--- a/docs/Containers-Plantilla.pptx
+++ b/docs/Containers-Plantilla.pptx
@@ -13,8 +13,8 @@
 </file>
 
 <file path=ppt/slideLayouts/slideLayout1.xml><?xml version="1.0" encoding="utf-8"?>
-<p:sldLayout xmlns:a="http://schemas.openxmlformats.org/drawingml/2006/main" xmlns:p="http://schemas.openxmlformats.org/presentationml/2006/main" xmlns:r="http://schemas.openxmlformats.org/officeDocument/2006/relationships" xmlns:p14="http://schemas.microsoft.com/office/powerpoint/2010/main" xmlns:p15="http://schemas.microsoft.com/office/powerpoint/2012/main" xmlns:mc="http://schemas.openxmlformats.org/markup-compatibility/2006" type="vertTitleAndTx" preserve="1">
-  <p:cSld name="Título vertical y texto">
+<p:sldLayout xmlns:a="http://schemas.openxmlformats.org/drawingml/2006/main" xmlns:p="http://schemas.openxmlformats.org/presentationml/2006/main" xmlns:r="http://schemas.openxmlformats.org/officeDocument/2006/relationships" xmlns:p14="http://schemas.microsoft.com/office/powerpoint/2010/main" xmlns:p15="http://schemas.microsoft.com/office/powerpoint/2012/main" xmlns:mc="http://schemas.openxmlformats.org/markup-compatibility/2006" type="blank" preserve="1">
+  <p:cSld name="Imagen con título">
     <p:bg>
       <p:bgPr>
         <a:solidFill>
@@ -48,8 +48,8 @@
         </p:nvSpPr>
         <p:spPr>
           <a:xfrm>
-            <a:off x="8724960" y="365040"/>
-            <a:ext cx="2627640" cy="5810400"/>
+            <a:off x="839880" y="457200"/>
+            <a:ext cx="3930480" cy="1598400"/>
           </a:xfrm>
           <a:prstGeom prst="rect">
             <a:avLst/>
@@ -60,7 +60,7 @@
           </a:ln>
         </p:spPr>
         <p:txBody>
-          <a:bodyPr lIns="91440" rIns="91440" tIns="45720" bIns="45720" anchor="ctr" vert="eaVert">
+          <a:bodyPr lIns="91440" rIns="91440" tIns="45720" bIns="45720" anchor="b">
             <a:noAutofit/>
           </a:bodyPr>
           <a:p>
@@ -74,7 +74,7 @@
               </a:tabLst>
             </a:pPr>
             <a:r>
-              <a:rPr b="0" lang="es-ES" sz="4400" strike="noStrike" u="none">
+              <a:rPr b="0" lang="es-ES" sz="3200" strike="noStrike" u="none">
                 <a:solidFill>
                   <a:schemeClr val="dk1"/>
                 </a:solidFill>
@@ -84,7 +84,7 @@
               </a:rPr>
               <a:t>Haga clic para modificar el estilo de título del patrón</a:t>
             </a:r>
-            <a:endParaRPr b="0" lang="es-ES" sz="4400" strike="noStrike" u="none">
+            <a:endParaRPr b="0" lang="es-ES" sz="3200" strike="noStrike" u="none">
               <a:solidFill>
                 <a:srgbClr val="000000"/>
               </a:solidFill>
@@ -107,8 +107,8 @@
         </p:nvSpPr>
         <p:spPr>
           <a:xfrm>
-            <a:off x="838080" y="365040"/>
-            <a:ext cx="7732800" cy="5810400"/>
+            <a:off x="5183280" y="987480"/>
+            <a:ext cx="6170400" cy="4871880"/>
           </a:xfrm>
           <a:prstGeom prst="rect">
             <a:avLst/>
@@ -119,171 +119,246 @@
           </a:ln>
         </p:spPr>
         <p:txBody>
-          <a:bodyPr lIns="91440" rIns="91440" tIns="45720" bIns="45720" anchor="t" vert="eaVert">
+          <a:bodyPr lIns="90000" rIns="90000" tIns="45000" bIns="45000" anchor="t">
             <a:noAutofit/>
           </a:bodyPr>
           <a:p>
-            <a:pPr marL="228600" indent="-228600" defTabSz="914400">
-              <a:lnSpc>
-                <a:spcPct val="90000"/>
-              </a:lnSpc>
-              <a:spcBef>
-                <a:spcPts val="1001"/>
+            <a:pPr marL="432000" indent="-324000">
+              <a:lnSpc>
+                <a:spcPct val="90000"/>
+              </a:lnSpc>
+              <a:spcBef>
+                <a:spcPts val="1417"/>
               </a:spcBef>
               <a:buClr>
                 <a:srgbClr val="000000"/>
               </a:buClr>
-              <a:buFont typeface="Arial"/>
-              <a:buChar char="•"/>
-            </a:pPr>
-            <a:r>
-              <a:rPr b="0" lang="es-ES" sz="2800" strike="noStrike" u="none">
-                <a:solidFill>
-                  <a:schemeClr val="dk1"/>
-                </a:solidFill>
-                <a:effectLst/>
-                <a:uFillTx/>
-                <a:latin typeface="Calibri"/>
-              </a:rPr>
-              <a:t>Haga clic para modificar los estilos de texto del patrón</a:t>
-            </a:r>
-            <a:endParaRPr b="0" lang="es-ES" sz="2800" strike="noStrike" u="none">
-              <a:solidFill>
-                <a:srgbClr val="000000"/>
-              </a:solidFill>
-              <a:effectLst/>
-              <a:uFillTx/>
-              <a:latin typeface="Arial"/>
-            </a:endParaRPr>
-          </a:p>
-          <a:p>
-            <a:pPr lvl="1" marL="685800" indent="-228600" defTabSz="914400">
-              <a:lnSpc>
-                <a:spcPct val="90000"/>
-              </a:lnSpc>
-              <a:spcBef>
-                <a:spcPts val="499"/>
+              <a:buSzPct val="45000"/>
+              <a:buFont typeface="Wingdings" charset="2"/>
+              <a:buChar char=""/>
+            </a:pPr>
+            <a:r>
+              <a:rPr b="0" lang="es-ES" sz="3200" strike="noStrike" u="none">
+                <a:solidFill>
+                  <a:schemeClr val="dk1"/>
+                </a:solidFill>
+                <a:effectLst/>
+                <a:uFillTx/>
+                <a:latin typeface="Calibri"/>
+              </a:rPr>
+              <a:t>Pulse para editar el formato de texto del esquema</a:t>
+            </a:r>
+            <a:endParaRPr b="0" lang="es-ES" sz="3200" strike="noStrike" u="none">
+              <a:solidFill>
+                <a:srgbClr val="000000"/>
+              </a:solidFill>
+              <a:effectLst/>
+              <a:uFillTx/>
+              <a:latin typeface="Arial"/>
+            </a:endParaRPr>
+          </a:p>
+          <a:p>
+            <a:pPr lvl="1" marL="864000" indent="-324000">
+              <a:lnSpc>
+                <a:spcPct val="90000"/>
+              </a:lnSpc>
+              <a:spcBef>
+                <a:spcPts val="1134"/>
               </a:spcBef>
               <a:buClr>
                 <a:srgbClr val="000000"/>
               </a:buClr>
-              <a:buFont typeface="Arial"/>
-              <a:buChar char="•"/>
-            </a:pPr>
-            <a:r>
-              <a:rPr b="0" lang="es-ES" sz="2400" strike="noStrike" u="none">
-                <a:solidFill>
-                  <a:schemeClr val="dk1"/>
-                </a:solidFill>
-                <a:effectLst/>
-                <a:uFillTx/>
-                <a:latin typeface="Calibri"/>
-              </a:rPr>
-              <a:t>Segundo nivel</a:t>
-            </a:r>
-            <a:endParaRPr b="0" lang="es-ES" sz="2400" strike="noStrike" u="none">
-              <a:solidFill>
-                <a:srgbClr val="000000"/>
-              </a:solidFill>
-              <a:effectLst/>
-              <a:uFillTx/>
-              <a:latin typeface="Arial"/>
-            </a:endParaRPr>
-          </a:p>
-          <a:p>
-            <a:pPr lvl="2" marL="1143000" indent="-228600" defTabSz="914400">
-              <a:lnSpc>
-                <a:spcPct val="90000"/>
-              </a:lnSpc>
-              <a:spcBef>
-                <a:spcPts val="499"/>
+              <a:buSzPct val="75000"/>
+              <a:buFont typeface="Symbol" charset="2"/>
+              <a:buChar char=""/>
+            </a:pPr>
+            <a:r>
+              <a:rPr b="0" lang="es-ES" sz="3200" strike="noStrike" u="none">
+                <a:solidFill>
+                  <a:schemeClr val="dk1"/>
+                </a:solidFill>
+                <a:effectLst/>
+                <a:uFillTx/>
+                <a:latin typeface="Calibri"/>
+              </a:rPr>
+              <a:t>Segundo nivel del esquema</a:t>
+            </a:r>
+            <a:endParaRPr b="0" lang="es-ES" sz="3200" strike="noStrike" u="none">
+              <a:solidFill>
+                <a:srgbClr val="000000"/>
+              </a:solidFill>
+              <a:effectLst/>
+              <a:uFillTx/>
+              <a:latin typeface="Arial"/>
+            </a:endParaRPr>
+          </a:p>
+          <a:p>
+            <a:pPr lvl="2" marL="1296000" indent="-288000">
+              <a:lnSpc>
+                <a:spcPct val="90000"/>
+              </a:lnSpc>
+              <a:spcBef>
+                <a:spcPts val="850"/>
               </a:spcBef>
               <a:buClr>
                 <a:srgbClr val="000000"/>
               </a:buClr>
-              <a:buFont typeface="Arial"/>
-              <a:buChar char="•"/>
-            </a:pPr>
-            <a:r>
-              <a:rPr b="0" lang="es-ES" sz="2000" strike="noStrike" u="none">
-                <a:solidFill>
-                  <a:schemeClr val="dk1"/>
-                </a:solidFill>
-                <a:effectLst/>
-                <a:uFillTx/>
-                <a:latin typeface="Calibri"/>
-              </a:rPr>
-              <a:t>Tercer nivel</a:t>
-            </a:r>
-            <a:endParaRPr b="0" lang="es-ES" sz="2000" strike="noStrike" u="none">
-              <a:solidFill>
-                <a:srgbClr val="000000"/>
-              </a:solidFill>
-              <a:effectLst/>
-              <a:uFillTx/>
-              <a:latin typeface="Arial"/>
-            </a:endParaRPr>
-          </a:p>
-          <a:p>
-            <a:pPr lvl="3" marL="1600200" indent="-228600" defTabSz="914400">
-              <a:lnSpc>
-                <a:spcPct val="90000"/>
-              </a:lnSpc>
-              <a:spcBef>
-                <a:spcPts val="499"/>
+              <a:buSzPct val="45000"/>
+              <a:buFont typeface="Wingdings" charset="2"/>
+              <a:buChar char=""/>
+            </a:pPr>
+            <a:r>
+              <a:rPr b="0" lang="es-ES" sz="3200" strike="noStrike" u="none">
+                <a:solidFill>
+                  <a:schemeClr val="dk1"/>
+                </a:solidFill>
+                <a:effectLst/>
+                <a:uFillTx/>
+                <a:latin typeface="Calibri"/>
+              </a:rPr>
+              <a:t>Tercer nivel del esquema</a:t>
+            </a:r>
+            <a:endParaRPr b="0" lang="es-ES" sz="3200" strike="noStrike" u="none">
+              <a:solidFill>
+                <a:srgbClr val="000000"/>
+              </a:solidFill>
+              <a:effectLst/>
+              <a:uFillTx/>
+              <a:latin typeface="Arial"/>
+            </a:endParaRPr>
+          </a:p>
+          <a:p>
+            <a:pPr lvl="3" marL="1728000" indent="-216000">
+              <a:lnSpc>
+                <a:spcPct val="90000"/>
+              </a:lnSpc>
+              <a:spcBef>
+                <a:spcPts val="567"/>
               </a:spcBef>
               <a:buClr>
                 <a:srgbClr val="000000"/>
               </a:buClr>
-              <a:buFont typeface="Arial"/>
-              <a:buChar char="•"/>
-            </a:pPr>
-            <a:r>
-              <a:rPr b="0" lang="es-ES" sz="1800" strike="noStrike" u="none">
-                <a:solidFill>
-                  <a:schemeClr val="dk1"/>
-                </a:solidFill>
-                <a:effectLst/>
-                <a:uFillTx/>
-                <a:latin typeface="Calibri"/>
-              </a:rPr>
-              <a:t>Cuarto nivel</a:t>
-            </a:r>
-            <a:endParaRPr b="0" lang="es-ES" sz="1800" strike="noStrike" u="none">
-              <a:solidFill>
-                <a:srgbClr val="000000"/>
-              </a:solidFill>
-              <a:effectLst/>
-              <a:uFillTx/>
-              <a:latin typeface="Arial"/>
-            </a:endParaRPr>
-          </a:p>
-          <a:p>
-            <a:pPr lvl="4" marL="2057400" indent="-228600" defTabSz="914400">
-              <a:lnSpc>
-                <a:spcPct val="90000"/>
-              </a:lnSpc>
-              <a:spcBef>
-                <a:spcPts val="499"/>
+              <a:buSzPct val="75000"/>
+              <a:buFont typeface="Symbol" charset="2"/>
+              <a:buChar char=""/>
+            </a:pPr>
+            <a:r>
+              <a:rPr b="0" lang="es-ES" sz="3200" strike="noStrike" u="none">
+                <a:solidFill>
+                  <a:schemeClr val="dk1"/>
+                </a:solidFill>
+                <a:effectLst/>
+                <a:uFillTx/>
+                <a:latin typeface="Calibri"/>
+              </a:rPr>
+              <a:t>Cuarto nivel del esquema</a:t>
+            </a:r>
+            <a:endParaRPr b="0" lang="es-ES" sz="3200" strike="noStrike" u="none">
+              <a:solidFill>
+                <a:srgbClr val="000000"/>
+              </a:solidFill>
+              <a:effectLst/>
+              <a:uFillTx/>
+              <a:latin typeface="Arial"/>
+            </a:endParaRPr>
+          </a:p>
+          <a:p>
+            <a:pPr lvl="4" marL="2160000" indent="-216000">
+              <a:lnSpc>
+                <a:spcPct val="90000"/>
+              </a:lnSpc>
+              <a:spcBef>
+                <a:spcPts val="283"/>
               </a:spcBef>
               <a:buClr>
                 <a:srgbClr val="000000"/>
               </a:buClr>
-              <a:buFont typeface="Arial"/>
-              <a:buChar char="•"/>
-            </a:pPr>
-            <a:r>
-              <a:rPr b="0" lang="es-ES" sz="1800" strike="noStrike" u="none">
-                <a:solidFill>
-                  <a:schemeClr val="dk1"/>
-                </a:solidFill>
-                <a:effectLst/>
-                <a:uFillTx/>
-                <a:latin typeface="Calibri"/>
-              </a:rPr>
-              <a:t>Quinto nivel</a:t>
-            </a:r>
-            <a:endParaRPr b="0" lang="es-ES" sz="1800" strike="noStrike" u="none">
+              <a:buSzPct val="45000"/>
+              <a:buFont typeface="Wingdings" charset="2"/>
+              <a:buChar char=""/>
+            </a:pPr>
+            <a:r>
+              <a:rPr b="0" lang="es-ES" sz="3200" strike="noStrike" u="none">
+                <a:solidFill>
+                  <a:schemeClr val="dk1"/>
+                </a:solidFill>
+                <a:effectLst/>
+                <a:uFillTx/>
+                <a:latin typeface="Calibri"/>
+              </a:rPr>
+              <a:t>Quinto nivel del esquema</a:t>
+            </a:r>
+            <a:endParaRPr b="0" lang="es-ES" sz="3200" strike="noStrike" u="none">
+              <a:solidFill>
+                <a:srgbClr val="000000"/>
+              </a:solidFill>
+              <a:effectLst/>
+              <a:uFillTx/>
+              <a:latin typeface="Arial"/>
+            </a:endParaRPr>
+          </a:p>
+          <a:p>
+            <a:pPr lvl="5" marL="2592000" indent="-216000">
+              <a:lnSpc>
+                <a:spcPct val="90000"/>
+              </a:lnSpc>
+              <a:spcBef>
+                <a:spcPts val="283"/>
+              </a:spcBef>
+              <a:buClr>
+                <a:srgbClr val="000000"/>
+              </a:buClr>
+              <a:buSzPct val="45000"/>
+              <a:buFont typeface="Wingdings" charset="2"/>
+              <a:buChar char=""/>
+            </a:pPr>
+            <a:r>
+              <a:rPr b="0" lang="es-ES" sz="3200" strike="noStrike" u="none">
+                <a:solidFill>
+                  <a:schemeClr val="dk1"/>
+                </a:solidFill>
+                <a:effectLst/>
+                <a:uFillTx/>
+                <a:latin typeface="Calibri"/>
+              </a:rPr>
+              <a:t>Sexto nivel del esquema</a:t>
+            </a:r>
+            <a:endParaRPr b="0" lang="es-ES" sz="3200" strike="noStrike" u="none">
+              <a:solidFill>
+                <a:srgbClr val="000000"/>
+              </a:solidFill>
+              <a:effectLst/>
+              <a:uFillTx/>
+              <a:latin typeface="Arial"/>
+            </a:endParaRPr>
+          </a:p>
+          <a:p>
+            <a:pPr lvl="6" marL="3024000" indent="-216000">
+              <a:lnSpc>
+                <a:spcPct val="90000"/>
+              </a:lnSpc>
+              <a:spcBef>
+                <a:spcPts val="283"/>
+              </a:spcBef>
+              <a:buClr>
+                <a:srgbClr val="000000"/>
+              </a:buClr>
+              <a:buSzPct val="45000"/>
+              <a:buFont typeface="Wingdings" charset="2"/>
+              <a:buChar char=""/>
+            </a:pPr>
+            <a:r>
+              <a:rPr b="0" lang="es-ES" sz="3200" strike="noStrike" u="none">
+                <a:solidFill>
+                  <a:schemeClr val="dk1"/>
+                </a:solidFill>
+                <a:effectLst/>
+                <a:uFillTx/>
+                <a:latin typeface="Calibri"/>
+              </a:rPr>
+              <a:t>Séptimo nivel del esquema</a:t>
+            </a:r>
+            <a:endParaRPr b="0" lang="es-ES" sz="3200" strike="noStrike" u="none">
               <a:solidFill>
                 <a:srgbClr val="000000"/>
               </a:solidFill>
@@ -297,6 +372,68 @@
       <p:sp>
         <p:nvSpPr>
           <p:cNvPr id="2" name="PlaceHolder 3"/>
+          <p:cNvSpPr>
+            <a:spLocks noGrp="1"/>
+          </p:cNvSpPr>
+          <p:nvPr>
+            <p:ph type="body"/>
+          </p:nvPr>
+        </p:nvSpPr>
+        <p:spPr>
+          <a:xfrm>
+            <a:off x="839880" y="2057400"/>
+            <a:ext cx="3930480" cy="3809880"/>
+          </a:xfrm>
+          <a:prstGeom prst="rect">
+            <a:avLst/>
+          </a:prstGeom>
+          <a:noFill/>
+          <a:ln w="0">
+            <a:noFill/>
+          </a:ln>
+        </p:spPr>
+        <p:txBody>
+          <a:bodyPr lIns="91440" rIns="91440" tIns="45720" bIns="45720" anchor="t">
+            <a:noAutofit/>
+          </a:bodyPr>
+          <a:p>
+            <a:pPr indent="0" defTabSz="914400">
+              <a:lnSpc>
+                <a:spcPct val="90000"/>
+              </a:lnSpc>
+              <a:spcBef>
+                <a:spcPts val="1001"/>
+              </a:spcBef>
+              <a:buNone/>
+              <a:tabLst>
+                <a:tab algn="l" pos="0"/>
+              </a:tabLst>
+            </a:pPr>
+            <a:r>
+              <a:rPr b="0" lang="es-ES" sz="1600" strike="noStrike" u="none">
+                <a:solidFill>
+                  <a:schemeClr val="dk1"/>
+                </a:solidFill>
+                <a:effectLst/>
+                <a:uFillTx/>
+                <a:latin typeface="Calibri"/>
+              </a:rPr>
+              <a:t>Haga clic para modificar los estilos de texto del patrón</a:t>
+            </a:r>
+            <a:endParaRPr b="0" lang="es-ES" sz="1600" strike="noStrike" u="none">
+              <a:solidFill>
+                <a:srgbClr val="000000"/>
+              </a:solidFill>
+              <a:effectLst/>
+              <a:uFillTx/>
+              <a:latin typeface="Arial"/>
+            </a:endParaRPr>
+          </a:p>
+        </p:txBody>
+      </p:sp>
+      <p:sp>
+        <p:nvSpPr>
+          <p:cNvPr id="3" name="PlaceHolder 4"/>
           <p:cNvSpPr>
             <a:spLocks noGrp="1"/>
           </p:cNvSpPr>
@@ -307,7 +444,7 @@
         <p:spPr>
           <a:xfrm>
             <a:off x="838080" y="6356520"/>
-            <a:ext cx="2741760" cy="363600"/>
+            <a:ext cx="2741400" cy="363240"/>
           </a:xfrm>
           <a:prstGeom prst="rect">
             <a:avLst/>
@@ -378,7 +515,7 @@
       </p:sp>
       <p:sp>
         <p:nvSpPr>
-          <p:cNvPr id="3" name="PlaceHolder 4"/>
+          <p:cNvPr id="4" name="PlaceHolder 5"/>
           <p:cNvSpPr>
             <a:spLocks noGrp="1"/>
           </p:cNvSpPr>
@@ -389,7 +526,7 @@
         <p:spPr>
           <a:xfrm>
             <a:off x="4038480" y="6356520"/>
-            <a:ext cx="4113360" cy="363600"/>
+            <a:ext cx="4113000" cy="363240"/>
           </a:xfrm>
           <a:prstGeom prst="rect">
             <a:avLst/>
@@ -456,7 +593,7 @@
       </p:sp>
       <p:sp>
         <p:nvSpPr>
-          <p:cNvPr id="4" name="PlaceHolder 5"/>
+          <p:cNvPr id="5" name="PlaceHolder 6"/>
           <p:cNvSpPr>
             <a:spLocks noGrp="1"/>
           </p:cNvSpPr>
@@ -467,7 +604,7 @@
         <p:spPr>
           <a:xfrm>
             <a:off x="8610480" y="6356520"/>
-            <a:ext cx="2741760" cy="363600"/>
+            <a:ext cx="2741400" cy="363240"/>
           </a:xfrm>
           <a:prstGeom prst="rect">
             <a:avLst/>
@@ -512,7 +649,7 @@
                 <a:tab algn="l" pos="0"/>
               </a:tabLst>
             </a:pPr>
-            <a:fld id="{4BF994AF-B0A9-42CB-B955-ECDC26C75847}" type="slidenum">
+            <a:fld id="{B4383429-C382-46CB-82A0-3EF1D69A096E}" type="slidenum">
               <a:rPr b="0" lang="en-GB" sz="1200" strike="noStrike" u="none">
                 <a:solidFill>
                   <a:schemeClr val="dk1">
@@ -542,6 +679,1201 @@
 </file>
 
 <file path=ppt/slideLayouts/slideLayout10.xml><?xml version="1.0" encoding="utf-8"?>
+<p:sldLayout xmlns:a="http://schemas.openxmlformats.org/drawingml/2006/main" xmlns:p="http://schemas.openxmlformats.org/presentationml/2006/main" xmlns:r="http://schemas.openxmlformats.org/officeDocument/2006/relationships" xmlns:p14="http://schemas.microsoft.com/office/powerpoint/2010/main" xmlns:p15="http://schemas.microsoft.com/office/powerpoint/2012/main" xmlns:mc="http://schemas.openxmlformats.org/markup-compatibility/2006" type="blank" preserve="1">
+  <p:cSld name="En blanco">
+    <p:bg>
+      <p:bgPr>
+        <a:solidFill>
+          <a:srgbClr val="ffffff"/>
+        </a:solidFill>
+      </p:bgPr>
+    </p:bg>
+    <p:spTree>
+      <p:nvGrpSpPr>
+        <p:cNvPr id="1" name=""/>
+        <p:cNvGrpSpPr/>
+        <p:nvPr/>
+      </p:nvGrpSpPr>
+      <p:grpSpPr>
+        <a:xfrm>
+          <a:off x="0" y="0"/>
+          <a:ext cx="0" cy="0"/>
+          <a:chOff x="0" y="0"/>
+          <a:chExt cx="0" cy="0"/>
+        </a:xfrm>
+      </p:grpSpPr>
+      <p:sp>
+        <p:nvSpPr>
+          <p:cNvPr id="48" name="PlaceHolder 1"/>
+          <p:cNvSpPr>
+            <a:spLocks noGrp="1"/>
+          </p:cNvSpPr>
+          <p:nvPr>
+            <p:ph type="dt" idx="28"/>
+          </p:nvPr>
+        </p:nvSpPr>
+        <p:spPr>
+          <a:xfrm>
+            <a:off x="838080" y="6356520"/>
+            <a:ext cx="2741400" cy="363240"/>
+          </a:xfrm>
+          <a:prstGeom prst="rect">
+            <a:avLst/>
+          </a:prstGeom>
+          <a:noFill/>
+          <a:ln w="0">
+            <a:noFill/>
+          </a:ln>
+        </p:spPr>
+        <p:txBody>
+          <a:bodyPr lIns="91440" rIns="91440" tIns="45720" bIns="45720" anchor="ctr">
+            <a:noAutofit/>
+          </a:bodyPr>
+          <a:lstStyle>
+            <a:lvl1pPr indent="0" defTabSz="914400">
+              <a:lnSpc>
+                <a:spcPct val="100000"/>
+              </a:lnSpc>
+              <a:buNone/>
+              <a:tabLst>
+                <a:tab algn="l" pos="0"/>
+              </a:tabLst>
+              <a:defRPr b="0" lang="en-GB" sz="1200" strike="noStrike" u="none">
+                <a:solidFill>
+                  <a:schemeClr val="dk1">
+                    <a:tint val="75000"/>
+                  </a:schemeClr>
+                </a:solidFill>
+                <a:effectLst/>
+                <a:uFillTx/>
+                <a:latin typeface="Calibri"/>
+              </a:defRPr>
+            </a:lvl1pPr>
+          </a:lstStyle>
+          <a:p>
+            <a:pPr indent="0" defTabSz="914400">
+              <a:lnSpc>
+                <a:spcPct val="100000"/>
+              </a:lnSpc>
+              <a:buNone/>
+              <a:tabLst>
+                <a:tab algn="l" pos="0"/>
+              </a:tabLst>
+            </a:pPr>
+            <a:r>
+              <a:rPr b="0" lang="en-GB" sz="1200" strike="noStrike" u="none">
+                <a:solidFill>
+                  <a:schemeClr val="dk1">
+                    <a:tint val="75000"/>
+                  </a:schemeClr>
+                </a:solidFill>
+                <a:effectLst/>
+                <a:uFillTx/>
+                <a:latin typeface="Calibri"/>
+              </a:rPr>
+              <a:t>&lt;fecha/hora&gt;</a:t>
+            </a:r>
+            <a:endParaRPr b="0" lang="es-ES" sz="1200" strike="noStrike" u="none">
+              <a:solidFill>
+                <a:srgbClr val="000000"/>
+              </a:solidFill>
+              <a:effectLst/>
+              <a:uFillTx/>
+              <a:latin typeface="Times New Roman"/>
+            </a:endParaRPr>
+          </a:p>
+        </p:txBody>
+      </p:sp>
+      <p:sp>
+        <p:nvSpPr>
+          <p:cNvPr id="49" name="PlaceHolder 2"/>
+          <p:cNvSpPr>
+            <a:spLocks noGrp="1"/>
+          </p:cNvSpPr>
+          <p:nvPr>
+            <p:ph type="ftr" idx="29"/>
+          </p:nvPr>
+        </p:nvSpPr>
+        <p:spPr>
+          <a:xfrm>
+            <a:off x="4038480" y="6356520"/>
+            <a:ext cx="4113000" cy="363240"/>
+          </a:xfrm>
+          <a:prstGeom prst="rect">
+            <a:avLst/>
+          </a:prstGeom>
+          <a:noFill/>
+          <a:ln w="0">
+            <a:noFill/>
+          </a:ln>
+        </p:spPr>
+        <p:txBody>
+          <a:bodyPr lIns="91440" rIns="91440" tIns="45720" bIns="45720" anchor="ctr">
+            <a:noAutofit/>
+          </a:bodyPr>
+          <a:lstStyle>
+            <a:lvl1pPr indent="0" algn="ctr">
+              <a:lnSpc>
+                <a:spcPct val="100000"/>
+              </a:lnSpc>
+              <a:buNone/>
+              <a:tabLst>
+                <a:tab algn="l" pos="0"/>
+              </a:tabLst>
+              <a:defRPr b="0" lang="es-ES" sz="1400" strike="noStrike" u="none">
+                <a:solidFill>
+                  <a:srgbClr val="000000"/>
+                </a:solidFill>
+                <a:effectLst/>
+                <a:uFillTx/>
+                <a:latin typeface="Times New Roman"/>
+              </a:defRPr>
+            </a:lvl1pPr>
+          </a:lstStyle>
+          <a:p>
+            <a:pPr indent="0" algn="ctr">
+              <a:lnSpc>
+                <a:spcPct val="100000"/>
+              </a:lnSpc>
+              <a:buNone/>
+              <a:tabLst>
+                <a:tab algn="l" pos="0"/>
+              </a:tabLst>
+            </a:pPr>
+            <a:r>
+              <a:rPr b="0" lang="es-ES" sz="1400" strike="noStrike" u="none">
+                <a:solidFill>
+                  <a:srgbClr val="000000"/>
+                </a:solidFill>
+                <a:effectLst/>
+                <a:uFillTx/>
+                <a:latin typeface="Times New Roman"/>
+              </a:rPr>
+              <a:t>&lt;pie de página&gt;</a:t>
+            </a:r>
+            <a:endParaRPr b="0" lang="es-ES" sz="1400" strike="noStrike" u="none">
+              <a:solidFill>
+                <a:srgbClr val="000000"/>
+              </a:solidFill>
+              <a:effectLst/>
+              <a:uFillTx/>
+              <a:latin typeface="Times New Roman"/>
+            </a:endParaRPr>
+          </a:p>
+        </p:txBody>
+      </p:sp>
+      <p:sp>
+        <p:nvSpPr>
+          <p:cNvPr id="50" name="PlaceHolder 3"/>
+          <p:cNvSpPr>
+            <a:spLocks noGrp="1"/>
+          </p:cNvSpPr>
+          <p:nvPr>
+            <p:ph type="sldNum" idx="30"/>
+          </p:nvPr>
+        </p:nvSpPr>
+        <p:spPr>
+          <a:xfrm>
+            <a:off x="8610480" y="6356520"/>
+            <a:ext cx="2741400" cy="363240"/>
+          </a:xfrm>
+          <a:prstGeom prst="rect">
+            <a:avLst/>
+          </a:prstGeom>
+          <a:noFill/>
+          <a:ln w="0">
+            <a:noFill/>
+          </a:ln>
+        </p:spPr>
+        <p:txBody>
+          <a:bodyPr lIns="91440" rIns="91440" tIns="45720" bIns="45720" anchor="ctr">
+            <a:noAutofit/>
+          </a:bodyPr>
+          <a:lstStyle>
+            <a:lvl1pPr indent="0" algn="r" defTabSz="914400">
+              <a:lnSpc>
+                <a:spcPct val="100000"/>
+              </a:lnSpc>
+              <a:buNone/>
+              <a:tabLst>
+                <a:tab algn="l" pos="0"/>
+              </a:tabLst>
+              <a:defRPr b="0" lang="en-GB" sz="1200" strike="noStrike" u="none">
+                <a:solidFill>
+                  <a:schemeClr val="dk1">
+                    <a:tint val="75000"/>
+                  </a:schemeClr>
+                </a:solidFill>
+                <a:effectLst/>
+                <a:uFillTx/>
+                <a:latin typeface="Calibri"/>
+              </a:defRPr>
+            </a:lvl1pPr>
+          </a:lstStyle>
+          <a:p>
+            <a:pPr indent="0" algn="r" defTabSz="914400">
+              <a:lnSpc>
+                <a:spcPct val="100000"/>
+              </a:lnSpc>
+              <a:buNone/>
+              <a:tabLst>
+                <a:tab algn="l" pos="0"/>
+              </a:tabLst>
+            </a:pPr>
+            <a:fld id="{D66A5C4A-EB8D-4ABA-8FA8-5AD4616323E0}" type="slidenum">
+              <a:rPr b="0" lang="en-GB" sz="1200" strike="noStrike" u="none">
+                <a:solidFill>
+                  <a:schemeClr val="dk1">
+                    <a:tint val="75000"/>
+                  </a:schemeClr>
+                </a:solidFill>
+                <a:effectLst/>
+                <a:uFillTx/>
+                <a:latin typeface="Calibri"/>
+              </a:rPr>
+              <a:t>&lt;número&gt;</a:t>
+            </a:fld>
+            <a:endParaRPr b="0" lang="es-ES" sz="1200" strike="noStrike" u="none">
+              <a:solidFill>
+                <a:srgbClr val="000000"/>
+              </a:solidFill>
+              <a:effectLst/>
+              <a:uFillTx/>
+              <a:latin typeface="Times New Roman"/>
+            </a:endParaRPr>
+          </a:p>
+        </p:txBody>
+      </p:sp>
+      <p:sp>
+        <p:nvSpPr>
+          <p:cNvPr id="51" name="PlaceHolder 4"/>
+          <p:cNvSpPr>
+            <a:spLocks noGrp="1"/>
+          </p:cNvSpPr>
+          <p:nvPr>
+            <p:ph type="title"/>
+          </p:nvPr>
+        </p:nvSpPr>
+        <p:spPr>
+          <a:xfrm>
+            <a:off x="609480" y="273600"/>
+            <a:ext cx="10971360" cy="1143720"/>
+          </a:xfrm>
+          <a:prstGeom prst="rect">
+            <a:avLst/>
+          </a:prstGeom>
+          <a:noFill/>
+          <a:ln w="0">
+            <a:noFill/>
+          </a:ln>
+        </p:spPr>
+        <p:txBody>
+          <a:bodyPr lIns="0" rIns="0" tIns="0" bIns="0" anchor="ctr">
+            <a:noAutofit/>
+          </a:bodyPr>
+          <a:p>
+            <a:pPr indent="0" algn="ctr">
+              <a:lnSpc>
+                <a:spcPct val="100000"/>
+              </a:lnSpc>
+              <a:buNone/>
+              <a:tabLst>
+                <a:tab algn="l" pos="0"/>
+              </a:tabLst>
+            </a:pPr>
+            <a:r>
+              <a:rPr b="0" lang="es-ES" sz="4400" strike="noStrike" u="none">
+                <a:solidFill>
+                  <a:srgbClr val="000000"/>
+                </a:solidFill>
+                <a:effectLst/>
+                <a:uFillTx/>
+                <a:latin typeface="Arial"/>
+              </a:rPr>
+              <a:t>Pulse para editar el formato del texto de título</a:t>
+            </a:r>
+            <a:endParaRPr b="0" lang="es-ES" sz="4400" strike="noStrike" u="none">
+              <a:solidFill>
+                <a:srgbClr val="000000"/>
+              </a:solidFill>
+              <a:effectLst/>
+              <a:uFillTx/>
+              <a:latin typeface="Arial"/>
+            </a:endParaRPr>
+          </a:p>
+        </p:txBody>
+      </p:sp>
+      <p:sp>
+        <p:nvSpPr>
+          <p:cNvPr id="52" name="PlaceHolder 5"/>
+          <p:cNvSpPr>
+            <a:spLocks noGrp="1"/>
+          </p:cNvSpPr>
+          <p:nvPr>
+            <p:ph type="body"/>
+          </p:nvPr>
+        </p:nvSpPr>
+        <p:spPr>
+          <a:xfrm>
+            <a:off x="609480" y="1604520"/>
+            <a:ext cx="10971360" cy="3976200"/>
+          </a:xfrm>
+          <a:prstGeom prst="rect">
+            <a:avLst/>
+          </a:prstGeom>
+          <a:noFill/>
+          <a:ln w="0">
+            <a:noFill/>
+          </a:ln>
+        </p:spPr>
+        <p:txBody>
+          <a:bodyPr lIns="0" rIns="0" tIns="0" bIns="0" anchor="t">
+            <a:normAutofit/>
+          </a:bodyPr>
+          <a:p>
+            <a:pPr marL="432000" indent="-324000">
+              <a:lnSpc>
+                <a:spcPct val="100000"/>
+              </a:lnSpc>
+              <a:spcBef>
+                <a:spcPts val="1417"/>
+              </a:spcBef>
+              <a:buClr>
+                <a:srgbClr val="000000"/>
+              </a:buClr>
+              <a:buSzPct val="45000"/>
+              <a:buFont typeface="Wingdings" charset="2"/>
+              <a:buChar char=""/>
+            </a:pPr>
+            <a:r>
+              <a:rPr b="0" lang="es-ES" sz="3200" strike="noStrike" u="none">
+                <a:solidFill>
+                  <a:srgbClr val="000000"/>
+                </a:solidFill>
+                <a:effectLst/>
+                <a:uFillTx/>
+                <a:latin typeface="Arial"/>
+              </a:rPr>
+              <a:t>Pulse para editar el formato de texto del esquema</a:t>
+            </a:r>
+            <a:endParaRPr b="0" lang="es-ES" sz="3200" strike="noStrike" u="none">
+              <a:solidFill>
+                <a:srgbClr val="000000"/>
+              </a:solidFill>
+              <a:effectLst/>
+              <a:uFillTx/>
+              <a:latin typeface="Arial"/>
+            </a:endParaRPr>
+          </a:p>
+          <a:p>
+            <a:pPr lvl="1" marL="864000" indent="-324000">
+              <a:lnSpc>
+                <a:spcPct val="100000"/>
+              </a:lnSpc>
+              <a:spcBef>
+                <a:spcPts val="1134"/>
+              </a:spcBef>
+              <a:buClr>
+                <a:srgbClr val="000000"/>
+              </a:buClr>
+              <a:buSzPct val="75000"/>
+              <a:buFont typeface="Symbol" charset="2"/>
+              <a:buChar char=""/>
+            </a:pPr>
+            <a:r>
+              <a:rPr b="0" lang="es-ES" sz="2800" strike="noStrike" u="none">
+                <a:solidFill>
+                  <a:srgbClr val="000000"/>
+                </a:solidFill>
+                <a:effectLst/>
+                <a:uFillTx/>
+                <a:latin typeface="Arial"/>
+              </a:rPr>
+              <a:t>Segundo nivel del esquema</a:t>
+            </a:r>
+            <a:endParaRPr b="0" lang="es-ES" sz="2800" strike="noStrike" u="none">
+              <a:solidFill>
+                <a:srgbClr val="000000"/>
+              </a:solidFill>
+              <a:effectLst/>
+              <a:uFillTx/>
+              <a:latin typeface="Arial"/>
+            </a:endParaRPr>
+          </a:p>
+          <a:p>
+            <a:pPr lvl="2" marL="1296000" indent="-288000">
+              <a:lnSpc>
+                <a:spcPct val="100000"/>
+              </a:lnSpc>
+              <a:spcBef>
+                <a:spcPts val="850"/>
+              </a:spcBef>
+              <a:buClr>
+                <a:srgbClr val="000000"/>
+              </a:buClr>
+              <a:buSzPct val="45000"/>
+              <a:buFont typeface="Wingdings" charset="2"/>
+              <a:buChar char=""/>
+            </a:pPr>
+            <a:r>
+              <a:rPr b="0" lang="es-ES" sz="2400" strike="noStrike" u="none">
+                <a:solidFill>
+                  <a:srgbClr val="000000"/>
+                </a:solidFill>
+                <a:effectLst/>
+                <a:uFillTx/>
+                <a:latin typeface="Arial"/>
+              </a:rPr>
+              <a:t>Tercer nivel del esquema</a:t>
+            </a:r>
+            <a:endParaRPr b="0" lang="es-ES" sz="2400" strike="noStrike" u="none">
+              <a:solidFill>
+                <a:srgbClr val="000000"/>
+              </a:solidFill>
+              <a:effectLst/>
+              <a:uFillTx/>
+              <a:latin typeface="Arial"/>
+            </a:endParaRPr>
+          </a:p>
+          <a:p>
+            <a:pPr lvl="3" marL="1728000" indent="-216000">
+              <a:lnSpc>
+                <a:spcPct val="100000"/>
+              </a:lnSpc>
+              <a:spcBef>
+                <a:spcPts val="567"/>
+              </a:spcBef>
+              <a:buClr>
+                <a:srgbClr val="000000"/>
+              </a:buClr>
+              <a:buSzPct val="75000"/>
+              <a:buFont typeface="Symbol" charset="2"/>
+              <a:buChar char=""/>
+            </a:pPr>
+            <a:r>
+              <a:rPr b="0" lang="es-ES" sz="2000" strike="noStrike" u="none">
+                <a:solidFill>
+                  <a:srgbClr val="000000"/>
+                </a:solidFill>
+                <a:effectLst/>
+                <a:uFillTx/>
+                <a:latin typeface="Arial"/>
+              </a:rPr>
+              <a:t>Cuarto nivel del esquema</a:t>
+            </a:r>
+            <a:endParaRPr b="0" lang="es-ES" sz="2000" strike="noStrike" u="none">
+              <a:solidFill>
+                <a:srgbClr val="000000"/>
+              </a:solidFill>
+              <a:effectLst/>
+              <a:uFillTx/>
+              <a:latin typeface="Arial"/>
+            </a:endParaRPr>
+          </a:p>
+          <a:p>
+            <a:pPr lvl="4" marL="2160000" indent="-216000">
+              <a:lnSpc>
+                <a:spcPct val="100000"/>
+              </a:lnSpc>
+              <a:spcBef>
+                <a:spcPts val="283"/>
+              </a:spcBef>
+              <a:buClr>
+                <a:srgbClr val="000000"/>
+              </a:buClr>
+              <a:buSzPct val="45000"/>
+              <a:buFont typeface="Wingdings" charset="2"/>
+              <a:buChar char=""/>
+            </a:pPr>
+            <a:r>
+              <a:rPr b="0" lang="es-ES" sz="2000" strike="noStrike" u="none">
+                <a:solidFill>
+                  <a:srgbClr val="000000"/>
+                </a:solidFill>
+                <a:effectLst/>
+                <a:uFillTx/>
+                <a:latin typeface="Arial"/>
+              </a:rPr>
+              <a:t>Quinto nivel del esquema</a:t>
+            </a:r>
+            <a:endParaRPr b="0" lang="es-ES" sz="2000" strike="noStrike" u="none">
+              <a:solidFill>
+                <a:srgbClr val="000000"/>
+              </a:solidFill>
+              <a:effectLst/>
+              <a:uFillTx/>
+              <a:latin typeface="Arial"/>
+            </a:endParaRPr>
+          </a:p>
+          <a:p>
+            <a:pPr lvl="5" marL="2592000" indent="-216000">
+              <a:lnSpc>
+                <a:spcPct val="100000"/>
+              </a:lnSpc>
+              <a:spcBef>
+                <a:spcPts val="283"/>
+              </a:spcBef>
+              <a:buClr>
+                <a:srgbClr val="000000"/>
+              </a:buClr>
+              <a:buSzPct val="45000"/>
+              <a:buFont typeface="Wingdings" charset="2"/>
+              <a:buChar char=""/>
+            </a:pPr>
+            <a:r>
+              <a:rPr b="0" lang="es-ES" sz="2000" strike="noStrike" u="none">
+                <a:solidFill>
+                  <a:srgbClr val="000000"/>
+                </a:solidFill>
+                <a:effectLst/>
+                <a:uFillTx/>
+                <a:latin typeface="Arial"/>
+              </a:rPr>
+              <a:t>Sexto nivel del esquema</a:t>
+            </a:r>
+            <a:endParaRPr b="0" lang="es-ES" sz="2000" strike="noStrike" u="none">
+              <a:solidFill>
+                <a:srgbClr val="000000"/>
+              </a:solidFill>
+              <a:effectLst/>
+              <a:uFillTx/>
+              <a:latin typeface="Arial"/>
+            </a:endParaRPr>
+          </a:p>
+          <a:p>
+            <a:pPr lvl="6" marL="3024000" indent="-216000">
+              <a:lnSpc>
+                <a:spcPct val="100000"/>
+              </a:lnSpc>
+              <a:spcBef>
+                <a:spcPts val="283"/>
+              </a:spcBef>
+              <a:buClr>
+                <a:srgbClr val="000000"/>
+              </a:buClr>
+              <a:buSzPct val="45000"/>
+              <a:buFont typeface="Wingdings" charset="2"/>
+              <a:buChar char=""/>
+            </a:pPr>
+            <a:r>
+              <a:rPr b="0" lang="es-ES" sz="2000" strike="noStrike" u="none">
+                <a:solidFill>
+                  <a:srgbClr val="000000"/>
+                </a:solidFill>
+                <a:effectLst/>
+                <a:uFillTx/>
+                <a:latin typeface="Arial"/>
+              </a:rPr>
+              <a:t>Séptimo nivel del esquema</a:t>
+            </a:r>
+            <a:endParaRPr b="0" lang="es-ES" sz="2000" strike="noStrike" u="none">
+              <a:solidFill>
+                <a:srgbClr val="000000"/>
+              </a:solidFill>
+              <a:effectLst/>
+              <a:uFillTx/>
+              <a:latin typeface="Arial"/>
+            </a:endParaRPr>
+          </a:p>
+        </p:txBody>
+      </p:sp>
+    </p:spTree>
+  </p:cSld>
+</p:sldLayout>
+</file>
+
+<file path=ppt/slideLayouts/slideLayout11.xml><?xml version="1.0" encoding="utf-8"?>
+<p:sldLayout xmlns:a="http://schemas.openxmlformats.org/drawingml/2006/main" xmlns:p="http://schemas.openxmlformats.org/presentationml/2006/main" xmlns:r="http://schemas.openxmlformats.org/officeDocument/2006/relationships" xmlns:p14="http://schemas.microsoft.com/office/powerpoint/2010/main" xmlns:p15="http://schemas.microsoft.com/office/powerpoint/2012/main" xmlns:mc="http://schemas.openxmlformats.org/markup-compatibility/2006" type="blank" preserve="1">
+  <p:cSld name="Contenido con título">
+    <p:bg>
+      <p:bgPr>
+        <a:solidFill>
+          <a:srgbClr val="ffffff"/>
+        </a:solidFill>
+      </p:bgPr>
+    </p:bg>
+    <p:spTree>
+      <p:nvGrpSpPr>
+        <p:cNvPr id="1" name=""/>
+        <p:cNvGrpSpPr/>
+        <p:nvPr/>
+      </p:nvGrpSpPr>
+      <p:grpSpPr>
+        <a:xfrm>
+          <a:off x="0" y="0"/>
+          <a:ext cx="0" cy="0"/>
+          <a:chOff x="0" y="0"/>
+          <a:chExt cx="0" cy="0"/>
+        </a:xfrm>
+      </p:grpSpPr>
+      <p:sp>
+        <p:nvSpPr>
+          <p:cNvPr id="53" name="PlaceHolder 1"/>
+          <p:cNvSpPr>
+            <a:spLocks noGrp="1"/>
+          </p:cNvSpPr>
+          <p:nvPr>
+            <p:ph type="title"/>
+          </p:nvPr>
+        </p:nvSpPr>
+        <p:spPr>
+          <a:xfrm>
+            <a:off x="839880" y="457200"/>
+            <a:ext cx="3930480" cy="1598400"/>
+          </a:xfrm>
+          <a:prstGeom prst="rect">
+            <a:avLst/>
+          </a:prstGeom>
+          <a:noFill/>
+          <a:ln w="0">
+            <a:noFill/>
+          </a:ln>
+        </p:spPr>
+        <p:txBody>
+          <a:bodyPr lIns="91440" rIns="91440" tIns="45720" bIns="45720" anchor="b">
+            <a:noAutofit/>
+          </a:bodyPr>
+          <a:p>
+            <a:pPr indent="0" defTabSz="914400">
+              <a:lnSpc>
+                <a:spcPct val="90000"/>
+              </a:lnSpc>
+              <a:buNone/>
+              <a:tabLst>
+                <a:tab algn="l" pos="0"/>
+              </a:tabLst>
+            </a:pPr>
+            <a:r>
+              <a:rPr b="0" lang="es-ES" sz="3200" strike="noStrike" u="none">
+                <a:solidFill>
+                  <a:schemeClr val="dk1"/>
+                </a:solidFill>
+                <a:effectLst/>
+                <a:uFillTx/>
+                <a:latin typeface="Calibri Light"/>
+              </a:rPr>
+              <a:t>Haga clic para modificar el estilo de título del patrón</a:t>
+            </a:r>
+            <a:endParaRPr b="0" lang="es-ES" sz="3200" strike="noStrike" u="none">
+              <a:solidFill>
+                <a:srgbClr val="000000"/>
+              </a:solidFill>
+              <a:effectLst/>
+              <a:uFillTx/>
+              <a:latin typeface="Arial"/>
+            </a:endParaRPr>
+          </a:p>
+        </p:txBody>
+      </p:sp>
+      <p:sp>
+        <p:nvSpPr>
+          <p:cNvPr id="54" name="PlaceHolder 2"/>
+          <p:cNvSpPr>
+            <a:spLocks noGrp="1"/>
+          </p:cNvSpPr>
+          <p:nvPr>
+            <p:ph type="body"/>
+          </p:nvPr>
+        </p:nvSpPr>
+        <p:spPr>
+          <a:xfrm>
+            <a:off x="5183280" y="987480"/>
+            <a:ext cx="6170400" cy="4871880"/>
+          </a:xfrm>
+          <a:prstGeom prst="rect">
+            <a:avLst/>
+          </a:prstGeom>
+          <a:noFill/>
+          <a:ln w="0">
+            <a:noFill/>
+          </a:ln>
+        </p:spPr>
+        <p:txBody>
+          <a:bodyPr lIns="91440" rIns="91440" tIns="45720" bIns="45720" anchor="t">
+            <a:noAutofit/>
+          </a:bodyPr>
+          <a:p>
+            <a:pPr marL="228600" indent="-228600" defTabSz="914400">
+              <a:lnSpc>
+                <a:spcPct val="90000"/>
+              </a:lnSpc>
+              <a:spcBef>
+                <a:spcPts val="1001"/>
+              </a:spcBef>
+              <a:buClr>
+                <a:srgbClr val="000000"/>
+              </a:buClr>
+              <a:buFont typeface="Arial"/>
+              <a:buChar char="•"/>
+            </a:pPr>
+            <a:r>
+              <a:rPr b="0" lang="es-ES" sz="3200" strike="noStrike" u="none">
+                <a:solidFill>
+                  <a:schemeClr val="dk1"/>
+                </a:solidFill>
+                <a:effectLst/>
+                <a:uFillTx/>
+                <a:latin typeface="Calibri"/>
+              </a:rPr>
+              <a:t>Haga clic para modificar los estilos de texto del patrón</a:t>
+            </a:r>
+            <a:endParaRPr b="0" lang="es-ES" sz="3200" strike="noStrike" u="none">
+              <a:solidFill>
+                <a:srgbClr val="000000"/>
+              </a:solidFill>
+              <a:effectLst/>
+              <a:uFillTx/>
+              <a:latin typeface="Arial"/>
+            </a:endParaRPr>
+          </a:p>
+          <a:p>
+            <a:pPr lvl="1" marL="685800" indent="-228600" defTabSz="914400">
+              <a:lnSpc>
+                <a:spcPct val="90000"/>
+              </a:lnSpc>
+              <a:spcBef>
+                <a:spcPts val="499"/>
+              </a:spcBef>
+              <a:buClr>
+                <a:srgbClr val="000000"/>
+              </a:buClr>
+              <a:buFont typeface="Arial"/>
+              <a:buChar char="•"/>
+            </a:pPr>
+            <a:r>
+              <a:rPr b="0" lang="es-ES" sz="2800" strike="noStrike" u="none">
+                <a:solidFill>
+                  <a:schemeClr val="dk1"/>
+                </a:solidFill>
+                <a:effectLst/>
+                <a:uFillTx/>
+                <a:latin typeface="Calibri"/>
+              </a:rPr>
+              <a:t>Segundo nivel</a:t>
+            </a:r>
+            <a:endParaRPr b="0" lang="es-ES" sz="2800" strike="noStrike" u="none">
+              <a:solidFill>
+                <a:srgbClr val="000000"/>
+              </a:solidFill>
+              <a:effectLst/>
+              <a:uFillTx/>
+              <a:latin typeface="Arial"/>
+            </a:endParaRPr>
+          </a:p>
+          <a:p>
+            <a:pPr lvl="2" marL="1143000" indent="-228600" defTabSz="914400">
+              <a:lnSpc>
+                <a:spcPct val="90000"/>
+              </a:lnSpc>
+              <a:spcBef>
+                <a:spcPts val="499"/>
+              </a:spcBef>
+              <a:buClr>
+                <a:srgbClr val="000000"/>
+              </a:buClr>
+              <a:buFont typeface="Arial"/>
+              <a:buChar char="•"/>
+            </a:pPr>
+            <a:r>
+              <a:rPr b="0" lang="es-ES" sz="2400" strike="noStrike" u="none">
+                <a:solidFill>
+                  <a:schemeClr val="dk1"/>
+                </a:solidFill>
+                <a:effectLst/>
+                <a:uFillTx/>
+                <a:latin typeface="Calibri"/>
+              </a:rPr>
+              <a:t>Tercer nivel</a:t>
+            </a:r>
+            <a:endParaRPr b="0" lang="es-ES" sz="2400" strike="noStrike" u="none">
+              <a:solidFill>
+                <a:srgbClr val="000000"/>
+              </a:solidFill>
+              <a:effectLst/>
+              <a:uFillTx/>
+              <a:latin typeface="Arial"/>
+            </a:endParaRPr>
+          </a:p>
+          <a:p>
+            <a:pPr lvl="3" marL="1600200" indent="-228600" defTabSz="914400">
+              <a:lnSpc>
+                <a:spcPct val="90000"/>
+              </a:lnSpc>
+              <a:spcBef>
+                <a:spcPts val="499"/>
+              </a:spcBef>
+              <a:buClr>
+                <a:srgbClr val="000000"/>
+              </a:buClr>
+              <a:buFont typeface="Arial"/>
+              <a:buChar char="•"/>
+            </a:pPr>
+            <a:r>
+              <a:rPr b="0" lang="es-ES" sz="2000" strike="noStrike" u="none">
+                <a:solidFill>
+                  <a:schemeClr val="dk1"/>
+                </a:solidFill>
+                <a:effectLst/>
+                <a:uFillTx/>
+                <a:latin typeface="Calibri"/>
+              </a:rPr>
+              <a:t>Cuarto nivel</a:t>
+            </a:r>
+            <a:endParaRPr b="0" lang="es-ES" sz="2000" strike="noStrike" u="none">
+              <a:solidFill>
+                <a:srgbClr val="000000"/>
+              </a:solidFill>
+              <a:effectLst/>
+              <a:uFillTx/>
+              <a:latin typeface="Arial"/>
+            </a:endParaRPr>
+          </a:p>
+          <a:p>
+            <a:pPr lvl="4" marL="2057400" indent="-228600" defTabSz="914400">
+              <a:lnSpc>
+                <a:spcPct val="90000"/>
+              </a:lnSpc>
+              <a:spcBef>
+                <a:spcPts val="499"/>
+              </a:spcBef>
+              <a:buClr>
+                <a:srgbClr val="000000"/>
+              </a:buClr>
+              <a:buFont typeface="Arial"/>
+              <a:buChar char="•"/>
+            </a:pPr>
+            <a:r>
+              <a:rPr b="0" lang="es-ES" sz="2000" strike="noStrike" u="none">
+                <a:solidFill>
+                  <a:schemeClr val="dk1"/>
+                </a:solidFill>
+                <a:effectLst/>
+                <a:uFillTx/>
+                <a:latin typeface="Calibri"/>
+              </a:rPr>
+              <a:t>Quinto nivel</a:t>
+            </a:r>
+            <a:endParaRPr b="0" lang="es-ES" sz="2000" strike="noStrike" u="none">
+              <a:solidFill>
+                <a:srgbClr val="000000"/>
+              </a:solidFill>
+              <a:effectLst/>
+              <a:uFillTx/>
+              <a:latin typeface="Arial"/>
+            </a:endParaRPr>
+          </a:p>
+        </p:txBody>
+      </p:sp>
+      <p:sp>
+        <p:nvSpPr>
+          <p:cNvPr id="55" name="PlaceHolder 3"/>
+          <p:cNvSpPr>
+            <a:spLocks noGrp="1"/>
+          </p:cNvSpPr>
+          <p:nvPr>
+            <p:ph type="body"/>
+          </p:nvPr>
+        </p:nvSpPr>
+        <p:spPr>
+          <a:xfrm>
+            <a:off x="839880" y="2057400"/>
+            <a:ext cx="3930480" cy="3809880"/>
+          </a:xfrm>
+          <a:prstGeom prst="rect">
+            <a:avLst/>
+          </a:prstGeom>
+          <a:noFill/>
+          <a:ln w="0">
+            <a:noFill/>
+          </a:ln>
+        </p:spPr>
+        <p:txBody>
+          <a:bodyPr lIns="91440" rIns="91440" tIns="45720" bIns="45720" anchor="t">
+            <a:noAutofit/>
+          </a:bodyPr>
+          <a:p>
+            <a:pPr indent="0" defTabSz="914400">
+              <a:lnSpc>
+                <a:spcPct val="90000"/>
+              </a:lnSpc>
+              <a:spcBef>
+                <a:spcPts val="1001"/>
+              </a:spcBef>
+              <a:buNone/>
+              <a:tabLst>
+                <a:tab algn="l" pos="0"/>
+              </a:tabLst>
+            </a:pPr>
+            <a:r>
+              <a:rPr b="0" lang="es-ES" sz="1600" strike="noStrike" u="none">
+                <a:solidFill>
+                  <a:schemeClr val="dk1"/>
+                </a:solidFill>
+                <a:effectLst/>
+                <a:uFillTx/>
+                <a:latin typeface="Calibri"/>
+              </a:rPr>
+              <a:t>Haga clic para modificar los estilos de texto del patrón</a:t>
+            </a:r>
+            <a:endParaRPr b="0" lang="es-ES" sz="1600" strike="noStrike" u="none">
+              <a:solidFill>
+                <a:srgbClr val="000000"/>
+              </a:solidFill>
+              <a:effectLst/>
+              <a:uFillTx/>
+              <a:latin typeface="Arial"/>
+            </a:endParaRPr>
+          </a:p>
+        </p:txBody>
+      </p:sp>
+      <p:sp>
+        <p:nvSpPr>
+          <p:cNvPr id="56" name="PlaceHolder 4"/>
+          <p:cNvSpPr>
+            <a:spLocks noGrp="1"/>
+          </p:cNvSpPr>
+          <p:nvPr>
+            <p:ph type="dt" idx="31"/>
+          </p:nvPr>
+        </p:nvSpPr>
+        <p:spPr>
+          <a:xfrm>
+            <a:off x="838080" y="6356520"/>
+            <a:ext cx="2741400" cy="363240"/>
+          </a:xfrm>
+          <a:prstGeom prst="rect">
+            <a:avLst/>
+          </a:prstGeom>
+          <a:noFill/>
+          <a:ln w="0">
+            <a:noFill/>
+          </a:ln>
+        </p:spPr>
+        <p:txBody>
+          <a:bodyPr lIns="91440" rIns="91440" tIns="45720" bIns="45720" anchor="ctr">
+            <a:noAutofit/>
+          </a:bodyPr>
+          <a:lstStyle>
+            <a:lvl1pPr indent="0" defTabSz="914400">
+              <a:lnSpc>
+                <a:spcPct val="100000"/>
+              </a:lnSpc>
+              <a:buNone/>
+              <a:tabLst>
+                <a:tab algn="l" pos="0"/>
+              </a:tabLst>
+              <a:defRPr b="0" lang="en-GB" sz="1200" strike="noStrike" u="none">
+                <a:solidFill>
+                  <a:schemeClr val="dk1">
+                    <a:tint val="75000"/>
+                  </a:schemeClr>
+                </a:solidFill>
+                <a:effectLst/>
+                <a:uFillTx/>
+                <a:latin typeface="Calibri"/>
+              </a:defRPr>
+            </a:lvl1pPr>
+          </a:lstStyle>
+          <a:p>
+            <a:pPr indent="0" defTabSz="914400">
+              <a:lnSpc>
+                <a:spcPct val="100000"/>
+              </a:lnSpc>
+              <a:buNone/>
+              <a:tabLst>
+                <a:tab algn="l" pos="0"/>
+              </a:tabLst>
+            </a:pPr>
+            <a:r>
+              <a:rPr b="0" lang="en-GB" sz="1200" strike="noStrike" u="none">
+                <a:solidFill>
+                  <a:schemeClr val="dk1">
+                    <a:tint val="75000"/>
+                  </a:schemeClr>
+                </a:solidFill>
+                <a:effectLst/>
+                <a:uFillTx/>
+                <a:latin typeface="Calibri"/>
+              </a:rPr>
+              <a:t>&lt;fecha/hora&gt;</a:t>
+            </a:r>
+            <a:endParaRPr b="0" lang="es-ES" sz="1200" strike="noStrike" u="none">
+              <a:solidFill>
+                <a:srgbClr val="000000"/>
+              </a:solidFill>
+              <a:effectLst/>
+              <a:uFillTx/>
+              <a:latin typeface="Times New Roman"/>
+            </a:endParaRPr>
+          </a:p>
+        </p:txBody>
+      </p:sp>
+      <p:sp>
+        <p:nvSpPr>
+          <p:cNvPr id="57" name="PlaceHolder 5"/>
+          <p:cNvSpPr>
+            <a:spLocks noGrp="1"/>
+          </p:cNvSpPr>
+          <p:nvPr>
+            <p:ph type="ftr" idx="32"/>
+          </p:nvPr>
+        </p:nvSpPr>
+        <p:spPr>
+          <a:xfrm>
+            <a:off x="4038480" y="6356520"/>
+            <a:ext cx="4113000" cy="363240"/>
+          </a:xfrm>
+          <a:prstGeom prst="rect">
+            <a:avLst/>
+          </a:prstGeom>
+          <a:noFill/>
+          <a:ln w="0">
+            <a:noFill/>
+          </a:ln>
+        </p:spPr>
+        <p:txBody>
+          <a:bodyPr lIns="91440" rIns="91440" tIns="45720" bIns="45720" anchor="ctr">
+            <a:noAutofit/>
+          </a:bodyPr>
+          <a:lstStyle>
+            <a:lvl1pPr indent="0" algn="ctr">
+              <a:lnSpc>
+                <a:spcPct val="100000"/>
+              </a:lnSpc>
+              <a:buNone/>
+              <a:tabLst>
+                <a:tab algn="l" pos="0"/>
+              </a:tabLst>
+              <a:defRPr b="0" lang="es-ES" sz="1400" strike="noStrike" u="none">
+                <a:solidFill>
+                  <a:srgbClr val="000000"/>
+                </a:solidFill>
+                <a:effectLst/>
+                <a:uFillTx/>
+                <a:latin typeface="Times New Roman"/>
+              </a:defRPr>
+            </a:lvl1pPr>
+          </a:lstStyle>
+          <a:p>
+            <a:pPr indent="0" algn="ctr">
+              <a:lnSpc>
+                <a:spcPct val="100000"/>
+              </a:lnSpc>
+              <a:buNone/>
+              <a:tabLst>
+                <a:tab algn="l" pos="0"/>
+              </a:tabLst>
+            </a:pPr>
+            <a:r>
+              <a:rPr b="0" lang="es-ES" sz="1400" strike="noStrike" u="none">
+                <a:solidFill>
+                  <a:srgbClr val="000000"/>
+                </a:solidFill>
+                <a:effectLst/>
+                <a:uFillTx/>
+                <a:latin typeface="Times New Roman"/>
+              </a:rPr>
+              <a:t>&lt;pie de página&gt;</a:t>
+            </a:r>
+            <a:endParaRPr b="0" lang="es-ES" sz="1400" strike="noStrike" u="none">
+              <a:solidFill>
+                <a:srgbClr val="000000"/>
+              </a:solidFill>
+              <a:effectLst/>
+              <a:uFillTx/>
+              <a:latin typeface="Times New Roman"/>
+            </a:endParaRPr>
+          </a:p>
+        </p:txBody>
+      </p:sp>
+      <p:sp>
+        <p:nvSpPr>
+          <p:cNvPr id="58" name="PlaceHolder 6"/>
+          <p:cNvSpPr>
+            <a:spLocks noGrp="1"/>
+          </p:cNvSpPr>
+          <p:nvPr>
+            <p:ph type="sldNum" idx="33"/>
+          </p:nvPr>
+        </p:nvSpPr>
+        <p:spPr>
+          <a:xfrm>
+            <a:off x="8610480" y="6356520"/>
+            <a:ext cx="2741400" cy="363240"/>
+          </a:xfrm>
+          <a:prstGeom prst="rect">
+            <a:avLst/>
+          </a:prstGeom>
+          <a:noFill/>
+          <a:ln w="0">
+            <a:noFill/>
+          </a:ln>
+        </p:spPr>
+        <p:txBody>
+          <a:bodyPr lIns="91440" rIns="91440" tIns="45720" bIns="45720" anchor="ctr">
+            <a:noAutofit/>
+          </a:bodyPr>
+          <a:lstStyle>
+            <a:lvl1pPr indent="0" algn="r" defTabSz="914400">
+              <a:lnSpc>
+                <a:spcPct val="100000"/>
+              </a:lnSpc>
+              <a:buNone/>
+              <a:tabLst>
+                <a:tab algn="l" pos="0"/>
+              </a:tabLst>
+              <a:defRPr b="0" lang="en-GB" sz="1200" strike="noStrike" u="none">
+                <a:solidFill>
+                  <a:schemeClr val="dk1">
+                    <a:tint val="75000"/>
+                  </a:schemeClr>
+                </a:solidFill>
+                <a:effectLst/>
+                <a:uFillTx/>
+                <a:latin typeface="Calibri"/>
+              </a:defRPr>
+            </a:lvl1pPr>
+          </a:lstStyle>
+          <a:p>
+            <a:pPr indent="0" algn="r" defTabSz="914400">
+              <a:lnSpc>
+                <a:spcPct val="100000"/>
+              </a:lnSpc>
+              <a:buNone/>
+              <a:tabLst>
+                <a:tab algn="l" pos="0"/>
+              </a:tabLst>
+            </a:pPr>
+            <a:fld id="{1262A9DA-0975-4D83-8679-A0578C10376C}" type="slidenum">
+              <a:rPr b="0" lang="en-GB" sz="1200" strike="noStrike" u="none">
+                <a:solidFill>
+                  <a:schemeClr val="dk1">
+                    <a:tint val="75000"/>
+                  </a:schemeClr>
+                </a:solidFill>
+                <a:effectLst/>
+                <a:uFillTx/>
+                <a:latin typeface="Calibri"/>
+              </a:rPr>
+              <a:t>&lt;número&gt;</a:t>
+            </a:fld>
+            <a:endParaRPr b="0" lang="es-ES" sz="1200" strike="noStrike" u="none">
+              <a:solidFill>
+                <a:srgbClr val="000000"/>
+              </a:solidFill>
+              <a:effectLst/>
+              <a:uFillTx/>
+              <a:latin typeface="Times New Roman"/>
+            </a:endParaRPr>
+          </a:p>
+        </p:txBody>
+      </p:sp>
+    </p:spTree>
+  </p:cSld>
+</p:sldLayout>
+</file>
+
+<file path=ppt/slideLayouts/slideLayout2.xml><?xml version="1.0" encoding="utf-8"?>
 <p:sldLayout xmlns:a="http://schemas.openxmlformats.org/drawingml/2006/main" xmlns:p="http://schemas.openxmlformats.org/presentationml/2006/main" xmlns:r="http://schemas.openxmlformats.org/officeDocument/2006/relationships" xmlns:p14="http://schemas.microsoft.com/office/powerpoint/2010/main" xmlns:p15="http://schemas.microsoft.com/office/powerpoint/2012/main" xmlns:mc="http://schemas.openxmlformats.org/markup-compatibility/2006" type="title" preserve="1">
   <p:cSld name="Diapositiva de título">
     <p:bg>
@@ -567,7 +1899,7 @@
       </p:grpSpPr>
       <p:sp>
         <p:nvSpPr>
-          <p:cNvPr id="50" name="PlaceHolder 1"/>
+          <p:cNvPr id="6" name="PlaceHolder 1"/>
           <p:cNvSpPr>
             <a:spLocks noGrp="1"/>
           </p:cNvSpPr>
@@ -578,7 +1910,7 @@
         <p:spPr>
           <a:xfrm>
             <a:off x="1523880" y="1122480"/>
-            <a:ext cx="9142560" cy="2386080"/>
+            <a:ext cx="9142200" cy="2385720"/>
           </a:xfrm>
           <a:prstGeom prst="rect">
             <a:avLst/>
@@ -626,18 +1958,18 @@
       </p:sp>
       <p:sp>
         <p:nvSpPr>
-          <p:cNvPr id="51" name="PlaceHolder 2"/>
+          <p:cNvPr id="7" name="PlaceHolder 2"/>
           <p:cNvSpPr>
             <a:spLocks noGrp="1"/>
           </p:cNvSpPr>
           <p:nvPr>
-            <p:ph type="dt" idx="28"/>
+            <p:ph type="dt" idx="4"/>
           </p:nvPr>
         </p:nvSpPr>
         <p:spPr>
           <a:xfrm>
             <a:off x="838080" y="6356520"/>
-            <a:ext cx="2741760" cy="363600"/>
+            <a:ext cx="2741400" cy="363240"/>
           </a:xfrm>
           <a:prstGeom prst="rect">
             <a:avLst/>
@@ -708,18 +2040,18 @@
       </p:sp>
       <p:sp>
         <p:nvSpPr>
-          <p:cNvPr id="52" name="PlaceHolder 3"/>
+          <p:cNvPr id="8" name="PlaceHolder 3"/>
           <p:cNvSpPr>
             <a:spLocks noGrp="1"/>
           </p:cNvSpPr>
           <p:nvPr>
-            <p:ph type="ftr" idx="29"/>
+            <p:ph type="ftr" idx="5"/>
           </p:nvPr>
         </p:nvSpPr>
         <p:spPr>
           <a:xfrm>
             <a:off x="4038480" y="6356520"/>
-            <a:ext cx="4113360" cy="363600"/>
+            <a:ext cx="4113000" cy="363240"/>
           </a:xfrm>
           <a:prstGeom prst="rect">
             <a:avLst/>
@@ -786,18 +2118,18 @@
       </p:sp>
       <p:sp>
         <p:nvSpPr>
-          <p:cNvPr id="53" name="PlaceHolder 4"/>
+          <p:cNvPr id="9" name="PlaceHolder 4"/>
           <p:cNvSpPr>
             <a:spLocks noGrp="1"/>
           </p:cNvSpPr>
           <p:nvPr>
-            <p:ph type="sldNum" idx="30"/>
+            <p:ph type="sldNum" idx="6"/>
           </p:nvPr>
         </p:nvSpPr>
         <p:spPr>
           <a:xfrm>
             <a:off x="8610480" y="6356520"/>
-            <a:ext cx="2741760" cy="363600"/>
+            <a:ext cx="2741400" cy="363240"/>
           </a:xfrm>
           <a:prstGeom prst="rect">
             <a:avLst/>
@@ -842,1065 +2174,7 @@
                 <a:tab algn="l" pos="0"/>
               </a:tabLst>
             </a:pPr>
-            <a:fld id="{7BE59016-1FB0-4EFD-BC97-8340A9BA38C9}" type="slidenum">
-              <a:rPr b="0" lang="en-GB" sz="1200" strike="noStrike" u="none">
-                <a:solidFill>
-                  <a:schemeClr val="dk1">
-                    <a:tint val="75000"/>
-                  </a:schemeClr>
-                </a:solidFill>
-                <a:effectLst/>
-                <a:uFillTx/>
-                <a:latin typeface="Calibri"/>
-              </a:rPr>
-              <a:t>&lt;número&gt;</a:t>
-            </a:fld>
-            <a:endParaRPr b="0" lang="es-ES" sz="1200" strike="noStrike" u="none">
-              <a:solidFill>
-                <a:srgbClr val="000000"/>
-              </a:solidFill>
-              <a:effectLst/>
-              <a:uFillTx/>
-              <a:latin typeface="Times New Roman"/>
-            </a:endParaRPr>
-          </a:p>
-        </p:txBody>
-      </p:sp>
-    </p:spTree>
-  </p:cSld>
-</p:sldLayout>
-</file>
-
-<file path=ppt/slideLayouts/slideLayout11.xml><?xml version="1.0" encoding="utf-8"?>
-<p:sldLayout xmlns:a="http://schemas.openxmlformats.org/drawingml/2006/main" xmlns:p="http://schemas.openxmlformats.org/presentationml/2006/main" xmlns:r="http://schemas.openxmlformats.org/officeDocument/2006/relationships" xmlns:p14="http://schemas.microsoft.com/office/powerpoint/2010/main" xmlns:p15="http://schemas.microsoft.com/office/powerpoint/2012/main" xmlns:mc="http://schemas.openxmlformats.org/markup-compatibility/2006" type="vertTx" preserve="1">
-  <p:cSld name="Título y texto vertical">
-    <p:bg>
-      <p:bgPr>
-        <a:solidFill>
-          <a:srgbClr val="ffffff"/>
-        </a:solidFill>
-      </p:bgPr>
-    </p:bg>
-    <p:spTree>
-      <p:nvGrpSpPr>
-        <p:cNvPr id="1" name=""/>
-        <p:cNvGrpSpPr/>
-        <p:nvPr/>
-      </p:nvGrpSpPr>
-      <p:grpSpPr>
-        <a:xfrm>
-          <a:off x="0" y="0"/>
-          <a:ext cx="0" cy="0"/>
-          <a:chOff x="0" y="0"/>
-          <a:chExt cx="0" cy="0"/>
-        </a:xfrm>
-      </p:grpSpPr>
-      <p:sp>
-        <p:nvSpPr>
-          <p:cNvPr id="54" name="PlaceHolder 1"/>
-          <p:cNvSpPr>
-            <a:spLocks noGrp="1"/>
-          </p:cNvSpPr>
-          <p:nvPr>
-            <p:ph type="title"/>
-          </p:nvPr>
-        </p:nvSpPr>
-        <p:spPr>
-          <a:xfrm>
-            <a:off x="838080" y="365040"/>
-            <a:ext cx="10514160" cy="1324080"/>
-          </a:xfrm>
-          <a:prstGeom prst="rect">
-            <a:avLst/>
-          </a:prstGeom>
-          <a:noFill/>
-          <a:ln w="0">
-            <a:noFill/>
-          </a:ln>
-        </p:spPr>
-        <p:txBody>
-          <a:bodyPr lIns="91440" rIns="91440" tIns="45720" bIns="45720" anchor="ctr">
-            <a:noAutofit/>
-          </a:bodyPr>
-          <a:p>
-            <a:pPr indent="0" defTabSz="914400">
-              <a:lnSpc>
-                <a:spcPct val="90000"/>
-              </a:lnSpc>
-              <a:buNone/>
-              <a:tabLst>
-                <a:tab algn="l" pos="0"/>
-              </a:tabLst>
-            </a:pPr>
-            <a:r>
-              <a:rPr b="0" lang="es-ES" sz="4400" strike="noStrike" u="none">
-                <a:solidFill>
-                  <a:schemeClr val="dk1"/>
-                </a:solidFill>
-                <a:effectLst/>
-                <a:uFillTx/>
-                <a:latin typeface="Calibri Light"/>
-              </a:rPr>
-              <a:t>Haga clic para modificar el estilo de título del patrón</a:t>
-            </a:r>
-            <a:endParaRPr b="0" lang="es-ES" sz="4400" strike="noStrike" u="none">
-              <a:solidFill>
-                <a:srgbClr val="000000"/>
-              </a:solidFill>
-              <a:effectLst/>
-              <a:uFillTx/>
-              <a:latin typeface="Arial"/>
-            </a:endParaRPr>
-          </a:p>
-        </p:txBody>
-      </p:sp>
-      <p:sp>
-        <p:nvSpPr>
-          <p:cNvPr id="55" name="PlaceHolder 2"/>
-          <p:cNvSpPr>
-            <a:spLocks noGrp="1"/>
-          </p:cNvSpPr>
-          <p:nvPr>
-            <p:ph type="body"/>
-          </p:nvPr>
-        </p:nvSpPr>
-        <p:spPr>
-          <a:xfrm>
-            <a:off x="838080" y="1825560"/>
-            <a:ext cx="10514160" cy="4349880"/>
-          </a:xfrm>
-          <a:prstGeom prst="rect">
-            <a:avLst/>
-          </a:prstGeom>
-          <a:noFill/>
-          <a:ln w="0">
-            <a:noFill/>
-          </a:ln>
-        </p:spPr>
-        <p:txBody>
-          <a:bodyPr lIns="91440" rIns="91440" tIns="45720" bIns="45720" anchor="t" vert="eaVert">
-            <a:noAutofit/>
-          </a:bodyPr>
-          <a:p>
-            <a:pPr marL="228600" indent="-228600" defTabSz="914400">
-              <a:lnSpc>
-                <a:spcPct val="90000"/>
-              </a:lnSpc>
-              <a:spcBef>
-                <a:spcPts val="1001"/>
-              </a:spcBef>
-              <a:buClr>
-                <a:srgbClr val="000000"/>
-              </a:buClr>
-              <a:buFont typeface="Arial"/>
-              <a:buChar char="•"/>
-            </a:pPr>
-            <a:r>
-              <a:rPr b="0" lang="es-ES" sz="2800" strike="noStrike" u="none">
-                <a:solidFill>
-                  <a:schemeClr val="dk1"/>
-                </a:solidFill>
-                <a:effectLst/>
-                <a:uFillTx/>
-                <a:latin typeface="Calibri"/>
-              </a:rPr>
-              <a:t>Haga clic para modificar los estilos de texto del patrón</a:t>
-            </a:r>
-            <a:endParaRPr b="0" lang="es-ES" sz="2800" strike="noStrike" u="none">
-              <a:solidFill>
-                <a:srgbClr val="000000"/>
-              </a:solidFill>
-              <a:effectLst/>
-              <a:uFillTx/>
-              <a:latin typeface="Arial"/>
-            </a:endParaRPr>
-          </a:p>
-          <a:p>
-            <a:pPr lvl="1" marL="685800" indent="-228600" defTabSz="914400">
-              <a:lnSpc>
-                <a:spcPct val="90000"/>
-              </a:lnSpc>
-              <a:spcBef>
-                <a:spcPts val="499"/>
-              </a:spcBef>
-              <a:buClr>
-                <a:srgbClr val="000000"/>
-              </a:buClr>
-              <a:buFont typeface="Arial"/>
-              <a:buChar char="•"/>
-            </a:pPr>
-            <a:r>
-              <a:rPr b="0" lang="es-ES" sz="2400" strike="noStrike" u="none">
-                <a:solidFill>
-                  <a:schemeClr val="dk1"/>
-                </a:solidFill>
-                <a:effectLst/>
-                <a:uFillTx/>
-                <a:latin typeface="Calibri"/>
-              </a:rPr>
-              <a:t>Segundo nivel</a:t>
-            </a:r>
-            <a:endParaRPr b="0" lang="es-ES" sz="2400" strike="noStrike" u="none">
-              <a:solidFill>
-                <a:srgbClr val="000000"/>
-              </a:solidFill>
-              <a:effectLst/>
-              <a:uFillTx/>
-              <a:latin typeface="Arial"/>
-            </a:endParaRPr>
-          </a:p>
-          <a:p>
-            <a:pPr lvl="2" marL="1143000" indent="-228600" defTabSz="914400">
-              <a:lnSpc>
-                <a:spcPct val="90000"/>
-              </a:lnSpc>
-              <a:spcBef>
-                <a:spcPts val="499"/>
-              </a:spcBef>
-              <a:buClr>
-                <a:srgbClr val="000000"/>
-              </a:buClr>
-              <a:buFont typeface="Arial"/>
-              <a:buChar char="•"/>
-            </a:pPr>
-            <a:r>
-              <a:rPr b="0" lang="es-ES" sz="2000" strike="noStrike" u="none">
-                <a:solidFill>
-                  <a:schemeClr val="dk1"/>
-                </a:solidFill>
-                <a:effectLst/>
-                <a:uFillTx/>
-                <a:latin typeface="Calibri"/>
-              </a:rPr>
-              <a:t>Tercer nivel</a:t>
-            </a:r>
-            <a:endParaRPr b="0" lang="es-ES" sz="2000" strike="noStrike" u="none">
-              <a:solidFill>
-                <a:srgbClr val="000000"/>
-              </a:solidFill>
-              <a:effectLst/>
-              <a:uFillTx/>
-              <a:latin typeface="Arial"/>
-            </a:endParaRPr>
-          </a:p>
-          <a:p>
-            <a:pPr lvl="3" marL="1600200" indent="-228600" defTabSz="914400">
-              <a:lnSpc>
-                <a:spcPct val="90000"/>
-              </a:lnSpc>
-              <a:spcBef>
-                <a:spcPts val="499"/>
-              </a:spcBef>
-              <a:buClr>
-                <a:srgbClr val="000000"/>
-              </a:buClr>
-              <a:buFont typeface="Arial"/>
-              <a:buChar char="•"/>
-            </a:pPr>
-            <a:r>
-              <a:rPr b="0" lang="es-ES" sz="1800" strike="noStrike" u="none">
-                <a:solidFill>
-                  <a:schemeClr val="dk1"/>
-                </a:solidFill>
-                <a:effectLst/>
-                <a:uFillTx/>
-                <a:latin typeface="Calibri"/>
-              </a:rPr>
-              <a:t>Cuarto nivel</a:t>
-            </a:r>
-            <a:endParaRPr b="0" lang="es-ES" sz="1800" strike="noStrike" u="none">
-              <a:solidFill>
-                <a:srgbClr val="000000"/>
-              </a:solidFill>
-              <a:effectLst/>
-              <a:uFillTx/>
-              <a:latin typeface="Arial"/>
-            </a:endParaRPr>
-          </a:p>
-          <a:p>
-            <a:pPr lvl="4" marL="2057400" indent="-228600" defTabSz="914400">
-              <a:lnSpc>
-                <a:spcPct val="90000"/>
-              </a:lnSpc>
-              <a:spcBef>
-                <a:spcPts val="499"/>
-              </a:spcBef>
-              <a:buClr>
-                <a:srgbClr val="000000"/>
-              </a:buClr>
-              <a:buFont typeface="Arial"/>
-              <a:buChar char="•"/>
-            </a:pPr>
-            <a:r>
-              <a:rPr b="0" lang="es-ES" sz="1800" strike="noStrike" u="none">
-                <a:solidFill>
-                  <a:schemeClr val="dk1"/>
-                </a:solidFill>
-                <a:effectLst/>
-                <a:uFillTx/>
-                <a:latin typeface="Calibri"/>
-              </a:rPr>
-              <a:t>Quinto nivel</a:t>
-            </a:r>
-            <a:endParaRPr b="0" lang="es-ES" sz="1800" strike="noStrike" u="none">
-              <a:solidFill>
-                <a:srgbClr val="000000"/>
-              </a:solidFill>
-              <a:effectLst/>
-              <a:uFillTx/>
-              <a:latin typeface="Arial"/>
-            </a:endParaRPr>
-          </a:p>
-        </p:txBody>
-      </p:sp>
-      <p:sp>
-        <p:nvSpPr>
-          <p:cNvPr id="56" name="PlaceHolder 3"/>
-          <p:cNvSpPr>
-            <a:spLocks noGrp="1"/>
-          </p:cNvSpPr>
-          <p:nvPr>
-            <p:ph type="dt" idx="31"/>
-          </p:nvPr>
-        </p:nvSpPr>
-        <p:spPr>
-          <a:xfrm>
-            <a:off x="838080" y="6356520"/>
-            <a:ext cx="2741760" cy="363600"/>
-          </a:xfrm>
-          <a:prstGeom prst="rect">
-            <a:avLst/>
-          </a:prstGeom>
-          <a:noFill/>
-          <a:ln w="0">
-            <a:noFill/>
-          </a:ln>
-        </p:spPr>
-        <p:txBody>
-          <a:bodyPr lIns="91440" rIns="91440" tIns="45720" bIns="45720" anchor="ctr">
-            <a:noAutofit/>
-          </a:bodyPr>
-          <a:lstStyle>
-            <a:lvl1pPr indent="0" defTabSz="914400">
-              <a:lnSpc>
-                <a:spcPct val="100000"/>
-              </a:lnSpc>
-              <a:buNone/>
-              <a:tabLst>
-                <a:tab algn="l" pos="0"/>
-              </a:tabLst>
-              <a:defRPr b="0" lang="en-GB" sz="1200" strike="noStrike" u="none">
-                <a:solidFill>
-                  <a:schemeClr val="dk1">
-                    <a:tint val="75000"/>
-                  </a:schemeClr>
-                </a:solidFill>
-                <a:effectLst/>
-                <a:uFillTx/>
-                <a:latin typeface="Calibri"/>
-              </a:defRPr>
-            </a:lvl1pPr>
-          </a:lstStyle>
-          <a:p>
-            <a:pPr indent="0" defTabSz="914400">
-              <a:lnSpc>
-                <a:spcPct val="100000"/>
-              </a:lnSpc>
-              <a:buNone/>
-              <a:tabLst>
-                <a:tab algn="l" pos="0"/>
-              </a:tabLst>
-            </a:pPr>
-            <a:r>
-              <a:rPr b="0" lang="en-GB" sz="1200" strike="noStrike" u="none">
-                <a:solidFill>
-                  <a:schemeClr val="dk1">
-                    <a:tint val="75000"/>
-                  </a:schemeClr>
-                </a:solidFill>
-                <a:effectLst/>
-                <a:uFillTx/>
-                <a:latin typeface="Calibri"/>
-              </a:rPr>
-              <a:t>&lt;fecha/hora&gt;</a:t>
-            </a:r>
-            <a:endParaRPr b="0" lang="es-ES" sz="1200" strike="noStrike" u="none">
-              <a:solidFill>
-                <a:srgbClr val="000000"/>
-              </a:solidFill>
-              <a:effectLst/>
-              <a:uFillTx/>
-              <a:latin typeface="Times New Roman"/>
-            </a:endParaRPr>
-          </a:p>
-        </p:txBody>
-      </p:sp>
-      <p:sp>
-        <p:nvSpPr>
-          <p:cNvPr id="57" name="PlaceHolder 4"/>
-          <p:cNvSpPr>
-            <a:spLocks noGrp="1"/>
-          </p:cNvSpPr>
-          <p:nvPr>
-            <p:ph type="ftr" idx="32"/>
-          </p:nvPr>
-        </p:nvSpPr>
-        <p:spPr>
-          <a:xfrm>
-            <a:off x="4038480" y="6356520"/>
-            <a:ext cx="4113360" cy="363600"/>
-          </a:xfrm>
-          <a:prstGeom prst="rect">
-            <a:avLst/>
-          </a:prstGeom>
-          <a:noFill/>
-          <a:ln w="0">
-            <a:noFill/>
-          </a:ln>
-        </p:spPr>
-        <p:txBody>
-          <a:bodyPr lIns="91440" rIns="91440" tIns="45720" bIns="45720" anchor="ctr">
-            <a:noAutofit/>
-          </a:bodyPr>
-          <a:lstStyle>
-            <a:lvl1pPr indent="0" algn="ctr">
-              <a:lnSpc>
-                <a:spcPct val="100000"/>
-              </a:lnSpc>
-              <a:buNone/>
-              <a:tabLst>
-                <a:tab algn="l" pos="0"/>
-              </a:tabLst>
-              <a:defRPr b="0" lang="es-ES" sz="1400" strike="noStrike" u="none">
-                <a:solidFill>
-                  <a:srgbClr val="000000"/>
-                </a:solidFill>
-                <a:effectLst/>
-                <a:uFillTx/>
-                <a:latin typeface="Times New Roman"/>
-              </a:defRPr>
-            </a:lvl1pPr>
-          </a:lstStyle>
-          <a:p>
-            <a:pPr indent="0" algn="ctr">
-              <a:lnSpc>
-                <a:spcPct val="100000"/>
-              </a:lnSpc>
-              <a:buNone/>
-              <a:tabLst>
-                <a:tab algn="l" pos="0"/>
-              </a:tabLst>
-            </a:pPr>
-            <a:r>
-              <a:rPr b="0" lang="es-ES" sz="1400" strike="noStrike" u="none">
-                <a:solidFill>
-                  <a:srgbClr val="000000"/>
-                </a:solidFill>
-                <a:effectLst/>
-                <a:uFillTx/>
-                <a:latin typeface="Times New Roman"/>
-              </a:rPr>
-              <a:t>&lt;pie de página&gt;</a:t>
-            </a:r>
-            <a:endParaRPr b="0" lang="es-ES" sz="1400" strike="noStrike" u="none">
-              <a:solidFill>
-                <a:srgbClr val="000000"/>
-              </a:solidFill>
-              <a:effectLst/>
-              <a:uFillTx/>
-              <a:latin typeface="Times New Roman"/>
-            </a:endParaRPr>
-          </a:p>
-        </p:txBody>
-      </p:sp>
-      <p:sp>
-        <p:nvSpPr>
-          <p:cNvPr id="58" name="PlaceHolder 5"/>
-          <p:cNvSpPr>
-            <a:spLocks noGrp="1"/>
-          </p:cNvSpPr>
-          <p:nvPr>
-            <p:ph type="sldNum" idx="33"/>
-          </p:nvPr>
-        </p:nvSpPr>
-        <p:spPr>
-          <a:xfrm>
-            <a:off x="8610480" y="6356520"/>
-            <a:ext cx="2741760" cy="363600"/>
-          </a:xfrm>
-          <a:prstGeom prst="rect">
-            <a:avLst/>
-          </a:prstGeom>
-          <a:noFill/>
-          <a:ln w="0">
-            <a:noFill/>
-          </a:ln>
-        </p:spPr>
-        <p:txBody>
-          <a:bodyPr lIns="91440" rIns="91440" tIns="45720" bIns="45720" anchor="ctr">
-            <a:noAutofit/>
-          </a:bodyPr>
-          <a:lstStyle>
-            <a:lvl1pPr indent="0" algn="r" defTabSz="914400">
-              <a:lnSpc>
-                <a:spcPct val="100000"/>
-              </a:lnSpc>
-              <a:buNone/>
-              <a:tabLst>
-                <a:tab algn="l" pos="0"/>
-              </a:tabLst>
-              <a:defRPr b="0" lang="en-GB" sz="1200" strike="noStrike" u="none">
-                <a:solidFill>
-                  <a:schemeClr val="dk1">
-                    <a:tint val="75000"/>
-                  </a:schemeClr>
-                </a:solidFill>
-                <a:effectLst/>
-                <a:uFillTx/>
-                <a:latin typeface="Calibri"/>
-              </a:defRPr>
-            </a:lvl1pPr>
-          </a:lstStyle>
-          <a:p>
-            <a:pPr indent="0" algn="r" defTabSz="914400">
-              <a:lnSpc>
-                <a:spcPct val="100000"/>
-              </a:lnSpc>
-              <a:buNone/>
-              <a:tabLst>
-                <a:tab algn="l" pos="0"/>
-              </a:tabLst>
-            </a:pPr>
-            <a:fld id="{38CEC191-BB7A-467E-8110-AD8B1C7C012E}" type="slidenum">
-              <a:rPr b="0" lang="en-GB" sz="1200" strike="noStrike" u="none">
-                <a:solidFill>
-                  <a:schemeClr val="dk1">
-                    <a:tint val="75000"/>
-                  </a:schemeClr>
-                </a:solidFill>
-                <a:effectLst/>
-                <a:uFillTx/>
-                <a:latin typeface="Calibri"/>
-              </a:rPr>
-              <a:t>&lt;número&gt;</a:t>
-            </a:fld>
-            <a:endParaRPr b="0" lang="es-ES" sz="1200" strike="noStrike" u="none">
-              <a:solidFill>
-                <a:srgbClr val="000000"/>
-              </a:solidFill>
-              <a:effectLst/>
-              <a:uFillTx/>
-              <a:latin typeface="Times New Roman"/>
-            </a:endParaRPr>
-          </a:p>
-        </p:txBody>
-      </p:sp>
-    </p:spTree>
-  </p:cSld>
-</p:sldLayout>
-</file>
-
-<file path=ppt/slideLayouts/slideLayout2.xml><?xml version="1.0" encoding="utf-8"?>
-<p:sldLayout xmlns:a="http://schemas.openxmlformats.org/drawingml/2006/main" xmlns:p="http://schemas.openxmlformats.org/presentationml/2006/main" xmlns:r="http://schemas.openxmlformats.org/officeDocument/2006/relationships" xmlns:p14="http://schemas.microsoft.com/office/powerpoint/2010/main" xmlns:p15="http://schemas.microsoft.com/office/powerpoint/2012/main" xmlns:mc="http://schemas.openxmlformats.org/markup-compatibility/2006" type="obj" preserve="1">
-  <p:cSld name="Título y objetos">
-    <p:bg>
-      <p:bgPr>
-        <a:solidFill>
-          <a:srgbClr val="ffffff"/>
-        </a:solidFill>
-      </p:bgPr>
-    </p:bg>
-    <p:spTree>
-      <p:nvGrpSpPr>
-        <p:cNvPr id="1" name=""/>
-        <p:cNvGrpSpPr/>
-        <p:nvPr/>
-      </p:nvGrpSpPr>
-      <p:grpSpPr>
-        <a:xfrm>
-          <a:off x="0" y="0"/>
-          <a:ext cx="0" cy="0"/>
-          <a:chOff x="0" y="0"/>
-          <a:chExt cx="0" cy="0"/>
-        </a:xfrm>
-      </p:grpSpPr>
-      <p:sp>
-        <p:nvSpPr>
-          <p:cNvPr id="5" name="PlaceHolder 1"/>
-          <p:cNvSpPr>
-            <a:spLocks noGrp="1"/>
-          </p:cNvSpPr>
-          <p:nvPr>
-            <p:ph type="title"/>
-          </p:nvPr>
-        </p:nvSpPr>
-        <p:spPr>
-          <a:xfrm>
-            <a:off x="838080" y="365040"/>
-            <a:ext cx="10514160" cy="1324080"/>
-          </a:xfrm>
-          <a:prstGeom prst="rect">
-            <a:avLst/>
-          </a:prstGeom>
-          <a:noFill/>
-          <a:ln w="0">
-            <a:noFill/>
-          </a:ln>
-        </p:spPr>
-        <p:txBody>
-          <a:bodyPr lIns="91440" rIns="91440" tIns="45720" bIns="45720" anchor="ctr">
-            <a:noAutofit/>
-          </a:bodyPr>
-          <a:p>
-            <a:pPr indent="0" defTabSz="914400">
-              <a:lnSpc>
-                <a:spcPct val="90000"/>
-              </a:lnSpc>
-              <a:buNone/>
-              <a:tabLst>
-                <a:tab algn="l" pos="0"/>
-              </a:tabLst>
-            </a:pPr>
-            <a:r>
-              <a:rPr b="0" lang="es-ES" sz="4400" strike="noStrike" u="none">
-                <a:solidFill>
-                  <a:schemeClr val="dk1"/>
-                </a:solidFill>
-                <a:effectLst/>
-                <a:uFillTx/>
-                <a:latin typeface="Calibri Light"/>
-              </a:rPr>
-              <a:t>Haga clic para modificar el estilo de título del patrón</a:t>
-            </a:r>
-            <a:endParaRPr b="0" lang="es-ES" sz="4400" strike="noStrike" u="none">
-              <a:solidFill>
-                <a:srgbClr val="000000"/>
-              </a:solidFill>
-              <a:effectLst/>
-              <a:uFillTx/>
-              <a:latin typeface="Arial"/>
-            </a:endParaRPr>
-          </a:p>
-        </p:txBody>
-      </p:sp>
-      <p:sp>
-        <p:nvSpPr>
-          <p:cNvPr id="6" name="PlaceHolder 2"/>
-          <p:cNvSpPr>
-            <a:spLocks noGrp="1"/>
-          </p:cNvSpPr>
-          <p:nvPr>
-            <p:ph type="body"/>
-          </p:nvPr>
-        </p:nvSpPr>
-        <p:spPr>
-          <a:xfrm>
-            <a:off x="838080" y="1825560"/>
-            <a:ext cx="10514160" cy="4349880"/>
-          </a:xfrm>
-          <a:prstGeom prst="rect">
-            <a:avLst/>
-          </a:prstGeom>
-          <a:noFill/>
-          <a:ln w="0">
-            <a:noFill/>
-          </a:ln>
-        </p:spPr>
-        <p:txBody>
-          <a:bodyPr lIns="91440" rIns="91440" tIns="45720" bIns="45720" anchor="t">
-            <a:noAutofit/>
-          </a:bodyPr>
-          <a:p>
-            <a:pPr marL="228600" indent="-228600" defTabSz="914400">
-              <a:lnSpc>
-                <a:spcPct val="90000"/>
-              </a:lnSpc>
-              <a:spcBef>
-                <a:spcPts val="1001"/>
-              </a:spcBef>
-              <a:buClr>
-                <a:srgbClr val="000000"/>
-              </a:buClr>
-              <a:buFont typeface="Arial"/>
-              <a:buChar char="•"/>
-            </a:pPr>
-            <a:r>
-              <a:rPr b="0" lang="es-ES" sz="2800" strike="noStrike" u="none">
-                <a:solidFill>
-                  <a:schemeClr val="dk1"/>
-                </a:solidFill>
-                <a:effectLst/>
-                <a:uFillTx/>
-                <a:latin typeface="Calibri"/>
-              </a:rPr>
-              <a:t>Haga clic para modificar los estilos de texto del patrón</a:t>
-            </a:r>
-            <a:endParaRPr b="0" lang="es-ES" sz="2800" strike="noStrike" u="none">
-              <a:solidFill>
-                <a:srgbClr val="000000"/>
-              </a:solidFill>
-              <a:effectLst/>
-              <a:uFillTx/>
-              <a:latin typeface="Arial"/>
-            </a:endParaRPr>
-          </a:p>
-          <a:p>
-            <a:pPr lvl="1" marL="685800" indent="-228600" defTabSz="914400">
-              <a:lnSpc>
-                <a:spcPct val="90000"/>
-              </a:lnSpc>
-              <a:spcBef>
-                <a:spcPts val="499"/>
-              </a:spcBef>
-              <a:buClr>
-                <a:srgbClr val="000000"/>
-              </a:buClr>
-              <a:buFont typeface="Arial"/>
-              <a:buChar char="•"/>
-            </a:pPr>
-            <a:r>
-              <a:rPr b="0" lang="es-ES" sz="2400" strike="noStrike" u="none">
-                <a:solidFill>
-                  <a:schemeClr val="dk1"/>
-                </a:solidFill>
-                <a:effectLst/>
-                <a:uFillTx/>
-                <a:latin typeface="Calibri"/>
-              </a:rPr>
-              <a:t>Segundo nivel</a:t>
-            </a:r>
-            <a:endParaRPr b="0" lang="es-ES" sz="2400" strike="noStrike" u="none">
-              <a:solidFill>
-                <a:srgbClr val="000000"/>
-              </a:solidFill>
-              <a:effectLst/>
-              <a:uFillTx/>
-              <a:latin typeface="Arial"/>
-            </a:endParaRPr>
-          </a:p>
-          <a:p>
-            <a:pPr lvl="2" marL="1143000" indent="-228600" defTabSz="914400">
-              <a:lnSpc>
-                <a:spcPct val="90000"/>
-              </a:lnSpc>
-              <a:spcBef>
-                <a:spcPts val="499"/>
-              </a:spcBef>
-              <a:buClr>
-                <a:srgbClr val="000000"/>
-              </a:buClr>
-              <a:buFont typeface="Arial"/>
-              <a:buChar char="•"/>
-            </a:pPr>
-            <a:r>
-              <a:rPr b="0" lang="es-ES" sz="2000" strike="noStrike" u="none">
-                <a:solidFill>
-                  <a:schemeClr val="dk1"/>
-                </a:solidFill>
-                <a:effectLst/>
-                <a:uFillTx/>
-                <a:latin typeface="Calibri"/>
-              </a:rPr>
-              <a:t>Tercer nivel</a:t>
-            </a:r>
-            <a:endParaRPr b="0" lang="es-ES" sz="2000" strike="noStrike" u="none">
-              <a:solidFill>
-                <a:srgbClr val="000000"/>
-              </a:solidFill>
-              <a:effectLst/>
-              <a:uFillTx/>
-              <a:latin typeface="Arial"/>
-            </a:endParaRPr>
-          </a:p>
-          <a:p>
-            <a:pPr lvl="3" marL="1600200" indent="-228600" defTabSz="914400">
-              <a:lnSpc>
-                <a:spcPct val="90000"/>
-              </a:lnSpc>
-              <a:spcBef>
-                <a:spcPts val="499"/>
-              </a:spcBef>
-              <a:buClr>
-                <a:srgbClr val="000000"/>
-              </a:buClr>
-              <a:buFont typeface="Arial"/>
-              <a:buChar char="•"/>
-            </a:pPr>
-            <a:r>
-              <a:rPr b="0" lang="es-ES" sz="1800" strike="noStrike" u="none">
-                <a:solidFill>
-                  <a:schemeClr val="dk1"/>
-                </a:solidFill>
-                <a:effectLst/>
-                <a:uFillTx/>
-                <a:latin typeface="Calibri"/>
-              </a:rPr>
-              <a:t>Cuarto nivel</a:t>
-            </a:r>
-            <a:endParaRPr b="0" lang="es-ES" sz="1800" strike="noStrike" u="none">
-              <a:solidFill>
-                <a:srgbClr val="000000"/>
-              </a:solidFill>
-              <a:effectLst/>
-              <a:uFillTx/>
-              <a:latin typeface="Arial"/>
-            </a:endParaRPr>
-          </a:p>
-          <a:p>
-            <a:pPr lvl="4" marL="2057400" indent="-228600" defTabSz="914400">
-              <a:lnSpc>
-                <a:spcPct val="90000"/>
-              </a:lnSpc>
-              <a:spcBef>
-                <a:spcPts val="499"/>
-              </a:spcBef>
-              <a:buClr>
-                <a:srgbClr val="000000"/>
-              </a:buClr>
-              <a:buFont typeface="Arial"/>
-              <a:buChar char="•"/>
-            </a:pPr>
-            <a:r>
-              <a:rPr b="0" lang="es-ES" sz="1800" strike="noStrike" u="none">
-                <a:solidFill>
-                  <a:schemeClr val="dk1"/>
-                </a:solidFill>
-                <a:effectLst/>
-                <a:uFillTx/>
-                <a:latin typeface="Calibri"/>
-              </a:rPr>
-              <a:t>Quinto nivel</a:t>
-            </a:r>
-            <a:endParaRPr b="0" lang="es-ES" sz="1800" strike="noStrike" u="none">
-              <a:solidFill>
-                <a:srgbClr val="000000"/>
-              </a:solidFill>
-              <a:effectLst/>
-              <a:uFillTx/>
-              <a:latin typeface="Arial"/>
-            </a:endParaRPr>
-          </a:p>
-        </p:txBody>
-      </p:sp>
-      <p:sp>
-        <p:nvSpPr>
-          <p:cNvPr id="7" name="PlaceHolder 3"/>
-          <p:cNvSpPr>
-            <a:spLocks noGrp="1"/>
-          </p:cNvSpPr>
-          <p:nvPr>
-            <p:ph type="dt" idx="4"/>
-          </p:nvPr>
-        </p:nvSpPr>
-        <p:spPr>
-          <a:xfrm>
-            <a:off x="838080" y="6356520"/>
-            <a:ext cx="2741760" cy="363600"/>
-          </a:xfrm>
-          <a:prstGeom prst="rect">
-            <a:avLst/>
-          </a:prstGeom>
-          <a:noFill/>
-          <a:ln w="0">
-            <a:noFill/>
-          </a:ln>
-        </p:spPr>
-        <p:txBody>
-          <a:bodyPr lIns="91440" rIns="91440" tIns="45720" bIns="45720" anchor="ctr">
-            <a:noAutofit/>
-          </a:bodyPr>
-          <a:lstStyle>
-            <a:lvl1pPr indent="0" defTabSz="914400">
-              <a:lnSpc>
-                <a:spcPct val="100000"/>
-              </a:lnSpc>
-              <a:buNone/>
-              <a:tabLst>
-                <a:tab algn="l" pos="0"/>
-              </a:tabLst>
-              <a:defRPr b="0" lang="en-GB" sz="1200" strike="noStrike" u="none">
-                <a:solidFill>
-                  <a:schemeClr val="dk1">
-                    <a:tint val="75000"/>
-                  </a:schemeClr>
-                </a:solidFill>
-                <a:effectLst/>
-                <a:uFillTx/>
-                <a:latin typeface="Calibri"/>
-              </a:defRPr>
-            </a:lvl1pPr>
-          </a:lstStyle>
-          <a:p>
-            <a:pPr indent="0" defTabSz="914400">
-              <a:lnSpc>
-                <a:spcPct val="100000"/>
-              </a:lnSpc>
-              <a:buNone/>
-              <a:tabLst>
-                <a:tab algn="l" pos="0"/>
-              </a:tabLst>
-            </a:pPr>
-            <a:r>
-              <a:rPr b="0" lang="en-GB" sz="1200" strike="noStrike" u="none">
-                <a:solidFill>
-                  <a:schemeClr val="dk1">
-                    <a:tint val="75000"/>
-                  </a:schemeClr>
-                </a:solidFill>
-                <a:effectLst/>
-                <a:uFillTx/>
-                <a:latin typeface="Calibri"/>
-              </a:rPr>
-              <a:t>&lt;fecha/hora&gt;</a:t>
-            </a:r>
-            <a:endParaRPr b="0" lang="es-ES" sz="1200" strike="noStrike" u="none">
-              <a:solidFill>
-                <a:srgbClr val="000000"/>
-              </a:solidFill>
-              <a:effectLst/>
-              <a:uFillTx/>
-              <a:latin typeface="Times New Roman"/>
-            </a:endParaRPr>
-          </a:p>
-        </p:txBody>
-      </p:sp>
-      <p:sp>
-        <p:nvSpPr>
-          <p:cNvPr id="8" name="PlaceHolder 4"/>
-          <p:cNvSpPr>
-            <a:spLocks noGrp="1"/>
-          </p:cNvSpPr>
-          <p:nvPr>
-            <p:ph type="ftr" idx="5"/>
-          </p:nvPr>
-        </p:nvSpPr>
-        <p:spPr>
-          <a:xfrm>
-            <a:off x="4038480" y="6356520"/>
-            <a:ext cx="4113360" cy="363600"/>
-          </a:xfrm>
-          <a:prstGeom prst="rect">
-            <a:avLst/>
-          </a:prstGeom>
-          <a:noFill/>
-          <a:ln w="0">
-            <a:noFill/>
-          </a:ln>
-        </p:spPr>
-        <p:txBody>
-          <a:bodyPr lIns="91440" rIns="91440" tIns="45720" bIns="45720" anchor="ctr">
-            <a:noAutofit/>
-          </a:bodyPr>
-          <a:lstStyle>
-            <a:lvl1pPr indent="0" algn="ctr">
-              <a:lnSpc>
-                <a:spcPct val="100000"/>
-              </a:lnSpc>
-              <a:buNone/>
-              <a:tabLst>
-                <a:tab algn="l" pos="0"/>
-              </a:tabLst>
-              <a:defRPr b="0" lang="es-ES" sz="1400" strike="noStrike" u="none">
-                <a:solidFill>
-                  <a:srgbClr val="000000"/>
-                </a:solidFill>
-                <a:effectLst/>
-                <a:uFillTx/>
-                <a:latin typeface="Times New Roman"/>
-              </a:defRPr>
-            </a:lvl1pPr>
-          </a:lstStyle>
-          <a:p>
-            <a:pPr indent="0" algn="ctr">
-              <a:lnSpc>
-                <a:spcPct val="100000"/>
-              </a:lnSpc>
-              <a:buNone/>
-              <a:tabLst>
-                <a:tab algn="l" pos="0"/>
-              </a:tabLst>
-            </a:pPr>
-            <a:r>
-              <a:rPr b="0" lang="es-ES" sz="1400" strike="noStrike" u="none">
-                <a:solidFill>
-                  <a:srgbClr val="000000"/>
-                </a:solidFill>
-                <a:effectLst/>
-                <a:uFillTx/>
-                <a:latin typeface="Times New Roman"/>
-              </a:rPr>
-              <a:t>&lt;pie de página&gt;</a:t>
-            </a:r>
-            <a:endParaRPr b="0" lang="es-ES" sz="1400" strike="noStrike" u="none">
-              <a:solidFill>
-                <a:srgbClr val="000000"/>
-              </a:solidFill>
-              <a:effectLst/>
-              <a:uFillTx/>
-              <a:latin typeface="Times New Roman"/>
-            </a:endParaRPr>
-          </a:p>
-        </p:txBody>
-      </p:sp>
-      <p:sp>
-        <p:nvSpPr>
-          <p:cNvPr id="9" name="PlaceHolder 5"/>
-          <p:cNvSpPr>
-            <a:spLocks noGrp="1"/>
-          </p:cNvSpPr>
-          <p:nvPr>
-            <p:ph type="sldNum" idx="6"/>
-          </p:nvPr>
-        </p:nvSpPr>
-        <p:spPr>
-          <a:xfrm>
-            <a:off x="8610480" y="6356520"/>
-            <a:ext cx="2741760" cy="363600"/>
-          </a:xfrm>
-          <a:prstGeom prst="rect">
-            <a:avLst/>
-          </a:prstGeom>
-          <a:noFill/>
-          <a:ln w="0">
-            <a:noFill/>
-          </a:ln>
-        </p:spPr>
-        <p:txBody>
-          <a:bodyPr lIns="91440" rIns="91440" tIns="45720" bIns="45720" anchor="ctr">
-            <a:noAutofit/>
-          </a:bodyPr>
-          <a:lstStyle>
-            <a:lvl1pPr indent="0" algn="r" defTabSz="914400">
-              <a:lnSpc>
-                <a:spcPct val="100000"/>
-              </a:lnSpc>
-              <a:buNone/>
-              <a:tabLst>
-                <a:tab algn="l" pos="0"/>
-              </a:tabLst>
-              <a:defRPr b="0" lang="en-GB" sz="1200" strike="noStrike" u="none">
-                <a:solidFill>
-                  <a:schemeClr val="dk1">
-                    <a:tint val="75000"/>
-                  </a:schemeClr>
-                </a:solidFill>
-                <a:effectLst/>
-                <a:uFillTx/>
-                <a:latin typeface="Calibri"/>
-              </a:defRPr>
-            </a:lvl1pPr>
-          </a:lstStyle>
-          <a:p>
-            <a:pPr indent="0" algn="r" defTabSz="914400">
-              <a:lnSpc>
-                <a:spcPct val="100000"/>
-              </a:lnSpc>
-              <a:buNone/>
-              <a:tabLst>
-                <a:tab algn="l" pos="0"/>
-              </a:tabLst>
-            </a:pPr>
-            <a:fld id="{7086DC9F-97DB-4BA9-AB49-2D54F59184A8}" type="slidenum">
+            <a:fld id="{233D1468-CB98-4D76-A74D-478C0E70DD7C}" type="slidenum">
               <a:rPr b="0" lang="en-GB" sz="1200" strike="noStrike" u="none">
                 <a:solidFill>
                   <a:schemeClr val="dk1">
@@ -1930,8 +2204,8 @@
 </file>
 
 <file path=ppt/slideLayouts/slideLayout3.xml><?xml version="1.0" encoding="utf-8"?>
-<p:sldLayout xmlns:a="http://schemas.openxmlformats.org/drawingml/2006/main" xmlns:p="http://schemas.openxmlformats.org/presentationml/2006/main" xmlns:r="http://schemas.openxmlformats.org/officeDocument/2006/relationships" xmlns:p14="http://schemas.microsoft.com/office/powerpoint/2010/main" xmlns:p15="http://schemas.microsoft.com/office/powerpoint/2012/main" xmlns:mc="http://schemas.openxmlformats.org/markup-compatibility/2006" type="blank" preserve="1">
-  <p:cSld name="Encabezado de sección">
+<p:sldLayout xmlns:a="http://schemas.openxmlformats.org/drawingml/2006/main" xmlns:p="http://schemas.openxmlformats.org/presentationml/2006/main" xmlns:r="http://schemas.openxmlformats.org/officeDocument/2006/relationships" xmlns:p14="http://schemas.microsoft.com/office/powerpoint/2010/main" xmlns:p15="http://schemas.microsoft.com/office/powerpoint/2012/main" xmlns:mc="http://schemas.openxmlformats.org/markup-compatibility/2006" type="vertTx" preserve="1">
+  <p:cSld name="Título y texto vertical">
     <p:bg>
       <p:bgPr>
         <a:solidFill>
@@ -1965,8 +2239,8 @@
         </p:nvSpPr>
         <p:spPr>
           <a:xfrm>
-            <a:off x="831960" y="1709640"/>
-            <a:ext cx="10514160" cy="2851200"/>
+            <a:off x="838080" y="365040"/>
+            <a:ext cx="10513800" cy="1323720"/>
           </a:xfrm>
           <a:prstGeom prst="rect">
             <a:avLst/>
@@ -1977,7 +2251,7 @@
           </a:ln>
         </p:spPr>
         <p:txBody>
-          <a:bodyPr lIns="91440" rIns="91440" tIns="45720" bIns="45720" anchor="b">
+          <a:bodyPr lIns="91440" rIns="91440" tIns="45720" bIns="45720" anchor="ctr">
             <a:noAutofit/>
           </a:bodyPr>
           <a:p>
@@ -1991,7 +2265,7 @@
               </a:tabLst>
             </a:pPr>
             <a:r>
-              <a:rPr b="0" lang="es-ES" sz="6000" strike="noStrike" u="none">
+              <a:rPr b="0" lang="es-ES" sz="4400" strike="noStrike" u="none">
                 <a:solidFill>
                   <a:schemeClr val="dk1"/>
                 </a:solidFill>
@@ -2001,7 +2275,7 @@
               </a:rPr>
               <a:t>Haga clic para modificar el estilo de título del patrón</a:t>
             </a:r>
-            <a:endParaRPr b="0" lang="es-ES" sz="6000" strike="noStrike" u="none">
+            <a:endParaRPr b="0" lang="es-ES" sz="4400" strike="noStrike" u="none">
               <a:solidFill>
                 <a:srgbClr val="000000"/>
               </a:solidFill>
@@ -2024,8 +2298,8 @@
         </p:nvSpPr>
         <p:spPr>
           <a:xfrm>
-            <a:off x="831960" y="4589640"/>
-            <a:ext cx="10514160" cy="1498680"/>
+            <a:off x="838080" y="1825560"/>
+            <a:ext cx="10513800" cy="4349520"/>
           </a:xfrm>
           <a:prstGeom prst="rect">
             <a:avLst/>
@@ -2036,36 +2310,171 @@
           </a:ln>
         </p:spPr>
         <p:txBody>
-          <a:bodyPr lIns="91440" rIns="91440" tIns="45720" bIns="45720" anchor="t">
+          <a:bodyPr lIns="91440" rIns="91440" tIns="45720" bIns="45720" anchor="t" vert="eaVert">
             <a:noAutofit/>
           </a:bodyPr>
           <a:p>
-            <a:pPr indent="0" defTabSz="914400">
+            <a:pPr marL="228600" indent="-228600" defTabSz="914400">
               <a:lnSpc>
                 <a:spcPct val="90000"/>
               </a:lnSpc>
               <a:spcBef>
                 <a:spcPts val="1001"/>
               </a:spcBef>
-              <a:buNone/>
-              <a:tabLst>
-                <a:tab algn="l" pos="0"/>
-              </a:tabLst>
+              <a:buClr>
+                <a:srgbClr val="000000"/>
+              </a:buClr>
+              <a:buFont typeface="Arial"/>
+              <a:buChar char="•"/>
+            </a:pPr>
+            <a:r>
+              <a:rPr b="0" lang="es-ES" sz="2800" strike="noStrike" u="none">
+                <a:solidFill>
+                  <a:schemeClr val="dk1"/>
+                </a:solidFill>
+                <a:effectLst/>
+                <a:uFillTx/>
+                <a:latin typeface="Calibri"/>
+              </a:rPr>
+              <a:t>Haga clic para modificar los estilos de texto del patrón</a:t>
+            </a:r>
+            <a:endParaRPr b="0" lang="es-ES" sz="2800" strike="noStrike" u="none">
+              <a:solidFill>
+                <a:srgbClr val="000000"/>
+              </a:solidFill>
+              <a:effectLst/>
+              <a:uFillTx/>
+              <a:latin typeface="Arial"/>
+            </a:endParaRPr>
+          </a:p>
+          <a:p>
+            <a:pPr lvl="1" marL="685800" indent="-228600" defTabSz="914400">
+              <a:lnSpc>
+                <a:spcPct val="90000"/>
+              </a:lnSpc>
+              <a:spcBef>
+                <a:spcPts val="499"/>
+              </a:spcBef>
+              <a:buClr>
+                <a:srgbClr val="000000"/>
+              </a:buClr>
+              <a:buFont typeface="Arial"/>
+              <a:buChar char="•"/>
             </a:pPr>
             <a:r>
               <a:rPr b="0" lang="es-ES" sz="2400" strike="noStrike" u="none">
                 <a:solidFill>
-                  <a:schemeClr val="dk1">
-                    <a:tint val="75000"/>
-                  </a:schemeClr>
-                </a:solidFill>
-                <a:effectLst/>
-                <a:uFillTx/>
-                <a:latin typeface="Calibri"/>
-              </a:rPr>
-              <a:t>Haga clic para modificar los estilos de texto del patrón</a:t>
+                  <a:schemeClr val="dk1"/>
+                </a:solidFill>
+                <a:effectLst/>
+                <a:uFillTx/>
+                <a:latin typeface="Calibri"/>
+              </a:rPr>
+              <a:t>Segundo nivel</a:t>
             </a:r>
             <a:endParaRPr b="0" lang="es-ES" sz="2400" strike="noStrike" u="none">
+              <a:solidFill>
+                <a:srgbClr val="000000"/>
+              </a:solidFill>
+              <a:effectLst/>
+              <a:uFillTx/>
+              <a:latin typeface="Arial"/>
+            </a:endParaRPr>
+          </a:p>
+          <a:p>
+            <a:pPr lvl="2" marL="1143000" indent="-228600" defTabSz="914400">
+              <a:lnSpc>
+                <a:spcPct val="90000"/>
+              </a:lnSpc>
+              <a:spcBef>
+                <a:spcPts val="499"/>
+              </a:spcBef>
+              <a:buClr>
+                <a:srgbClr val="000000"/>
+              </a:buClr>
+              <a:buFont typeface="Arial"/>
+              <a:buChar char="•"/>
+            </a:pPr>
+            <a:r>
+              <a:rPr b="0" lang="es-ES" sz="2000" strike="noStrike" u="none">
+                <a:solidFill>
+                  <a:schemeClr val="dk1"/>
+                </a:solidFill>
+                <a:effectLst/>
+                <a:uFillTx/>
+                <a:latin typeface="Calibri"/>
+              </a:rPr>
+              <a:t>Tercer nivel</a:t>
+            </a:r>
+            <a:endParaRPr b="0" lang="es-ES" sz="2000" strike="noStrike" u="none">
+              <a:solidFill>
+                <a:srgbClr val="000000"/>
+              </a:solidFill>
+              <a:effectLst/>
+              <a:uFillTx/>
+              <a:latin typeface="Arial"/>
+            </a:endParaRPr>
+          </a:p>
+          <a:p>
+            <a:pPr lvl="3" marL="1600200" indent="-228600" defTabSz="914400">
+              <a:lnSpc>
+                <a:spcPct val="90000"/>
+              </a:lnSpc>
+              <a:spcBef>
+                <a:spcPts val="499"/>
+              </a:spcBef>
+              <a:buClr>
+                <a:srgbClr val="000000"/>
+              </a:buClr>
+              <a:buFont typeface="Arial"/>
+              <a:buChar char="•"/>
+            </a:pPr>
+            <a:r>
+              <a:rPr b="0" lang="es-ES" sz="1800" strike="noStrike" u="none">
+                <a:solidFill>
+                  <a:schemeClr val="dk1"/>
+                </a:solidFill>
+                <a:effectLst/>
+                <a:uFillTx/>
+                <a:latin typeface="Calibri"/>
+              </a:rPr>
+              <a:t>Cuarto nivel</a:t>
+            </a:r>
+            <a:endParaRPr b="0" lang="es-ES" sz="1800" strike="noStrike" u="none">
+              <a:solidFill>
+                <a:srgbClr val="000000"/>
+              </a:solidFill>
+              <a:effectLst/>
+              <a:uFillTx/>
+              <a:latin typeface="Arial"/>
+            </a:endParaRPr>
+          </a:p>
+          <a:p>
+            <a:pPr lvl="4" marL="2057400" indent="-228600" defTabSz="914400">
+              <a:lnSpc>
+                <a:spcPct val="90000"/>
+              </a:lnSpc>
+              <a:spcBef>
+                <a:spcPts val="499"/>
+              </a:spcBef>
+              <a:buClr>
+                <a:srgbClr val="000000"/>
+              </a:buClr>
+              <a:buFont typeface="Arial"/>
+              <a:buChar char="•"/>
+            </a:pPr>
+            <a:r>
+              <a:rPr b="0" lang="es-ES" sz="1800" strike="noStrike" u="none">
+                <a:solidFill>
+                  <a:schemeClr val="dk1"/>
+                </a:solidFill>
+                <a:effectLst/>
+                <a:uFillTx/>
+                <a:latin typeface="Calibri"/>
+              </a:rPr>
+              <a:t>Quinto nivel</a:t>
+            </a:r>
+            <a:endParaRPr b="0" lang="es-ES" sz="1800" strike="noStrike" u="none">
               <a:solidFill>
                 <a:srgbClr val="000000"/>
               </a:solidFill>
@@ -2089,7 +2498,7 @@
         <p:spPr>
           <a:xfrm>
             <a:off x="838080" y="6356520"/>
-            <a:ext cx="2741760" cy="363600"/>
+            <a:ext cx="2741400" cy="363240"/>
           </a:xfrm>
           <a:prstGeom prst="rect">
             <a:avLst/>
@@ -2171,7 +2580,7 @@
         <p:spPr>
           <a:xfrm>
             <a:off x="4038480" y="6356520"/>
-            <a:ext cx="4113360" cy="363600"/>
+            <a:ext cx="4113000" cy="363240"/>
           </a:xfrm>
           <a:prstGeom prst="rect">
             <a:avLst/>
@@ -2249,7 +2658,7 @@
         <p:spPr>
           <a:xfrm>
             <a:off x="8610480" y="6356520"/>
-            <a:ext cx="2741760" cy="363600"/>
+            <a:ext cx="2741400" cy="363240"/>
           </a:xfrm>
           <a:prstGeom prst="rect">
             <a:avLst/>
@@ -2294,7 +2703,7 @@
                 <a:tab algn="l" pos="0"/>
               </a:tabLst>
             </a:pPr>
-            <a:fld id="{7E49E0AB-CDFE-40D2-9907-7BB164A4BA32}" type="slidenum">
+            <a:fld id="{515C74DF-2161-48AA-828D-1A8459AD8708}" type="slidenum">
               <a:rPr b="0" lang="en-GB" sz="1200" strike="noStrike" u="none">
                 <a:solidFill>
                   <a:schemeClr val="dk1">
@@ -2324,8 +2733,8 @@
 </file>
 
 <file path=ppt/slideLayouts/slideLayout4.xml><?xml version="1.0" encoding="utf-8"?>
-<p:sldLayout xmlns:a="http://schemas.openxmlformats.org/drawingml/2006/main" xmlns:p="http://schemas.openxmlformats.org/presentationml/2006/main" xmlns:r="http://schemas.openxmlformats.org/officeDocument/2006/relationships" xmlns:p14="http://schemas.microsoft.com/office/powerpoint/2010/main" xmlns:p15="http://schemas.microsoft.com/office/powerpoint/2012/main" xmlns:mc="http://schemas.openxmlformats.org/markup-compatibility/2006" type="twoObj" preserve="1">
-  <p:cSld name="Dos objetos">
+<p:sldLayout xmlns:a="http://schemas.openxmlformats.org/drawingml/2006/main" xmlns:p="http://schemas.openxmlformats.org/presentationml/2006/main" xmlns:r="http://schemas.openxmlformats.org/officeDocument/2006/relationships" xmlns:p14="http://schemas.microsoft.com/office/powerpoint/2010/main" xmlns:p15="http://schemas.microsoft.com/office/powerpoint/2012/main" xmlns:mc="http://schemas.openxmlformats.org/markup-compatibility/2006" type="vertTitleAndTx" preserve="1">
+  <p:cSld name="Título vertical y texto">
     <p:bg>
       <p:bgPr>
         <a:solidFill>
@@ -2359,8 +2768,8 @@
         </p:nvSpPr>
         <p:spPr>
           <a:xfrm>
-            <a:off x="838080" y="365040"/>
-            <a:ext cx="10514160" cy="1324080"/>
+            <a:off x="8724960" y="365040"/>
+            <a:ext cx="2627280" cy="5810040"/>
           </a:xfrm>
           <a:prstGeom prst="rect">
             <a:avLst/>
@@ -2371,7 +2780,7 @@
           </a:ln>
         </p:spPr>
         <p:txBody>
-          <a:bodyPr lIns="91440" rIns="91440" tIns="45720" bIns="45720" anchor="ctr">
+          <a:bodyPr lIns="91440" rIns="91440" tIns="45720" bIns="45720" anchor="ctr" vert="eaVert">
             <a:noAutofit/>
           </a:bodyPr>
           <a:p>
@@ -2418,8 +2827,8 @@
         </p:nvSpPr>
         <p:spPr>
           <a:xfrm>
-            <a:off x="838080" y="1825560"/>
-            <a:ext cx="5180040" cy="4349880"/>
+            <a:off x="838080" y="365040"/>
+            <a:ext cx="7732440" cy="5810040"/>
           </a:xfrm>
           <a:prstGeom prst="rect">
             <a:avLst/>
@@ -2430,7 +2839,7 @@
           </a:ln>
         </p:spPr>
         <p:txBody>
-          <a:bodyPr lIns="91440" rIns="91440" tIns="45720" bIns="45720" anchor="t">
+          <a:bodyPr lIns="91440" rIns="91440" tIns="45720" bIns="45720" anchor="t" vert="eaVert">
             <a:noAutofit/>
           </a:bodyPr>
           <a:p>
@@ -2608,205 +3017,6 @@
       <p:sp>
         <p:nvSpPr>
           <p:cNvPr id="17" name="PlaceHolder 3"/>
-          <p:cNvSpPr>
-            <a:spLocks noGrp="1"/>
-          </p:cNvSpPr>
-          <p:nvPr>
-            <p:ph type="body"/>
-          </p:nvPr>
-        </p:nvSpPr>
-        <p:spPr>
-          <a:xfrm>
-            <a:off x="6172200" y="1825560"/>
-            <a:ext cx="5180040" cy="4349880"/>
-          </a:xfrm>
-          <a:prstGeom prst="rect">
-            <a:avLst/>
-          </a:prstGeom>
-          <a:noFill/>
-          <a:ln w="0">
-            <a:noFill/>
-          </a:ln>
-        </p:spPr>
-        <p:txBody>
-          <a:bodyPr lIns="91440" rIns="91440" tIns="45720" bIns="45720" anchor="t">
-            <a:noAutofit/>
-          </a:bodyPr>
-          <a:p>
-            <a:pPr marL="228600" indent="-228600" defTabSz="914400">
-              <a:lnSpc>
-                <a:spcPct val="90000"/>
-              </a:lnSpc>
-              <a:spcBef>
-                <a:spcPts val="1001"/>
-              </a:spcBef>
-              <a:buClr>
-                <a:srgbClr val="000000"/>
-              </a:buClr>
-              <a:buFont typeface="Arial"/>
-              <a:buChar char="•"/>
-            </a:pPr>
-            <a:r>
-              <a:rPr b="0" lang="es-ES" sz="2800" strike="noStrike" u="none">
-                <a:solidFill>
-                  <a:schemeClr val="dk1"/>
-                </a:solidFill>
-                <a:effectLst/>
-                <a:uFillTx/>
-                <a:latin typeface="Calibri"/>
-              </a:rPr>
-              <a:t>Haga clic para modificar los estilos de texto del patrón</a:t>
-            </a:r>
-            <a:endParaRPr b="0" lang="es-ES" sz="2800" strike="noStrike" u="none">
-              <a:solidFill>
-                <a:srgbClr val="000000"/>
-              </a:solidFill>
-              <a:effectLst/>
-              <a:uFillTx/>
-              <a:latin typeface="Arial"/>
-            </a:endParaRPr>
-          </a:p>
-          <a:p>
-            <a:pPr lvl="1" marL="685800" indent="-228600" defTabSz="914400">
-              <a:lnSpc>
-                <a:spcPct val="90000"/>
-              </a:lnSpc>
-              <a:spcBef>
-                <a:spcPts val="499"/>
-              </a:spcBef>
-              <a:buClr>
-                <a:srgbClr val="000000"/>
-              </a:buClr>
-              <a:buFont typeface="Arial"/>
-              <a:buChar char="•"/>
-            </a:pPr>
-            <a:r>
-              <a:rPr b="0" lang="es-ES" sz="2400" strike="noStrike" u="none">
-                <a:solidFill>
-                  <a:schemeClr val="dk1"/>
-                </a:solidFill>
-                <a:effectLst/>
-                <a:uFillTx/>
-                <a:latin typeface="Calibri"/>
-              </a:rPr>
-              <a:t>Segundo nivel</a:t>
-            </a:r>
-            <a:endParaRPr b="0" lang="es-ES" sz="2400" strike="noStrike" u="none">
-              <a:solidFill>
-                <a:srgbClr val="000000"/>
-              </a:solidFill>
-              <a:effectLst/>
-              <a:uFillTx/>
-              <a:latin typeface="Arial"/>
-            </a:endParaRPr>
-          </a:p>
-          <a:p>
-            <a:pPr lvl="2" marL="1143000" indent="-228600" defTabSz="914400">
-              <a:lnSpc>
-                <a:spcPct val="90000"/>
-              </a:lnSpc>
-              <a:spcBef>
-                <a:spcPts val="499"/>
-              </a:spcBef>
-              <a:buClr>
-                <a:srgbClr val="000000"/>
-              </a:buClr>
-              <a:buFont typeface="Arial"/>
-              <a:buChar char="•"/>
-            </a:pPr>
-            <a:r>
-              <a:rPr b="0" lang="es-ES" sz="2000" strike="noStrike" u="none">
-                <a:solidFill>
-                  <a:schemeClr val="dk1"/>
-                </a:solidFill>
-                <a:effectLst/>
-                <a:uFillTx/>
-                <a:latin typeface="Calibri"/>
-              </a:rPr>
-              <a:t>Tercer nivel</a:t>
-            </a:r>
-            <a:endParaRPr b="0" lang="es-ES" sz="2000" strike="noStrike" u="none">
-              <a:solidFill>
-                <a:srgbClr val="000000"/>
-              </a:solidFill>
-              <a:effectLst/>
-              <a:uFillTx/>
-              <a:latin typeface="Arial"/>
-            </a:endParaRPr>
-          </a:p>
-          <a:p>
-            <a:pPr lvl="3" marL="1600200" indent="-228600" defTabSz="914400">
-              <a:lnSpc>
-                <a:spcPct val="90000"/>
-              </a:lnSpc>
-              <a:spcBef>
-                <a:spcPts val="499"/>
-              </a:spcBef>
-              <a:buClr>
-                <a:srgbClr val="000000"/>
-              </a:buClr>
-              <a:buFont typeface="Arial"/>
-              <a:buChar char="•"/>
-            </a:pPr>
-            <a:r>
-              <a:rPr b="0" lang="es-ES" sz="1800" strike="noStrike" u="none">
-                <a:solidFill>
-                  <a:schemeClr val="dk1"/>
-                </a:solidFill>
-                <a:effectLst/>
-                <a:uFillTx/>
-                <a:latin typeface="Calibri"/>
-              </a:rPr>
-              <a:t>Cuarto nivel</a:t>
-            </a:r>
-            <a:endParaRPr b="0" lang="es-ES" sz="1800" strike="noStrike" u="none">
-              <a:solidFill>
-                <a:srgbClr val="000000"/>
-              </a:solidFill>
-              <a:effectLst/>
-              <a:uFillTx/>
-              <a:latin typeface="Arial"/>
-            </a:endParaRPr>
-          </a:p>
-          <a:p>
-            <a:pPr lvl="4" marL="2057400" indent="-228600" defTabSz="914400">
-              <a:lnSpc>
-                <a:spcPct val="90000"/>
-              </a:lnSpc>
-              <a:spcBef>
-                <a:spcPts val="499"/>
-              </a:spcBef>
-              <a:buClr>
-                <a:srgbClr val="000000"/>
-              </a:buClr>
-              <a:buFont typeface="Arial"/>
-              <a:buChar char="•"/>
-            </a:pPr>
-            <a:r>
-              <a:rPr b="0" lang="es-ES" sz="1800" strike="noStrike" u="none">
-                <a:solidFill>
-                  <a:schemeClr val="dk1"/>
-                </a:solidFill>
-                <a:effectLst/>
-                <a:uFillTx/>
-                <a:latin typeface="Calibri"/>
-              </a:rPr>
-              <a:t>Quinto nivel</a:t>
-            </a:r>
-            <a:endParaRPr b="0" lang="es-ES" sz="1800" strike="noStrike" u="none">
-              <a:solidFill>
-                <a:srgbClr val="000000"/>
-              </a:solidFill>
-              <a:effectLst/>
-              <a:uFillTx/>
-              <a:latin typeface="Arial"/>
-            </a:endParaRPr>
-          </a:p>
-        </p:txBody>
-      </p:sp>
-      <p:sp>
-        <p:nvSpPr>
-          <p:cNvPr id="18" name="PlaceHolder 4"/>
           <p:cNvSpPr>
             <a:spLocks noGrp="1"/>
           </p:cNvSpPr>
@@ -2817,7 +3027,7 @@
         <p:spPr>
           <a:xfrm>
             <a:off x="838080" y="6356520"/>
-            <a:ext cx="2741760" cy="363600"/>
+            <a:ext cx="2741400" cy="363240"/>
           </a:xfrm>
           <a:prstGeom prst="rect">
             <a:avLst/>
@@ -2888,7 +3098,7 @@
       </p:sp>
       <p:sp>
         <p:nvSpPr>
-          <p:cNvPr id="19" name="PlaceHolder 5"/>
+          <p:cNvPr id="18" name="PlaceHolder 4"/>
           <p:cNvSpPr>
             <a:spLocks noGrp="1"/>
           </p:cNvSpPr>
@@ -2899,7 +3109,7 @@
         <p:spPr>
           <a:xfrm>
             <a:off x="4038480" y="6356520"/>
-            <a:ext cx="4113360" cy="363600"/>
+            <a:ext cx="4113000" cy="363240"/>
           </a:xfrm>
           <a:prstGeom prst="rect">
             <a:avLst/>
@@ -2966,7 +3176,7 @@
       </p:sp>
       <p:sp>
         <p:nvSpPr>
-          <p:cNvPr id="20" name="PlaceHolder 6"/>
+          <p:cNvPr id="19" name="PlaceHolder 5"/>
           <p:cNvSpPr>
             <a:spLocks noGrp="1"/>
           </p:cNvSpPr>
@@ -2977,7 +3187,7 @@
         <p:spPr>
           <a:xfrm>
             <a:off x="8610480" y="6356520"/>
-            <a:ext cx="2741760" cy="363600"/>
+            <a:ext cx="2741400" cy="363240"/>
           </a:xfrm>
           <a:prstGeom prst="rect">
             <a:avLst/>
@@ -3022,7 +3232,7 @@
                 <a:tab algn="l" pos="0"/>
               </a:tabLst>
             </a:pPr>
-            <a:fld id="{3E7137A3-4C73-4BAA-8CF9-6456B617DEBE}" type="slidenum">
+            <a:fld id="{352BCFAF-D7AC-49F7-9A88-53BC77322D4C}" type="slidenum">
               <a:rPr b="0" lang="en-GB" sz="1200" strike="noStrike" u="none">
                 <a:solidFill>
                   <a:schemeClr val="dk1">
@@ -3052,6 +3262,1657 @@
 </file>
 
 <file path=ppt/slideLayouts/slideLayout5.xml><?xml version="1.0" encoding="utf-8"?>
+<p:sldLayout xmlns:a="http://schemas.openxmlformats.org/drawingml/2006/main" xmlns:p="http://schemas.openxmlformats.org/presentationml/2006/main" xmlns:r="http://schemas.openxmlformats.org/officeDocument/2006/relationships" xmlns:p14="http://schemas.microsoft.com/office/powerpoint/2010/main" xmlns:p15="http://schemas.microsoft.com/office/powerpoint/2012/main" xmlns:mc="http://schemas.openxmlformats.org/markup-compatibility/2006" type="obj" preserve="1">
+  <p:cSld name="Título y objetos">
+    <p:bg>
+      <p:bgPr>
+        <a:solidFill>
+          <a:srgbClr val="ffffff"/>
+        </a:solidFill>
+      </p:bgPr>
+    </p:bg>
+    <p:spTree>
+      <p:nvGrpSpPr>
+        <p:cNvPr id="1" name=""/>
+        <p:cNvGrpSpPr/>
+        <p:nvPr/>
+      </p:nvGrpSpPr>
+      <p:grpSpPr>
+        <a:xfrm>
+          <a:off x="0" y="0"/>
+          <a:ext cx="0" cy="0"/>
+          <a:chOff x="0" y="0"/>
+          <a:chExt cx="0" cy="0"/>
+        </a:xfrm>
+      </p:grpSpPr>
+      <p:sp>
+        <p:nvSpPr>
+          <p:cNvPr id="20" name="PlaceHolder 1"/>
+          <p:cNvSpPr>
+            <a:spLocks noGrp="1"/>
+          </p:cNvSpPr>
+          <p:nvPr>
+            <p:ph type="title"/>
+          </p:nvPr>
+        </p:nvSpPr>
+        <p:spPr>
+          <a:xfrm>
+            <a:off x="838080" y="365040"/>
+            <a:ext cx="10513800" cy="1323720"/>
+          </a:xfrm>
+          <a:prstGeom prst="rect">
+            <a:avLst/>
+          </a:prstGeom>
+          <a:noFill/>
+          <a:ln w="0">
+            <a:noFill/>
+          </a:ln>
+        </p:spPr>
+        <p:txBody>
+          <a:bodyPr lIns="91440" rIns="91440" tIns="45720" bIns="45720" anchor="ctr">
+            <a:noAutofit/>
+          </a:bodyPr>
+          <a:p>
+            <a:pPr indent="0" defTabSz="914400">
+              <a:lnSpc>
+                <a:spcPct val="90000"/>
+              </a:lnSpc>
+              <a:buNone/>
+              <a:tabLst>
+                <a:tab algn="l" pos="0"/>
+              </a:tabLst>
+            </a:pPr>
+            <a:r>
+              <a:rPr b="0" lang="es-ES" sz="4400" strike="noStrike" u="none">
+                <a:solidFill>
+                  <a:schemeClr val="dk1"/>
+                </a:solidFill>
+                <a:effectLst/>
+                <a:uFillTx/>
+                <a:latin typeface="Calibri Light"/>
+              </a:rPr>
+              <a:t>Haga clic para modificar el estilo de título del patrón</a:t>
+            </a:r>
+            <a:endParaRPr b="0" lang="es-ES" sz="4400" strike="noStrike" u="none">
+              <a:solidFill>
+                <a:srgbClr val="000000"/>
+              </a:solidFill>
+              <a:effectLst/>
+              <a:uFillTx/>
+              <a:latin typeface="Arial"/>
+            </a:endParaRPr>
+          </a:p>
+        </p:txBody>
+      </p:sp>
+      <p:sp>
+        <p:nvSpPr>
+          <p:cNvPr id="21" name="PlaceHolder 2"/>
+          <p:cNvSpPr>
+            <a:spLocks noGrp="1"/>
+          </p:cNvSpPr>
+          <p:nvPr>
+            <p:ph type="body"/>
+          </p:nvPr>
+        </p:nvSpPr>
+        <p:spPr>
+          <a:xfrm>
+            <a:off x="838080" y="1825560"/>
+            <a:ext cx="10513800" cy="4349520"/>
+          </a:xfrm>
+          <a:prstGeom prst="rect">
+            <a:avLst/>
+          </a:prstGeom>
+          <a:noFill/>
+          <a:ln w="0">
+            <a:noFill/>
+          </a:ln>
+        </p:spPr>
+        <p:txBody>
+          <a:bodyPr lIns="91440" rIns="91440" tIns="45720" bIns="45720" anchor="t">
+            <a:noAutofit/>
+          </a:bodyPr>
+          <a:p>
+            <a:pPr marL="228600" indent="-228600" defTabSz="914400">
+              <a:lnSpc>
+                <a:spcPct val="90000"/>
+              </a:lnSpc>
+              <a:spcBef>
+                <a:spcPts val="1001"/>
+              </a:spcBef>
+              <a:buClr>
+                <a:srgbClr val="000000"/>
+              </a:buClr>
+              <a:buFont typeface="Arial"/>
+              <a:buChar char="•"/>
+            </a:pPr>
+            <a:r>
+              <a:rPr b="0" lang="es-ES" sz="2800" strike="noStrike" u="none">
+                <a:solidFill>
+                  <a:schemeClr val="dk1"/>
+                </a:solidFill>
+                <a:effectLst/>
+                <a:uFillTx/>
+                <a:latin typeface="Calibri"/>
+              </a:rPr>
+              <a:t>Haga clic para modificar los estilos de texto del patrón</a:t>
+            </a:r>
+            <a:endParaRPr b="0" lang="es-ES" sz="2800" strike="noStrike" u="none">
+              <a:solidFill>
+                <a:srgbClr val="000000"/>
+              </a:solidFill>
+              <a:effectLst/>
+              <a:uFillTx/>
+              <a:latin typeface="Arial"/>
+            </a:endParaRPr>
+          </a:p>
+          <a:p>
+            <a:pPr lvl="1" marL="685800" indent="-228600" defTabSz="914400">
+              <a:lnSpc>
+                <a:spcPct val="90000"/>
+              </a:lnSpc>
+              <a:spcBef>
+                <a:spcPts val="499"/>
+              </a:spcBef>
+              <a:buClr>
+                <a:srgbClr val="000000"/>
+              </a:buClr>
+              <a:buFont typeface="Arial"/>
+              <a:buChar char="•"/>
+            </a:pPr>
+            <a:r>
+              <a:rPr b="0" lang="es-ES" sz="2400" strike="noStrike" u="none">
+                <a:solidFill>
+                  <a:schemeClr val="dk1"/>
+                </a:solidFill>
+                <a:effectLst/>
+                <a:uFillTx/>
+                <a:latin typeface="Calibri"/>
+              </a:rPr>
+              <a:t>Segundo nivel</a:t>
+            </a:r>
+            <a:endParaRPr b="0" lang="es-ES" sz="2400" strike="noStrike" u="none">
+              <a:solidFill>
+                <a:srgbClr val="000000"/>
+              </a:solidFill>
+              <a:effectLst/>
+              <a:uFillTx/>
+              <a:latin typeface="Arial"/>
+            </a:endParaRPr>
+          </a:p>
+          <a:p>
+            <a:pPr lvl="2" marL="1143000" indent="-228600" defTabSz="914400">
+              <a:lnSpc>
+                <a:spcPct val="90000"/>
+              </a:lnSpc>
+              <a:spcBef>
+                <a:spcPts val="499"/>
+              </a:spcBef>
+              <a:buClr>
+                <a:srgbClr val="000000"/>
+              </a:buClr>
+              <a:buFont typeface="Arial"/>
+              <a:buChar char="•"/>
+            </a:pPr>
+            <a:r>
+              <a:rPr b="0" lang="es-ES" sz="2000" strike="noStrike" u="none">
+                <a:solidFill>
+                  <a:schemeClr val="dk1"/>
+                </a:solidFill>
+                <a:effectLst/>
+                <a:uFillTx/>
+                <a:latin typeface="Calibri"/>
+              </a:rPr>
+              <a:t>Tercer nivel</a:t>
+            </a:r>
+            <a:endParaRPr b="0" lang="es-ES" sz="2000" strike="noStrike" u="none">
+              <a:solidFill>
+                <a:srgbClr val="000000"/>
+              </a:solidFill>
+              <a:effectLst/>
+              <a:uFillTx/>
+              <a:latin typeface="Arial"/>
+            </a:endParaRPr>
+          </a:p>
+          <a:p>
+            <a:pPr lvl="3" marL="1600200" indent="-228600" defTabSz="914400">
+              <a:lnSpc>
+                <a:spcPct val="90000"/>
+              </a:lnSpc>
+              <a:spcBef>
+                <a:spcPts val="499"/>
+              </a:spcBef>
+              <a:buClr>
+                <a:srgbClr val="000000"/>
+              </a:buClr>
+              <a:buFont typeface="Arial"/>
+              <a:buChar char="•"/>
+            </a:pPr>
+            <a:r>
+              <a:rPr b="0" lang="es-ES" sz="1800" strike="noStrike" u="none">
+                <a:solidFill>
+                  <a:schemeClr val="dk1"/>
+                </a:solidFill>
+                <a:effectLst/>
+                <a:uFillTx/>
+                <a:latin typeface="Calibri"/>
+              </a:rPr>
+              <a:t>Cuarto nivel</a:t>
+            </a:r>
+            <a:endParaRPr b="0" lang="es-ES" sz="1800" strike="noStrike" u="none">
+              <a:solidFill>
+                <a:srgbClr val="000000"/>
+              </a:solidFill>
+              <a:effectLst/>
+              <a:uFillTx/>
+              <a:latin typeface="Arial"/>
+            </a:endParaRPr>
+          </a:p>
+          <a:p>
+            <a:pPr lvl="4" marL="2057400" indent="-228600" defTabSz="914400">
+              <a:lnSpc>
+                <a:spcPct val="90000"/>
+              </a:lnSpc>
+              <a:spcBef>
+                <a:spcPts val="499"/>
+              </a:spcBef>
+              <a:buClr>
+                <a:srgbClr val="000000"/>
+              </a:buClr>
+              <a:buFont typeface="Arial"/>
+              <a:buChar char="•"/>
+            </a:pPr>
+            <a:r>
+              <a:rPr b="0" lang="es-ES" sz="1800" strike="noStrike" u="none">
+                <a:solidFill>
+                  <a:schemeClr val="dk1"/>
+                </a:solidFill>
+                <a:effectLst/>
+                <a:uFillTx/>
+                <a:latin typeface="Calibri"/>
+              </a:rPr>
+              <a:t>Quinto nivel</a:t>
+            </a:r>
+            <a:endParaRPr b="0" lang="es-ES" sz="1800" strike="noStrike" u="none">
+              <a:solidFill>
+                <a:srgbClr val="000000"/>
+              </a:solidFill>
+              <a:effectLst/>
+              <a:uFillTx/>
+              <a:latin typeface="Arial"/>
+            </a:endParaRPr>
+          </a:p>
+        </p:txBody>
+      </p:sp>
+      <p:sp>
+        <p:nvSpPr>
+          <p:cNvPr id="22" name="PlaceHolder 3"/>
+          <p:cNvSpPr>
+            <a:spLocks noGrp="1"/>
+          </p:cNvSpPr>
+          <p:nvPr>
+            <p:ph type="dt" idx="13"/>
+          </p:nvPr>
+        </p:nvSpPr>
+        <p:spPr>
+          <a:xfrm>
+            <a:off x="838080" y="6356520"/>
+            <a:ext cx="2741400" cy="363240"/>
+          </a:xfrm>
+          <a:prstGeom prst="rect">
+            <a:avLst/>
+          </a:prstGeom>
+          <a:noFill/>
+          <a:ln w="0">
+            <a:noFill/>
+          </a:ln>
+        </p:spPr>
+        <p:txBody>
+          <a:bodyPr lIns="91440" rIns="91440" tIns="45720" bIns="45720" anchor="ctr">
+            <a:noAutofit/>
+          </a:bodyPr>
+          <a:lstStyle>
+            <a:lvl1pPr indent="0" defTabSz="914400">
+              <a:lnSpc>
+                <a:spcPct val="100000"/>
+              </a:lnSpc>
+              <a:buNone/>
+              <a:tabLst>
+                <a:tab algn="l" pos="0"/>
+              </a:tabLst>
+              <a:defRPr b="0" lang="en-GB" sz="1200" strike="noStrike" u="none">
+                <a:solidFill>
+                  <a:schemeClr val="dk1">
+                    <a:tint val="75000"/>
+                  </a:schemeClr>
+                </a:solidFill>
+                <a:effectLst/>
+                <a:uFillTx/>
+                <a:latin typeface="Calibri"/>
+              </a:defRPr>
+            </a:lvl1pPr>
+          </a:lstStyle>
+          <a:p>
+            <a:pPr indent="0" defTabSz="914400">
+              <a:lnSpc>
+                <a:spcPct val="100000"/>
+              </a:lnSpc>
+              <a:buNone/>
+              <a:tabLst>
+                <a:tab algn="l" pos="0"/>
+              </a:tabLst>
+            </a:pPr>
+            <a:r>
+              <a:rPr b="0" lang="en-GB" sz="1200" strike="noStrike" u="none">
+                <a:solidFill>
+                  <a:schemeClr val="dk1">
+                    <a:tint val="75000"/>
+                  </a:schemeClr>
+                </a:solidFill>
+                <a:effectLst/>
+                <a:uFillTx/>
+                <a:latin typeface="Calibri"/>
+              </a:rPr>
+              <a:t>&lt;fecha/hora&gt;</a:t>
+            </a:r>
+            <a:endParaRPr b="0" lang="es-ES" sz="1200" strike="noStrike" u="none">
+              <a:solidFill>
+                <a:srgbClr val="000000"/>
+              </a:solidFill>
+              <a:effectLst/>
+              <a:uFillTx/>
+              <a:latin typeface="Times New Roman"/>
+            </a:endParaRPr>
+          </a:p>
+        </p:txBody>
+      </p:sp>
+      <p:sp>
+        <p:nvSpPr>
+          <p:cNvPr id="23" name="PlaceHolder 4"/>
+          <p:cNvSpPr>
+            <a:spLocks noGrp="1"/>
+          </p:cNvSpPr>
+          <p:nvPr>
+            <p:ph type="ftr" idx="14"/>
+          </p:nvPr>
+        </p:nvSpPr>
+        <p:spPr>
+          <a:xfrm>
+            <a:off x="4038480" y="6356520"/>
+            <a:ext cx="4113000" cy="363240"/>
+          </a:xfrm>
+          <a:prstGeom prst="rect">
+            <a:avLst/>
+          </a:prstGeom>
+          <a:noFill/>
+          <a:ln w="0">
+            <a:noFill/>
+          </a:ln>
+        </p:spPr>
+        <p:txBody>
+          <a:bodyPr lIns="91440" rIns="91440" tIns="45720" bIns="45720" anchor="ctr">
+            <a:noAutofit/>
+          </a:bodyPr>
+          <a:lstStyle>
+            <a:lvl1pPr indent="0" algn="ctr">
+              <a:lnSpc>
+                <a:spcPct val="100000"/>
+              </a:lnSpc>
+              <a:buNone/>
+              <a:tabLst>
+                <a:tab algn="l" pos="0"/>
+              </a:tabLst>
+              <a:defRPr b="0" lang="es-ES" sz="1400" strike="noStrike" u="none">
+                <a:solidFill>
+                  <a:srgbClr val="000000"/>
+                </a:solidFill>
+                <a:effectLst/>
+                <a:uFillTx/>
+                <a:latin typeface="Times New Roman"/>
+              </a:defRPr>
+            </a:lvl1pPr>
+          </a:lstStyle>
+          <a:p>
+            <a:pPr indent="0" algn="ctr">
+              <a:lnSpc>
+                <a:spcPct val="100000"/>
+              </a:lnSpc>
+              <a:buNone/>
+              <a:tabLst>
+                <a:tab algn="l" pos="0"/>
+              </a:tabLst>
+            </a:pPr>
+            <a:r>
+              <a:rPr b="0" lang="es-ES" sz="1400" strike="noStrike" u="none">
+                <a:solidFill>
+                  <a:srgbClr val="000000"/>
+                </a:solidFill>
+                <a:effectLst/>
+                <a:uFillTx/>
+                <a:latin typeface="Times New Roman"/>
+              </a:rPr>
+              <a:t>&lt;pie de página&gt;</a:t>
+            </a:r>
+            <a:endParaRPr b="0" lang="es-ES" sz="1400" strike="noStrike" u="none">
+              <a:solidFill>
+                <a:srgbClr val="000000"/>
+              </a:solidFill>
+              <a:effectLst/>
+              <a:uFillTx/>
+              <a:latin typeface="Times New Roman"/>
+            </a:endParaRPr>
+          </a:p>
+        </p:txBody>
+      </p:sp>
+      <p:sp>
+        <p:nvSpPr>
+          <p:cNvPr id="24" name="PlaceHolder 5"/>
+          <p:cNvSpPr>
+            <a:spLocks noGrp="1"/>
+          </p:cNvSpPr>
+          <p:nvPr>
+            <p:ph type="sldNum" idx="15"/>
+          </p:nvPr>
+        </p:nvSpPr>
+        <p:spPr>
+          <a:xfrm>
+            <a:off x="8610480" y="6356520"/>
+            <a:ext cx="2741400" cy="363240"/>
+          </a:xfrm>
+          <a:prstGeom prst="rect">
+            <a:avLst/>
+          </a:prstGeom>
+          <a:noFill/>
+          <a:ln w="0">
+            <a:noFill/>
+          </a:ln>
+        </p:spPr>
+        <p:txBody>
+          <a:bodyPr lIns="91440" rIns="91440" tIns="45720" bIns="45720" anchor="ctr">
+            <a:noAutofit/>
+          </a:bodyPr>
+          <a:lstStyle>
+            <a:lvl1pPr indent="0" algn="r" defTabSz="914400">
+              <a:lnSpc>
+                <a:spcPct val="100000"/>
+              </a:lnSpc>
+              <a:buNone/>
+              <a:tabLst>
+                <a:tab algn="l" pos="0"/>
+              </a:tabLst>
+              <a:defRPr b="0" lang="en-GB" sz="1200" strike="noStrike" u="none">
+                <a:solidFill>
+                  <a:schemeClr val="dk1">
+                    <a:tint val="75000"/>
+                  </a:schemeClr>
+                </a:solidFill>
+                <a:effectLst/>
+                <a:uFillTx/>
+                <a:latin typeface="Calibri"/>
+              </a:defRPr>
+            </a:lvl1pPr>
+          </a:lstStyle>
+          <a:p>
+            <a:pPr indent="0" algn="r" defTabSz="914400">
+              <a:lnSpc>
+                <a:spcPct val="100000"/>
+              </a:lnSpc>
+              <a:buNone/>
+              <a:tabLst>
+                <a:tab algn="l" pos="0"/>
+              </a:tabLst>
+            </a:pPr>
+            <a:fld id="{8621EE56-C6E1-4F2B-8E58-5D64BAF3146A}" type="slidenum">
+              <a:rPr b="0" lang="en-GB" sz="1200" strike="noStrike" u="none">
+                <a:solidFill>
+                  <a:schemeClr val="dk1">
+                    <a:tint val="75000"/>
+                  </a:schemeClr>
+                </a:solidFill>
+                <a:effectLst/>
+                <a:uFillTx/>
+                <a:latin typeface="Calibri"/>
+              </a:rPr>
+              <a:t>&lt;número&gt;</a:t>
+            </a:fld>
+            <a:endParaRPr b="0" lang="es-ES" sz="1200" strike="noStrike" u="none">
+              <a:solidFill>
+                <a:srgbClr val="000000"/>
+              </a:solidFill>
+              <a:effectLst/>
+              <a:uFillTx/>
+              <a:latin typeface="Times New Roman"/>
+            </a:endParaRPr>
+          </a:p>
+        </p:txBody>
+      </p:sp>
+    </p:spTree>
+  </p:cSld>
+</p:sldLayout>
+</file>
+
+<file path=ppt/slideLayouts/slideLayout6.xml><?xml version="1.0" encoding="utf-8"?>
+<p:sldLayout xmlns:a="http://schemas.openxmlformats.org/drawingml/2006/main" xmlns:p="http://schemas.openxmlformats.org/presentationml/2006/main" xmlns:r="http://schemas.openxmlformats.org/officeDocument/2006/relationships" xmlns:p14="http://schemas.microsoft.com/office/powerpoint/2010/main" xmlns:p15="http://schemas.microsoft.com/office/powerpoint/2012/main" xmlns:mc="http://schemas.openxmlformats.org/markup-compatibility/2006" type="blank" preserve="1">
+  <p:cSld name="Encabezado de sección">
+    <p:bg>
+      <p:bgPr>
+        <a:solidFill>
+          <a:srgbClr val="ffffff"/>
+        </a:solidFill>
+      </p:bgPr>
+    </p:bg>
+    <p:spTree>
+      <p:nvGrpSpPr>
+        <p:cNvPr id="1" name=""/>
+        <p:cNvGrpSpPr/>
+        <p:nvPr/>
+      </p:nvGrpSpPr>
+      <p:grpSpPr>
+        <a:xfrm>
+          <a:off x="0" y="0"/>
+          <a:ext cx="0" cy="0"/>
+          <a:chOff x="0" y="0"/>
+          <a:chExt cx="0" cy="0"/>
+        </a:xfrm>
+      </p:grpSpPr>
+      <p:sp>
+        <p:nvSpPr>
+          <p:cNvPr id="25" name="PlaceHolder 1"/>
+          <p:cNvSpPr>
+            <a:spLocks noGrp="1"/>
+          </p:cNvSpPr>
+          <p:nvPr>
+            <p:ph type="title"/>
+          </p:nvPr>
+        </p:nvSpPr>
+        <p:spPr>
+          <a:xfrm>
+            <a:off x="831960" y="1709640"/>
+            <a:ext cx="10513800" cy="2850840"/>
+          </a:xfrm>
+          <a:prstGeom prst="rect">
+            <a:avLst/>
+          </a:prstGeom>
+          <a:noFill/>
+          <a:ln w="0">
+            <a:noFill/>
+          </a:ln>
+        </p:spPr>
+        <p:txBody>
+          <a:bodyPr lIns="91440" rIns="91440" tIns="45720" bIns="45720" anchor="b">
+            <a:noAutofit/>
+          </a:bodyPr>
+          <a:p>
+            <a:pPr indent="0" defTabSz="914400">
+              <a:lnSpc>
+                <a:spcPct val="90000"/>
+              </a:lnSpc>
+              <a:buNone/>
+              <a:tabLst>
+                <a:tab algn="l" pos="0"/>
+              </a:tabLst>
+            </a:pPr>
+            <a:r>
+              <a:rPr b="0" lang="es-ES" sz="6000" strike="noStrike" u="none">
+                <a:solidFill>
+                  <a:schemeClr val="dk1"/>
+                </a:solidFill>
+                <a:effectLst/>
+                <a:uFillTx/>
+                <a:latin typeface="Calibri Light"/>
+              </a:rPr>
+              <a:t>Haga clic para modificar el estilo de título del patrón</a:t>
+            </a:r>
+            <a:endParaRPr b="0" lang="es-ES" sz="6000" strike="noStrike" u="none">
+              <a:solidFill>
+                <a:srgbClr val="000000"/>
+              </a:solidFill>
+              <a:effectLst/>
+              <a:uFillTx/>
+              <a:latin typeface="Arial"/>
+            </a:endParaRPr>
+          </a:p>
+        </p:txBody>
+      </p:sp>
+      <p:sp>
+        <p:nvSpPr>
+          <p:cNvPr id="26" name="PlaceHolder 2"/>
+          <p:cNvSpPr>
+            <a:spLocks noGrp="1"/>
+          </p:cNvSpPr>
+          <p:nvPr>
+            <p:ph type="body"/>
+          </p:nvPr>
+        </p:nvSpPr>
+        <p:spPr>
+          <a:xfrm>
+            <a:off x="831960" y="4589640"/>
+            <a:ext cx="10513800" cy="1498320"/>
+          </a:xfrm>
+          <a:prstGeom prst="rect">
+            <a:avLst/>
+          </a:prstGeom>
+          <a:noFill/>
+          <a:ln w="0">
+            <a:noFill/>
+          </a:ln>
+        </p:spPr>
+        <p:txBody>
+          <a:bodyPr lIns="91440" rIns="91440" tIns="45720" bIns="45720" anchor="t">
+            <a:noAutofit/>
+          </a:bodyPr>
+          <a:p>
+            <a:pPr indent="0" defTabSz="914400">
+              <a:lnSpc>
+                <a:spcPct val="90000"/>
+              </a:lnSpc>
+              <a:spcBef>
+                <a:spcPts val="1001"/>
+              </a:spcBef>
+              <a:buNone/>
+              <a:tabLst>
+                <a:tab algn="l" pos="0"/>
+              </a:tabLst>
+            </a:pPr>
+            <a:r>
+              <a:rPr b="0" lang="es-ES" sz="2400" strike="noStrike" u="none">
+                <a:solidFill>
+                  <a:schemeClr val="dk1">
+                    <a:tint val="75000"/>
+                  </a:schemeClr>
+                </a:solidFill>
+                <a:effectLst/>
+                <a:uFillTx/>
+                <a:latin typeface="Calibri"/>
+              </a:rPr>
+              <a:t>Haga clic para modificar los estilos de texto del patrón</a:t>
+            </a:r>
+            <a:endParaRPr b="0" lang="es-ES" sz="2400" strike="noStrike" u="none">
+              <a:solidFill>
+                <a:srgbClr val="000000"/>
+              </a:solidFill>
+              <a:effectLst/>
+              <a:uFillTx/>
+              <a:latin typeface="Arial"/>
+            </a:endParaRPr>
+          </a:p>
+        </p:txBody>
+      </p:sp>
+      <p:sp>
+        <p:nvSpPr>
+          <p:cNvPr id="27" name="PlaceHolder 3"/>
+          <p:cNvSpPr>
+            <a:spLocks noGrp="1"/>
+          </p:cNvSpPr>
+          <p:nvPr>
+            <p:ph type="dt" idx="16"/>
+          </p:nvPr>
+        </p:nvSpPr>
+        <p:spPr>
+          <a:xfrm>
+            <a:off x="838080" y="6356520"/>
+            <a:ext cx="2741400" cy="363240"/>
+          </a:xfrm>
+          <a:prstGeom prst="rect">
+            <a:avLst/>
+          </a:prstGeom>
+          <a:noFill/>
+          <a:ln w="0">
+            <a:noFill/>
+          </a:ln>
+        </p:spPr>
+        <p:txBody>
+          <a:bodyPr lIns="91440" rIns="91440" tIns="45720" bIns="45720" anchor="ctr">
+            <a:noAutofit/>
+          </a:bodyPr>
+          <a:lstStyle>
+            <a:lvl1pPr indent="0" defTabSz="914400">
+              <a:lnSpc>
+                <a:spcPct val="100000"/>
+              </a:lnSpc>
+              <a:buNone/>
+              <a:tabLst>
+                <a:tab algn="l" pos="0"/>
+              </a:tabLst>
+              <a:defRPr b="0" lang="en-GB" sz="1200" strike="noStrike" u="none">
+                <a:solidFill>
+                  <a:schemeClr val="dk1">
+                    <a:tint val="75000"/>
+                  </a:schemeClr>
+                </a:solidFill>
+                <a:effectLst/>
+                <a:uFillTx/>
+                <a:latin typeface="Calibri"/>
+              </a:defRPr>
+            </a:lvl1pPr>
+          </a:lstStyle>
+          <a:p>
+            <a:pPr indent="0" defTabSz="914400">
+              <a:lnSpc>
+                <a:spcPct val="100000"/>
+              </a:lnSpc>
+              <a:buNone/>
+              <a:tabLst>
+                <a:tab algn="l" pos="0"/>
+              </a:tabLst>
+            </a:pPr>
+            <a:r>
+              <a:rPr b="0" lang="en-GB" sz="1200" strike="noStrike" u="none">
+                <a:solidFill>
+                  <a:schemeClr val="dk1">
+                    <a:tint val="75000"/>
+                  </a:schemeClr>
+                </a:solidFill>
+                <a:effectLst/>
+                <a:uFillTx/>
+                <a:latin typeface="Calibri"/>
+              </a:rPr>
+              <a:t>&lt;fecha/hora&gt;</a:t>
+            </a:r>
+            <a:endParaRPr b="0" lang="es-ES" sz="1200" strike="noStrike" u="none">
+              <a:solidFill>
+                <a:srgbClr val="000000"/>
+              </a:solidFill>
+              <a:effectLst/>
+              <a:uFillTx/>
+              <a:latin typeface="Times New Roman"/>
+            </a:endParaRPr>
+          </a:p>
+        </p:txBody>
+      </p:sp>
+      <p:sp>
+        <p:nvSpPr>
+          <p:cNvPr id="28" name="PlaceHolder 4"/>
+          <p:cNvSpPr>
+            <a:spLocks noGrp="1"/>
+          </p:cNvSpPr>
+          <p:nvPr>
+            <p:ph type="ftr" idx="17"/>
+          </p:nvPr>
+        </p:nvSpPr>
+        <p:spPr>
+          <a:xfrm>
+            <a:off x="4038480" y="6356520"/>
+            <a:ext cx="4113000" cy="363240"/>
+          </a:xfrm>
+          <a:prstGeom prst="rect">
+            <a:avLst/>
+          </a:prstGeom>
+          <a:noFill/>
+          <a:ln w="0">
+            <a:noFill/>
+          </a:ln>
+        </p:spPr>
+        <p:txBody>
+          <a:bodyPr lIns="91440" rIns="91440" tIns="45720" bIns="45720" anchor="ctr">
+            <a:noAutofit/>
+          </a:bodyPr>
+          <a:lstStyle>
+            <a:lvl1pPr indent="0" algn="ctr">
+              <a:lnSpc>
+                <a:spcPct val="100000"/>
+              </a:lnSpc>
+              <a:buNone/>
+              <a:tabLst>
+                <a:tab algn="l" pos="0"/>
+              </a:tabLst>
+              <a:defRPr b="0" lang="es-ES" sz="1400" strike="noStrike" u="none">
+                <a:solidFill>
+                  <a:srgbClr val="000000"/>
+                </a:solidFill>
+                <a:effectLst/>
+                <a:uFillTx/>
+                <a:latin typeface="Times New Roman"/>
+              </a:defRPr>
+            </a:lvl1pPr>
+          </a:lstStyle>
+          <a:p>
+            <a:pPr indent="0" algn="ctr">
+              <a:lnSpc>
+                <a:spcPct val="100000"/>
+              </a:lnSpc>
+              <a:buNone/>
+              <a:tabLst>
+                <a:tab algn="l" pos="0"/>
+              </a:tabLst>
+            </a:pPr>
+            <a:r>
+              <a:rPr b="0" lang="es-ES" sz="1400" strike="noStrike" u="none">
+                <a:solidFill>
+                  <a:srgbClr val="000000"/>
+                </a:solidFill>
+                <a:effectLst/>
+                <a:uFillTx/>
+                <a:latin typeface="Times New Roman"/>
+              </a:rPr>
+              <a:t>&lt;pie de página&gt;</a:t>
+            </a:r>
+            <a:endParaRPr b="0" lang="es-ES" sz="1400" strike="noStrike" u="none">
+              <a:solidFill>
+                <a:srgbClr val="000000"/>
+              </a:solidFill>
+              <a:effectLst/>
+              <a:uFillTx/>
+              <a:latin typeface="Times New Roman"/>
+            </a:endParaRPr>
+          </a:p>
+        </p:txBody>
+      </p:sp>
+      <p:sp>
+        <p:nvSpPr>
+          <p:cNvPr id="29" name="PlaceHolder 5"/>
+          <p:cNvSpPr>
+            <a:spLocks noGrp="1"/>
+          </p:cNvSpPr>
+          <p:nvPr>
+            <p:ph type="sldNum" idx="18"/>
+          </p:nvPr>
+        </p:nvSpPr>
+        <p:spPr>
+          <a:xfrm>
+            <a:off x="8610480" y="6356520"/>
+            <a:ext cx="2741400" cy="363240"/>
+          </a:xfrm>
+          <a:prstGeom prst="rect">
+            <a:avLst/>
+          </a:prstGeom>
+          <a:noFill/>
+          <a:ln w="0">
+            <a:noFill/>
+          </a:ln>
+        </p:spPr>
+        <p:txBody>
+          <a:bodyPr lIns="91440" rIns="91440" tIns="45720" bIns="45720" anchor="ctr">
+            <a:noAutofit/>
+          </a:bodyPr>
+          <a:lstStyle>
+            <a:lvl1pPr indent="0" algn="r" defTabSz="914400">
+              <a:lnSpc>
+                <a:spcPct val="100000"/>
+              </a:lnSpc>
+              <a:buNone/>
+              <a:tabLst>
+                <a:tab algn="l" pos="0"/>
+              </a:tabLst>
+              <a:defRPr b="0" lang="en-GB" sz="1200" strike="noStrike" u="none">
+                <a:solidFill>
+                  <a:schemeClr val="dk1">
+                    <a:tint val="75000"/>
+                  </a:schemeClr>
+                </a:solidFill>
+                <a:effectLst/>
+                <a:uFillTx/>
+                <a:latin typeface="Calibri"/>
+              </a:defRPr>
+            </a:lvl1pPr>
+          </a:lstStyle>
+          <a:p>
+            <a:pPr indent="0" algn="r" defTabSz="914400">
+              <a:lnSpc>
+                <a:spcPct val="100000"/>
+              </a:lnSpc>
+              <a:buNone/>
+              <a:tabLst>
+                <a:tab algn="l" pos="0"/>
+              </a:tabLst>
+            </a:pPr>
+            <a:fld id="{A71366A2-C820-4AC4-B898-07D4C4CC9DFE}" type="slidenum">
+              <a:rPr b="0" lang="en-GB" sz="1200" strike="noStrike" u="none">
+                <a:solidFill>
+                  <a:schemeClr val="dk1">
+                    <a:tint val="75000"/>
+                  </a:schemeClr>
+                </a:solidFill>
+                <a:effectLst/>
+                <a:uFillTx/>
+                <a:latin typeface="Calibri"/>
+              </a:rPr>
+              <a:t>&lt;número&gt;</a:t>
+            </a:fld>
+            <a:endParaRPr b="0" lang="es-ES" sz="1200" strike="noStrike" u="none">
+              <a:solidFill>
+                <a:srgbClr val="000000"/>
+              </a:solidFill>
+              <a:effectLst/>
+              <a:uFillTx/>
+              <a:latin typeface="Times New Roman"/>
+            </a:endParaRPr>
+          </a:p>
+        </p:txBody>
+      </p:sp>
+    </p:spTree>
+  </p:cSld>
+</p:sldLayout>
+</file>
+
+<file path=ppt/slideLayouts/slideLayout7.xml><?xml version="1.0" encoding="utf-8"?>
+<p:sldLayout xmlns:a="http://schemas.openxmlformats.org/drawingml/2006/main" xmlns:p="http://schemas.openxmlformats.org/presentationml/2006/main" xmlns:r="http://schemas.openxmlformats.org/officeDocument/2006/relationships" xmlns:p14="http://schemas.microsoft.com/office/powerpoint/2010/main" xmlns:p15="http://schemas.microsoft.com/office/powerpoint/2012/main" xmlns:mc="http://schemas.openxmlformats.org/markup-compatibility/2006" type="twoObj" preserve="1">
+  <p:cSld name="Dos objetos">
+    <p:bg>
+      <p:bgPr>
+        <a:solidFill>
+          <a:srgbClr val="ffffff"/>
+        </a:solidFill>
+      </p:bgPr>
+    </p:bg>
+    <p:spTree>
+      <p:nvGrpSpPr>
+        <p:cNvPr id="1" name=""/>
+        <p:cNvGrpSpPr/>
+        <p:nvPr/>
+      </p:nvGrpSpPr>
+      <p:grpSpPr>
+        <a:xfrm>
+          <a:off x="0" y="0"/>
+          <a:ext cx="0" cy="0"/>
+          <a:chOff x="0" y="0"/>
+          <a:chExt cx="0" cy="0"/>
+        </a:xfrm>
+      </p:grpSpPr>
+      <p:sp>
+        <p:nvSpPr>
+          <p:cNvPr id="30" name="PlaceHolder 1"/>
+          <p:cNvSpPr>
+            <a:spLocks noGrp="1"/>
+          </p:cNvSpPr>
+          <p:nvPr>
+            <p:ph type="title"/>
+          </p:nvPr>
+        </p:nvSpPr>
+        <p:spPr>
+          <a:xfrm>
+            <a:off x="838080" y="365040"/>
+            <a:ext cx="10513800" cy="1323720"/>
+          </a:xfrm>
+          <a:prstGeom prst="rect">
+            <a:avLst/>
+          </a:prstGeom>
+          <a:noFill/>
+          <a:ln w="0">
+            <a:noFill/>
+          </a:ln>
+        </p:spPr>
+        <p:txBody>
+          <a:bodyPr lIns="91440" rIns="91440" tIns="45720" bIns="45720" anchor="ctr">
+            <a:noAutofit/>
+          </a:bodyPr>
+          <a:p>
+            <a:pPr indent="0" defTabSz="914400">
+              <a:lnSpc>
+                <a:spcPct val="90000"/>
+              </a:lnSpc>
+              <a:buNone/>
+              <a:tabLst>
+                <a:tab algn="l" pos="0"/>
+              </a:tabLst>
+            </a:pPr>
+            <a:r>
+              <a:rPr b="0" lang="es-ES" sz="4400" strike="noStrike" u="none">
+                <a:solidFill>
+                  <a:schemeClr val="dk1"/>
+                </a:solidFill>
+                <a:effectLst/>
+                <a:uFillTx/>
+                <a:latin typeface="Calibri Light"/>
+              </a:rPr>
+              <a:t>Haga clic para modificar el estilo de título del patrón</a:t>
+            </a:r>
+            <a:endParaRPr b="0" lang="es-ES" sz="4400" strike="noStrike" u="none">
+              <a:solidFill>
+                <a:srgbClr val="000000"/>
+              </a:solidFill>
+              <a:effectLst/>
+              <a:uFillTx/>
+              <a:latin typeface="Arial"/>
+            </a:endParaRPr>
+          </a:p>
+        </p:txBody>
+      </p:sp>
+      <p:sp>
+        <p:nvSpPr>
+          <p:cNvPr id="31" name="PlaceHolder 2"/>
+          <p:cNvSpPr>
+            <a:spLocks noGrp="1"/>
+          </p:cNvSpPr>
+          <p:nvPr>
+            <p:ph type="body"/>
+          </p:nvPr>
+        </p:nvSpPr>
+        <p:spPr>
+          <a:xfrm>
+            <a:off x="838080" y="1825560"/>
+            <a:ext cx="5179680" cy="4349520"/>
+          </a:xfrm>
+          <a:prstGeom prst="rect">
+            <a:avLst/>
+          </a:prstGeom>
+          <a:noFill/>
+          <a:ln w="0">
+            <a:noFill/>
+          </a:ln>
+        </p:spPr>
+        <p:txBody>
+          <a:bodyPr lIns="91440" rIns="91440" tIns="45720" bIns="45720" anchor="t">
+            <a:noAutofit/>
+          </a:bodyPr>
+          <a:p>
+            <a:pPr marL="228600" indent="-228600" defTabSz="914400">
+              <a:lnSpc>
+                <a:spcPct val="90000"/>
+              </a:lnSpc>
+              <a:spcBef>
+                <a:spcPts val="1001"/>
+              </a:spcBef>
+              <a:buClr>
+                <a:srgbClr val="000000"/>
+              </a:buClr>
+              <a:buFont typeface="Arial"/>
+              <a:buChar char="•"/>
+            </a:pPr>
+            <a:r>
+              <a:rPr b="0" lang="es-ES" sz="2800" strike="noStrike" u="none">
+                <a:solidFill>
+                  <a:schemeClr val="dk1"/>
+                </a:solidFill>
+                <a:effectLst/>
+                <a:uFillTx/>
+                <a:latin typeface="Calibri"/>
+              </a:rPr>
+              <a:t>Haga clic para modificar los estilos de texto del patrón</a:t>
+            </a:r>
+            <a:endParaRPr b="0" lang="es-ES" sz="2800" strike="noStrike" u="none">
+              <a:solidFill>
+                <a:srgbClr val="000000"/>
+              </a:solidFill>
+              <a:effectLst/>
+              <a:uFillTx/>
+              <a:latin typeface="Arial"/>
+            </a:endParaRPr>
+          </a:p>
+          <a:p>
+            <a:pPr lvl="1" marL="685800" indent="-228600" defTabSz="914400">
+              <a:lnSpc>
+                <a:spcPct val="90000"/>
+              </a:lnSpc>
+              <a:spcBef>
+                <a:spcPts val="499"/>
+              </a:spcBef>
+              <a:buClr>
+                <a:srgbClr val="000000"/>
+              </a:buClr>
+              <a:buFont typeface="Arial"/>
+              <a:buChar char="•"/>
+            </a:pPr>
+            <a:r>
+              <a:rPr b="0" lang="es-ES" sz="2400" strike="noStrike" u="none">
+                <a:solidFill>
+                  <a:schemeClr val="dk1"/>
+                </a:solidFill>
+                <a:effectLst/>
+                <a:uFillTx/>
+                <a:latin typeface="Calibri"/>
+              </a:rPr>
+              <a:t>Segundo nivel</a:t>
+            </a:r>
+            <a:endParaRPr b="0" lang="es-ES" sz="2400" strike="noStrike" u="none">
+              <a:solidFill>
+                <a:srgbClr val="000000"/>
+              </a:solidFill>
+              <a:effectLst/>
+              <a:uFillTx/>
+              <a:latin typeface="Arial"/>
+            </a:endParaRPr>
+          </a:p>
+          <a:p>
+            <a:pPr lvl="2" marL="1143000" indent="-228600" defTabSz="914400">
+              <a:lnSpc>
+                <a:spcPct val="90000"/>
+              </a:lnSpc>
+              <a:spcBef>
+                <a:spcPts val="499"/>
+              </a:spcBef>
+              <a:buClr>
+                <a:srgbClr val="000000"/>
+              </a:buClr>
+              <a:buFont typeface="Arial"/>
+              <a:buChar char="•"/>
+            </a:pPr>
+            <a:r>
+              <a:rPr b="0" lang="es-ES" sz="2000" strike="noStrike" u="none">
+                <a:solidFill>
+                  <a:schemeClr val="dk1"/>
+                </a:solidFill>
+                <a:effectLst/>
+                <a:uFillTx/>
+                <a:latin typeface="Calibri"/>
+              </a:rPr>
+              <a:t>Tercer nivel</a:t>
+            </a:r>
+            <a:endParaRPr b="0" lang="es-ES" sz="2000" strike="noStrike" u="none">
+              <a:solidFill>
+                <a:srgbClr val="000000"/>
+              </a:solidFill>
+              <a:effectLst/>
+              <a:uFillTx/>
+              <a:latin typeface="Arial"/>
+            </a:endParaRPr>
+          </a:p>
+          <a:p>
+            <a:pPr lvl="3" marL="1600200" indent="-228600" defTabSz="914400">
+              <a:lnSpc>
+                <a:spcPct val="90000"/>
+              </a:lnSpc>
+              <a:spcBef>
+                <a:spcPts val="499"/>
+              </a:spcBef>
+              <a:buClr>
+                <a:srgbClr val="000000"/>
+              </a:buClr>
+              <a:buFont typeface="Arial"/>
+              <a:buChar char="•"/>
+            </a:pPr>
+            <a:r>
+              <a:rPr b="0" lang="es-ES" sz="1800" strike="noStrike" u="none">
+                <a:solidFill>
+                  <a:schemeClr val="dk1"/>
+                </a:solidFill>
+                <a:effectLst/>
+                <a:uFillTx/>
+                <a:latin typeface="Calibri"/>
+              </a:rPr>
+              <a:t>Cuarto nivel</a:t>
+            </a:r>
+            <a:endParaRPr b="0" lang="es-ES" sz="1800" strike="noStrike" u="none">
+              <a:solidFill>
+                <a:srgbClr val="000000"/>
+              </a:solidFill>
+              <a:effectLst/>
+              <a:uFillTx/>
+              <a:latin typeface="Arial"/>
+            </a:endParaRPr>
+          </a:p>
+          <a:p>
+            <a:pPr lvl="4" marL="2057400" indent="-228600" defTabSz="914400">
+              <a:lnSpc>
+                <a:spcPct val="90000"/>
+              </a:lnSpc>
+              <a:spcBef>
+                <a:spcPts val="499"/>
+              </a:spcBef>
+              <a:buClr>
+                <a:srgbClr val="000000"/>
+              </a:buClr>
+              <a:buFont typeface="Arial"/>
+              <a:buChar char="•"/>
+            </a:pPr>
+            <a:r>
+              <a:rPr b="0" lang="es-ES" sz="1800" strike="noStrike" u="none">
+                <a:solidFill>
+                  <a:schemeClr val="dk1"/>
+                </a:solidFill>
+                <a:effectLst/>
+                <a:uFillTx/>
+                <a:latin typeface="Calibri"/>
+              </a:rPr>
+              <a:t>Quinto nivel</a:t>
+            </a:r>
+            <a:endParaRPr b="0" lang="es-ES" sz="1800" strike="noStrike" u="none">
+              <a:solidFill>
+                <a:srgbClr val="000000"/>
+              </a:solidFill>
+              <a:effectLst/>
+              <a:uFillTx/>
+              <a:latin typeface="Arial"/>
+            </a:endParaRPr>
+          </a:p>
+        </p:txBody>
+      </p:sp>
+      <p:sp>
+        <p:nvSpPr>
+          <p:cNvPr id="32" name="PlaceHolder 3"/>
+          <p:cNvSpPr>
+            <a:spLocks noGrp="1"/>
+          </p:cNvSpPr>
+          <p:nvPr>
+            <p:ph type="body"/>
+          </p:nvPr>
+        </p:nvSpPr>
+        <p:spPr>
+          <a:xfrm>
+            <a:off x="6172200" y="1825560"/>
+            <a:ext cx="5179680" cy="4349520"/>
+          </a:xfrm>
+          <a:prstGeom prst="rect">
+            <a:avLst/>
+          </a:prstGeom>
+          <a:noFill/>
+          <a:ln w="0">
+            <a:noFill/>
+          </a:ln>
+        </p:spPr>
+        <p:txBody>
+          <a:bodyPr lIns="91440" rIns="91440" tIns="45720" bIns="45720" anchor="t">
+            <a:noAutofit/>
+          </a:bodyPr>
+          <a:p>
+            <a:pPr marL="228600" indent="-228600" defTabSz="914400">
+              <a:lnSpc>
+                <a:spcPct val="90000"/>
+              </a:lnSpc>
+              <a:spcBef>
+                <a:spcPts val="1001"/>
+              </a:spcBef>
+              <a:buClr>
+                <a:srgbClr val="000000"/>
+              </a:buClr>
+              <a:buFont typeface="Arial"/>
+              <a:buChar char="•"/>
+            </a:pPr>
+            <a:r>
+              <a:rPr b="0" lang="es-ES" sz="2800" strike="noStrike" u="none">
+                <a:solidFill>
+                  <a:schemeClr val="dk1"/>
+                </a:solidFill>
+                <a:effectLst/>
+                <a:uFillTx/>
+                <a:latin typeface="Calibri"/>
+              </a:rPr>
+              <a:t>Haga clic para modificar los estilos de texto del patrón</a:t>
+            </a:r>
+            <a:endParaRPr b="0" lang="es-ES" sz="2800" strike="noStrike" u="none">
+              <a:solidFill>
+                <a:srgbClr val="000000"/>
+              </a:solidFill>
+              <a:effectLst/>
+              <a:uFillTx/>
+              <a:latin typeface="Arial"/>
+            </a:endParaRPr>
+          </a:p>
+          <a:p>
+            <a:pPr lvl="1" marL="685800" indent="-228600" defTabSz="914400">
+              <a:lnSpc>
+                <a:spcPct val="90000"/>
+              </a:lnSpc>
+              <a:spcBef>
+                <a:spcPts val="499"/>
+              </a:spcBef>
+              <a:buClr>
+                <a:srgbClr val="000000"/>
+              </a:buClr>
+              <a:buFont typeface="Arial"/>
+              <a:buChar char="•"/>
+            </a:pPr>
+            <a:r>
+              <a:rPr b="0" lang="es-ES" sz="2400" strike="noStrike" u="none">
+                <a:solidFill>
+                  <a:schemeClr val="dk1"/>
+                </a:solidFill>
+                <a:effectLst/>
+                <a:uFillTx/>
+                <a:latin typeface="Calibri"/>
+              </a:rPr>
+              <a:t>Segundo nivel</a:t>
+            </a:r>
+            <a:endParaRPr b="0" lang="es-ES" sz="2400" strike="noStrike" u="none">
+              <a:solidFill>
+                <a:srgbClr val="000000"/>
+              </a:solidFill>
+              <a:effectLst/>
+              <a:uFillTx/>
+              <a:latin typeface="Arial"/>
+            </a:endParaRPr>
+          </a:p>
+          <a:p>
+            <a:pPr lvl="2" marL="1143000" indent="-228600" defTabSz="914400">
+              <a:lnSpc>
+                <a:spcPct val="90000"/>
+              </a:lnSpc>
+              <a:spcBef>
+                <a:spcPts val="499"/>
+              </a:spcBef>
+              <a:buClr>
+                <a:srgbClr val="000000"/>
+              </a:buClr>
+              <a:buFont typeface="Arial"/>
+              <a:buChar char="•"/>
+            </a:pPr>
+            <a:r>
+              <a:rPr b="0" lang="es-ES" sz="2000" strike="noStrike" u="none">
+                <a:solidFill>
+                  <a:schemeClr val="dk1"/>
+                </a:solidFill>
+                <a:effectLst/>
+                <a:uFillTx/>
+                <a:latin typeface="Calibri"/>
+              </a:rPr>
+              <a:t>Tercer nivel</a:t>
+            </a:r>
+            <a:endParaRPr b="0" lang="es-ES" sz="2000" strike="noStrike" u="none">
+              <a:solidFill>
+                <a:srgbClr val="000000"/>
+              </a:solidFill>
+              <a:effectLst/>
+              <a:uFillTx/>
+              <a:latin typeface="Arial"/>
+            </a:endParaRPr>
+          </a:p>
+          <a:p>
+            <a:pPr lvl="3" marL="1600200" indent="-228600" defTabSz="914400">
+              <a:lnSpc>
+                <a:spcPct val="90000"/>
+              </a:lnSpc>
+              <a:spcBef>
+                <a:spcPts val="499"/>
+              </a:spcBef>
+              <a:buClr>
+                <a:srgbClr val="000000"/>
+              </a:buClr>
+              <a:buFont typeface="Arial"/>
+              <a:buChar char="•"/>
+            </a:pPr>
+            <a:r>
+              <a:rPr b="0" lang="es-ES" sz="1800" strike="noStrike" u="none">
+                <a:solidFill>
+                  <a:schemeClr val="dk1"/>
+                </a:solidFill>
+                <a:effectLst/>
+                <a:uFillTx/>
+                <a:latin typeface="Calibri"/>
+              </a:rPr>
+              <a:t>Cuarto nivel</a:t>
+            </a:r>
+            <a:endParaRPr b="0" lang="es-ES" sz="1800" strike="noStrike" u="none">
+              <a:solidFill>
+                <a:srgbClr val="000000"/>
+              </a:solidFill>
+              <a:effectLst/>
+              <a:uFillTx/>
+              <a:latin typeface="Arial"/>
+            </a:endParaRPr>
+          </a:p>
+          <a:p>
+            <a:pPr lvl="4" marL="2057400" indent="-228600" defTabSz="914400">
+              <a:lnSpc>
+                <a:spcPct val="90000"/>
+              </a:lnSpc>
+              <a:spcBef>
+                <a:spcPts val="499"/>
+              </a:spcBef>
+              <a:buClr>
+                <a:srgbClr val="000000"/>
+              </a:buClr>
+              <a:buFont typeface="Arial"/>
+              <a:buChar char="•"/>
+            </a:pPr>
+            <a:r>
+              <a:rPr b="0" lang="es-ES" sz="1800" strike="noStrike" u="none">
+                <a:solidFill>
+                  <a:schemeClr val="dk1"/>
+                </a:solidFill>
+                <a:effectLst/>
+                <a:uFillTx/>
+                <a:latin typeface="Calibri"/>
+              </a:rPr>
+              <a:t>Quinto nivel</a:t>
+            </a:r>
+            <a:endParaRPr b="0" lang="es-ES" sz="1800" strike="noStrike" u="none">
+              <a:solidFill>
+                <a:srgbClr val="000000"/>
+              </a:solidFill>
+              <a:effectLst/>
+              <a:uFillTx/>
+              <a:latin typeface="Arial"/>
+            </a:endParaRPr>
+          </a:p>
+        </p:txBody>
+      </p:sp>
+      <p:sp>
+        <p:nvSpPr>
+          <p:cNvPr id="33" name="PlaceHolder 4"/>
+          <p:cNvSpPr>
+            <a:spLocks noGrp="1"/>
+          </p:cNvSpPr>
+          <p:nvPr>
+            <p:ph type="dt" idx="19"/>
+          </p:nvPr>
+        </p:nvSpPr>
+        <p:spPr>
+          <a:xfrm>
+            <a:off x="838080" y="6356520"/>
+            <a:ext cx="2741400" cy="363240"/>
+          </a:xfrm>
+          <a:prstGeom prst="rect">
+            <a:avLst/>
+          </a:prstGeom>
+          <a:noFill/>
+          <a:ln w="0">
+            <a:noFill/>
+          </a:ln>
+        </p:spPr>
+        <p:txBody>
+          <a:bodyPr lIns="91440" rIns="91440" tIns="45720" bIns="45720" anchor="ctr">
+            <a:noAutofit/>
+          </a:bodyPr>
+          <a:lstStyle>
+            <a:lvl1pPr indent="0" defTabSz="914400">
+              <a:lnSpc>
+                <a:spcPct val="100000"/>
+              </a:lnSpc>
+              <a:buNone/>
+              <a:tabLst>
+                <a:tab algn="l" pos="0"/>
+              </a:tabLst>
+              <a:defRPr b="0" lang="en-GB" sz="1200" strike="noStrike" u="none">
+                <a:solidFill>
+                  <a:schemeClr val="dk1">
+                    <a:tint val="75000"/>
+                  </a:schemeClr>
+                </a:solidFill>
+                <a:effectLst/>
+                <a:uFillTx/>
+                <a:latin typeface="Calibri"/>
+              </a:defRPr>
+            </a:lvl1pPr>
+          </a:lstStyle>
+          <a:p>
+            <a:pPr indent="0" defTabSz="914400">
+              <a:lnSpc>
+                <a:spcPct val="100000"/>
+              </a:lnSpc>
+              <a:buNone/>
+              <a:tabLst>
+                <a:tab algn="l" pos="0"/>
+              </a:tabLst>
+            </a:pPr>
+            <a:r>
+              <a:rPr b="0" lang="en-GB" sz="1200" strike="noStrike" u="none">
+                <a:solidFill>
+                  <a:schemeClr val="dk1">
+                    <a:tint val="75000"/>
+                  </a:schemeClr>
+                </a:solidFill>
+                <a:effectLst/>
+                <a:uFillTx/>
+                <a:latin typeface="Calibri"/>
+              </a:rPr>
+              <a:t>&lt;fecha/hora&gt;</a:t>
+            </a:r>
+            <a:endParaRPr b="0" lang="es-ES" sz="1200" strike="noStrike" u="none">
+              <a:solidFill>
+                <a:srgbClr val="000000"/>
+              </a:solidFill>
+              <a:effectLst/>
+              <a:uFillTx/>
+              <a:latin typeface="Times New Roman"/>
+            </a:endParaRPr>
+          </a:p>
+        </p:txBody>
+      </p:sp>
+      <p:sp>
+        <p:nvSpPr>
+          <p:cNvPr id="34" name="PlaceHolder 5"/>
+          <p:cNvSpPr>
+            <a:spLocks noGrp="1"/>
+          </p:cNvSpPr>
+          <p:nvPr>
+            <p:ph type="ftr" idx="20"/>
+          </p:nvPr>
+        </p:nvSpPr>
+        <p:spPr>
+          <a:xfrm>
+            <a:off x="4038480" y="6356520"/>
+            <a:ext cx="4113000" cy="363240"/>
+          </a:xfrm>
+          <a:prstGeom prst="rect">
+            <a:avLst/>
+          </a:prstGeom>
+          <a:noFill/>
+          <a:ln w="0">
+            <a:noFill/>
+          </a:ln>
+        </p:spPr>
+        <p:txBody>
+          <a:bodyPr lIns="91440" rIns="91440" tIns="45720" bIns="45720" anchor="ctr">
+            <a:noAutofit/>
+          </a:bodyPr>
+          <a:lstStyle>
+            <a:lvl1pPr indent="0" algn="ctr">
+              <a:lnSpc>
+                <a:spcPct val="100000"/>
+              </a:lnSpc>
+              <a:buNone/>
+              <a:tabLst>
+                <a:tab algn="l" pos="0"/>
+              </a:tabLst>
+              <a:defRPr b="0" lang="es-ES" sz="1400" strike="noStrike" u="none">
+                <a:solidFill>
+                  <a:srgbClr val="000000"/>
+                </a:solidFill>
+                <a:effectLst/>
+                <a:uFillTx/>
+                <a:latin typeface="Times New Roman"/>
+              </a:defRPr>
+            </a:lvl1pPr>
+          </a:lstStyle>
+          <a:p>
+            <a:pPr indent="0" algn="ctr">
+              <a:lnSpc>
+                <a:spcPct val="100000"/>
+              </a:lnSpc>
+              <a:buNone/>
+              <a:tabLst>
+                <a:tab algn="l" pos="0"/>
+              </a:tabLst>
+            </a:pPr>
+            <a:r>
+              <a:rPr b="0" lang="es-ES" sz="1400" strike="noStrike" u="none">
+                <a:solidFill>
+                  <a:srgbClr val="000000"/>
+                </a:solidFill>
+                <a:effectLst/>
+                <a:uFillTx/>
+                <a:latin typeface="Times New Roman"/>
+              </a:rPr>
+              <a:t>&lt;pie de página&gt;</a:t>
+            </a:r>
+            <a:endParaRPr b="0" lang="es-ES" sz="1400" strike="noStrike" u="none">
+              <a:solidFill>
+                <a:srgbClr val="000000"/>
+              </a:solidFill>
+              <a:effectLst/>
+              <a:uFillTx/>
+              <a:latin typeface="Times New Roman"/>
+            </a:endParaRPr>
+          </a:p>
+        </p:txBody>
+      </p:sp>
+      <p:sp>
+        <p:nvSpPr>
+          <p:cNvPr id="35" name="PlaceHolder 6"/>
+          <p:cNvSpPr>
+            <a:spLocks noGrp="1"/>
+          </p:cNvSpPr>
+          <p:nvPr>
+            <p:ph type="sldNum" idx="21"/>
+          </p:nvPr>
+        </p:nvSpPr>
+        <p:spPr>
+          <a:xfrm>
+            <a:off x="8610480" y="6356520"/>
+            <a:ext cx="2741400" cy="363240"/>
+          </a:xfrm>
+          <a:prstGeom prst="rect">
+            <a:avLst/>
+          </a:prstGeom>
+          <a:noFill/>
+          <a:ln w="0">
+            <a:noFill/>
+          </a:ln>
+        </p:spPr>
+        <p:txBody>
+          <a:bodyPr lIns="91440" rIns="91440" tIns="45720" bIns="45720" anchor="ctr">
+            <a:noAutofit/>
+          </a:bodyPr>
+          <a:lstStyle>
+            <a:lvl1pPr indent="0" algn="r" defTabSz="914400">
+              <a:lnSpc>
+                <a:spcPct val="100000"/>
+              </a:lnSpc>
+              <a:buNone/>
+              <a:tabLst>
+                <a:tab algn="l" pos="0"/>
+              </a:tabLst>
+              <a:defRPr b="0" lang="en-GB" sz="1200" strike="noStrike" u="none">
+                <a:solidFill>
+                  <a:schemeClr val="dk1">
+                    <a:tint val="75000"/>
+                  </a:schemeClr>
+                </a:solidFill>
+                <a:effectLst/>
+                <a:uFillTx/>
+                <a:latin typeface="Calibri"/>
+              </a:defRPr>
+            </a:lvl1pPr>
+          </a:lstStyle>
+          <a:p>
+            <a:pPr indent="0" algn="r" defTabSz="914400">
+              <a:lnSpc>
+                <a:spcPct val="100000"/>
+              </a:lnSpc>
+              <a:buNone/>
+              <a:tabLst>
+                <a:tab algn="l" pos="0"/>
+              </a:tabLst>
+            </a:pPr>
+            <a:fld id="{EFDE5FB7-69A3-4F15-9DD9-22C69772BD85}" type="slidenum">
+              <a:rPr b="0" lang="en-GB" sz="1200" strike="noStrike" u="none">
+                <a:solidFill>
+                  <a:schemeClr val="dk1">
+                    <a:tint val="75000"/>
+                  </a:schemeClr>
+                </a:solidFill>
+                <a:effectLst/>
+                <a:uFillTx/>
+                <a:latin typeface="Calibri"/>
+              </a:rPr>
+              <a:t>&lt;número&gt;</a:t>
+            </a:fld>
+            <a:endParaRPr b="0" lang="es-ES" sz="1200" strike="noStrike" u="none">
+              <a:solidFill>
+                <a:srgbClr val="000000"/>
+              </a:solidFill>
+              <a:effectLst/>
+              <a:uFillTx/>
+              <a:latin typeface="Times New Roman"/>
+            </a:endParaRPr>
+          </a:p>
+        </p:txBody>
+      </p:sp>
+    </p:spTree>
+  </p:cSld>
+</p:sldLayout>
+</file>
+
+<file path=ppt/slideLayouts/slideLayout8.xml><?xml version="1.0" encoding="utf-8"?>
 <p:sldLayout xmlns:a="http://schemas.openxmlformats.org/drawingml/2006/main" xmlns:p="http://schemas.openxmlformats.org/presentationml/2006/main" xmlns:r="http://schemas.openxmlformats.org/officeDocument/2006/relationships" xmlns:p14="http://schemas.microsoft.com/office/powerpoint/2010/main" xmlns:p15="http://schemas.microsoft.com/office/powerpoint/2012/main" xmlns:mc="http://schemas.openxmlformats.org/markup-compatibility/2006" type="blank" preserve="1">
   <p:cSld name="Comparación">
     <p:bg>
@@ -3077,7 +4938,7 @@
       </p:grpSpPr>
       <p:sp>
         <p:nvSpPr>
-          <p:cNvPr id="21" name="PlaceHolder 1"/>
+          <p:cNvPr id="36" name="PlaceHolder 1"/>
           <p:cNvSpPr>
             <a:spLocks noGrp="1"/>
           </p:cNvSpPr>
@@ -3088,7 +4949,7 @@
         <p:spPr>
           <a:xfrm>
             <a:off x="839880" y="365040"/>
-            <a:ext cx="10514160" cy="1324080"/>
+            <a:ext cx="10513800" cy="1323720"/>
           </a:xfrm>
           <a:prstGeom prst="rect">
             <a:avLst/>
@@ -3136,7 +4997,7 @@
       </p:sp>
       <p:sp>
         <p:nvSpPr>
-          <p:cNvPr id="22" name="PlaceHolder 2"/>
+          <p:cNvPr id="37" name="PlaceHolder 2"/>
           <p:cNvSpPr>
             <a:spLocks noGrp="1"/>
           </p:cNvSpPr>
@@ -3147,7 +5008,7 @@
         <p:spPr>
           <a:xfrm>
             <a:off x="839880" y="1681200"/>
-            <a:ext cx="5156280" cy="822600"/>
+            <a:ext cx="5155920" cy="822240"/>
           </a:xfrm>
           <a:prstGeom prst="rect">
             <a:avLst/>
@@ -3198,7 +5059,7 @@
       </p:sp>
       <p:sp>
         <p:nvSpPr>
-          <p:cNvPr id="23" name="PlaceHolder 3"/>
+          <p:cNvPr id="38" name="PlaceHolder 3"/>
           <p:cNvSpPr>
             <a:spLocks noGrp="1"/>
           </p:cNvSpPr>
@@ -3209,7 +5070,7 @@
         <p:spPr>
           <a:xfrm>
             <a:off x="839880" y="2505240"/>
-            <a:ext cx="5156280" cy="3683160"/>
+            <a:ext cx="5155920" cy="3682800"/>
           </a:xfrm>
           <a:prstGeom prst="rect">
             <a:avLst/>
@@ -3397,7 +5258,7 @@
       </p:sp>
       <p:sp>
         <p:nvSpPr>
-          <p:cNvPr id="24" name="PlaceHolder 4"/>
+          <p:cNvPr id="39" name="PlaceHolder 4"/>
           <p:cNvSpPr>
             <a:spLocks noGrp="1"/>
           </p:cNvSpPr>
@@ -3408,7 +5269,7 @@
         <p:spPr>
           <a:xfrm>
             <a:off x="6172200" y="1681200"/>
-            <a:ext cx="5181840" cy="822600"/>
+            <a:ext cx="5181480" cy="822240"/>
           </a:xfrm>
           <a:prstGeom prst="rect">
             <a:avLst/>
@@ -3459,7 +5320,7 @@
       </p:sp>
       <p:sp>
         <p:nvSpPr>
-          <p:cNvPr id="25" name="PlaceHolder 5"/>
+          <p:cNvPr id="40" name="PlaceHolder 5"/>
           <p:cNvSpPr>
             <a:spLocks noGrp="1"/>
           </p:cNvSpPr>
@@ -3470,7 +5331,7 @@
         <p:spPr>
           <a:xfrm>
             <a:off x="6172200" y="2505240"/>
-            <a:ext cx="5181840" cy="3683160"/>
+            <a:ext cx="5181480" cy="3682800"/>
           </a:xfrm>
           <a:prstGeom prst="rect">
             <a:avLst/>
@@ -3658,18 +5519,18 @@
       </p:sp>
       <p:sp>
         <p:nvSpPr>
-          <p:cNvPr id="26" name="PlaceHolder 6"/>
+          <p:cNvPr id="41" name="PlaceHolder 6"/>
           <p:cNvSpPr>
             <a:spLocks noGrp="1"/>
           </p:cNvSpPr>
           <p:nvPr>
-            <p:ph type="dt" idx="13"/>
+            <p:ph type="dt" idx="22"/>
           </p:nvPr>
         </p:nvSpPr>
         <p:spPr>
           <a:xfrm>
             <a:off x="838080" y="6356520"/>
-            <a:ext cx="2741760" cy="363600"/>
+            <a:ext cx="2741400" cy="363240"/>
           </a:xfrm>
           <a:prstGeom prst="rect">
             <a:avLst/>
@@ -3740,18 +5601,18 @@
       </p:sp>
       <p:sp>
         <p:nvSpPr>
-          <p:cNvPr id="27" name="PlaceHolder 7"/>
+          <p:cNvPr id="42" name="PlaceHolder 7"/>
           <p:cNvSpPr>
             <a:spLocks noGrp="1"/>
           </p:cNvSpPr>
           <p:nvPr>
-            <p:ph type="ftr" idx="14"/>
+            <p:ph type="ftr" idx="23"/>
           </p:nvPr>
         </p:nvSpPr>
         <p:spPr>
           <a:xfrm>
             <a:off x="4038480" y="6356520"/>
-            <a:ext cx="4113360" cy="363600"/>
+            <a:ext cx="4113000" cy="363240"/>
           </a:xfrm>
           <a:prstGeom prst="rect">
             <a:avLst/>
@@ -3818,18 +5679,18 @@
       </p:sp>
       <p:sp>
         <p:nvSpPr>
-          <p:cNvPr id="28" name="PlaceHolder 8"/>
+          <p:cNvPr id="43" name="PlaceHolder 8"/>
           <p:cNvSpPr>
             <a:spLocks noGrp="1"/>
           </p:cNvSpPr>
           <p:nvPr>
-            <p:ph type="sldNum" idx="15"/>
+            <p:ph type="sldNum" idx="24"/>
           </p:nvPr>
         </p:nvSpPr>
         <p:spPr>
           <a:xfrm>
             <a:off x="8610480" y="6356520"/>
-            <a:ext cx="2741760" cy="363600"/>
+            <a:ext cx="2741400" cy="363240"/>
           </a:xfrm>
           <a:prstGeom prst="rect">
             <a:avLst/>
@@ -3874,1532 +5735,7 @@
                 <a:tab algn="l" pos="0"/>
               </a:tabLst>
             </a:pPr>
-            <a:fld id="{BC56AAE1-E59F-4FFE-99EC-B8D9F317BE15}" type="slidenum">
-              <a:rPr b="0" lang="en-GB" sz="1200" strike="noStrike" u="none">
-                <a:solidFill>
-                  <a:schemeClr val="dk1">
-                    <a:tint val="75000"/>
-                  </a:schemeClr>
-                </a:solidFill>
-                <a:effectLst/>
-                <a:uFillTx/>
-                <a:latin typeface="Calibri"/>
-              </a:rPr>
-              <a:t>&lt;número&gt;</a:t>
-            </a:fld>
-            <a:endParaRPr b="0" lang="es-ES" sz="1200" strike="noStrike" u="none">
-              <a:solidFill>
-                <a:srgbClr val="000000"/>
-              </a:solidFill>
-              <a:effectLst/>
-              <a:uFillTx/>
-              <a:latin typeface="Times New Roman"/>
-            </a:endParaRPr>
-          </a:p>
-        </p:txBody>
-      </p:sp>
-    </p:spTree>
-  </p:cSld>
-</p:sldLayout>
-</file>
-
-<file path=ppt/slideLayouts/slideLayout6.xml><?xml version="1.0" encoding="utf-8"?>
-<p:sldLayout xmlns:a="http://schemas.openxmlformats.org/drawingml/2006/main" xmlns:p="http://schemas.openxmlformats.org/presentationml/2006/main" xmlns:r="http://schemas.openxmlformats.org/officeDocument/2006/relationships" xmlns:p14="http://schemas.microsoft.com/office/powerpoint/2010/main" xmlns:p15="http://schemas.microsoft.com/office/powerpoint/2012/main" xmlns:mc="http://schemas.openxmlformats.org/markup-compatibility/2006" type="titleOnly" preserve="1">
-  <p:cSld name="Solo el título">
-    <p:bg>
-      <p:bgPr>
-        <a:solidFill>
-          <a:srgbClr val="ffffff"/>
-        </a:solidFill>
-      </p:bgPr>
-    </p:bg>
-    <p:spTree>
-      <p:nvGrpSpPr>
-        <p:cNvPr id="1" name=""/>
-        <p:cNvGrpSpPr/>
-        <p:nvPr/>
-      </p:nvGrpSpPr>
-      <p:grpSpPr>
-        <a:xfrm>
-          <a:off x="0" y="0"/>
-          <a:ext cx="0" cy="0"/>
-          <a:chOff x="0" y="0"/>
-          <a:chExt cx="0" cy="0"/>
-        </a:xfrm>
-      </p:grpSpPr>
-      <p:sp>
-        <p:nvSpPr>
-          <p:cNvPr id="29" name="PlaceHolder 1"/>
-          <p:cNvSpPr>
-            <a:spLocks noGrp="1"/>
-          </p:cNvSpPr>
-          <p:nvPr>
-            <p:ph type="title"/>
-          </p:nvPr>
-        </p:nvSpPr>
-        <p:spPr>
-          <a:xfrm>
-            <a:off x="838080" y="365040"/>
-            <a:ext cx="10514160" cy="1324080"/>
-          </a:xfrm>
-          <a:prstGeom prst="rect">
-            <a:avLst/>
-          </a:prstGeom>
-          <a:noFill/>
-          <a:ln w="0">
-            <a:noFill/>
-          </a:ln>
-        </p:spPr>
-        <p:txBody>
-          <a:bodyPr lIns="91440" rIns="91440" tIns="45720" bIns="45720" anchor="ctr">
-            <a:noAutofit/>
-          </a:bodyPr>
-          <a:p>
-            <a:pPr indent="0" defTabSz="914400">
-              <a:lnSpc>
-                <a:spcPct val="90000"/>
-              </a:lnSpc>
-              <a:buNone/>
-              <a:tabLst>
-                <a:tab algn="l" pos="0"/>
-              </a:tabLst>
-            </a:pPr>
-            <a:r>
-              <a:rPr b="0" lang="es-ES" sz="4400" strike="noStrike" u="none">
-                <a:solidFill>
-                  <a:schemeClr val="dk1"/>
-                </a:solidFill>
-                <a:effectLst/>
-                <a:uFillTx/>
-                <a:latin typeface="Calibri Light"/>
-              </a:rPr>
-              <a:t>Haga clic para modificar el estilo de título del patrón</a:t>
-            </a:r>
-            <a:endParaRPr b="0" lang="es-ES" sz="4400" strike="noStrike" u="none">
-              <a:solidFill>
-                <a:srgbClr val="000000"/>
-              </a:solidFill>
-              <a:effectLst/>
-              <a:uFillTx/>
-              <a:latin typeface="Arial"/>
-            </a:endParaRPr>
-          </a:p>
-        </p:txBody>
-      </p:sp>
-      <p:sp>
-        <p:nvSpPr>
-          <p:cNvPr id="30" name="PlaceHolder 2"/>
-          <p:cNvSpPr>
-            <a:spLocks noGrp="1"/>
-          </p:cNvSpPr>
-          <p:nvPr>
-            <p:ph type="dt" idx="16"/>
-          </p:nvPr>
-        </p:nvSpPr>
-        <p:spPr>
-          <a:xfrm>
-            <a:off x="838080" y="6356520"/>
-            <a:ext cx="2741760" cy="363600"/>
-          </a:xfrm>
-          <a:prstGeom prst="rect">
-            <a:avLst/>
-          </a:prstGeom>
-          <a:noFill/>
-          <a:ln w="0">
-            <a:noFill/>
-          </a:ln>
-        </p:spPr>
-        <p:txBody>
-          <a:bodyPr lIns="91440" rIns="91440" tIns="45720" bIns="45720" anchor="ctr">
-            <a:noAutofit/>
-          </a:bodyPr>
-          <a:lstStyle>
-            <a:lvl1pPr indent="0" defTabSz="914400">
-              <a:lnSpc>
-                <a:spcPct val="100000"/>
-              </a:lnSpc>
-              <a:buNone/>
-              <a:tabLst>
-                <a:tab algn="l" pos="0"/>
-              </a:tabLst>
-              <a:defRPr b="0" lang="en-GB" sz="1200" strike="noStrike" u="none">
-                <a:solidFill>
-                  <a:schemeClr val="dk1">
-                    <a:tint val="75000"/>
-                  </a:schemeClr>
-                </a:solidFill>
-                <a:effectLst/>
-                <a:uFillTx/>
-                <a:latin typeface="Calibri"/>
-              </a:defRPr>
-            </a:lvl1pPr>
-          </a:lstStyle>
-          <a:p>
-            <a:pPr indent="0" defTabSz="914400">
-              <a:lnSpc>
-                <a:spcPct val="100000"/>
-              </a:lnSpc>
-              <a:buNone/>
-              <a:tabLst>
-                <a:tab algn="l" pos="0"/>
-              </a:tabLst>
-            </a:pPr>
-            <a:r>
-              <a:rPr b="0" lang="en-GB" sz="1200" strike="noStrike" u="none">
-                <a:solidFill>
-                  <a:schemeClr val="dk1">
-                    <a:tint val="75000"/>
-                  </a:schemeClr>
-                </a:solidFill>
-                <a:effectLst/>
-                <a:uFillTx/>
-                <a:latin typeface="Calibri"/>
-              </a:rPr>
-              <a:t>&lt;fecha/hora&gt;</a:t>
-            </a:r>
-            <a:endParaRPr b="0" lang="es-ES" sz="1200" strike="noStrike" u="none">
-              <a:solidFill>
-                <a:srgbClr val="000000"/>
-              </a:solidFill>
-              <a:effectLst/>
-              <a:uFillTx/>
-              <a:latin typeface="Times New Roman"/>
-            </a:endParaRPr>
-          </a:p>
-        </p:txBody>
-      </p:sp>
-      <p:sp>
-        <p:nvSpPr>
-          <p:cNvPr id="31" name="PlaceHolder 3"/>
-          <p:cNvSpPr>
-            <a:spLocks noGrp="1"/>
-          </p:cNvSpPr>
-          <p:nvPr>
-            <p:ph type="ftr" idx="17"/>
-          </p:nvPr>
-        </p:nvSpPr>
-        <p:spPr>
-          <a:xfrm>
-            <a:off x="4038480" y="6356520"/>
-            <a:ext cx="4113360" cy="363600"/>
-          </a:xfrm>
-          <a:prstGeom prst="rect">
-            <a:avLst/>
-          </a:prstGeom>
-          <a:noFill/>
-          <a:ln w="0">
-            <a:noFill/>
-          </a:ln>
-        </p:spPr>
-        <p:txBody>
-          <a:bodyPr lIns="91440" rIns="91440" tIns="45720" bIns="45720" anchor="ctr">
-            <a:noAutofit/>
-          </a:bodyPr>
-          <a:lstStyle>
-            <a:lvl1pPr indent="0" algn="ctr">
-              <a:lnSpc>
-                <a:spcPct val="100000"/>
-              </a:lnSpc>
-              <a:buNone/>
-              <a:tabLst>
-                <a:tab algn="l" pos="0"/>
-              </a:tabLst>
-              <a:defRPr b="0" lang="es-ES" sz="1400" strike="noStrike" u="none">
-                <a:solidFill>
-                  <a:srgbClr val="000000"/>
-                </a:solidFill>
-                <a:effectLst/>
-                <a:uFillTx/>
-                <a:latin typeface="Times New Roman"/>
-              </a:defRPr>
-            </a:lvl1pPr>
-          </a:lstStyle>
-          <a:p>
-            <a:pPr indent="0" algn="ctr">
-              <a:lnSpc>
-                <a:spcPct val="100000"/>
-              </a:lnSpc>
-              <a:buNone/>
-              <a:tabLst>
-                <a:tab algn="l" pos="0"/>
-              </a:tabLst>
-            </a:pPr>
-            <a:r>
-              <a:rPr b="0" lang="es-ES" sz="1400" strike="noStrike" u="none">
-                <a:solidFill>
-                  <a:srgbClr val="000000"/>
-                </a:solidFill>
-                <a:effectLst/>
-                <a:uFillTx/>
-                <a:latin typeface="Times New Roman"/>
-              </a:rPr>
-              <a:t>&lt;pie de página&gt;</a:t>
-            </a:r>
-            <a:endParaRPr b="0" lang="es-ES" sz="1400" strike="noStrike" u="none">
-              <a:solidFill>
-                <a:srgbClr val="000000"/>
-              </a:solidFill>
-              <a:effectLst/>
-              <a:uFillTx/>
-              <a:latin typeface="Times New Roman"/>
-            </a:endParaRPr>
-          </a:p>
-        </p:txBody>
-      </p:sp>
-      <p:sp>
-        <p:nvSpPr>
-          <p:cNvPr id="32" name="PlaceHolder 4"/>
-          <p:cNvSpPr>
-            <a:spLocks noGrp="1"/>
-          </p:cNvSpPr>
-          <p:nvPr>
-            <p:ph type="sldNum" idx="18"/>
-          </p:nvPr>
-        </p:nvSpPr>
-        <p:spPr>
-          <a:xfrm>
-            <a:off x="8610480" y="6356520"/>
-            <a:ext cx="2741760" cy="363600"/>
-          </a:xfrm>
-          <a:prstGeom prst="rect">
-            <a:avLst/>
-          </a:prstGeom>
-          <a:noFill/>
-          <a:ln w="0">
-            <a:noFill/>
-          </a:ln>
-        </p:spPr>
-        <p:txBody>
-          <a:bodyPr lIns="91440" rIns="91440" tIns="45720" bIns="45720" anchor="ctr">
-            <a:noAutofit/>
-          </a:bodyPr>
-          <a:lstStyle>
-            <a:lvl1pPr indent="0" algn="r" defTabSz="914400">
-              <a:lnSpc>
-                <a:spcPct val="100000"/>
-              </a:lnSpc>
-              <a:buNone/>
-              <a:tabLst>
-                <a:tab algn="l" pos="0"/>
-              </a:tabLst>
-              <a:defRPr b="0" lang="en-GB" sz="1200" strike="noStrike" u="none">
-                <a:solidFill>
-                  <a:schemeClr val="dk1">
-                    <a:tint val="75000"/>
-                  </a:schemeClr>
-                </a:solidFill>
-                <a:effectLst/>
-                <a:uFillTx/>
-                <a:latin typeface="Calibri"/>
-              </a:defRPr>
-            </a:lvl1pPr>
-          </a:lstStyle>
-          <a:p>
-            <a:pPr indent="0" algn="r" defTabSz="914400">
-              <a:lnSpc>
-                <a:spcPct val="100000"/>
-              </a:lnSpc>
-              <a:buNone/>
-              <a:tabLst>
-                <a:tab algn="l" pos="0"/>
-              </a:tabLst>
-            </a:pPr>
-            <a:fld id="{ED9C45A0-038D-4130-A6AD-14131FD5B5D7}" type="slidenum">
-              <a:rPr b="0" lang="en-GB" sz="1200" strike="noStrike" u="none">
-                <a:solidFill>
-                  <a:schemeClr val="dk1">
-                    <a:tint val="75000"/>
-                  </a:schemeClr>
-                </a:solidFill>
-                <a:effectLst/>
-                <a:uFillTx/>
-                <a:latin typeface="Calibri"/>
-              </a:rPr>
-              <a:t>&lt;número&gt;</a:t>
-            </a:fld>
-            <a:endParaRPr b="0" lang="es-ES" sz="1200" strike="noStrike" u="none">
-              <a:solidFill>
-                <a:srgbClr val="000000"/>
-              </a:solidFill>
-              <a:effectLst/>
-              <a:uFillTx/>
-              <a:latin typeface="Times New Roman"/>
-            </a:endParaRPr>
-          </a:p>
-        </p:txBody>
-      </p:sp>
-    </p:spTree>
-  </p:cSld>
-</p:sldLayout>
-</file>
-
-<file path=ppt/slideLayouts/slideLayout7.xml><?xml version="1.0" encoding="utf-8"?>
-<p:sldLayout xmlns:a="http://schemas.openxmlformats.org/drawingml/2006/main" xmlns:p="http://schemas.openxmlformats.org/presentationml/2006/main" xmlns:r="http://schemas.openxmlformats.org/officeDocument/2006/relationships" xmlns:p14="http://schemas.microsoft.com/office/powerpoint/2010/main" xmlns:p15="http://schemas.microsoft.com/office/powerpoint/2012/main" xmlns:mc="http://schemas.openxmlformats.org/markup-compatibility/2006" type="blank" preserve="1">
-  <p:cSld name="En blanco">
-    <p:bg>
-      <p:bgPr>
-        <a:solidFill>
-          <a:srgbClr val="ffffff"/>
-        </a:solidFill>
-      </p:bgPr>
-    </p:bg>
-    <p:spTree>
-      <p:nvGrpSpPr>
-        <p:cNvPr id="1" name=""/>
-        <p:cNvGrpSpPr/>
-        <p:nvPr/>
-      </p:nvGrpSpPr>
-      <p:grpSpPr>
-        <a:xfrm>
-          <a:off x="0" y="0"/>
-          <a:ext cx="0" cy="0"/>
-          <a:chOff x="0" y="0"/>
-          <a:chExt cx="0" cy="0"/>
-        </a:xfrm>
-      </p:grpSpPr>
-      <p:sp>
-        <p:nvSpPr>
-          <p:cNvPr id="33" name="PlaceHolder 1"/>
-          <p:cNvSpPr>
-            <a:spLocks noGrp="1"/>
-          </p:cNvSpPr>
-          <p:nvPr>
-            <p:ph type="dt" idx="19"/>
-          </p:nvPr>
-        </p:nvSpPr>
-        <p:spPr>
-          <a:xfrm>
-            <a:off x="838080" y="6356520"/>
-            <a:ext cx="2741760" cy="363600"/>
-          </a:xfrm>
-          <a:prstGeom prst="rect">
-            <a:avLst/>
-          </a:prstGeom>
-          <a:noFill/>
-          <a:ln w="0">
-            <a:noFill/>
-          </a:ln>
-        </p:spPr>
-        <p:txBody>
-          <a:bodyPr lIns="91440" rIns="91440" tIns="45720" bIns="45720" anchor="ctr">
-            <a:noAutofit/>
-          </a:bodyPr>
-          <a:lstStyle>
-            <a:lvl1pPr indent="0" defTabSz="914400">
-              <a:lnSpc>
-                <a:spcPct val="100000"/>
-              </a:lnSpc>
-              <a:buNone/>
-              <a:tabLst>
-                <a:tab algn="l" pos="0"/>
-              </a:tabLst>
-              <a:defRPr b="0" lang="en-GB" sz="1200" strike="noStrike" u="none">
-                <a:solidFill>
-                  <a:schemeClr val="dk1">
-                    <a:tint val="75000"/>
-                  </a:schemeClr>
-                </a:solidFill>
-                <a:effectLst/>
-                <a:uFillTx/>
-                <a:latin typeface="Calibri"/>
-              </a:defRPr>
-            </a:lvl1pPr>
-          </a:lstStyle>
-          <a:p>
-            <a:pPr indent="0" defTabSz="914400">
-              <a:lnSpc>
-                <a:spcPct val="100000"/>
-              </a:lnSpc>
-              <a:buNone/>
-              <a:tabLst>
-                <a:tab algn="l" pos="0"/>
-              </a:tabLst>
-            </a:pPr>
-            <a:r>
-              <a:rPr b="0" lang="en-GB" sz="1200" strike="noStrike" u="none">
-                <a:solidFill>
-                  <a:schemeClr val="dk1">
-                    <a:tint val="75000"/>
-                  </a:schemeClr>
-                </a:solidFill>
-                <a:effectLst/>
-                <a:uFillTx/>
-                <a:latin typeface="Calibri"/>
-              </a:rPr>
-              <a:t>&lt;fecha/hora&gt;</a:t>
-            </a:r>
-            <a:endParaRPr b="0" lang="es-ES" sz="1200" strike="noStrike" u="none">
-              <a:solidFill>
-                <a:srgbClr val="000000"/>
-              </a:solidFill>
-              <a:effectLst/>
-              <a:uFillTx/>
-              <a:latin typeface="Times New Roman"/>
-            </a:endParaRPr>
-          </a:p>
-        </p:txBody>
-      </p:sp>
-      <p:sp>
-        <p:nvSpPr>
-          <p:cNvPr id="34" name="PlaceHolder 2"/>
-          <p:cNvSpPr>
-            <a:spLocks noGrp="1"/>
-          </p:cNvSpPr>
-          <p:nvPr>
-            <p:ph type="ftr" idx="20"/>
-          </p:nvPr>
-        </p:nvSpPr>
-        <p:spPr>
-          <a:xfrm>
-            <a:off x="4038480" y="6356520"/>
-            <a:ext cx="4113360" cy="363600"/>
-          </a:xfrm>
-          <a:prstGeom prst="rect">
-            <a:avLst/>
-          </a:prstGeom>
-          <a:noFill/>
-          <a:ln w="0">
-            <a:noFill/>
-          </a:ln>
-        </p:spPr>
-        <p:txBody>
-          <a:bodyPr lIns="91440" rIns="91440" tIns="45720" bIns="45720" anchor="ctr">
-            <a:noAutofit/>
-          </a:bodyPr>
-          <a:lstStyle>
-            <a:lvl1pPr indent="0" algn="ctr">
-              <a:lnSpc>
-                <a:spcPct val="100000"/>
-              </a:lnSpc>
-              <a:buNone/>
-              <a:tabLst>
-                <a:tab algn="l" pos="0"/>
-              </a:tabLst>
-              <a:defRPr b="0" lang="es-ES" sz="1400" strike="noStrike" u="none">
-                <a:solidFill>
-                  <a:srgbClr val="000000"/>
-                </a:solidFill>
-                <a:effectLst/>
-                <a:uFillTx/>
-                <a:latin typeface="Times New Roman"/>
-              </a:defRPr>
-            </a:lvl1pPr>
-          </a:lstStyle>
-          <a:p>
-            <a:pPr indent="0" algn="ctr">
-              <a:lnSpc>
-                <a:spcPct val="100000"/>
-              </a:lnSpc>
-              <a:buNone/>
-              <a:tabLst>
-                <a:tab algn="l" pos="0"/>
-              </a:tabLst>
-            </a:pPr>
-            <a:r>
-              <a:rPr b="0" lang="es-ES" sz="1400" strike="noStrike" u="none">
-                <a:solidFill>
-                  <a:srgbClr val="000000"/>
-                </a:solidFill>
-                <a:effectLst/>
-                <a:uFillTx/>
-                <a:latin typeface="Times New Roman"/>
-              </a:rPr>
-              <a:t>&lt;pie de página&gt;</a:t>
-            </a:r>
-            <a:endParaRPr b="0" lang="es-ES" sz="1400" strike="noStrike" u="none">
-              <a:solidFill>
-                <a:srgbClr val="000000"/>
-              </a:solidFill>
-              <a:effectLst/>
-              <a:uFillTx/>
-              <a:latin typeface="Times New Roman"/>
-            </a:endParaRPr>
-          </a:p>
-        </p:txBody>
-      </p:sp>
-      <p:sp>
-        <p:nvSpPr>
-          <p:cNvPr id="35" name="PlaceHolder 3"/>
-          <p:cNvSpPr>
-            <a:spLocks noGrp="1"/>
-          </p:cNvSpPr>
-          <p:nvPr>
-            <p:ph type="sldNum" idx="21"/>
-          </p:nvPr>
-        </p:nvSpPr>
-        <p:spPr>
-          <a:xfrm>
-            <a:off x="8610480" y="6356520"/>
-            <a:ext cx="2741760" cy="363600"/>
-          </a:xfrm>
-          <a:prstGeom prst="rect">
-            <a:avLst/>
-          </a:prstGeom>
-          <a:noFill/>
-          <a:ln w="0">
-            <a:noFill/>
-          </a:ln>
-        </p:spPr>
-        <p:txBody>
-          <a:bodyPr lIns="91440" rIns="91440" tIns="45720" bIns="45720" anchor="ctr">
-            <a:noAutofit/>
-          </a:bodyPr>
-          <a:lstStyle>
-            <a:lvl1pPr indent="0" algn="r" defTabSz="914400">
-              <a:lnSpc>
-                <a:spcPct val="100000"/>
-              </a:lnSpc>
-              <a:buNone/>
-              <a:tabLst>
-                <a:tab algn="l" pos="0"/>
-              </a:tabLst>
-              <a:defRPr b="0" lang="en-GB" sz="1200" strike="noStrike" u="none">
-                <a:solidFill>
-                  <a:schemeClr val="dk1">
-                    <a:tint val="75000"/>
-                  </a:schemeClr>
-                </a:solidFill>
-                <a:effectLst/>
-                <a:uFillTx/>
-                <a:latin typeface="Calibri"/>
-              </a:defRPr>
-            </a:lvl1pPr>
-          </a:lstStyle>
-          <a:p>
-            <a:pPr indent="0" algn="r" defTabSz="914400">
-              <a:lnSpc>
-                <a:spcPct val="100000"/>
-              </a:lnSpc>
-              <a:buNone/>
-              <a:tabLst>
-                <a:tab algn="l" pos="0"/>
-              </a:tabLst>
-            </a:pPr>
-            <a:fld id="{CC1BDB44-70B8-4497-BDA7-8624C0A68589}" type="slidenum">
-              <a:rPr b="0" lang="en-GB" sz="1200" strike="noStrike" u="none">
-                <a:solidFill>
-                  <a:schemeClr val="dk1">
-                    <a:tint val="75000"/>
-                  </a:schemeClr>
-                </a:solidFill>
-                <a:effectLst/>
-                <a:uFillTx/>
-                <a:latin typeface="Calibri"/>
-              </a:rPr>
-              <a:t>&lt;número&gt;</a:t>
-            </a:fld>
-            <a:endParaRPr b="0" lang="es-ES" sz="1200" strike="noStrike" u="none">
-              <a:solidFill>
-                <a:srgbClr val="000000"/>
-              </a:solidFill>
-              <a:effectLst/>
-              <a:uFillTx/>
-              <a:latin typeface="Times New Roman"/>
-            </a:endParaRPr>
-          </a:p>
-        </p:txBody>
-      </p:sp>
-      <p:sp>
-        <p:nvSpPr>
-          <p:cNvPr id="36" name="PlaceHolder 4"/>
-          <p:cNvSpPr>
-            <a:spLocks noGrp="1"/>
-          </p:cNvSpPr>
-          <p:nvPr>
-            <p:ph type="title"/>
-          </p:nvPr>
-        </p:nvSpPr>
-        <p:spPr>
-          <a:xfrm>
-            <a:off x="609480" y="273600"/>
-            <a:ext cx="10971720" cy="1144080"/>
-          </a:xfrm>
-          <a:prstGeom prst="rect">
-            <a:avLst/>
-          </a:prstGeom>
-          <a:noFill/>
-          <a:ln w="0">
-            <a:noFill/>
-          </a:ln>
-        </p:spPr>
-        <p:txBody>
-          <a:bodyPr lIns="0" rIns="0" tIns="0" bIns="0" anchor="ctr">
-            <a:noAutofit/>
-          </a:bodyPr>
-          <a:p>
-            <a:pPr indent="0" algn="ctr">
-              <a:lnSpc>
-                <a:spcPct val="100000"/>
-              </a:lnSpc>
-              <a:buNone/>
-              <a:tabLst>
-                <a:tab algn="l" pos="0"/>
-              </a:tabLst>
-            </a:pPr>
-            <a:r>
-              <a:rPr b="0" lang="es-ES" sz="4400" strike="noStrike" u="none">
-                <a:solidFill>
-                  <a:srgbClr val="000000"/>
-                </a:solidFill>
-                <a:effectLst/>
-                <a:uFillTx/>
-                <a:latin typeface="Arial"/>
-              </a:rPr>
-              <a:t>Pulse para editar el formato del texto de título</a:t>
-            </a:r>
-            <a:endParaRPr b="0" lang="es-ES" sz="4400" strike="noStrike" u="none">
-              <a:solidFill>
-                <a:srgbClr val="000000"/>
-              </a:solidFill>
-              <a:effectLst/>
-              <a:uFillTx/>
-              <a:latin typeface="Arial"/>
-            </a:endParaRPr>
-          </a:p>
-        </p:txBody>
-      </p:sp>
-      <p:sp>
-        <p:nvSpPr>
-          <p:cNvPr id="37" name="PlaceHolder 5"/>
-          <p:cNvSpPr>
-            <a:spLocks noGrp="1"/>
-          </p:cNvSpPr>
-          <p:nvPr>
-            <p:ph type="body"/>
-          </p:nvPr>
-        </p:nvSpPr>
-        <p:spPr>
-          <a:xfrm>
-            <a:off x="609480" y="1604520"/>
-            <a:ext cx="10971720" cy="3976560"/>
-          </a:xfrm>
-          <a:prstGeom prst="rect">
-            <a:avLst/>
-          </a:prstGeom>
-          <a:noFill/>
-          <a:ln w="0">
-            <a:noFill/>
-          </a:ln>
-        </p:spPr>
-        <p:txBody>
-          <a:bodyPr lIns="0" rIns="0" tIns="0" bIns="0" anchor="t">
-            <a:normAutofit/>
-          </a:bodyPr>
-          <a:p>
-            <a:pPr marL="432000" indent="-324000">
-              <a:lnSpc>
-                <a:spcPct val="100000"/>
-              </a:lnSpc>
-              <a:spcBef>
-                <a:spcPts val="1417"/>
-              </a:spcBef>
-              <a:buClr>
-                <a:srgbClr val="000000"/>
-              </a:buClr>
-              <a:buSzPct val="45000"/>
-              <a:buFont typeface="Wingdings" charset="2"/>
-              <a:buChar char=""/>
-            </a:pPr>
-            <a:r>
-              <a:rPr b="0" lang="es-ES" sz="3200" strike="noStrike" u="none">
-                <a:solidFill>
-                  <a:srgbClr val="000000"/>
-                </a:solidFill>
-                <a:effectLst/>
-                <a:uFillTx/>
-                <a:latin typeface="Arial"/>
-              </a:rPr>
-              <a:t>Pulse para editar el formato de texto del esquema</a:t>
-            </a:r>
-            <a:endParaRPr b="0" lang="es-ES" sz="3200" strike="noStrike" u="none">
-              <a:solidFill>
-                <a:srgbClr val="000000"/>
-              </a:solidFill>
-              <a:effectLst/>
-              <a:uFillTx/>
-              <a:latin typeface="Arial"/>
-            </a:endParaRPr>
-          </a:p>
-          <a:p>
-            <a:pPr lvl="1" marL="864000" indent="-324000">
-              <a:lnSpc>
-                <a:spcPct val="100000"/>
-              </a:lnSpc>
-              <a:spcBef>
-                <a:spcPts val="1134"/>
-              </a:spcBef>
-              <a:buClr>
-                <a:srgbClr val="000000"/>
-              </a:buClr>
-              <a:buSzPct val="75000"/>
-              <a:buFont typeface="Symbol" charset="2"/>
-              <a:buChar char=""/>
-            </a:pPr>
-            <a:r>
-              <a:rPr b="0" lang="es-ES" sz="2800" strike="noStrike" u="none">
-                <a:solidFill>
-                  <a:srgbClr val="000000"/>
-                </a:solidFill>
-                <a:effectLst/>
-                <a:uFillTx/>
-                <a:latin typeface="Arial"/>
-              </a:rPr>
-              <a:t>Segundo nivel del esquema</a:t>
-            </a:r>
-            <a:endParaRPr b="0" lang="es-ES" sz="2800" strike="noStrike" u="none">
-              <a:solidFill>
-                <a:srgbClr val="000000"/>
-              </a:solidFill>
-              <a:effectLst/>
-              <a:uFillTx/>
-              <a:latin typeface="Arial"/>
-            </a:endParaRPr>
-          </a:p>
-          <a:p>
-            <a:pPr lvl="2" marL="1296000" indent="-288000">
-              <a:lnSpc>
-                <a:spcPct val="100000"/>
-              </a:lnSpc>
-              <a:spcBef>
-                <a:spcPts val="850"/>
-              </a:spcBef>
-              <a:buClr>
-                <a:srgbClr val="000000"/>
-              </a:buClr>
-              <a:buSzPct val="45000"/>
-              <a:buFont typeface="Wingdings" charset="2"/>
-              <a:buChar char=""/>
-            </a:pPr>
-            <a:r>
-              <a:rPr b="0" lang="es-ES" sz="2400" strike="noStrike" u="none">
-                <a:solidFill>
-                  <a:srgbClr val="000000"/>
-                </a:solidFill>
-                <a:effectLst/>
-                <a:uFillTx/>
-                <a:latin typeface="Arial"/>
-              </a:rPr>
-              <a:t>Tercer nivel del esquema</a:t>
-            </a:r>
-            <a:endParaRPr b="0" lang="es-ES" sz="2400" strike="noStrike" u="none">
-              <a:solidFill>
-                <a:srgbClr val="000000"/>
-              </a:solidFill>
-              <a:effectLst/>
-              <a:uFillTx/>
-              <a:latin typeface="Arial"/>
-            </a:endParaRPr>
-          </a:p>
-          <a:p>
-            <a:pPr lvl="3" marL="1728000" indent="-216000">
-              <a:lnSpc>
-                <a:spcPct val="100000"/>
-              </a:lnSpc>
-              <a:spcBef>
-                <a:spcPts val="567"/>
-              </a:spcBef>
-              <a:buClr>
-                <a:srgbClr val="000000"/>
-              </a:buClr>
-              <a:buSzPct val="75000"/>
-              <a:buFont typeface="Symbol" charset="2"/>
-              <a:buChar char=""/>
-            </a:pPr>
-            <a:r>
-              <a:rPr b="0" lang="es-ES" sz="2000" strike="noStrike" u="none">
-                <a:solidFill>
-                  <a:srgbClr val="000000"/>
-                </a:solidFill>
-                <a:effectLst/>
-                <a:uFillTx/>
-                <a:latin typeface="Arial"/>
-              </a:rPr>
-              <a:t>Cuarto nivel del esquema</a:t>
-            </a:r>
-            <a:endParaRPr b="0" lang="es-ES" sz="2000" strike="noStrike" u="none">
-              <a:solidFill>
-                <a:srgbClr val="000000"/>
-              </a:solidFill>
-              <a:effectLst/>
-              <a:uFillTx/>
-              <a:latin typeface="Arial"/>
-            </a:endParaRPr>
-          </a:p>
-          <a:p>
-            <a:pPr lvl="4" marL="2160000" indent="-216000">
-              <a:lnSpc>
-                <a:spcPct val="100000"/>
-              </a:lnSpc>
-              <a:spcBef>
-                <a:spcPts val="283"/>
-              </a:spcBef>
-              <a:buClr>
-                <a:srgbClr val="000000"/>
-              </a:buClr>
-              <a:buSzPct val="45000"/>
-              <a:buFont typeface="Wingdings" charset="2"/>
-              <a:buChar char=""/>
-            </a:pPr>
-            <a:r>
-              <a:rPr b="0" lang="es-ES" sz="2000" strike="noStrike" u="none">
-                <a:solidFill>
-                  <a:srgbClr val="000000"/>
-                </a:solidFill>
-                <a:effectLst/>
-                <a:uFillTx/>
-                <a:latin typeface="Arial"/>
-              </a:rPr>
-              <a:t>Quinto nivel del esquema</a:t>
-            </a:r>
-            <a:endParaRPr b="0" lang="es-ES" sz="2000" strike="noStrike" u="none">
-              <a:solidFill>
-                <a:srgbClr val="000000"/>
-              </a:solidFill>
-              <a:effectLst/>
-              <a:uFillTx/>
-              <a:latin typeface="Arial"/>
-            </a:endParaRPr>
-          </a:p>
-          <a:p>
-            <a:pPr lvl="5" marL="2592000" indent="-216000">
-              <a:lnSpc>
-                <a:spcPct val="100000"/>
-              </a:lnSpc>
-              <a:spcBef>
-                <a:spcPts val="283"/>
-              </a:spcBef>
-              <a:buClr>
-                <a:srgbClr val="000000"/>
-              </a:buClr>
-              <a:buSzPct val="45000"/>
-              <a:buFont typeface="Wingdings" charset="2"/>
-              <a:buChar char=""/>
-            </a:pPr>
-            <a:r>
-              <a:rPr b="0" lang="es-ES" sz="2000" strike="noStrike" u="none">
-                <a:solidFill>
-                  <a:srgbClr val="000000"/>
-                </a:solidFill>
-                <a:effectLst/>
-                <a:uFillTx/>
-                <a:latin typeface="Arial"/>
-              </a:rPr>
-              <a:t>Sexto nivel del esquema</a:t>
-            </a:r>
-            <a:endParaRPr b="0" lang="es-ES" sz="2000" strike="noStrike" u="none">
-              <a:solidFill>
-                <a:srgbClr val="000000"/>
-              </a:solidFill>
-              <a:effectLst/>
-              <a:uFillTx/>
-              <a:latin typeface="Arial"/>
-            </a:endParaRPr>
-          </a:p>
-          <a:p>
-            <a:pPr lvl="6" marL="3024000" indent="-216000">
-              <a:lnSpc>
-                <a:spcPct val="100000"/>
-              </a:lnSpc>
-              <a:spcBef>
-                <a:spcPts val="283"/>
-              </a:spcBef>
-              <a:buClr>
-                <a:srgbClr val="000000"/>
-              </a:buClr>
-              <a:buSzPct val="45000"/>
-              <a:buFont typeface="Wingdings" charset="2"/>
-              <a:buChar char=""/>
-            </a:pPr>
-            <a:r>
-              <a:rPr b="0" lang="es-ES" sz="2000" strike="noStrike" u="none">
-                <a:solidFill>
-                  <a:srgbClr val="000000"/>
-                </a:solidFill>
-                <a:effectLst/>
-                <a:uFillTx/>
-                <a:latin typeface="Arial"/>
-              </a:rPr>
-              <a:t>Séptimo nivel del esquema</a:t>
-            </a:r>
-            <a:endParaRPr b="0" lang="es-ES" sz="2000" strike="noStrike" u="none">
-              <a:solidFill>
-                <a:srgbClr val="000000"/>
-              </a:solidFill>
-              <a:effectLst/>
-              <a:uFillTx/>
-              <a:latin typeface="Arial"/>
-            </a:endParaRPr>
-          </a:p>
-        </p:txBody>
-      </p:sp>
-    </p:spTree>
-  </p:cSld>
-</p:sldLayout>
-</file>
-
-<file path=ppt/slideLayouts/slideLayout8.xml><?xml version="1.0" encoding="utf-8"?>
-<p:sldLayout xmlns:a="http://schemas.openxmlformats.org/drawingml/2006/main" xmlns:p="http://schemas.openxmlformats.org/presentationml/2006/main" xmlns:r="http://schemas.openxmlformats.org/officeDocument/2006/relationships" xmlns:p14="http://schemas.microsoft.com/office/powerpoint/2010/main" xmlns:p15="http://schemas.microsoft.com/office/powerpoint/2012/main" xmlns:mc="http://schemas.openxmlformats.org/markup-compatibility/2006" type="blank" preserve="1">
-  <p:cSld name="Contenido con título">
-    <p:bg>
-      <p:bgPr>
-        <a:solidFill>
-          <a:srgbClr val="ffffff"/>
-        </a:solidFill>
-      </p:bgPr>
-    </p:bg>
-    <p:spTree>
-      <p:nvGrpSpPr>
-        <p:cNvPr id="1" name=""/>
-        <p:cNvGrpSpPr/>
-        <p:nvPr/>
-      </p:nvGrpSpPr>
-      <p:grpSpPr>
-        <a:xfrm>
-          <a:off x="0" y="0"/>
-          <a:ext cx="0" cy="0"/>
-          <a:chOff x="0" y="0"/>
-          <a:chExt cx="0" cy="0"/>
-        </a:xfrm>
-      </p:grpSpPr>
-      <p:sp>
-        <p:nvSpPr>
-          <p:cNvPr id="38" name="PlaceHolder 1"/>
-          <p:cNvSpPr>
-            <a:spLocks noGrp="1"/>
-          </p:cNvSpPr>
-          <p:nvPr>
-            <p:ph type="title"/>
-          </p:nvPr>
-        </p:nvSpPr>
-        <p:spPr>
-          <a:xfrm>
-            <a:off x="839880" y="457200"/>
-            <a:ext cx="3930840" cy="1598760"/>
-          </a:xfrm>
-          <a:prstGeom prst="rect">
-            <a:avLst/>
-          </a:prstGeom>
-          <a:noFill/>
-          <a:ln w="0">
-            <a:noFill/>
-          </a:ln>
-        </p:spPr>
-        <p:txBody>
-          <a:bodyPr lIns="91440" rIns="91440" tIns="45720" bIns="45720" anchor="b">
-            <a:noAutofit/>
-          </a:bodyPr>
-          <a:p>
-            <a:pPr indent="0" defTabSz="914400">
-              <a:lnSpc>
-                <a:spcPct val="90000"/>
-              </a:lnSpc>
-              <a:buNone/>
-              <a:tabLst>
-                <a:tab algn="l" pos="0"/>
-              </a:tabLst>
-            </a:pPr>
-            <a:r>
-              <a:rPr b="0" lang="es-ES" sz="3200" strike="noStrike" u="none">
-                <a:solidFill>
-                  <a:schemeClr val="dk1"/>
-                </a:solidFill>
-                <a:effectLst/>
-                <a:uFillTx/>
-                <a:latin typeface="Calibri Light"/>
-              </a:rPr>
-              <a:t>Haga clic para modificar el estilo de título del patrón</a:t>
-            </a:r>
-            <a:endParaRPr b="0" lang="es-ES" sz="3200" strike="noStrike" u="none">
-              <a:solidFill>
-                <a:srgbClr val="000000"/>
-              </a:solidFill>
-              <a:effectLst/>
-              <a:uFillTx/>
-              <a:latin typeface="Arial"/>
-            </a:endParaRPr>
-          </a:p>
-        </p:txBody>
-      </p:sp>
-      <p:sp>
-        <p:nvSpPr>
-          <p:cNvPr id="39" name="PlaceHolder 2"/>
-          <p:cNvSpPr>
-            <a:spLocks noGrp="1"/>
-          </p:cNvSpPr>
-          <p:nvPr>
-            <p:ph type="body"/>
-          </p:nvPr>
-        </p:nvSpPr>
-        <p:spPr>
-          <a:xfrm>
-            <a:off x="5183280" y="987480"/>
-            <a:ext cx="6170760" cy="4872240"/>
-          </a:xfrm>
-          <a:prstGeom prst="rect">
-            <a:avLst/>
-          </a:prstGeom>
-          <a:noFill/>
-          <a:ln w="0">
-            <a:noFill/>
-          </a:ln>
-        </p:spPr>
-        <p:txBody>
-          <a:bodyPr lIns="91440" rIns="91440" tIns="45720" bIns="45720" anchor="t">
-            <a:noAutofit/>
-          </a:bodyPr>
-          <a:p>
-            <a:pPr marL="228600" indent="-228600" defTabSz="914400">
-              <a:lnSpc>
-                <a:spcPct val="90000"/>
-              </a:lnSpc>
-              <a:spcBef>
-                <a:spcPts val="1001"/>
-              </a:spcBef>
-              <a:buClr>
-                <a:srgbClr val="000000"/>
-              </a:buClr>
-              <a:buFont typeface="Arial"/>
-              <a:buChar char="•"/>
-            </a:pPr>
-            <a:r>
-              <a:rPr b="0" lang="es-ES" sz="3200" strike="noStrike" u="none">
-                <a:solidFill>
-                  <a:schemeClr val="dk1"/>
-                </a:solidFill>
-                <a:effectLst/>
-                <a:uFillTx/>
-                <a:latin typeface="Calibri"/>
-              </a:rPr>
-              <a:t>Haga clic para modificar los estilos de texto del patrón</a:t>
-            </a:r>
-            <a:endParaRPr b="0" lang="es-ES" sz="3200" strike="noStrike" u="none">
-              <a:solidFill>
-                <a:srgbClr val="000000"/>
-              </a:solidFill>
-              <a:effectLst/>
-              <a:uFillTx/>
-              <a:latin typeface="Arial"/>
-            </a:endParaRPr>
-          </a:p>
-          <a:p>
-            <a:pPr lvl="1" marL="685800" indent="-228600" defTabSz="914400">
-              <a:lnSpc>
-                <a:spcPct val="90000"/>
-              </a:lnSpc>
-              <a:spcBef>
-                <a:spcPts val="499"/>
-              </a:spcBef>
-              <a:buClr>
-                <a:srgbClr val="000000"/>
-              </a:buClr>
-              <a:buFont typeface="Arial"/>
-              <a:buChar char="•"/>
-            </a:pPr>
-            <a:r>
-              <a:rPr b="0" lang="es-ES" sz="2800" strike="noStrike" u="none">
-                <a:solidFill>
-                  <a:schemeClr val="dk1"/>
-                </a:solidFill>
-                <a:effectLst/>
-                <a:uFillTx/>
-                <a:latin typeface="Calibri"/>
-              </a:rPr>
-              <a:t>Segundo nivel</a:t>
-            </a:r>
-            <a:endParaRPr b="0" lang="es-ES" sz="2800" strike="noStrike" u="none">
-              <a:solidFill>
-                <a:srgbClr val="000000"/>
-              </a:solidFill>
-              <a:effectLst/>
-              <a:uFillTx/>
-              <a:latin typeface="Arial"/>
-            </a:endParaRPr>
-          </a:p>
-          <a:p>
-            <a:pPr lvl="2" marL="1143000" indent="-228600" defTabSz="914400">
-              <a:lnSpc>
-                <a:spcPct val="90000"/>
-              </a:lnSpc>
-              <a:spcBef>
-                <a:spcPts val="499"/>
-              </a:spcBef>
-              <a:buClr>
-                <a:srgbClr val="000000"/>
-              </a:buClr>
-              <a:buFont typeface="Arial"/>
-              <a:buChar char="•"/>
-            </a:pPr>
-            <a:r>
-              <a:rPr b="0" lang="es-ES" sz="2400" strike="noStrike" u="none">
-                <a:solidFill>
-                  <a:schemeClr val="dk1"/>
-                </a:solidFill>
-                <a:effectLst/>
-                <a:uFillTx/>
-                <a:latin typeface="Calibri"/>
-              </a:rPr>
-              <a:t>Tercer nivel</a:t>
-            </a:r>
-            <a:endParaRPr b="0" lang="es-ES" sz="2400" strike="noStrike" u="none">
-              <a:solidFill>
-                <a:srgbClr val="000000"/>
-              </a:solidFill>
-              <a:effectLst/>
-              <a:uFillTx/>
-              <a:latin typeface="Arial"/>
-            </a:endParaRPr>
-          </a:p>
-          <a:p>
-            <a:pPr lvl="3" marL="1600200" indent="-228600" defTabSz="914400">
-              <a:lnSpc>
-                <a:spcPct val="90000"/>
-              </a:lnSpc>
-              <a:spcBef>
-                <a:spcPts val="499"/>
-              </a:spcBef>
-              <a:buClr>
-                <a:srgbClr val="000000"/>
-              </a:buClr>
-              <a:buFont typeface="Arial"/>
-              <a:buChar char="•"/>
-            </a:pPr>
-            <a:r>
-              <a:rPr b="0" lang="es-ES" sz="2000" strike="noStrike" u="none">
-                <a:solidFill>
-                  <a:schemeClr val="dk1"/>
-                </a:solidFill>
-                <a:effectLst/>
-                <a:uFillTx/>
-                <a:latin typeface="Calibri"/>
-              </a:rPr>
-              <a:t>Cuarto nivel</a:t>
-            </a:r>
-            <a:endParaRPr b="0" lang="es-ES" sz="2000" strike="noStrike" u="none">
-              <a:solidFill>
-                <a:srgbClr val="000000"/>
-              </a:solidFill>
-              <a:effectLst/>
-              <a:uFillTx/>
-              <a:latin typeface="Arial"/>
-            </a:endParaRPr>
-          </a:p>
-          <a:p>
-            <a:pPr lvl="4" marL="2057400" indent="-228600" defTabSz="914400">
-              <a:lnSpc>
-                <a:spcPct val="90000"/>
-              </a:lnSpc>
-              <a:spcBef>
-                <a:spcPts val="499"/>
-              </a:spcBef>
-              <a:buClr>
-                <a:srgbClr val="000000"/>
-              </a:buClr>
-              <a:buFont typeface="Arial"/>
-              <a:buChar char="•"/>
-            </a:pPr>
-            <a:r>
-              <a:rPr b="0" lang="es-ES" sz="2000" strike="noStrike" u="none">
-                <a:solidFill>
-                  <a:schemeClr val="dk1"/>
-                </a:solidFill>
-                <a:effectLst/>
-                <a:uFillTx/>
-                <a:latin typeface="Calibri"/>
-              </a:rPr>
-              <a:t>Quinto nivel</a:t>
-            </a:r>
-            <a:endParaRPr b="0" lang="es-ES" sz="2000" strike="noStrike" u="none">
-              <a:solidFill>
-                <a:srgbClr val="000000"/>
-              </a:solidFill>
-              <a:effectLst/>
-              <a:uFillTx/>
-              <a:latin typeface="Arial"/>
-            </a:endParaRPr>
-          </a:p>
-        </p:txBody>
-      </p:sp>
-      <p:sp>
-        <p:nvSpPr>
-          <p:cNvPr id="40" name="PlaceHolder 3"/>
-          <p:cNvSpPr>
-            <a:spLocks noGrp="1"/>
-          </p:cNvSpPr>
-          <p:nvPr>
-            <p:ph type="body"/>
-          </p:nvPr>
-        </p:nvSpPr>
-        <p:spPr>
-          <a:xfrm>
-            <a:off x="839880" y="2057400"/>
-            <a:ext cx="3930840" cy="3810240"/>
-          </a:xfrm>
-          <a:prstGeom prst="rect">
-            <a:avLst/>
-          </a:prstGeom>
-          <a:noFill/>
-          <a:ln w="0">
-            <a:noFill/>
-          </a:ln>
-        </p:spPr>
-        <p:txBody>
-          <a:bodyPr lIns="91440" rIns="91440" tIns="45720" bIns="45720" anchor="t">
-            <a:noAutofit/>
-          </a:bodyPr>
-          <a:p>
-            <a:pPr indent="0" defTabSz="914400">
-              <a:lnSpc>
-                <a:spcPct val="90000"/>
-              </a:lnSpc>
-              <a:spcBef>
-                <a:spcPts val="1001"/>
-              </a:spcBef>
-              <a:buNone/>
-              <a:tabLst>
-                <a:tab algn="l" pos="0"/>
-              </a:tabLst>
-            </a:pPr>
-            <a:r>
-              <a:rPr b="0" lang="es-ES" sz="1600" strike="noStrike" u="none">
-                <a:solidFill>
-                  <a:schemeClr val="dk1"/>
-                </a:solidFill>
-                <a:effectLst/>
-                <a:uFillTx/>
-                <a:latin typeface="Calibri"/>
-              </a:rPr>
-              <a:t>Haga clic para modificar los estilos de texto del patrón</a:t>
-            </a:r>
-            <a:endParaRPr b="0" lang="es-ES" sz="1600" strike="noStrike" u="none">
-              <a:solidFill>
-                <a:srgbClr val="000000"/>
-              </a:solidFill>
-              <a:effectLst/>
-              <a:uFillTx/>
-              <a:latin typeface="Arial"/>
-            </a:endParaRPr>
-          </a:p>
-        </p:txBody>
-      </p:sp>
-      <p:sp>
-        <p:nvSpPr>
-          <p:cNvPr id="41" name="PlaceHolder 4"/>
-          <p:cNvSpPr>
-            <a:spLocks noGrp="1"/>
-          </p:cNvSpPr>
-          <p:nvPr>
-            <p:ph type="dt" idx="22"/>
-          </p:nvPr>
-        </p:nvSpPr>
-        <p:spPr>
-          <a:xfrm>
-            <a:off x="838080" y="6356520"/>
-            <a:ext cx="2741760" cy="363600"/>
-          </a:xfrm>
-          <a:prstGeom prst="rect">
-            <a:avLst/>
-          </a:prstGeom>
-          <a:noFill/>
-          <a:ln w="0">
-            <a:noFill/>
-          </a:ln>
-        </p:spPr>
-        <p:txBody>
-          <a:bodyPr lIns="91440" rIns="91440" tIns="45720" bIns="45720" anchor="ctr">
-            <a:noAutofit/>
-          </a:bodyPr>
-          <a:lstStyle>
-            <a:lvl1pPr indent="0" defTabSz="914400">
-              <a:lnSpc>
-                <a:spcPct val="100000"/>
-              </a:lnSpc>
-              <a:buNone/>
-              <a:tabLst>
-                <a:tab algn="l" pos="0"/>
-              </a:tabLst>
-              <a:defRPr b="0" lang="en-GB" sz="1200" strike="noStrike" u="none">
-                <a:solidFill>
-                  <a:schemeClr val="dk1">
-                    <a:tint val="75000"/>
-                  </a:schemeClr>
-                </a:solidFill>
-                <a:effectLst/>
-                <a:uFillTx/>
-                <a:latin typeface="Calibri"/>
-              </a:defRPr>
-            </a:lvl1pPr>
-          </a:lstStyle>
-          <a:p>
-            <a:pPr indent="0" defTabSz="914400">
-              <a:lnSpc>
-                <a:spcPct val="100000"/>
-              </a:lnSpc>
-              <a:buNone/>
-              <a:tabLst>
-                <a:tab algn="l" pos="0"/>
-              </a:tabLst>
-            </a:pPr>
-            <a:r>
-              <a:rPr b="0" lang="en-GB" sz="1200" strike="noStrike" u="none">
-                <a:solidFill>
-                  <a:schemeClr val="dk1">
-                    <a:tint val="75000"/>
-                  </a:schemeClr>
-                </a:solidFill>
-                <a:effectLst/>
-                <a:uFillTx/>
-                <a:latin typeface="Calibri"/>
-              </a:rPr>
-              <a:t>&lt;fecha/hora&gt;</a:t>
-            </a:r>
-            <a:endParaRPr b="0" lang="es-ES" sz="1200" strike="noStrike" u="none">
-              <a:solidFill>
-                <a:srgbClr val="000000"/>
-              </a:solidFill>
-              <a:effectLst/>
-              <a:uFillTx/>
-              <a:latin typeface="Times New Roman"/>
-            </a:endParaRPr>
-          </a:p>
-        </p:txBody>
-      </p:sp>
-      <p:sp>
-        <p:nvSpPr>
-          <p:cNvPr id="42" name="PlaceHolder 5"/>
-          <p:cNvSpPr>
-            <a:spLocks noGrp="1"/>
-          </p:cNvSpPr>
-          <p:nvPr>
-            <p:ph type="ftr" idx="23"/>
-          </p:nvPr>
-        </p:nvSpPr>
-        <p:spPr>
-          <a:xfrm>
-            <a:off x="4038480" y="6356520"/>
-            <a:ext cx="4113360" cy="363600"/>
-          </a:xfrm>
-          <a:prstGeom prst="rect">
-            <a:avLst/>
-          </a:prstGeom>
-          <a:noFill/>
-          <a:ln w="0">
-            <a:noFill/>
-          </a:ln>
-        </p:spPr>
-        <p:txBody>
-          <a:bodyPr lIns="91440" rIns="91440" tIns="45720" bIns="45720" anchor="ctr">
-            <a:noAutofit/>
-          </a:bodyPr>
-          <a:lstStyle>
-            <a:lvl1pPr indent="0" algn="ctr">
-              <a:lnSpc>
-                <a:spcPct val="100000"/>
-              </a:lnSpc>
-              <a:buNone/>
-              <a:tabLst>
-                <a:tab algn="l" pos="0"/>
-              </a:tabLst>
-              <a:defRPr b="0" lang="es-ES" sz="1400" strike="noStrike" u="none">
-                <a:solidFill>
-                  <a:srgbClr val="000000"/>
-                </a:solidFill>
-                <a:effectLst/>
-                <a:uFillTx/>
-                <a:latin typeface="Times New Roman"/>
-              </a:defRPr>
-            </a:lvl1pPr>
-          </a:lstStyle>
-          <a:p>
-            <a:pPr indent="0" algn="ctr">
-              <a:lnSpc>
-                <a:spcPct val="100000"/>
-              </a:lnSpc>
-              <a:buNone/>
-              <a:tabLst>
-                <a:tab algn="l" pos="0"/>
-              </a:tabLst>
-            </a:pPr>
-            <a:r>
-              <a:rPr b="0" lang="es-ES" sz="1400" strike="noStrike" u="none">
-                <a:solidFill>
-                  <a:srgbClr val="000000"/>
-                </a:solidFill>
-                <a:effectLst/>
-                <a:uFillTx/>
-                <a:latin typeface="Times New Roman"/>
-              </a:rPr>
-              <a:t>&lt;pie de página&gt;</a:t>
-            </a:r>
-            <a:endParaRPr b="0" lang="es-ES" sz="1400" strike="noStrike" u="none">
-              <a:solidFill>
-                <a:srgbClr val="000000"/>
-              </a:solidFill>
-              <a:effectLst/>
-              <a:uFillTx/>
-              <a:latin typeface="Times New Roman"/>
-            </a:endParaRPr>
-          </a:p>
-        </p:txBody>
-      </p:sp>
-      <p:sp>
-        <p:nvSpPr>
-          <p:cNvPr id="43" name="PlaceHolder 6"/>
-          <p:cNvSpPr>
-            <a:spLocks noGrp="1"/>
-          </p:cNvSpPr>
-          <p:nvPr>
-            <p:ph type="sldNum" idx="24"/>
-          </p:nvPr>
-        </p:nvSpPr>
-        <p:spPr>
-          <a:xfrm>
-            <a:off x="8610480" y="6356520"/>
-            <a:ext cx="2741760" cy="363600"/>
-          </a:xfrm>
-          <a:prstGeom prst="rect">
-            <a:avLst/>
-          </a:prstGeom>
-          <a:noFill/>
-          <a:ln w="0">
-            <a:noFill/>
-          </a:ln>
-        </p:spPr>
-        <p:txBody>
-          <a:bodyPr lIns="91440" rIns="91440" tIns="45720" bIns="45720" anchor="ctr">
-            <a:noAutofit/>
-          </a:bodyPr>
-          <a:lstStyle>
-            <a:lvl1pPr indent="0" algn="r" defTabSz="914400">
-              <a:lnSpc>
-                <a:spcPct val="100000"/>
-              </a:lnSpc>
-              <a:buNone/>
-              <a:tabLst>
-                <a:tab algn="l" pos="0"/>
-              </a:tabLst>
-              <a:defRPr b="0" lang="en-GB" sz="1200" strike="noStrike" u="none">
-                <a:solidFill>
-                  <a:schemeClr val="dk1">
-                    <a:tint val="75000"/>
-                  </a:schemeClr>
-                </a:solidFill>
-                <a:effectLst/>
-                <a:uFillTx/>
-                <a:latin typeface="Calibri"/>
-              </a:defRPr>
-            </a:lvl1pPr>
-          </a:lstStyle>
-          <a:p>
-            <a:pPr indent="0" algn="r" defTabSz="914400">
-              <a:lnSpc>
-                <a:spcPct val="100000"/>
-              </a:lnSpc>
-              <a:buNone/>
-              <a:tabLst>
-                <a:tab algn="l" pos="0"/>
-              </a:tabLst>
-            </a:pPr>
-            <a:fld id="{74D77408-2B94-46E4-8D03-62361BCFF665}" type="slidenum">
+            <a:fld id="{2FA5C43C-60CE-41E8-8264-A9C2610DBFCA}" type="slidenum">
               <a:rPr b="0" lang="en-GB" sz="1200" strike="noStrike" u="none">
                 <a:solidFill>
                   <a:schemeClr val="dk1">
@@ -5429,8 +5765,8 @@
 </file>
 
 <file path=ppt/slideLayouts/slideLayout9.xml><?xml version="1.0" encoding="utf-8"?>
-<p:sldLayout xmlns:a="http://schemas.openxmlformats.org/drawingml/2006/main" xmlns:p="http://schemas.openxmlformats.org/presentationml/2006/main" xmlns:r="http://schemas.openxmlformats.org/officeDocument/2006/relationships" xmlns:p14="http://schemas.microsoft.com/office/powerpoint/2010/main" xmlns:p15="http://schemas.microsoft.com/office/powerpoint/2012/main" xmlns:mc="http://schemas.openxmlformats.org/markup-compatibility/2006" type="blank" preserve="1">
-  <p:cSld name="Imagen con título">
+<p:sldLayout xmlns:a="http://schemas.openxmlformats.org/drawingml/2006/main" xmlns:p="http://schemas.openxmlformats.org/presentationml/2006/main" xmlns:r="http://schemas.openxmlformats.org/officeDocument/2006/relationships" xmlns:p14="http://schemas.microsoft.com/office/powerpoint/2010/main" xmlns:p15="http://schemas.microsoft.com/office/powerpoint/2012/main" xmlns:mc="http://schemas.openxmlformats.org/markup-compatibility/2006" type="titleOnly" preserve="1">
+  <p:cSld name="Solo el título">
     <p:bg>
       <p:bgPr>
         <a:solidFill>
@@ -5464,8 +5800,8 @@
         </p:nvSpPr>
         <p:spPr>
           <a:xfrm>
-            <a:off x="839880" y="457200"/>
-            <a:ext cx="3930840" cy="1598760"/>
+            <a:off x="838080" y="365040"/>
+            <a:ext cx="10513800" cy="1323720"/>
           </a:xfrm>
           <a:prstGeom prst="rect">
             <a:avLst/>
@@ -5476,7 +5812,7 @@
           </a:ln>
         </p:spPr>
         <p:txBody>
-          <a:bodyPr lIns="91440" rIns="91440" tIns="45720" bIns="45720" anchor="b">
+          <a:bodyPr lIns="91440" rIns="91440" tIns="45720" bIns="45720" anchor="ctr">
             <a:noAutofit/>
           </a:bodyPr>
           <a:p>
@@ -5490,7 +5826,7 @@
               </a:tabLst>
             </a:pPr>
             <a:r>
-              <a:rPr b="0" lang="es-ES" sz="3200" strike="noStrike" u="none">
+              <a:rPr b="0" lang="es-ES" sz="4400" strike="noStrike" u="none">
                 <a:solidFill>
                   <a:schemeClr val="dk1"/>
                 </a:solidFill>
@@ -5500,7 +5836,7 @@
               </a:rPr>
               <a:t>Haga clic para modificar el estilo de título del patrón</a:t>
             </a:r>
-            <a:endParaRPr b="0" lang="es-ES" sz="3200" strike="noStrike" u="none">
+            <a:endParaRPr b="0" lang="es-ES" sz="4400" strike="noStrike" u="none">
               <a:solidFill>
                 <a:srgbClr val="000000"/>
               </a:solidFill>
@@ -5514,342 +5850,6 @@
       <p:sp>
         <p:nvSpPr>
           <p:cNvPr id="45" name="PlaceHolder 2"/>
-          <p:cNvSpPr>
-            <a:spLocks noGrp="1"/>
-          </p:cNvSpPr>
-          <p:nvPr>
-            <p:ph type="body"/>
-          </p:nvPr>
-        </p:nvSpPr>
-        <p:spPr>
-          <a:xfrm>
-            <a:off x="5183280" y="987480"/>
-            <a:ext cx="6170760" cy="4872240"/>
-          </a:xfrm>
-          <a:prstGeom prst="rect">
-            <a:avLst/>
-          </a:prstGeom>
-          <a:noFill/>
-          <a:ln w="0">
-            <a:noFill/>
-          </a:ln>
-        </p:spPr>
-        <p:txBody>
-          <a:bodyPr lIns="90000" rIns="90000" tIns="45000" bIns="45000" anchor="t">
-            <a:noAutofit/>
-          </a:bodyPr>
-          <a:p>
-            <a:pPr marL="432000" indent="-324000">
-              <a:lnSpc>
-                <a:spcPct val="90000"/>
-              </a:lnSpc>
-              <a:spcBef>
-                <a:spcPts val="1417"/>
-              </a:spcBef>
-              <a:buClr>
-                <a:srgbClr val="000000"/>
-              </a:buClr>
-              <a:buSzPct val="45000"/>
-              <a:buFont typeface="Wingdings" charset="2"/>
-              <a:buChar char=""/>
-            </a:pPr>
-            <a:r>
-              <a:rPr b="0" lang="es-ES" sz="3200" strike="noStrike" u="none">
-                <a:solidFill>
-                  <a:schemeClr val="dk1"/>
-                </a:solidFill>
-                <a:effectLst/>
-                <a:uFillTx/>
-                <a:latin typeface="Calibri"/>
-              </a:rPr>
-              <a:t>Pulse para editar el formato de texto del esquema</a:t>
-            </a:r>
-            <a:endParaRPr b="0" lang="es-ES" sz="3200" strike="noStrike" u="none">
-              <a:solidFill>
-                <a:srgbClr val="000000"/>
-              </a:solidFill>
-              <a:effectLst/>
-              <a:uFillTx/>
-              <a:latin typeface="Arial"/>
-            </a:endParaRPr>
-          </a:p>
-          <a:p>
-            <a:pPr lvl="1" marL="864000" indent="-324000">
-              <a:lnSpc>
-                <a:spcPct val="90000"/>
-              </a:lnSpc>
-              <a:spcBef>
-                <a:spcPts val="1134"/>
-              </a:spcBef>
-              <a:buClr>
-                <a:srgbClr val="000000"/>
-              </a:buClr>
-              <a:buSzPct val="75000"/>
-              <a:buFont typeface="Symbol" charset="2"/>
-              <a:buChar char=""/>
-            </a:pPr>
-            <a:r>
-              <a:rPr b="0" lang="es-ES" sz="3200" strike="noStrike" u="none">
-                <a:solidFill>
-                  <a:schemeClr val="dk1"/>
-                </a:solidFill>
-                <a:effectLst/>
-                <a:uFillTx/>
-                <a:latin typeface="Calibri"/>
-              </a:rPr>
-              <a:t>Segundo nivel del esquema</a:t>
-            </a:r>
-            <a:endParaRPr b="0" lang="es-ES" sz="3200" strike="noStrike" u="none">
-              <a:solidFill>
-                <a:srgbClr val="000000"/>
-              </a:solidFill>
-              <a:effectLst/>
-              <a:uFillTx/>
-              <a:latin typeface="Arial"/>
-            </a:endParaRPr>
-          </a:p>
-          <a:p>
-            <a:pPr lvl="2" marL="1296000" indent="-288000">
-              <a:lnSpc>
-                <a:spcPct val="90000"/>
-              </a:lnSpc>
-              <a:spcBef>
-                <a:spcPts val="850"/>
-              </a:spcBef>
-              <a:buClr>
-                <a:srgbClr val="000000"/>
-              </a:buClr>
-              <a:buSzPct val="45000"/>
-              <a:buFont typeface="Wingdings" charset="2"/>
-              <a:buChar char=""/>
-            </a:pPr>
-            <a:r>
-              <a:rPr b="0" lang="es-ES" sz="3200" strike="noStrike" u="none">
-                <a:solidFill>
-                  <a:schemeClr val="dk1"/>
-                </a:solidFill>
-                <a:effectLst/>
-                <a:uFillTx/>
-                <a:latin typeface="Calibri"/>
-              </a:rPr>
-              <a:t>Tercer nivel del esquema</a:t>
-            </a:r>
-            <a:endParaRPr b="0" lang="es-ES" sz="3200" strike="noStrike" u="none">
-              <a:solidFill>
-                <a:srgbClr val="000000"/>
-              </a:solidFill>
-              <a:effectLst/>
-              <a:uFillTx/>
-              <a:latin typeface="Arial"/>
-            </a:endParaRPr>
-          </a:p>
-          <a:p>
-            <a:pPr lvl="3" marL="1728000" indent="-216000">
-              <a:lnSpc>
-                <a:spcPct val="90000"/>
-              </a:lnSpc>
-              <a:spcBef>
-                <a:spcPts val="567"/>
-              </a:spcBef>
-              <a:buClr>
-                <a:srgbClr val="000000"/>
-              </a:buClr>
-              <a:buSzPct val="75000"/>
-              <a:buFont typeface="Symbol" charset="2"/>
-              <a:buChar char=""/>
-            </a:pPr>
-            <a:r>
-              <a:rPr b="0" lang="es-ES" sz="3200" strike="noStrike" u="none">
-                <a:solidFill>
-                  <a:schemeClr val="dk1"/>
-                </a:solidFill>
-                <a:effectLst/>
-                <a:uFillTx/>
-                <a:latin typeface="Calibri"/>
-              </a:rPr>
-              <a:t>Cuarto nivel del esquema</a:t>
-            </a:r>
-            <a:endParaRPr b="0" lang="es-ES" sz="3200" strike="noStrike" u="none">
-              <a:solidFill>
-                <a:srgbClr val="000000"/>
-              </a:solidFill>
-              <a:effectLst/>
-              <a:uFillTx/>
-              <a:latin typeface="Arial"/>
-            </a:endParaRPr>
-          </a:p>
-          <a:p>
-            <a:pPr lvl="4" marL="2160000" indent="-216000">
-              <a:lnSpc>
-                <a:spcPct val="90000"/>
-              </a:lnSpc>
-              <a:spcBef>
-                <a:spcPts val="283"/>
-              </a:spcBef>
-              <a:buClr>
-                <a:srgbClr val="000000"/>
-              </a:buClr>
-              <a:buSzPct val="45000"/>
-              <a:buFont typeface="Wingdings" charset="2"/>
-              <a:buChar char=""/>
-            </a:pPr>
-            <a:r>
-              <a:rPr b="0" lang="es-ES" sz="3200" strike="noStrike" u="none">
-                <a:solidFill>
-                  <a:schemeClr val="dk1"/>
-                </a:solidFill>
-                <a:effectLst/>
-                <a:uFillTx/>
-                <a:latin typeface="Calibri"/>
-              </a:rPr>
-              <a:t>Quinto nivel del esquema</a:t>
-            </a:r>
-            <a:endParaRPr b="0" lang="es-ES" sz="3200" strike="noStrike" u="none">
-              <a:solidFill>
-                <a:srgbClr val="000000"/>
-              </a:solidFill>
-              <a:effectLst/>
-              <a:uFillTx/>
-              <a:latin typeface="Arial"/>
-            </a:endParaRPr>
-          </a:p>
-          <a:p>
-            <a:pPr lvl="5" marL="2592000" indent="-216000">
-              <a:lnSpc>
-                <a:spcPct val="90000"/>
-              </a:lnSpc>
-              <a:spcBef>
-                <a:spcPts val="283"/>
-              </a:spcBef>
-              <a:buClr>
-                <a:srgbClr val="000000"/>
-              </a:buClr>
-              <a:buSzPct val="45000"/>
-              <a:buFont typeface="Wingdings" charset="2"/>
-              <a:buChar char=""/>
-            </a:pPr>
-            <a:r>
-              <a:rPr b="0" lang="es-ES" sz="3200" strike="noStrike" u="none">
-                <a:solidFill>
-                  <a:schemeClr val="dk1"/>
-                </a:solidFill>
-                <a:effectLst/>
-                <a:uFillTx/>
-                <a:latin typeface="Calibri"/>
-              </a:rPr>
-              <a:t>Sexto nivel del esquema</a:t>
-            </a:r>
-            <a:endParaRPr b="0" lang="es-ES" sz="3200" strike="noStrike" u="none">
-              <a:solidFill>
-                <a:srgbClr val="000000"/>
-              </a:solidFill>
-              <a:effectLst/>
-              <a:uFillTx/>
-              <a:latin typeface="Arial"/>
-            </a:endParaRPr>
-          </a:p>
-          <a:p>
-            <a:pPr lvl="6" marL="3024000" indent="-216000">
-              <a:lnSpc>
-                <a:spcPct val="90000"/>
-              </a:lnSpc>
-              <a:spcBef>
-                <a:spcPts val="283"/>
-              </a:spcBef>
-              <a:buClr>
-                <a:srgbClr val="000000"/>
-              </a:buClr>
-              <a:buSzPct val="45000"/>
-              <a:buFont typeface="Wingdings" charset="2"/>
-              <a:buChar char=""/>
-            </a:pPr>
-            <a:r>
-              <a:rPr b="0" lang="es-ES" sz="3200" strike="noStrike" u="none">
-                <a:solidFill>
-                  <a:schemeClr val="dk1"/>
-                </a:solidFill>
-                <a:effectLst/>
-                <a:uFillTx/>
-                <a:latin typeface="Calibri"/>
-              </a:rPr>
-              <a:t>Séptimo nivel del esquema</a:t>
-            </a:r>
-            <a:endParaRPr b="0" lang="es-ES" sz="3200" strike="noStrike" u="none">
-              <a:solidFill>
-                <a:srgbClr val="000000"/>
-              </a:solidFill>
-              <a:effectLst/>
-              <a:uFillTx/>
-              <a:latin typeface="Arial"/>
-            </a:endParaRPr>
-          </a:p>
-        </p:txBody>
-      </p:sp>
-      <p:sp>
-        <p:nvSpPr>
-          <p:cNvPr id="46" name="PlaceHolder 3"/>
-          <p:cNvSpPr>
-            <a:spLocks noGrp="1"/>
-          </p:cNvSpPr>
-          <p:nvPr>
-            <p:ph type="body"/>
-          </p:nvPr>
-        </p:nvSpPr>
-        <p:spPr>
-          <a:xfrm>
-            <a:off x="839880" y="2057400"/>
-            <a:ext cx="3930840" cy="3810240"/>
-          </a:xfrm>
-          <a:prstGeom prst="rect">
-            <a:avLst/>
-          </a:prstGeom>
-          <a:noFill/>
-          <a:ln w="0">
-            <a:noFill/>
-          </a:ln>
-        </p:spPr>
-        <p:txBody>
-          <a:bodyPr lIns="91440" rIns="91440" tIns="45720" bIns="45720" anchor="t">
-            <a:noAutofit/>
-          </a:bodyPr>
-          <a:p>
-            <a:pPr indent="0" defTabSz="914400">
-              <a:lnSpc>
-                <a:spcPct val="90000"/>
-              </a:lnSpc>
-              <a:spcBef>
-                <a:spcPts val="1001"/>
-              </a:spcBef>
-              <a:buNone/>
-              <a:tabLst>
-                <a:tab algn="l" pos="0"/>
-              </a:tabLst>
-            </a:pPr>
-            <a:r>
-              <a:rPr b="0" lang="es-ES" sz="1600" strike="noStrike" u="none">
-                <a:solidFill>
-                  <a:schemeClr val="dk1"/>
-                </a:solidFill>
-                <a:effectLst/>
-                <a:uFillTx/>
-                <a:latin typeface="Calibri"/>
-              </a:rPr>
-              <a:t>Haga clic para modificar los estilos de texto del patrón</a:t>
-            </a:r>
-            <a:endParaRPr b="0" lang="es-ES" sz="1600" strike="noStrike" u="none">
-              <a:solidFill>
-                <a:srgbClr val="000000"/>
-              </a:solidFill>
-              <a:effectLst/>
-              <a:uFillTx/>
-              <a:latin typeface="Arial"/>
-            </a:endParaRPr>
-          </a:p>
-        </p:txBody>
-      </p:sp>
-      <p:sp>
-        <p:nvSpPr>
-          <p:cNvPr id="47" name="PlaceHolder 4"/>
           <p:cNvSpPr>
             <a:spLocks noGrp="1"/>
           </p:cNvSpPr>
@@ -5860,7 +5860,7 @@
         <p:spPr>
           <a:xfrm>
             <a:off x="838080" y="6356520"/>
-            <a:ext cx="2741760" cy="363600"/>
+            <a:ext cx="2741400" cy="363240"/>
           </a:xfrm>
           <a:prstGeom prst="rect">
             <a:avLst/>
@@ -5931,7 +5931,7 @@
       </p:sp>
       <p:sp>
         <p:nvSpPr>
-          <p:cNvPr id="48" name="PlaceHolder 5"/>
+          <p:cNvPr id="46" name="PlaceHolder 3"/>
           <p:cNvSpPr>
             <a:spLocks noGrp="1"/>
           </p:cNvSpPr>
@@ -5942,7 +5942,7 @@
         <p:spPr>
           <a:xfrm>
             <a:off x="4038480" y="6356520"/>
-            <a:ext cx="4113360" cy="363600"/>
+            <a:ext cx="4113000" cy="363240"/>
           </a:xfrm>
           <a:prstGeom prst="rect">
             <a:avLst/>
@@ -6009,7 +6009,7 @@
       </p:sp>
       <p:sp>
         <p:nvSpPr>
-          <p:cNvPr id="49" name="PlaceHolder 6"/>
+          <p:cNvPr id="47" name="PlaceHolder 4"/>
           <p:cNvSpPr>
             <a:spLocks noGrp="1"/>
           </p:cNvSpPr>
@@ -6020,7 +6020,7 @@
         <p:spPr>
           <a:xfrm>
             <a:off x="8610480" y="6356520"/>
-            <a:ext cx="2741760" cy="363600"/>
+            <a:ext cx="2741400" cy="363240"/>
           </a:xfrm>
           <a:prstGeom prst="rect">
             <a:avLst/>
@@ -6065,7 +6065,7 @@
                 <a:tab algn="l" pos="0"/>
               </a:tabLst>
             </a:pPr>
-            <a:fld id="{A9B25A48-9B82-4F47-9AB3-95D317251BC2}" type="slidenum">
+            <a:fld id="{D49D662C-69EE-43E3-B2A3-2BEB3F1D7A4A}" type="slidenum">
               <a:rPr b="0" lang="en-GB" sz="1200" strike="noStrike" u="none">
                 <a:solidFill>
                   <a:schemeClr val="dk1">
@@ -6156,7 +6156,7 @@
         <p:spPr>
           <a:xfrm>
             <a:off x="3651840" y="1213920"/>
-            <a:ext cx="2518920" cy="4988160"/>
+            <a:ext cx="2518560" cy="4987800"/>
           </a:xfrm>
           <a:prstGeom prst="rect">
             <a:avLst/>
@@ -6609,14 +6609,128 @@
       </p:sp>
       <p:sp>
         <p:nvSpPr>
-          <p:cNvPr id="60" name="2 Marcador de contenido 1"/>
+          <p:cNvPr id="60" name="CuadroTexto 35"/>
           <p:cNvSpPr/>
           <p:nvPr/>
         </p:nvSpPr>
         <p:spPr>
           <a:xfrm>
-            <a:off x="723240" y="1083240"/>
-            <a:ext cx="2518920" cy="5219280"/>
+            <a:off x="644760" y="363240"/>
+            <a:ext cx="2237400" cy="638280"/>
+          </a:xfrm>
+          <a:prstGeom prst="rect">
+            <a:avLst/>
+          </a:prstGeom>
+          <a:noFill/>
+          <a:ln w="0">
+            <a:noFill/>
+          </a:ln>
+        </p:spPr>
+        <p:style>
+          <a:lnRef idx="0"/>
+          <a:fillRef idx="0"/>
+          <a:effectRef idx="0"/>
+          <a:fontRef idx="minor"/>
+        </p:style>
+        <p:txBody>
+          <a:bodyPr lIns="90000" rIns="90000" tIns="45000" bIns="45000" anchor="t">
+            <a:spAutoFit/>
+          </a:bodyPr>
+          <a:p>
+            <a:pPr defTabSz="914400">
+              <a:lnSpc>
+                <a:spcPct val="100000"/>
+              </a:lnSpc>
+            </a:pPr>
+            <a:r>
+              <a:rPr b="0" lang="en-GB" sz="1800" strike="noStrike" u="none">
+                <a:solidFill>
+                  <a:schemeClr val="dk1"/>
+                </a:solidFill>
+                <a:effectLst/>
+                <a:uFillTx/>
+                <a:latin typeface="Calibri"/>
+              </a:rPr>
+              <a:t>Plantilla contenedor principal</a:t>
+            </a:r>
+            <a:endParaRPr b="0" lang="es-ES" sz="1800" strike="noStrike" u="none">
+              <a:solidFill>
+                <a:srgbClr val="000000"/>
+              </a:solidFill>
+              <a:effectLst/>
+              <a:uFillTx/>
+              <a:latin typeface="Arial"/>
+            </a:endParaRPr>
+          </a:p>
+        </p:txBody>
+      </p:sp>
+      <p:sp>
+        <p:nvSpPr>
+          <p:cNvPr id="61" name="CuadroTexto 36"/>
+          <p:cNvSpPr/>
+          <p:nvPr/>
+        </p:nvSpPr>
+        <p:spPr>
+          <a:xfrm>
+            <a:off x="3651840" y="567720"/>
+            <a:ext cx="2422440" cy="638280"/>
+          </a:xfrm>
+          <a:prstGeom prst="rect">
+            <a:avLst/>
+          </a:prstGeom>
+          <a:noFill/>
+          <a:ln w="0">
+            <a:noFill/>
+          </a:ln>
+        </p:spPr>
+        <p:style>
+          <a:lnRef idx="0"/>
+          <a:fillRef idx="0"/>
+          <a:effectRef idx="0"/>
+          <a:fontRef idx="minor"/>
+        </p:style>
+        <p:txBody>
+          <a:bodyPr lIns="90000" rIns="90000" tIns="45000" bIns="45000" anchor="t">
+            <a:spAutoFit/>
+          </a:bodyPr>
+          <a:p>
+            <a:pPr defTabSz="914400">
+              <a:lnSpc>
+                <a:spcPct val="100000"/>
+              </a:lnSpc>
+            </a:pPr>
+            <a:r>
+              <a:rPr b="0" lang="en-GB" sz="1800" strike="noStrike" u="none">
+                <a:solidFill>
+                  <a:schemeClr val="dk1"/>
+                </a:solidFill>
+                <a:effectLst/>
+                <a:uFillTx/>
+                <a:latin typeface="Calibri"/>
+              </a:rPr>
+              <a:t>Regular container template</a:t>
+            </a:r>
+            <a:endParaRPr b="0" lang="es-ES" sz="1800" strike="noStrike" u="none">
+              <a:solidFill>
+                <a:srgbClr val="000000"/>
+              </a:solidFill>
+              <a:effectLst/>
+              <a:uFillTx/>
+              <a:latin typeface="Arial"/>
+            </a:endParaRPr>
+          </a:p>
+        </p:txBody>
+      </p:sp>
+      <p:sp>
+        <p:nvSpPr>
+          <p:cNvPr id="62" name="2 Marcador de contenido 3"/>
+          <p:cNvSpPr/>
+          <p:nvPr/>
+        </p:nvSpPr>
+        <p:spPr>
+          <a:xfrm>
+            <a:off x="541440" y="1080360"/>
+            <a:ext cx="2518560" cy="5399640"/>
           </a:xfrm>
           <a:prstGeom prst="rect">
             <a:avLst/>
@@ -6819,7 +6933,7 @@
                 <a:uFillTx/>
                 <a:latin typeface="Lucida Handwriting"/>
               </a:rPr>
-              <a:t>Abrir actividades</a:t>
+              <a:t>Ir a Actividades</a:t>
             </a:r>
             <a:endParaRPr b="0" lang="es-ES" sz="1000" strike="noStrike" u="none">
               <a:solidFill>
@@ -6860,7 +6974,7 @@
                 <a:uFillTx/>
                 <a:latin typeface="Lucida Handwriting"/>
               </a:rPr>
-              <a:t>Importar GPX</a:t>
+              <a:t>Ir a Historial</a:t>
             </a:r>
             <a:endParaRPr b="0" lang="es-ES" sz="1000" strike="noStrike" u="none">
               <a:solidFill>
@@ -6901,7 +7015,7 @@
                 <a:uFillTx/>
                 <a:latin typeface="Lucida Handwriting"/>
               </a:rPr>
-              <a:t>Abrir historial</a:t>
+              <a:t>Ir a Mapas</a:t>
             </a:r>
             <a:endParaRPr b="0" lang="es-ES" sz="1000" strike="noStrike" u="none">
               <a:solidFill>
@@ -6942,7 +7056,7 @@
                 <a:uFillTx/>
                 <a:latin typeface="Lucida Handwriting"/>
               </a:rPr>
-              <a:t>Gestionar mapas</a:t>
+              <a:t>Ir a Perfil</a:t>
             </a:r>
             <a:endParaRPr b="0" lang="es-ES" sz="1000" strike="noStrike" u="none">
               <a:solidFill>
@@ -6983,7 +7097,7 @@
                 <a:uFillTx/>
                 <a:latin typeface="Lucida Handwriting"/>
               </a:rPr>
-              <a:t>Modificar perfil</a:t>
+              <a:t>Cerrar sesión</a:t>
             </a:r>
             <a:endParaRPr b="0" lang="es-ES" sz="1000" strike="noStrike" u="none">
               <a:solidFill>
@@ -6995,9 +7109,72 @@
             </a:endParaRPr>
           </a:p>
           <a:p>
-            <a:pPr lvl="1" marL="450720" indent="-228600" defTabSz="914400">
-              <a:lnSpc>
-                <a:spcPct val="100000"/>
+            <a:pPr defTabSz="914400">
+              <a:lnSpc>
+                <a:spcPct val="90000"/>
+              </a:lnSpc>
+              <a:tabLst>
+                <a:tab algn="l" pos="355680"/>
+              </a:tabLst>
+            </a:pPr>
+            <a:endParaRPr b="0" lang="es-ES" sz="1000" strike="noStrike" u="none">
+              <a:solidFill>
+                <a:srgbClr val="000000"/>
+              </a:solidFill>
+              <a:effectLst/>
+              <a:uFillTx/>
+              <a:latin typeface="Arial"/>
+            </a:endParaRPr>
+          </a:p>
+          <a:p>
+            <a:pPr defTabSz="914400">
+              <a:lnSpc>
+                <a:spcPct val="90000"/>
+              </a:lnSpc>
+              <a:spcBef>
+                <a:spcPts val="1001"/>
+              </a:spcBef>
+              <a:tabLst>
+                <a:tab algn="l" pos="0"/>
+              </a:tabLst>
+            </a:pPr>
+            <a:r>
+              <a:rPr b="0" i="1" lang="en-GB" sz="1200" strike="noStrike" u="none">
+                <a:solidFill>
+                  <a:schemeClr val="dk1"/>
+                </a:solidFill>
+                <a:effectLst/>
+                <a:uFillTx/>
+                <a:latin typeface="Calibri"/>
+                <a:ea typeface="Microsoft YaHei"/>
+              </a:rPr>
+              <a:t>Enlaces</a:t>
+            </a:r>
+            <a:r>
+              <a:rPr b="0" lang="en-GB" sz="1200" strike="noStrike" u="none">
+                <a:solidFill>
+                  <a:schemeClr val="dk1"/>
+                </a:solidFill>
+                <a:effectLst/>
+                <a:uFillTx/>
+                <a:latin typeface="Calibri"/>
+                <a:ea typeface="Microsoft YaHei"/>
+              </a:rPr>
+              <a:t>: </a:t>
+            </a:r>
+            <a:endParaRPr b="0" lang="es-ES" sz="1200" strike="noStrike" u="none">
+              <a:solidFill>
+                <a:srgbClr val="000000"/>
+              </a:solidFill>
+              <a:effectLst/>
+              <a:uFillTx/>
+              <a:latin typeface="Arial"/>
+            </a:endParaRPr>
+          </a:p>
+          <a:p>
+            <a:pPr marL="268200" defTabSz="914400">
+              <a:lnSpc>
+                <a:spcPct val="90000"/>
               </a:lnSpc>
               <a:spcBef>
                 <a:spcPts val="340"/>
@@ -7005,14 +7182,8 @@
               <a:spcAft>
                 <a:spcPts val="142"/>
               </a:spcAft>
-              <a:buClr>
-                <a:srgbClr val="000000"/>
-              </a:buClr>
-              <a:buSzPct val="200000"/>
-              <a:buFont typeface="Arial"/>
-              <a:buChar char="•"/>
-              <a:tabLst>
-                <a:tab algn="l" pos="355680"/>
+              <a:tabLst>
+                <a:tab algn="l" pos="0"/>
               </a:tabLst>
             </a:pPr>
             <a:r>
@@ -7023,73 +7194,11 @@
                 <a:effectLst/>
                 <a:uFillTx/>
                 <a:latin typeface="Lucida Handwriting"/>
-              </a:rPr>
-              <a:t>Cerrar sesión</a:t>
+                <a:ea typeface="Microsoft YaHei"/>
+              </a:rPr>
+              <a:t>► Actividades</a:t>
             </a:r>
             <a:endParaRPr b="0" lang="es-ES" sz="1000" strike="noStrike" u="none">
-              <a:solidFill>
-                <a:srgbClr val="000000"/>
-              </a:solidFill>
-              <a:effectLst/>
-              <a:uFillTx/>
-              <a:latin typeface="Arial"/>
-            </a:endParaRPr>
-          </a:p>
-          <a:p>
-            <a:pPr defTabSz="914400">
-              <a:lnSpc>
-                <a:spcPct val="90000"/>
-              </a:lnSpc>
-              <a:tabLst>
-                <a:tab algn="l" pos="355680"/>
-              </a:tabLst>
-            </a:pPr>
-            <a:endParaRPr b="0" lang="es-ES" sz="1000" strike="noStrike" u="none">
-              <a:solidFill>
-                <a:srgbClr val="000000"/>
-              </a:solidFill>
-              <a:effectLst/>
-              <a:uFillTx/>
-              <a:latin typeface="Arial"/>
-            </a:endParaRPr>
-          </a:p>
-          <a:p>
-            <a:pPr defTabSz="914400">
-              <a:lnSpc>
-                <a:spcPct val="90000"/>
-              </a:lnSpc>
-              <a:spcBef>
-                <a:spcPts val="1001"/>
-              </a:spcBef>
-              <a:tabLst>
-                <a:tab algn="l" pos="0"/>
-              </a:tabLst>
-            </a:pPr>
-            <a:r>
-              <a:rPr b="0" i="1" lang="en-GB" sz="1200" strike="noStrike" u="none">
-                <a:solidFill>
-                  <a:schemeClr val="dk1"/>
-                </a:solidFill>
-                <a:effectLst/>
-                <a:uFillTx/>
-                <a:latin typeface="Calibri"/>
-                <a:ea typeface="Microsoft YaHei"/>
-              </a:rPr>
-              <a:t>Enlaces</a:t>
-            </a:r>
-            <a:r>
-              <a:rPr b="0" lang="en-GB" sz="1200" strike="noStrike" u="none">
-                <a:solidFill>
-                  <a:schemeClr val="dk1"/>
-                </a:solidFill>
-                <a:effectLst/>
-                <a:uFillTx/>
-                <a:latin typeface="Calibri"/>
-                <a:ea typeface="Microsoft YaHei"/>
-              </a:rPr>
-              <a:t>: </a:t>
-            </a:r>
-            <a:endParaRPr b="0" lang="es-ES" sz="1200" strike="noStrike" u="none">
               <a:solidFill>
                 <a:srgbClr val="000000"/>
               </a:solidFill>
@@ -7123,7 +7232,7 @@
                 <a:latin typeface="Lucida Handwriting"/>
                 <a:ea typeface="Microsoft YaHei"/>
               </a:rPr>
-              <a:t>► Actividades</a:t>
+              <a:t>► Historial</a:t>
             </a:r>
             <a:endParaRPr b="0" lang="es-ES" sz="1000" strike="noStrike" u="none">
               <a:solidFill>
@@ -7159,7 +7268,7 @@
                 <a:latin typeface="Lucida Handwriting"/>
                 <a:ea typeface="Microsoft YaHei"/>
               </a:rPr>
-              <a:t>► Historial</a:t>
+              <a:t>► Perfil</a:t>
             </a:r>
             <a:endParaRPr b="0" lang="es-ES" sz="1000" strike="noStrike" u="none">
               <a:solidFill>
@@ -7195,9 +7304,75 @@
                 <a:latin typeface="Lucida Handwriting"/>
                 <a:ea typeface="Microsoft YaHei"/>
               </a:rPr>
-              <a:t>► Perfil</a:t>
+              <a:t>► Mapas</a:t>
             </a:r>
             <a:endParaRPr b="0" lang="es-ES" sz="1000" strike="noStrike" u="none">
+              <a:solidFill>
+                <a:srgbClr val="000000"/>
+              </a:solidFill>
+              <a:effectLst/>
+              <a:uFillTx/>
+              <a:latin typeface="Arial"/>
+            </a:endParaRPr>
+          </a:p>
+          <a:p>
+            <a:pPr marL="268200" defTabSz="914400">
+              <a:lnSpc>
+                <a:spcPct val="90000"/>
+              </a:lnSpc>
+              <a:spcBef>
+                <a:spcPts val="434"/>
+              </a:spcBef>
+              <a:tabLst>
+                <a:tab algn="l" pos="0"/>
+              </a:tabLst>
+            </a:pPr>
+            <a:endParaRPr b="0" lang="es-ES" sz="1200" strike="noStrike" u="none">
+              <a:solidFill>
+                <a:srgbClr val="000000"/>
+              </a:solidFill>
+              <a:effectLst/>
+              <a:uFillTx/>
+              <a:latin typeface="Arial"/>
+            </a:endParaRPr>
+          </a:p>
+          <a:p>
+            <a:pPr marL="268200" defTabSz="914400">
+              <a:lnSpc>
+                <a:spcPct val="90000"/>
+              </a:lnSpc>
+              <a:spcBef>
+                <a:spcPts val="434"/>
+              </a:spcBef>
+              <a:tabLst>
+                <a:tab algn="l" pos="0"/>
+              </a:tabLst>
+            </a:pPr>
+            <a:r>
+              <a:rPr b="0" i="1" lang="en-GB" sz="1200" strike="noStrike" u="none">
+                <a:solidFill>
+                  <a:schemeClr val="dk1"/>
+                </a:solidFill>
+                <a:effectLst/>
+                <a:uFillTx/>
+                <a:latin typeface="Calibri"/>
+                <a:ea typeface="Microsoft YaHei"/>
+              </a:rPr>
+              <a:t>Objectos</a:t>
+            </a:r>
+            <a:r>
+              <a:rPr b="0" lang="en-GB" sz="1200" strike="noStrike" u="none">
+                <a:solidFill>
+                  <a:schemeClr val="dk1"/>
+                </a:solidFill>
+                <a:effectLst/>
+                <a:uFillTx/>
+                <a:latin typeface="Calibri"/>
+                <a:ea typeface="Microsoft YaHei"/>
+              </a:rPr>
+              <a:t>:</a:t>
+            </a:r>
+            <a:endParaRPr b="0" lang="es-ES" sz="1200" strike="noStrike" u="none">
               <a:solidFill>
                 <a:srgbClr val="000000"/>
               </a:solidFill>
@@ -7222,18 +7397,30 @@
               </a:tabLst>
             </a:pPr>
             <a:r>
-              <a:rPr b="0" lang="en-GB" sz="1000" strike="noStrike" u="none">
-                <a:solidFill>
-                  <a:schemeClr val="dk1"/>
-                </a:solidFill>
-                <a:effectLst/>
-                <a:uFillTx/>
-                <a:latin typeface="Lucida Handwriting"/>
+              <a:rPr b="0" i="1" lang="en-GB" sz="1200" strike="noStrike" u="none">
+                <a:solidFill>
+                  <a:schemeClr val="dk1"/>
+                </a:solidFill>
+                <a:effectLst/>
+                <a:uFillTx/>
+                <a:latin typeface="Calibri"/>
                 <a:ea typeface="Microsoft YaHei"/>
               </a:rPr>
-              <a:t>► Mapas</a:t>
-            </a:r>
-            <a:endParaRPr b="0" lang="es-ES" sz="1000" strike="noStrike" u="none">
+              <a:t>Restricciones</a:t>
+            </a:r>
+            <a:r>
+              <a:rPr b="0" lang="en-GB" sz="1200" strike="noStrike" u="none">
+                <a:solidFill>
+                  <a:schemeClr val="dk1"/>
+                </a:solidFill>
+                <a:effectLst/>
+                <a:uFillTx/>
+                <a:latin typeface="Calibri"/>
+                <a:ea typeface="Microsoft YaHei"/>
+              </a:rPr>
+              <a:t>: </a:t>
+            </a:r>
+            <a:endParaRPr b="0" lang="es-ES" sz="1200" strike="noStrike" u="none">
               <a:solidFill>
                 <a:srgbClr val="000000"/>
               </a:solidFill>
@@ -7258,181 +7445,16 @@
               </a:tabLst>
             </a:pPr>
             <a:r>
-              <a:rPr b="0" lang="en-GB" sz="1000" strike="noStrike" u="none">
-                <a:solidFill>
-                  <a:schemeClr val="dk1"/>
-                </a:solidFill>
-                <a:effectLst/>
-                <a:uFillTx/>
-                <a:latin typeface="Lucida Handwriting"/>
+              <a:rPr b="0" lang="en-GB" sz="1200" strike="noStrike" u="none">
+                <a:solidFill>
+                  <a:schemeClr val="dk1"/>
+                </a:solidFill>
+                <a:effectLst/>
+                <a:uFillTx/>
+                <a:latin typeface="Calibri"/>
                 <a:ea typeface="Microsoft YaHei"/>
               </a:rPr>
-              <a:t>► Logout</a:t>
-            </a:r>
-            <a:endParaRPr b="0" lang="es-ES" sz="1000" strike="noStrike" u="none">
-              <a:solidFill>
-                <a:srgbClr val="000000"/>
-              </a:solidFill>
-              <a:effectLst/>
-              <a:uFillTx/>
-              <a:latin typeface="Arial"/>
-            </a:endParaRPr>
-          </a:p>
-          <a:p>
-            <a:pPr marL="268200" defTabSz="914400">
-              <a:lnSpc>
-                <a:spcPct val="90000"/>
-              </a:lnSpc>
-              <a:spcBef>
-                <a:spcPts val="434"/>
-              </a:spcBef>
-              <a:tabLst>
-                <a:tab algn="l" pos="0"/>
-              </a:tabLst>
-            </a:pPr>
-            <a:r>
-              <a:rPr b="0" i="1" lang="en-GB" sz="1200" strike="noStrike" u="none">
-                <a:solidFill>
-                  <a:schemeClr val="dk1"/>
-                </a:solidFill>
-                <a:effectLst/>
-                <a:uFillTx/>
-                <a:latin typeface="Calibri"/>
-                <a:ea typeface="Microsoft YaHei"/>
-              </a:rPr>
-              <a:t>Objectos</a:t>
-            </a:r>
-            <a:r>
-              <a:rPr b="0" lang="en-GB" sz="1200" strike="noStrike" u="none">
-                <a:solidFill>
-                  <a:schemeClr val="dk1"/>
-                </a:solidFill>
-                <a:effectLst/>
-                <a:uFillTx/>
-                <a:latin typeface="Calibri"/>
-                <a:ea typeface="Microsoft YaHei"/>
-              </a:rPr>
-              <a:t>:</a:t>
-            </a:r>
-            <a:endParaRPr b="0" lang="es-ES" sz="1200" strike="noStrike" u="none">
-              <a:solidFill>
-                <a:srgbClr val="000000"/>
-              </a:solidFill>
-              <a:effectLst/>
-              <a:uFillTx/>
-              <a:latin typeface="Arial"/>
-            </a:endParaRPr>
-          </a:p>
-          <a:p>
-            <a:pPr marL="268200" defTabSz="914400">
-              <a:lnSpc>
-                <a:spcPct val="90000"/>
-              </a:lnSpc>
-              <a:spcBef>
-                <a:spcPts val="624"/>
-              </a:spcBef>
-              <a:spcAft>
-                <a:spcPts val="425"/>
-              </a:spcAft>
-              <a:tabLst>
-                <a:tab algn="l" pos="0"/>
-              </a:tabLst>
-            </a:pPr>
-            <a:r>
-              <a:rPr b="0" lang="en-GB" sz="1200" strike="noStrike" u="none">
-                <a:solidFill>
-                  <a:schemeClr val="dk1"/>
-                </a:solidFill>
-                <a:effectLst/>
-                <a:uFillTx/>
-                <a:latin typeface="Calibri"/>
-                <a:ea typeface="Microsoft YaHei"/>
-              </a:rPr>
-              <a:t>Usuario, actividades, mapas</a:t>
-            </a:r>
-            <a:endParaRPr b="0" lang="es-ES" sz="1200" strike="noStrike" u="none">
-              <a:solidFill>
-                <a:srgbClr val="000000"/>
-              </a:solidFill>
-              <a:effectLst/>
-              <a:uFillTx/>
-              <a:latin typeface="Arial"/>
-            </a:endParaRPr>
-          </a:p>
-          <a:p>
-            <a:pPr marL="268200" defTabSz="914400">
-              <a:lnSpc>
-                <a:spcPct val="90000"/>
-              </a:lnSpc>
-              <a:spcBef>
-                <a:spcPts val="340"/>
-              </a:spcBef>
-              <a:spcAft>
-                <a:spcPts val="142"/>
-              </a:spcAft>
-              <a:tabLst>
-                <a:tab algn="l" pos="0"/>
-              </a:tabLst>
-            </a:pPr>
-            <a:r>
-              <a:rPr b="0" i="1" lang="en-GB" sz="1200" strike="noStrike" u="none">
-                <a:solidFill>
-                  <a:schemeClr val="dk1"/>
-                </a:solidFill>
-                <a:effectLst/>
-                <a:uFillTx/>
-                <a:latin typeface="Calibri"/>
-                <a:ea typeface="Microsoft YaHei"/>
-              </a:rPr>
-              <a:t>Restricciones</a:t>
-            </a:r>
-            <a:r>
-              <a:rPr b="0" lang="en-GB" sz="1200" strike="noStrike" u="none">
-                <a:solidFill>
-                  <a:schemeClr val="dk1"/>
-                </a:solidFill>
-                <a:effectLst/>
-                <a:uFillTx/>
-                <a:latin typeface="Calibri"/>
-                <a:ea typeface="Microsoft YaHei"/>
-              </a:rPr>
-              <a:t>: </a:t>
-            </a:r>
-            <a:endParaRPr b="0" lang="es-ES" sz="1200" strike="noStrike" u="none">
-              <a:solidFill>
-                <a:srgbClr val="000000"/>
-              </a:solidFill>
-              <a:effectLst/>
-              <a:uFillTx/>
-              <a:latin typeface="Arial"/>
-            </a:endParaRPr>
-          </a:p>
-          <a:p>
-            <a:pPr marL="268200" defTabSz="914400">
-              <a:lnSpc>
-                <a:spcPct val="90000"/>
-              </a:lnSpc>
-              <a:spcBef>
-                <a:spcPts val="340"/>
-              </a:spcBef>
-              <a:spcAft>
-                <a:spcPts val="142"/>
-              </a:spcAft>
-              <a:tabLst>
-                <a:tab algn="l" pos="0"/>
-              </a:tabLst>
-            </a:pPr>
-            <a:r>
-              <a:rPr b="0" lang="en-GB" sz="1200" strike="noStrike" u="none">
-                <a:solidFill>
-                  <a:schemeClr val="dk1"/>
-                </a:solidFill>
-                <a:effectLst/>
-                <a:uFillTx/>
-                <a:latin typeface="Calibri"/>
-                <a:ea typeface="Microsoft YaHei"/>
-              </a:rPr>
-              <a:t>Solo accesible con sesión iniciada</a:t>
+              <a:t>- Solo accesible con sesión iniciada</a:t>
             </a:r>
             <a:endParaRPr b="0" lang="es-ES" sz="1200" strike="noStrike" u="none">
               <a:solidFill>
@@ -7489,14 +7511,274 @@
       </p:sp>
       <p:sp>
         <p:nvSpPr>
-          <p:cNvPr id="61" name="CuadroTexto 35"/>
+          <p:cNvPr id="63" name="5 Redondear rectángulo de esquina diagonal"/>
           <p:cNvSpPr/>
           <p:nvPr/>
         </p:nvSpPr>
         <p:spPr>
           <a:xfrm>
-            <a:off x="644760" y="363240"/>
-            <a:ext cx="2237760" cy="638280"/>
+            <a:off x="6660000" y="2160000"/>
+            <a:ext cx="1562400" cy="647640"/>
+          </a:xfrm>
+          <a:prstGeom prst="round2DiagRect">
+            <a:avLst>
+              <a:gd name="adj1" fmla="val 16667"/>
+              <a:gd name="adj2" fmla="val 0"/>
+            </a:avLst>
+          </a:prstGeom>
+          <a:solidFill>
+            <a:srgbClr val="ffffff"/>
+          </a:solidFill>
+          <a:ln w="28575">
+            <a:solidFill>
+              <a:srgbClr val="000000"/>
+            </a:solidFill>
+          </a:ln>
+        </p:spPr>
+        <p:style>
+          <a:lnRef idx="2">
+            <a:schemeClr val="dk1"/>
+          </a:lnRef>
+          <a:fillRef idx="1">
+            <a:schemeClr val="lt1"/>
+          </a:fillRef>
+          <a:effectRef idx="0">
+            <a:schemeClr val="dk1"/>
+          </a:effectRef>
+          <a:fontRef idx="minor"/>
+        </p:style>
+        <p:txBody>
+          <a:bodyPr lIns="90000" rIns="90000" tIns="45000" bIns="45000" anchor="ctr">
+            <a:noAutofit/>
+          </a:bodyPr>
+          <a:p>
+            <a:pPr algn="ctr" defTabSz="914400">
+              <a:lnSpc>
+                <a:spcPct val="100000"/>
+              </a:lnSpc>
+            </a:pPr>
+            <a:r>
+              <a:rPr b="0" lang="es-ES" sz="1400" strike="noStrike" u="none">
+                <a:solidFill>
+                  <a:srgbClr val="000000"/>
+                </a:solidFill>
+                <a:effectLst/>
+                <a:uFillTx/>
+                <a:latin typeface="Calibri"/>
+              </a:rPr>
+              <a:t>Principal</a:t>
+            </a:r>
+            <a:endParaRPr b="0" lang="es-ES" sz="1400" strike="noStrike" u="none">
+              <a:solidFill>
+                <a:srgbClr val="000000"/>
+              </a:solidFill>
+              <a:effectLst/>
+              <a:uFillTx/>
+              <a:latin typeface="Arial"/>
+            </a:endParaRPr>
+          </a:p>
+        </p:txBody>
+      </p:sp>
+      <p:sp>
+        <p:nvSpPr>
+          <p:cNvPr id="64" name="5 Redondear rectángulo de esquina diagonal 1"/>
+          <p:cNvSpPr/>
+          <p:nvPr/>
+        </p:nvSpPr>
+        <p:spPr>
+          <a:xfrm>
+            <a:off x="8640000" y="2160000"/>
+            <a:ext cx="1562400" cy="647640"/>
+          </a:xfrm>
+          <a:prstGeom prst="round2DiagRect">
+            <a:avLst>
+              <a:gd name="adj1" fmla="val 16667"/>
+              <a:gd name="adj2" fmla="val 0"/>
+            </a:avLst>
+          </a:prstGeom>
+          <a:solidFill>
+            <a:srgbClr val="ffffff"/>
+          </a:solidFill>
+          <a:ln w="28575">
+            <a:solidFill>
+              <a:srgbClr val="000000"/>
+            </a:solidFill>
+          </a:ln>
+        </p:spPr>
+        <p:style>
+          <a:lnRef idx="2">
+            <a:schemeClr val="dk1"/>
+          </a:lnRef>
+          <a:fillRef idx="1">
+            <a:schemeClr val="lt1"/>
+          </a:fillRef>
+          <a:effectRef idx="0">
+            <a:schemeClr val="dk1"/>
+          </a:effectRef>
+          <a:fontRef idx="minor"/>
+        </p:style>
+        <p:txBody>
+          <a:bodyPr lIns="90000" rIns="90000" tIns="45000" bIns="45000" anchor="ctr">
+            <a:noAutofit/>
+          </a:bodyPr>
+          <a:p>
+            <a:pPr algn="ctr" defTabSz="914400">
+              <a:lnSpc>
+                <a:spcPct val="100000"/>
+              </a:lnSpc>
+            </a:pPr>
+            <a:r>
+              <a:rPr b="0" lang="es-ES" sz="1400" strike="noStrike" u="none">
+                <a:solidFill>
+                  <a:srgbClr val="000000"/>
+                </a:solidFill>
+                <a:effectLst/>
+                <a:uFillTx/>
+                <a:latin typeface="Calibri"/>
+              </a:rPr>
+              <a:t>1</a:t>
+            </a:r>
+            <a:endParaRPr b="0" lang="es-ES" sz="1400" strike="noStrike" u="none">
+              <a:solidFill>
+                <a:srgbClr val="000000"/>
+              </a:solidFill>
+              <a:effectLst/>
+              <a:uFillTx/>
+              <a:latin typeface="Arial"/>
+            </a:endParaRPr>
+          </a:p>
+        </p:txBody>
+      </p:sp>
+      <p:sp>
+        <p:nvSpPr>
+          <p:cNvPr id="65" name="5 Redondear rectángulo de esquina diagonal 2"/>
+          <p:cNvSpPr/>
+          <p:nvPr/>
+        </p:nvSpPr>
+        <p:spPr>
+          <a:xfrm>
+            <a:off x="8640000" y="3232800"/>
+            <a:ext cx="1562400" cy="647640"/>
+          </a:xfrm>
+          <a:prstGeom prst="round2DiagRect">
+            <a:avLst>
+              <a:gd name="adj1" fmla="val 16667"/>
+              <a:gd name="adj2" fmla="val 0"/>
+            </a:avLst>
+          </a:prstGeom>
+          <a:solidFill>
+            <a:srgbClr val="ffffff"/>
+          </a:solidFill>
+          <a:ln w="28575">
+            <a:solidFill>
+              <a:srgbClr val="000000"/>
+            </a:solidFill>
+          </a:ln>
+        </p:spPr>
+        <p:style>
+          <a:lnRef idx="2">
+            <a:schemeClr val="dk1"/>
+          </a:lnRef>
+          <a:fillRef idx="1">
+            <a:schemeClr val="lt1"/>
+          </a:fillRef>
+          <a:effectRef idx="0">
+            <a:schemeClr val="dk1"/>
+          </a:effectRef>
+          <a:fontRef idx="minor"/>
+        </p:style>
+        <p:txBody>
+          <a:bodyPr lIns="90000" rIns="90000" tIns="45000" bIns="45000" anchor="ctr">
+            <a:noAutofit/>
+          </a:bodyPr>
+          <a:p>
+            <a:pPr algn="ctr" defTabSz="914400">
+              <a:lnSpc>
+                <a:spcPct val="100000"/>
+              </a:lnSpc>
+            </a:pPr>
+            <a:r>
+              <a:rPr b="0" lang="es-ES" sz="1400" strike="noStrike" u="none">
+                <a:solidFill>
+                  <a:srgbClr val="000000"/>
+                </a:solidFill>
+                <a:effectLst/>
+                <a:uFillTx/>
+                <a:latin typeface="Calibri"/>
+              </a:rPr>
+              <a:t>2</a:t>
+            </a:r>
+            <a:endParaRPr b="0" lang="es-ES" sz="1400" strike="noStrike" u="none">
+              <a:solidFill>
+                <a:srgbClr val="000000"/>
+              </a:solidFill>
+              <a:effectLst/>
+              <a:uFillTx/>
+              <a:latin typeface="Arial"/>
+            </a:endParaRPr>
+          </a:p>
+        </p:txBody>
+      </p:sp>
+      <p:cxnSp>
+        <p:nvCxnSpPr>
+          <p:cNvPr id="66" name="Conector recto de flecha 10"/>
+          <p:cNvCxnSpPr>
+            <a:stCxn id="63" idx="3"/>
+            <a:endCxn id="64" idx="1"/>
+          </p:cNvCxnSpPr>
+          <p:nvPr/>
+        </p:nvCxnSpPr>
+        <p:spPr>
+          <a:xfrm>
+            <a:off x="8222400" y="2483640"/>
+            <a:ext cx="417960" cy="360"/>
+          </a:xfrm>
+          <a:prstGeom prst="straightConnector1">
+            <a:avLst/>
+          </a:prstGeom>
+          <a:ln>
+            <a:solidFill>
+              <a:srgbClr val="4472c4"/>
+            </a:solidFill>
+            <a:tailEnd len="med" type="triangle" w="med"/>
+          </a:ln>
+        </p:spPr>
+      </p:cxnSp>
+      <p:cxnSp>
+        <p:nvCxnSpPr>
+          <p:cNvPr id="67" name="Conector recto de flecha 13"/>
+          <p:cNvCxnSpPr>
+            <a:stCxn id="63" idx="3"/>
+            <a:endCxn id="65" idx="1"/>
+          </p:cNvCxnSpPr>
+          <p:nvPr/>
+        </p:nvCxnSpPr>
+        <p:spPr>
+          <a:xfrm>
+            <a:off x="8222400" y="2483640"/>
+            <a:ext cx="417960" cy="1073160"/>
+          </a:xfrm>
+          <a:prstGeom prst="straightConnector1">
+            <a:avLst/>
+          </a:prstGeom>
+          <a:ln>
+            <a:solidFill>
+              <a:srgbClr val="4472c4"/>
+            </a:solidFill>
+            <a:tailEnd len="med" type="triangle" w="med"/>
+          </a:ln>
+        </p:spPr>
+      </p:cxnSp>
+      <p:sp>
+        <p:nvSpPr>
+          <p:cNvPr id="68" name="CuadroTexto 37"/>
+          <p:cNvSpPr/>
+          <p:nvPr/>
+        </p:nvSpPr>
+        <p:spPr>
+          <a:xfrm>
+            <a:off x="6661440" y="1440000"/>
+            <a:ext cx="3238560" cy="364680"/>
           </a:xfrm>
           <a:prstGeom prst="rect">
             <a:avLst/>
@@ -7531,7 +7813,7 @@
                 <a:uFillTx/>
                 <a:latin typeface="Calibri"/>
               </a:rPr>
-              <a:t>Plantilla contenedor principal</a:t>
+              <a:t>Content Diagram template</a:t>
             </a:r>
             <a:endParaRPr b="0" lang="es-ES" sz="1800" strike="noStrike" u="none">
               <a:solidFill>
@@ -7546,51 +7828,64 @@
       </p:sp>
       <p:sp>
         <p:nvSpPr>
-          <p:cNvPr id="62" name="CuadroTexto 36"/>
+          <p:cNvPr id="69" name="5 Redondear rectángulo de esquina diagonal 3"/>
           <p:cNvSpPr/>
           <p:nvPr/>
         </p:nvSpPr>
         <p:spPr>
           <a:xfrm>
-            <a:off x="3651840" y="567720"/>
-            <a:ext cx="2422800" cy="638280"/>
+            <a:off x="10497600" y="2160000"/>
+            <a:ext cx="1562400" cy="647640"/>
           </a:xfrm>
-          <a:prstGeom prst="rect">
-            <a:avLst/>
+          <a:prstGeom prst="round2DiagRect">
+            <a:avLst>
+              <a:gd name="adj1" fmla="val 16667"/>
+              <a:gd name="adj2" fmla="val 0"/>
+            </a:avLst>
           </a:prstGeom>
-          <a:noFill/>
-          <a:ln w="0">
-            <a:noFill/>
+          <a:solidFill>
+            <a:srgbClr val="ffffff"/>
+          </a:solidFill>
+          <a:ln w="28575">
+            <a:solidFill>
+              <a:srgbClr val="000000"/>
+            </a:solidFill>
           </a:ln>
         </p:spPr>
         <p:style>
-          <a:lnRef idx="0"/>
-          <a:fillRef idx="0"/>
-          <a:effectRef idx="0"/>
+          <a:lnRef idx="2">
+            <a:schemeClr val="dk1"/>
+          </a:lnRef>
+          <a:fillRef idx="1">
+            <a:schemeClr val="lt1"/>
+          </a:fillRef>
+          <a:effectRef idx="0">
+            <a:schemeClr val="dk1"/>
+          </a:effectRef>
           <a:fontRef idx="minor"/>
         </p:style>
         <p:txBody>
-          <a:bodyPr lIns="90000" rIns="90000" tIns="45000" bIns="45000" anchor="t">
-            <a:spAutoFit/>
+          <a:bodyPr lIns="90000" rIns="90000" tIns="45000" bIns="45000" anchor="ctr">
+            <a:noAutofit/>
           </a:bodyPr>
           <a:p>
-            <a:pPr defTabSz="914400">
-              <a:lnSpc>
-                <a:spcPct val="100000"/>
-              </a:lnSpc>
-            </a:pPr>
-            <a:r>
-              <a:rPr b="0" lang="en-GB" sz="1800" strike="noStrike" u="none">
-                <a:solidFill>
-                  <a:schemeClr val="dk1"/>
-                </a:solidFill>
-                <a:effectLst/>
-                <a:uFillTx/>
-                <a:latin typeface="Calibri"/>
-              </a:rPr>
-              <a:t>Regular container template</a:t>
-            </a:r>
-            <a:endParaRPr b="0" lang="es-ES" sz="1800" strike="noStrike" u="none">
+            <a:pPr algn="ctr" defTabSz="914400">
+              <a:lnSpc>
+                <a:spcPct val="100000"/>
+              </a:lnSpc>
+            </a:pPr>
+            <a:r>
+              <a:rPr b="0" lang="es-ES" sz="1400" strike="noStrike" u="none">
+                <a:solidFill>
+                  <a:srgbClr val="000000"/>
+                </a:solidFill>
+                <a:effectLst/>
+                <a:uFillTx/>
+                <a:latin typeface="Calibri"/>
+              </a:rPr>
+              <a:t>3</a:t>
+            </a:r>
+            <a:endParaRPr b="0" lang="es-ES" sz="1400" strike="noStrike" u="none">
               <a:solidFill>
                 <a:srgbClr val="000000"/>
               </a:solidFill>
@@ -7601,6 +7896,31 @@
           </a:p>
         </p:txBody>
       </p:sp>
+      <p:cxnSp>
+        <p:nvCxnSpPr>
+          <p:cNvPr id="70" name="Conector recto de flecha 1"/>
+          <p:cNvCxnSpPr>
+            <a:stCxn id="64" idx="3"/>
+            <a:endCxn id="69" idx="1"/>
+          </p:cNvCxnSpPr>
+          <p:nvPr/>
+        </p:nvCxnSpPr>
+        <p:spPr>
+          <a:xfrm>
+            <a:off x="10202400" y="2483640"/>
+            <a:ext cx="295560" cy="360"/>
+          </a:xfrm>
+          <a:prstGeom prst="straightConnector1">
+            <a:avLst/>
+          </a:prstGeom>
+          <a:ln>
+            <a:solidFill>
+              <a:srgbClr val="4472c4"/>
+            </a:solidFill>
+            <a:tailEnd len="med" type="triangle" w="med"/>
+          </a:ln>
+        </p:spPr>
+      </p:cxnSp>
     </p:spTree>
   </p:cSld>
   <mc:AlternateContent>

--- a/docs/Containers-Plantilla.pptx
+++ b/docs/Containers-Plantilla.pptx
@@ -13,8 +13,8 @@
 </file>
 
 <file path=ppt/slideLayouts/slideLayout1.xml><?xml version="1.0" encoding="utf-8"?>
-<p:sldLayout xmlns:a="http://schemas.openxmlformats.org/drawingml/2006/main" xmlns:p="http://schemas.openxmlformats.org/presentationml/2006/main" xmlns:r="http://schemas.openxmlformats.org/officeDocument/2006/relationships" xmlns:p14="http://schemas.microsoft.com/office/powerpoint/2010/main" xmlns:p15="http://schemas.microsoft.com/office/powerpoint/2012/main" xmlns:mc="http://schemas.openxmlformats.org/markup-compatibility/2006" type="blank" preserve="1">
-  <p:cSld name="Imagen con título">
+<p:sldLayout xmlns:a="http://schemas.openxmlformats.org/drawingml/2006/main" xmlns:p="http://schemas.openxmlformats.org/presentationml/2006/main" xmlns:r="http://schemas.openxmlformats.org/officeDocument/2006/relationships" xmlns:p14="http://schemas.microsoft.com/office/powerpoint/2010/main" xmlns:p15="http://schemas.microsoft.com/office/powerpoint/2012/main" xmlns:mc="http://schemas.openxmlformats.org/markup-compatibility/2006" type="titleOnly" preserve="1">
+  <p:cSld name="Solo el título">
     <p:bg>
       <p:bgPr>
         <a:solidFill>
@@ -48,8 +48,8 @@
         </p:nvSpPr>
         <p:spPr>
           <a:xfrm>
-            <a:off x="839880" y="457200"/>
-            <a:ext cx="3930480" cy="1598400"/>
+            <a:off x="838080" y="365040"/>
+            <a:ext cx="10513440" cy="1323360"/>
           </a:xfrm>
           <a:prstGeom prst="rect">
             <a:avLst/>
@@ -60,7 +60,7 @@
           </a:ln>
         </p:spPr>
         <p:txBody>
-          <a:bodyPr lIns="91440" rIns="91440" tIns="45720" bIns="45720" anchor="b">
+          <a:bodyPr lIns="91440" rIns="91440" tIns="45720" bIns="45720" anchor="ctr">
             <a:noAutofit/>
           </a:bodyPr>
           <a:p>
@@ -74,7 +74,7 @@
               </a:tabLst>
             </a:pPr>
             <a:r>
-              <a:rPr b="0" lang="es-ES" sz="3200" strike="noStrike" u="none">
+              <a:rPr b="0" lang="es-ES" sz="4400" strike="noStrike" u="none">
                 <a:solidFill>
                   <a:schemeClr val="dk1"/>
                 </a:solidFill>
@@ -84,7 +84,7 @@
               </a:rPr>
               <a:t>Haga clic para modificar el estilo de título del patrón</a:t>
             </a:r>
-            <a:endParaRPr b="0" lang="es-ES" sz="3200" strike="noStrike" u="none">
+            <a:endParaRPr b="0" lang="es-ES" sz="4400" strike="noStrike" u="none">
               <a:solidFill>
                 <a:srgbClr val="000000"/>
               </a:solidFill>
@@ -98,342 +98,6 @@
       <p:sp>
         <p:nvSpPr>
           <p:cNvPr id="1" name="PlaceHolder 2"/>
-          <p:cNvSpPr>
-            <a:spLocks noGrp="1"/>
-          </p:cNvSpPr>
-          <p:nvPr>
-            <p:ph type="body"/>
-          </p:nvPr>
-        </p:nvSpPr>
-        <p:spPr>
-          <a:xfrm>
-            <a:off x="5183280" y="987480"/>
-            <a:ext cx="6170400" cy="4871880"/>
-          </a:xfrm>
-          <a:prstGeom prst="rect">
-            <a:avLst/>
-          </a:prstGeom>
-          <a:noFill/>
-          <a:ln w="0">
-            <a:noFill/>
-          </a:ln>
-        </p:spPr>
-        <p:txBody>
-          <a:bodyPr lIns="90000" rIns="90000" tIns="45000" bIns="45000" anchor="t">
-            <a:noAutofit/>
-          </a:bodyPr>
-          <a:p>
-            <a:pPr marL="432000" indent="-324000">
-              <a:lnSpc>
-                <a:spcPct val="90000"/>
-              </a:lnSpc>
-              <a:spcBef>
-                <a:spcPts val="1417"/>
-              </a:spcBef>
-              <a:buClr>
-                <a:srgbClr val="000000"/>
-              </a:buClr>
-              <a:buSzPct val="45000"/>
-              <a:buFont typeface="Wingdings" charset="2"/>
-              <a:buChar char=""/>
-            </a:pPr>
-            <a:r>
-              <a:rPr b="0" lang="es-ES" sz="3200" strike="noStrike" u="none">
-                <a:solidFill>
-                  <a:schemeClr val="dk1"/>
-                </a:solidFill>
-                <a:effectLst/>
-                <a:uFillTx/>
-                <a:latin typeface="Calibri"/>
-              </a:rPr>
-              <a:t>Pulse para editar el formato de texto del esquema</a:t>
-            </a:r>
-            <a:endParaRPr b="0" lang="es-ES" sz="3200" strike="noStrike" u="none">
-              <a:solidFill>
-                <a:srgbClr val="000000"/>
-              </a:solidFill>
-              <a:effectLst/>
-              <a:uFillTx/>
-              <a:latin typeface="Arial"/>
-            </a:endParaRPr>
-          </a:p>
-          <a:p>
-            <a:pPr lvl="1" marL="864000" indent="-324000">
-              <a:lnSpc>
-                <a:spcPct val="90000"/>
-              </a:lnSpc>
-              <a:spcBef>
-                <a:spcPts val="1134"/>
-              </a:spcBef>
-              <a:buClr>
-                <a:srgbClr val="000000"/>
-              </a:buClr>
-              <a:buSzPct val="75000"/>
-              <a:buFont typeface="Symbol" charset="2"/>
-              <a:buChar char=""/>
-            </a:pPr>
-            <a:r>
-              <a:rPr b="0" lang="es-ES" sz="3200" strike="noStrike" u="none">
-                <a:solidFill>
-                  <a:schemeClr val="dk1"/>
-                </a:solidFill>
-                <a:effectLst/>
-                <a:uFillTx/>
-                <a:latin typeface="Calibri"/>
-              </a:rPr>
-              <a:t>Segundo nivel del esquema</a:t>
-            </a:r>
-            <a:endParaRPr b="0" lang="es-ES" sz="3200" strike="noStrike" u="none">
-              <a:solidFill>
-                <a:srgbClr val="000000"/>
-              </a:solidFill>
-              <a:effectLst/>
-              <a:uFillTx/>
-              <a:latin typeface="Arial"/>
-            </a:endParaRPr>
-          </a:p>
-          <a:p>
-            <a:pPr lvl="2" marL="1296000" indent="-288000">
-              <a:lnSpc>
-                <a:spcPct val="90000"/>
-              </a:lnSpc>
-              <a:spcBef>
-                <a:spcPts val="850"/>
-              </a:spcBef>
-              <a:buClr>
-                <a:srgbClr val="000000"/>
-              </a:buClr>
-              <a:buSzPct val="45000"/>
-              <a:buFont typeface="Wingdings" charset="2"/>
-              <a:buChar char=""/>
-            </a:pPr>
-            <a:r>
-              <a:rPr b="0" lang="es-ES" sz="3200" strike="noStrike" u="none">
-                <a:solidFill>
-                  <a:schemeClr val="dk1"/>
-                </a:solidFill>
-                <a:effectLst/>
-                <a:uFillTx/>
-                <a:latin typeface="Calibri"/>
-              </a:rPr>
-              <a:t>Tercer nivel del esquema</a:t>
-            </a:r>
-            <a:endParaRPr b="0" lang="es-ES" sz="3200" strike="noStrike" u="none">
-              <a:solidFill>
-                <a:srgbClr val="000000"/>
-              </a:solidFill>
-              <a:effectLst/>
-              <a:uFillTx/>
-              <a:latin typeface="Arial"/>
-            </a:endParaRPr>
-          </a:p>
-          <a:p>
-            <a:pPr lvl="3" marL="1728000" indent="-216000">
-              <a:lnSpc>
-                <a:spcPct val="90000"/>
-              </a:lnSpc>
-              <a:spcBef>
-                <a:spcPts val="567"/>
-              </a:spcBef>
-              <a:buClr>
-                <a:srgbClr val="000000"/>
-              </a:buClr>
-              <a:buSzPct val="75000"/>
-              <a:buFont typeface="Symbol" charset="2"/>
-              <a:buChar char=""/>
-            </a:pPr>
-            <a:r>
-              <a:rPr b="0" lang="es-ES" sz="3200" strike="noStrike" u="none">
-                <a:solidFill>
-                  <a:schemeClr val="dk1"/>
-                </a:solidFill>
-                <a:effectLst/>
-                <a:uFillTx/>
-                <a:latin typeface="Calibri"/>
-              </a:rPr>
-              <a:t>Cuarto nivel del esquema</a:t>
-            </a:r>
-            <a:endParaRPr b="0" lang="es-ES" sz="3200" strike="noStrike" u="none">
-              <a:solidFill>
-                <a:srgbClr val="000000"/>
-              </a:solidFill>
-              <a:effectLst/>
-              <a:uFillTx/>
-              <a:latin typeface="Arial"/>
-            </a:endParaRPr>
-          </a:p>
-          <a:p>
-            <a:pPr lvl="4" marL="2160000" indent="-216000">
-              <a:lnSpc>
-                <a:spcPct val="90000"/>
-              </a:lnSpc>
-              <a:spcBef>
-                <a:spcPts val="283"/>
-              </a:spcBef>
-              <a:buClr>
-                <a:srgbClr val="000000"/>
-              </a:buClr>
-              <a:buSzPct val="45000"/>
-              <a:buFont typeface="Wingdings" charset="2"/>
-              <a:buChar char=""/>
-            </a:pPr>
-            <a:r>
-              <a:rPr b="0" lang="es-ES" sz="3200" strike="noStrike" u="none">
-                <a:solidFill>
-                  <a:schemeClr val="dk1"/>
-                </a:solidFill>
-                <a:effectLst/>
-                <a:uFillTx/>
-                <a:latin typeface="Calibri"/>
-              </a:rPr>
-              <a:t>Quinto nivel del esquema</a:t>
-            </a:r>
-            <a:endParaRPr b="0" lang="es-ES" sz="3200" strike="noStrike" u="none">
-              <a:solidFill>
-                <a:srgbClr val="000000"/>
-              </a:solidFill>
-              <a:effectLst/>
-              <a:uFillTx/>
-              <a:latin typeface="Arial"/>
-            </a:endParaRPr>
-          </a:p>
-          <a:p>
-            <a:pPr lvl="5" marL="2592000" indent="-216000">
-              <a:lnSpc>
-                <a:spcPct val="90000"/>
-              </a:lnSpc>
-              <a:spcBef>
-                <a:spcPts val="283"/>
-              </a:spcBef>
-              <a:buClr>
-                <a:srgbClr val="000000"/>
-              </a:buClr>
-              <a:buSzPct val="45000"/>
-              <a:buFont typeface="Wingdings" charset="2"/>
-              <a:buChar char=""/>
-            </a:pPr>
-            <a:r>
-              <a:rPr b="0" lang="es-ES" sz="3200" strike="noStrike" u="none">
-                <a:solidFill>
-                  <a:schemeClr val="dk1"/>
-                </a:solidFill>
-                <a:effectLst/>
-                <a:uFillTx/>
-                <a:latin typeface="Calibri"/>
-              </a:rPr>
-              <a:t>Sexto nivel del esquema</a:t>
-            </a:r>
-            <a:endParaRPr b="0" lang="es-ES" sz="3200" strike="noStrike" u="none">
-              <a:solidFill>
-                <a:srgbClr val="000000"/>
-              </a:solidFill>
-              <a:effectLst/>
-              <a:uFillTx/>
-              <a:latin typeface="Arial"/>
-            </a:endParaRPr>
-          </a:p>
-          <a:p>
-            <a:pPr lvl="6" marL="3024000" indent="-216000">
-              <a:lnSpc>
-                <a:spcPct val="90000"/>
-              </a:lnSpc>
-              <a:spcBef>
-                <a:spcPts val="283"/>
-              </a:spcBef>
-              <a:buClr>
-                <a:srgbClr val="000000"/>
-              </a:buClr>
-              <a:buSzPct val="45000"/>
-              <a:buFont typeface="Wingdings" charset="2"/>
-              <a:buChar char=""/>
-            </a:pPr>
-            <a:r>
-              <a:rPr b="0" lang="es-ES" sz="3200" strike="noStrike" u="none">
-                <a:solidFill>
-                  <a:schemeClr val="dk1"/>
-                </a:solidFill>
-                <a:effectLst/>
-                <a:uFillTx/>
-                <a:latin typeface="Calibri"/>
-              </a:rPr>
-              <a:t>Séptimo nivel del esquema</a:t>
-            </a:r>
-            <a:endParaRPr b="0" lang="es-ES" sz="3200" strike="noStrike" u="none">
-              <a:solidFill>
-                <a:srgbClr val="000000"/>
-              </a:solidFill>
-              <a:effectLst/>
-              <a:uFillTx/>
-              <a:latin typeface="Arial"/>
-            </a:endParaRPr>
-          </a:p>
-        </p:txBody>
-      </p:sp>
-      <p:sp>
-        <p:nvSpPr>
-          <p:cNvPr id="2" name="PlaceHolder 3"/>
-          <p:cNvSpPr>
-            <a:spLocks noGrp="1"/>
-          </p:cNvSpPr>
-          <p:nvPr>
-            <p:ph type="body"/>
-          </p:nvPr>
-        </p:nvSpPr>
-        <p:spPr>
-          <a:xfrm>
-            <a:off x="839880" y="2057400"/>
-            <a:ext cx="3930480" cy="3809880"/>
-          </a:xfrm>
-          <a:prstGeom prst="rect">
-            <a:avLst/>
-          </a:prstGeom>
-          <a:noFill/>
-          <a:ln w="0">
-            <a:noFill/>
-          </a:ln>
-        </p:spPr>
-        <p:txBody>
-          <a:bodyPr lIns="91440" rIns="91440" tIns="45720" bIns="45720" anchor="t">
-            <a:noAutofit/>
-          </a:bodyPr>
-          <a:p>
-            <a:pPr indent="0" defTabSz="914400">
-              <a:lnSpc>
-                <a:spcPct val="90000"/>
-              </a:lnSpc>
-              <a:spcBef>
-                <a:spcPts val="1001"/>
-              </a:spcBef>
-              <a:buNone/>
-              <a:tabLst>
-                <a:tab algn="l" pos="0"/>
-              </a:tabLst>
-            </a:pPr>
-            <a:r>
-              <a:rPr b="0" lang="es-ES" sz="1600" strike="noStrike" u="none">
-                <a:solidFill>
-                  <a:schemeClr val="dk1"/>
-                </a:solidFill>
-                <a:effectLst/>
-                <a:uFillTx/>
-                <a:latin typeface="Calibri"/>
-              </a:rPr>
-              <a:t>Haga clic para modificar los estilos de texto del patrón</a:t>
-            </a:r>
-            <a:endParaRPr b="0" lang="es-ES" sz="1600" strike="noStrike" u="none">
-              <a:solidFill>
-                <a:srgbClr val="000000"/>
-              </a:solidFill>
-              <a:effectLst/>
-              <a:uFillTx/>
-              <a:latin typeface="Arial"/>
-            </a:endParaRPr>
-          </a:p>
-        </p:txBody>
-      </p:sp>
-      <p:sp>
-        <p:nvSpPr>
-          <p:cNvPr id="3" name="PlaceHolder 4"/>
           <p:cNvSpPr>
             <a:spLocks noGrp="1"/>
           </p:cNvSpPr>
@@ -444,7 +108,7 @@
         <p:spPr>
           <a:xfrm>
             <a:off x="838080" y="6356520"/>
-            <a:ext cx="2741400" cy="363240"/>
+            <a:ext cx="2741040" cy="362880"/>
           </a:xfrm>
           <a:prstGeom prst="rect">
             <a:avLst/>
@@ -515,7 +179,7 @@
       </p:sp>
       <p:sp>
         <p:nvSpPr>
-          <p:cNvPr id="4" name="PlaceHolder 5"/>
+          <p:cNvPr id="2" name="PlaceHolder 3"/>
           <p:cNvSpPr>
             <a:spLocks noGrp="1"/>
           </p:cNvSpPr>
@@ -526,7 +190,7 @@
         <p:spPr>
           <a:xfrm>
             <a:off x="4038480" y="6356520"/>
-            <a:ext cx="4113000" cy="363240"/>
+            <a:ext cx="4112640" cy="362880"/>
           </a:xfrm>
           <a:prstGeom prst="rect">
             <a:avLst/>
@@ -593,7 +257,7 @@
       </p:sp>
       <p:sp>
         <p:nvSpPr>
-          <p:cNvPr id="5" name="PlaceHolder 6"/>
+          <p:cNvPr id="3" name="PlaceHolder 4"/>
           <p:cNvSpPr>
             <a:spLocks noGrp="1"/>
           </p:cNvSpPr>
@@ -604,7 +268,7 @@
         <p:spPr>
           <a:xfrm>
             <a:off x="8610480" y="6356520"/>
-            <a:ext cx="2741400" cy="363240"/>
+            <a:ext cx="2741040" cy="362880"/>
           </a:xfrm>
           <a:prstGeom prst="rect">
             <a:avLst/>
@@ -649,7 +313,7 @@
                 <a:tab algn="l" pos="0"/>
               </a:tabLst>
             </a:pPr>
-            <a:fld id="{B4383429-C382-46CB-82A0-3EF1D69A096E}" type="slidenum">
+            <a:fld id="{3DFCE477-8716-44F8-8C61-9506A0358A98}" type="slidenum">
               <a:rPr b="0" lang="en-GB" sz="1200" strike="noStrike" u="none">
                 <a:solidFill>
                   <a:schemeClr val="dk1">
@@ -679,6 +343,1586 @@
 </file>
 
 <file path=ppt/slideLayouts/slideLayout10.xml><?xml version="1.0" encoding="utf-8"?>
+<p:sldLayout xmlns:a="http://schemas.openxmlformats.org/drawingml/2006/main" xmlns:p="http://schemas.openxmlformats.org/presentationml/2006/main" xmlns:r="http://schemas.openxmlformats.org/officeDocument/2006/relationships" xmlns:p14="http://schemas.microsoft.com/office/powerpoint/2010/main" xmlns:p15="http://schemas.microsoft.com/office/powerpoint/2012/main" xmlns:mc="http://schemas.openxmlformats.org/markup-compatibility/2006" type="twoObj" preserve="1">
+  <p:cSld name="Dos objetos">
+    <p:bg>
+      <p:bgPr>
+        <a:solidFill>
+          <a:srgbClr val="ffffff"/>
+        </a:solidFill>
+      </p:bgPr>
+    </p:bg>
+    <p:spTree>
+      <p:nvGrpSpPr>
+        <p:cNvPr id="1" name=""/>
+        <p:cNvGrpSpPr/>
+        <p:nvPr/>
+      </p:nvGrpSpPr>
+      <p:grpSpPr>
+        <a:xfrm>
+          <a:off x="0" y="0"/>
+          <a:ext cx="0" cy="0"/>
+          <a:chOff x="0" y="0"/>
+          <a:chExt cx="0" cy="0"/>
+        </a:xfrm>
+      </p:grpSpPr>
+      <p:sp>
+        <p:nvSpPr>
+          <p:cNvPr id="45" name="PlaceHolder 1"/>
+          <p:cNvSpPr>
+            <a:spLocks noGrp="1"/>
+          </p:cNvSpPr>
+          <p:nvPr>
+            <p:ph type="title"/>
+          </p:nvPr>
+        </p:nvSpPr>
+        <p:spPr>
+          <a:xfrm>
+            <a:off x="838080" y="365040"/>
+            <a:ext cx="10513440" cy="1323360"/>
+          </a:xfrm>
+          <a:prstGeom prst="rect">
+            <a:avLst/>
+          </a:prstGeom>
+          <a:noFill/>
+          <a:ln w="0">
+            <a:noFill/>
+          </a:ln>
+        </p:spPr>
+        <p:txBody>
+          <a:bodyPr lIns="91440" rIns="91440" tIns="45720" bIns="45720" anchor="ctr">
+            <a:noAutofit/>
+          </a:bodyPr>
+          <a:p>
+            <a:pPr indent="0" defTabSz="914400">
+              <a:lnSpc>
+                <a:spcPct val="90000"/>
+              </a:lnSpc>
+              <a:buNone/>
+              <a:tabLst>
+                <a:tab algn="l" pos="0"/>
+              </a:tabLst>
+            </a:pPr>
+            <a:r>
+              <a:rPr b="0" lang="es-ES" sz="4400" strike="noStrike" u="none">
+                <a:solidFill>
+                  <a:schemeClr val="dk1"/>
+                </a:solidFill>
+                <a:effectLst/>
+                <a:uFillTx/>
+                <a:latin typeface="Calibri Light"/>
+              </a:rPr>
+              <a:t>Haga clic para modificar el estilo de título del patrón</a:t>
+            </a:r>
+            <a:endParaRPr b="0" lang="es-ES" sz="4400" strike="noStrike" u="none">
+              <a:solidFill>
+                <a:srgbClr val="000000"/>
+              </a:solidFill>
+              <a:effectLst/>
+              <a:uFillTx/>
+              <a:latin typeface="Arial"/>
+            </a:endParaRPr>
+          </a:p>
+        </p:txBody>
+      </p:sp>
+      <p:sp>
+        <p:nvSpPr>
+          <p:cNvPr id="46" name="PlaceHolder 2"/>
+          <p:cNvSpPr>
+            <a:spLocks noGrp="1"/>
+          </p:cNvSpPr>
+          <p:nvPr>
+            <p:ph type="body"/>
+          </p:nvPr>
+        </p:nvSpPr>
+        <p:spPr>
+          <a:xfrm>
+            <a:off x="838080" y="1825560"/>
+            <a:ext cx="5179320" cy="4349160"/>
+          </a:xfrm>
+          <a:prstGeom prst="rect">
+            <a:avLst/>
+          </a:prstGeom>
+          <a:noFill/>
+          <a:ln w="0">
+            <a:noFill/>
+          </a:ln>
+        </p:spPr>
+        <p:txBody>
+          <a:bodyPr lIns="91440" rIns="91440" tIns="45720" bIns="45720" anchor="t">
+            <a:noAutofit/>
+          </a:bodyPr>
+          <a:p>
+            <a:pPr marL="228600" indent="-228600" defTabSz="914400">
+              <a:lnSpc>
+                <a:spcPct val="90000"/>
+              </a:lnSpc>
+              <a:spcBef>
+                <a:spcPts val="1001"/>
+              </a:spcBef>
+              <a:buClr>
+                <a:srgbClr val="000000"/>
+              </a:buClr>
+              <a:buFont typeface="Arial"/>
+              <a:buChar char="•"/>
+            </a:pPr>
+            <a:r>
+              <a:rPr b="0" lang="es-ES" sz="2800" strike="noStrike" u="none">
+                <a:solidFill>
+                  <a:schemeClr val="dk1"/>
+                </a:solidFill>
+                <a:effectLst/>
+                <a:uFillTx/>
+                <a:latin typeface="Calibri"/>
+              </a:rPr>
+              <a:t>Haga clic para modificar los estilos de texto del patrón</a:t>
+            </a:r>
+            <a:endParaRPr b="0" lang="es-ES" sz="2800" strike="noStrike" u="none">
+              <a:solidFill>
+                <a:srgbClr val="000000"/>
+              </a:solidFill>
+              <a:effectLst/>
+              <a:uFillTx/>
+              <a:latin typeface="Arial"/>
+            </a:endParaRPr>
+          </a:p>
+          <a:p>
+            <a:pPr lvl="1" marL="685800" indent="-228600" defTabSz="914400">
+              <a:lnSpc>
+                <a:spcPct val="90000"/>
+              </a:lnSpc>
+              <a:spcBef>
+                <a:spcPts val="499"/>
+              </a:spcBef>
+              <a:buClr>
+                <a:srgbClr val="000000"/>
+              </a:buClr>
+              <a:buFont typeface="Arial"/>
+              <a:buChar char="•"/>
+            </a:pPr>
+            <a:r>
+              <a:rPr b="0" lang="es-ES" sz="2400" strike="noStrike" u="none">
+                <a:solidFill>
+                  <a:schemeClr val="dk1"/>
+                </a:solidFill>
+                <a:effectLst/>
+                <a:uFillTx/>
+                <a:latin typeface="Calibri"/>
+              </a:rPr>
+              <a:t>Segundo nivel</a:t>
+            </a:r>
+            <a:endParaRPr b="0" lang="es-ES" sz="2400" strike="noStrike" u="none">
+              <a:solidFill>
+                <a:srgbClr val="000000"/>
+              </a:solidFill>
+              <a:effectLst/>
+              <a:uFillTx/>
+              <a:latin typeface="Arial"/>
+            </a:endParaRPr>
+          </a:p>
+          <a:p>
+            <a:pPr lvl="2" marL="1143000" indent="-228600" defTabSz="914400">
+              <a:lnSpc>
+                <a:spcPct val="90000"/>
+              </a:lnSpc>
+              <a:spcBef>
+                <a:spcPts val="499"/>
+              </a:spcBef>
+              <a:buClr>
+                <a:srgbClr val="000000"/>
+              </a:buClr>
+              <a:buFont typeface="Arial"/>
+              <a:buChar char="•"/>
+            </a:pPr>
+            <a:r>
+              <a:rPr b="0" lang="es-ES" sz="2000" strike="noStrike" u="none">
+                <a:solidFill>
+                  <a:schemeClr val="dk1"/>
+                </a:solidFill>
+                <a:effectLst/>
+                <a:uFillTx/>
+                <a:latin typeface="Calibri"/>
+              </a:rPr>
+              <a:t>Tercer nivel</a:t>
+            </a:r>
+            <a:endParaRPr b="0" lang="es-ES" sz="2000" strike="noStrike" u="none">
+              <a:solidFill>
+                <a:srgbClr val="000000"/>
+              </a:solidFill>
+              <a:effectLst/>
+              <a:uFillTx/>
+              <a:latin typeface="Arial"/>
+            </a:endParaRPr>
+          </a:p>
+          <a:p>
+            <a:pPr lvl="3" marL="1600200" indent="-228600" defTabSz="914400">
+              <a:lnSpc>
+                <a:spcPct val="90000"/>
+              </a:lnSpc>
+              <a:spcBef>
+                <a:spcPts val="499"/>
+              </a:spcBef>
+              <a:buClr>
+                <a:srgbClr val="000000"/>
+              </a:buClr>
+              <a:buFont typeface="Arial"/>
+              <a:buChar char="•"/>
+            </a:pPr>
+            <a:r>
+              <a:rPr b="0" lang="es-ES" sz="1800" strike="noStrike" u="none">
+                <a:solidFill>
+                  <a:schemeClr val="dk1"/>
+                </a:solidFill>
+                <a:effectLst/>
+                <a:uFillTx/>
+                <a:latin typeface="Calibri"/>
+              </a:rPr>
+              <a:t>Cuarto nivel</a:t>
+            </a:r>
+            <a:endParaRPr b="0" lang="es-ES" sz="1800" strike="noStrike" u="none">
+              <a:solidFill>
+                <a:srgbClr val="000000"/>
+              </a:solidFill>
+              <a:effectLst/>
+              <a:uFillTx/>
+              <a:latin typeface="Arial"/>
+            </a:endParaRPr>
+          </a:p>
+          <a:p>
+            <a:pPr lvl="4" marL="2057400" indent="-228600" defTabSz="914400">
+              <a:lnSpc>
+                <a:spcPct val="90000"/>
+              </a:lnSpc>
+              <a:spcBef>
+                <a:spcPts val="499"/>
+              </a:spcBef>
+              <a:buClr>
+                <a:srgbClr val="000000"/>
+              </a:buClr>
+              <a:buFont typeface="Arial"/>
+              <a:buChar char="•"/>
+            </a:pPr>
+            <a:r>
+              <a:rPr b="0" lang="es-ES" sz="1800" strike="noStrike" u="none">
+                <a:solidFill>
+                  <a:schemeClr val="dk1"/>
+                </a:solidFill>
+                <a:effectLst/>
+                <a:uFillTx/>
+                <a:latin typeface="Calibri"/>
+              </a:rPr>
+              <a:t>Quinto nivel</a:t>
+            </a:r>
+            <a:endParaRPr b="0" lang="es-ES" sz="1800" strike="noStrike" u="none">
+              <a:solidFill>
+                <a:srgbClr val="000000"/>
+              </a:solidFill>
+              <a:effectLst/>
+              <a:uFillTx/>
+              <a:latin typeface="Arial"/>
+            </a:endParaRPr>
+          </a:p>
+        </p:txBody>
+      </p:sp>
+      <p:sp>
+        <p:nvSpPr>
+          <p:cNvPr id="47" name="PlaceHolder 3"/>
+          <p:cNvSpPr>
+            <a:spLocks noGrp="1"/>
+          </p:cNvSpPr>
+          <p:nvPr>
+            <p:ph type="body"/>
+          </p:nvPr>
+        </p:nvSpPr>
+        <p:spPr>
+          <a:xfrm>
+            <a:off x="6172200" y="1825560"/>
+            <a:ext cx="5179320" cy="4349160"/>
+          </a:xfrm>
+          <a:prstGeom prst="rect">
+            <a:avLst/>
+          </a:prstGeom>
+          <a:noFill/>
+          <a:ln w="0">
+            <a:noFill/>
+          </a:ln>
+        </p:spPr>
+        <p:txBody>
+          <a:bodyPr lIns="91440" rIns="91440" tIns="45720" bIns="45720" anchor="t">
+            <a:noAutofit/>
+          </a:bodyPr>
+          <a:p>
+            <a:pPr marL="228600" indent="-228600" defTabSz="914400">
+              <a:lnSpc>
+                <a:spcPct val="90000"/>
+              </a:lnSpc>
+              <a:spcBef>
+                <a:spcPts val="1001"/>
+              </a:spcBef>
+              <a:buClr>
+                <a:srgbClr val="000000"/>
+              </a:buClr>
+              <a:buFont typeface="Arial"/>
+              <a:buChar char="•"/>
+            </a:pPr>
+            <a:r>
+              <a:rPr b="0" lang="es-ES" sz="2800" strike="noStrike" u="none">
+                <a:solidFill>
+                  <a:schemeClr val="dk1"/>
+                </a:solidFill>
+                <a:effectLst/>
+                <a:uFillTx/>
+                <a:latin typeface="Calibri"/>
+              </a:rPr>
+              <a:t>Haga clic para modificar los estilos de texto del patrón</a:t>
+            </a:r>
+            <a:endParaRPr b="0" lang="es-ES" sz="2800" strike="noStrike" u="none">
+              <a:solidFill>
+                <a:srgbClr val="000000"/>
+              </a:solidFill>
+              <a:effectLst/>
+              <a:uFillTx/>
+              <a:latin typeface="Arial"/>
+            </a:endParaRPr>
+          </a:p>
+          <a:p>
+            <a:pPr lvl="1" marL="685800" indent="-228600" defTabSz="914400">
+              <a:lnSpc>
+                <a:spcPct val="90000"/>
+              </a:lnSpc>
+              <a:spcBef>
+                <a:spcPts val="499"/>
+              </a:spcBef>
+              <a:buClr>
+                <a:srgbClr val="000000"/>
+              </a:buClr>
+              <a:buFont typeface="Arial"/>
+              <a:buChar char="•"/>
+            </a:pPr>
+            <a:r>
+              <a:rPr b="0" lang="es-ES" sz="2400" strike="noStrike" u="none">
+                <a:solidFill>
+                  <a:schemeClr val="dk1"/>
+                </a:solidFill>
+                <a:effectLst/>
+                <a:uFillTx/>
+                <a:latin typeface="Calibri"/>
+              </a:rPr>
+              <a:t>Segundo nivel</a:t>
+            </a:r>
+            <a:endParaRPr b="0" lang="es-ES" sz="2400" strike="noStrike" u="none">
+              <a:solidFill>
+                <a:srgbClr val="000000"/>
+              </a:solidFill>
+              <a:effectLst/>
+              <a:uFillTx/>
+              <a:latin typeface="Arial"/>
+            </a:endParaRPr>
+          </a:p>
+          <a:p>
+            <a:pPr lvl="2" marL="1143000" indent="-228600" defTabSz="914400">
+              <a:lnSpc>
+                <a:spcPct val="90000"/>
+              </a:lnSpc>
+              <a:spcBef>
+                <a:spcPts val="499"/>
+              </a:spcBef>
+              <a:buClr>
+                <a:srgbClr val="000000"/>
+              </a:buClr>
+              <a:buFont typeface="Arial"/>
+              <a:buChar char="•"/>
+            </a:pPr>
+            <a:r>
+              <a:rPr b="0" lang="es-ES" sz="2000" strike="noStrike" u="none">
+                <a:solidFill>
+                  <a:schemeClr val="dk1"/>
+                </a:solidFill>
+                <a:effectLst/>
+                <a:uFillTx/>
+                <a:latin typeface="Calibri"/>
+              </a:rPr>
+              <a:t>Tercer nivel</a:t>
+            </a:r>
+            <a:endParaRPr b="0" lang="es-ES" sz="2000" strike="noStrike" u="none">
+              <a:solidFill>
+                <a:srgbClr val="000000"/>
+              </a:solidFill>
+              <a:effectLst/>
+              <a:uFillTx/>
+              <a:latin typeface="Arial"/>
+            </a:endParaRPr>
+          </a:p>
+          <a:p>
+            <a:pPr lvl="3" marL="1600200" indent="-228600" defTabSz="914400">
+              <a:lnSpc>
+                <a:spcPct val="90000"/>
+              </a:lnSpc>
+              <a:spcBef>
+                <a:spcPts val="499"/>
+              </a:spcBef>
+              <a:buClr>
+                <a:srgbClr val="000000"/>
+              </a:buClr>
+              <a:buFont typeface="Arial"/>
+              <a:buChar char="•"/>
+            </a:pPr>
+            <a:r>
+              <a:rPr b="0" lang="es-ES" sz="1800" strike="noStrike" u="none">
+                <a:solidFill>
+                  <a:schemeClr val="dk1"/>
+                </a:solidFill>
+                <a:effectLst/>
+                <a:uFillTx/>
+                <a:latin typeface="Calibri"/>
+              </a:rPr>
+              <a:t>Cuarto nivel</a:t>
+            </a:r>
+            <a:endParaRPr b="0" lang="es-ES" sz="1800" strike="noStrike" u="none">
+              <a:solidFill>
+                <a:srgbClr val="000000"/>
+              </a:solidFill>
+              <a:effectLst/>
+              <a:uFillTx/>
+              <a:latin typeface="Arial"/>
+            </a:endParaRPr>
+          </a:p>
+          <a:p>
+            <a:pPr lvl="4" marL="2057400" indent="-228600" defTabSz="914400">
+              <a:lnSpc>
+                <a:spcPct val="90000"/>
+              </a:lnSpc>
+              <a:spcBef>
+                <a:spcPts val="499"/>
+              </a:spcBef>
+              <a:buClr>
+                <a:srgbClr val="000000"/>
+              </a:buClr>
+              <a:buFont typeface="Arial"/>
+              <a:buChar char="•"/>
+            </a:pPr>
+            <a:r>
+              <a:rPr b="0" lang="es-ES" sz="1800" strike="noStrike" u="none">
+                <a:solidFill>
+                  <a:schemeClr val="dk1"/>
+                </a:solidFill>
+                <a:effectLst/>
+                <a:uFillTx/>
+                <a:latin typeface="Calibri"/>
+              </a:rPr>
+              <a:t>Quinto nivel</a:t>
+            </a:r>
+            <a:endParaRPr b="0" lang="es-ES" sz="1800" strike="noStrike" u="none">
+              <a:solidFill>
+                <a:srgbClr val="000000"/>
+              </a:solidFill>
+              <a:effectLst/>
+              <a:uFillTx/>
+              <a:latin typeface="Arial"/>
+            </a:endParaRPr>
+          </a:p>
+        </p:txBody>
+      </p:sp>
+      <p:sp>
+        <p:nvSpPr>
+          <p:cNvPr id="48" name="PlaceHolder 4"/>
+          <p:cNvSpPr>
+            <a:spLocks noGrp="1"/>
+          </p:cNvSpPr>
+          <p:nvPr>
+            <p:ph type="dt" idx="28"/>
+          </p:nvPr>
+        </p:nvSpPr>
+        <p:spPr>
+          <a:xfrm>
+            <a:off x="838080" y="6356520"/>
+            <a:ext cx="2741040" cy="362880"/>
+          </a:xfrm>
+          <a:prstGeom prst="rect">
+            <a:avLst/>
+          </a:prstGeom>
+          <a:noFill/>
+          <a:ln w="0">
+            <a:noFill/>
+          </a:ln>
+        </p:spPr>
+        <p:txBody>
+          <a:bodyPr lIns="91440" rIns="91440" tIns="45720" bIns="45720" anchor="ctr">
+            <a:noAutofit/>
+          </a:bodyPr>
+          <a:lstStyle>
+            <a:lvl1pPr indent="0" defTabSz="914400">
+              <a:lnSpc>
+                <a:spcPct val="100000"/>
+              </a:lnSpc>
+              <a:buNone/>
+              <a:tabLst>
+                <a:tab algn="l" pos="0"/>
+              </a:tabLst>
+              <a:defRPr b="0" lang="en-GB" sz="1200" strike="noStrike" u="none">
+                <a:solidFill>
+                  <a:schemeClr val="dk1">
+                    <a:tint val="75000"/>
+                  </a:schemeClr>
+                </a:solidFill>
+                <a:effectLst/>
+                <a:uFillTx/>
+                <a:latin typeface="Calibri"/>
+              </a:defRPr>
+            </a:lvl1pPr>
+          </a:lstStyle>
+          <a:p>
+            <a:pPr indent="0" defTabSz="914400">
+              <a:lnSpc>
+                <a:spcPct val="100000"/>
+              </a:lnSpc>
+              <a:buNone/>
+              <a:tabLst>
+                <a:tab algn="l" pos="0"/>
+              </a:tabLst>
+            </a:pPr>
+            <a:r>
+              <a:rPr b="0" lang="en-GB" sz="1200" strike="noStrike" u="none">
+                <a:solidFill>
+                  <a:schemeClr val="dk1">
+                    <a:tint val="75000"/>
+                  </a:schemeClr>
+                </a:solidFill>
+                <a:effectLst/>
+                <a:uFillTx/>
+                <a:latin typeface="Calibri"/>
+              </a:rPr>
+              <a:t>&lt;fecha/hora&gt;</a:t>
+            </a:r>
+            <a:endParaRPr b="0" lang="es-ES" sz="1200" strike="noStrike" u="none">
+              <a:solidFill>
+                <a:srgbClr val="000000"/>
+              </a:solidFill>
+              <a:effectLst/>
+              <a:uFillTx/>
+              <a:latin typeface="Times New Roman"/>
+            </a:endParaRPr>
+          </a:p>
+        </p:txBody>
+      </p:sp>
+      <p:sp>
+        <p:nvSpPr>
+          <p:cNvPr id="49" name="PlaceHolder 5"/>
+          <p:cNvSpPr>
+            <a:spLocks noGrp="1"/>
+          </p:cNvSpPr>
+          <p:nvPr>
+            <p:ph type="ftr" idx="29"/>
+          </p:nvPr>
+        </p:nvSpPr>
+        <p:spPr>
+          <a:xfrm>
+            <a:off x="4038480" y="6356520"/>
+            <a:ext cx="4112640" cy="362880"/>
+          </a:xfrm>
+          <a:prstGeom prst="rect">
+            <a:avLst/>
+          </a:prstGeom>
+          <a:noFill/>
+          <a:ln w="0">
+            <a:noFill/>
+          </a:ln>
+        </p:spPr>
+        <p:txBody>
+          <a:bodyPr lIns="91440" rIns="91440" tIns="45720" bIns="45720" anchor="ctr">
+            <a:noAutofit/>
+          </a:bodyPr>
+          <a:lstStyle>
+            <a:lvl1pPr indent="0" algn="ctr">
+              <a:lnSpc>
+                <a:spcPct val="100000"/>
+              </a:lnSpc>
+              <a:buNone/>
+              <a:tabLst>
+                <a:tab algn="l" pos="0"/>
+              </a:tabLst>
+              <a:defRPr b="0" lang="es-ES" sz="1400" strike="noStrike" u="none">
+                <a:solidFill>
+                  <a:srgbClr val="000000"/>
+                </a:solidFill>
+                <a:effectLst/>
+                <a:uFillTx/>
+                <a:latin typeface="Times New Roman"/>
+              </a:defRPr>
+            </a:lvl1pPr>
+          </a:lstStyle>
+          <a:p>
+            <a:pPr indent="0" algn="ctr">
+              <a:lnSpc>
+                <a:spcPct val="100000"/>
+              </a:lnSpc>
+              <a:buNone/>
+              <a:tabLst>
+                <a:tab algn="l" pos="0"/>
+              </a:tabLst>
+            </a:pPr>
+            <a:r>
+              <a:rPr b="0" lang="es-ES" sz="1400" strike="noStrike" u="none">
+                <a:solidFill>
+                  <a:srgbClr val="000000"/>
+                </a:solidFill>
+                <a:effectLst/>
+                <a:uFillTx/>
+                <a:latin typeface="Times New Roman"/>
+              </a:rPr>
+              <a:t>&lt;pie de página&gt;</a:t>
+            </a:r>
+            <a:endParaRPr b="0" lang="es-ES" sz="1400" strike="noStrike" u="none">
+              <a:solidFill>
+                <a:srgbClr val="000000"/>
+              </a:solidFill>
+              <a:effectLst/>
+              <a:uFillTx/>
+              <a:latin typeface="Times New Roman"/>
+            </a:endParaRPr>
+          </a:p>
+        </p:txBody>
+      </p:sp>
+      <p:sp>
+        <p:nvSpPr>
+          <p:cNvPr id="50" name="PlaceHolder 6"/>
+          <p:cNvSpPr>
+            <a:spLocks noGrp="1"/>
+          </p:cNvSpPr>
+          <p:nvPr>
+            <p:ph type="sldNum" idx="30"/>
+          </p:nvPr>
+        </p:nvSpPr>
+        <p:spPr>
+          <a:xfrm>
+            <a:off x="8610480" y="6356520"/>
+            <a:ext cx="2741040" cy="362880"/>
+          </a:xfrm>
+          <a:prstGeom prst="rect">
+            <a:avLst/>
+          </a:prstGeom>
+          <a:noFill/>
+          <a:ln w="0">
+            <a:noFill/>
+          </a:ln>
+        </p:spPr>
+        <p:txBody>
+          <a:bodyPr lIns="91440" rIns="91440" tIns="45720" bIns="45720" anchor="ctr">
+            <a:noAutofit/>
+          </a:bodyPr>
+          <a:lstStyle>
+            <a:lvl1pPr indent="0" algn="r" defTabSz="914400">
+              <a:lnSpc>
+                <a:spcPct val="100000"/>
+              </a:lnSpc>
+              <a:buNone/>
+              <a:tabLst>
+                <a:tab algn="l" pos="0"/>
+              </a:tabLst>
+              <a:defRPr b="0" lang="en-GB" sz="1200" strike="noStrike" u="none">
+                <a:solidFill>
+                  <a:schemeClr val="dk1">
+                    <a:tint val="75000"/>
+                  </a:schemeClr>
+                </a:solidFill>
+                <a:effectLst/>
+                <a:uFillTx/>
+                <a:latin typeface="Calibri"/>
+              </a:defRPr>
+            </a:lvl1pPr>
+          </a:lstStyle>
+          <a:p>
+            <a:pPr indent="0" algn="r" defTabSz="914400">
+              <a:lnSpc>
+                <a:spcPct val="100000"/>
+              </a:lnSpc>
+              <a:buNone/>
+              <a:tabLst>
+                <a:tab algn="l" pos="0"/>
+              </a:tabLst>
+            </a:pPr>
+            <a:fld id="{D8F77C13-EE7A-42F4-AF10-AB23D0C4D746}" type="slidenum">
+              <a:rPr b="0" lang="en-GB" sz="1200" strike="noStrike" u="none">
+                <a:solidFill>
+                  <a:schemeClr val="dk1">
+                    <a:tint val="75000"/>
+                  </a:schemeClr>
+                </a:solidFill>
+                <a:effectLst/>
+                <a:uFillTx/>
+                <a:latin typeface="Calibri"/>
+              </a:rPr>
+              <a:t>&lt;número&gt;</a:t>
+            </a:fld>
+            <a:endParaRPr b="0" lang="es-ES" sz="1200" strike="noStrike" u="none">
+              <a:solidFill>
+                <a:srgbClr val="000000"/>
+              </a:solidFill>
+              <a:effectLst/>
+              <a:uFillTx/>
+              <a:latin typeface="Times New Roman"/>
+            </a:endParaRPr>
+          </a:p>
+        </p:txBody>
+      </p:sp>
+    </p:spTree>
+  </p:cSld>
+</p:sldLayout>
+</file>
+
+<file path=ppt/slideLayouts/slideLayout11.xml><?xml version="1.0" encoding="utf-8"?>
+<p:sldLayout xmlns:a="http://schemas.openxmlformats.org/drawingml/2006/main" xmlns:p="http://schemas.openxmlformats.org/presentationml/2006/main" xmlns:r="http://schemas.openxmlformats.org/officeDocument/2006/relationships" xmlns:p14="http://schemas.microsoft.com/office/powerpoint/2010/main" xmlns:p15="http://schemas.microsoft.com/office/powerpoint/2012/main" xmlns:mc="http://schemas.openxmlformats.org/markup-compatibility/2006" type="blank" preserve="1">
+  <p:cSld name="Comparación">
+    <p:bg>
+      <p:bgPr>
+        <a:solidFill>
+          <a:srgbClr val="ffffff"/>
+        </a:solidFill>
+      </p:bgPr>
+    </p:bg>
+    <p:spTree>
+      <p:nvGrpSpPr>
+        <p:cNvPr id="1" name=""/>
+        <p:cNvGrpSpPr/>
+        <p:nvPr/>
+      </p:nvGrpSpPr>
+      <p:grpSpPr>
+        <a:xfrm>
+          <a:off x="0" y="0"/>
+          <a:ext cx="0" cy="0"/>
+          <a:chOff x="0" y="0"/>
+          <a:chExt cx="0" cy="0"/>
+        </a:xfrm>
+      </p:grpSpPr>
+      <p:sp>
+        <p:nvSpPr>
+          <p:cNvPr id="51" name="PlaceHolder 1"/>
+          <p:cNvSpPr>
+            <a:spLocks noGrp="1"/>
+          </p:cNvSpPr>
+          <p:nvPr>
+            <p:ph type="title"/>
+          </p:nvPr>
+        </p:nvSpPr>
+        <p:spPr>
+          <a:xfrm>
+            <a:off x="839880" y="365040"/>
+            <a:ext cx="10513440" cy="1323360"/>
+          </a:xfrm>
+          <a:prstGeom prst="rect">
+            <a:avLst/>
+          </a:prstGeom>
+          <a:noFill/>
+          <a:ln w="0">
+            <a:noFill/>
+          </a:ln>
+        </p:spPr>
+        <p:txBody>
+          <a:bodyPr lIns="91440" rIns="91440" tIns="45720" bIns="45720" anchor="ctr">
+            <a:noAutofit/>
+          </a:bodyPr>
+          <a:p>
+            <a:pPr indent="0" defTabSz="914400">
+              <a:lnSpc>
+                <a:spcPct val="90000"/>
+              </a:lnSpc>
+              <a:buNone/>
+              <a:tabLst>
+                <a:tab algn="l" pos="0"/>
+              </a:tabLst>
+            </a:pPr>
+            <a:r>
+              <a:rPr b="0" lang="es-ES" sz="4400" strike="noStrike" u="none">
+                <a:solidFill>
+                  <a:schemeClr val="dk1"/>
+                </a:solidFill>
+                <a:effectLst/>
+                <a:uFillTx/>
+                <a:latin typeface="Calibri Light"/>
+              </a:rPr>
+              <a:t>Haga clic para modificar el estilo de título del patrón</a:t>
+            </a:r>
+            <a:endParaRPr b="0" lang="es-ES" sz="4400" strike="noStrike" u="none">
+              <a:solidFill>
+                <a:srgbClr val="000000"/>
+              </a:solidFill>
+              <a:effectLst/>
+              <a:uFillTx/>
+              <a:latin typeface="Arial"/>
+            </a:endParaRPr>
+          </a:p>
+        </p:txBody>
+      </p:sp>
+      <p:sp>
+        <p:nvSpPr>
+          <p:cNvPr id="52" name="PlaceHolder 2"/>
+          <p:cNvSpPr>
+            <a:spLocks noGrp="1"/>
+          </p:cNvSpPr>
+          <p:nvPr>
+            <p:ph type="body"/>
+          </p:nvPr>
+        </p:nvSpPr>
+        <p:spPr>
+          <a:xfrm>
+            <a:off x="839880" y="1681200"/>
+            <a:ext cx="5155560" cy="821880"/>
+          </a:xfrm>
+          <a:prstGeom prst="rect">
+            <a:avLst/>
+          </a:prstGeom>
+          <a:noFill/>
+          <a:ln w="0">
+            <a:noFill/>
+          </a:ln>
+        </p:spPr>
+        <p:txBody>
+          <a:bodyPr lIns="91440" rIns="91440" tIns="45720" bIns="45720" anchor="b">
+            <a:noAutofit/>
+          </a:bodyPr>
+          <a:p>
+            <a:pPr indent="0" defTabSz="914400">
+              <a:lnSpc>
+                <a:spcPct val="90000"/>
+              </a:lnSpc>
+              <a:spcBef>
+                <a:spcPts val="1001"/>
+              </a:spcBef>
+              <a:buNone/>
+              <a:tabLst>
+                <a:tab algn="l" pos="0"/>
+              </a:tabLst>
+            </a:pPr>
+            <a:r>
+              <a:rPr b="1" lang="es-ES" sz="2400" strike="noStrike" u="none">
+                <a:solidFill>
+                  <a:schemeClr val="dk1"/>
+                </a:solidFill>
+                <a:effectLst/>
+                <a:uFillTx/>
+                <a:latin typeface="Calibri"/>
+              </a:rPr>
+              <a:t>Haga clic para modificar los estilos de texto del patrón</a:t>
+            </a:r>
+            <a:endParaRPr b="0" lang="es-ES" sz="2400" strike="noStrike" u="none">
+              <a:solidFill>
+                <a:srgbClr val="000000"/>
+              </a:solidFill>
+              <a:effectLst/>
+              <a:uFillTx/>
+              <a:latin typeface="Arial"/>
+            </a:endParaRPr>
+          </a:p>
+        </p:txBody>
+      </p:sp>
+      <p:sp>
+        <p:nvSpPr>
+          <p:cNvPr id="53" name="PlaceHolder 3"/>
+          <p:cNvSpPr>
+            <a:spLocks noGrp="1"/>
+          </p:cNvSpPr>
+          <p:nvPr>
+            <p:ph type="body"/>
+          </p:nvPr>
+        </p:nvSpPr>
+        <p:spPr>
+          <a:xfrm>
+            <a:off x="839880" y="2505240"/>
+            <a:ext cx="5155560" cy="3682440"/>
+          </a:xfrm>
+          <a:prstGeom prst="rect">
+            <a:avLst/>
+          </a:prstGeom>
+          <a:noFill/>
+          <a:ln w="0">
+            <a:noFill/>
+          </a:ln>
+        </p:spPr>
+        <p:txBody>
+          <a:bodyPr lIns="91440" rIns="91440" tIns="45720" bIns="45720" anchor="t">
+            <a:noAutofit/>
+          </a:bodyPr>
+          <a:p>
+            <a:pPr marL="228600" indent="-228600" defTabSz="914400">
+              <a:lnSpc>
+                <a:spcPct val="90000"/>
+              </a:lnSpc>
+              <a:spcBef>
+                <a:spcPts val="1001"/>
+              </a:spcBef>
+              <a:buClr>
+                <a:srgbClr val="000000"/>
+              </a:buClr>
+              <a:buFont typeface="Arial"/>
+              <a:buChar char="•"/>
+            </a:pPr>
+            <a:r>
+              <a:rPr b="0" lang="es-ES" sz="2800" strike="noStrike" u="none">
+                <a:solidFill>
+                  <a:schemeClr val="dk1"/>
+                </a:solidFill>
+                <a:effectLst/>
+                <a:uFillTx/>
+                <a:latin typeface="Calibri"/>
+              </a:rPr>
+              <a:t>Haga clic para modificar los estilos de texto del patrón</a:t>
+            </a:r>
+            <a:endParaRPr b="0" lang="es-ES" sz="2800" strike="noStrike" u="none">
+              <a:solidFill>
+                <a:srgbClr val="000000"/>
+              </a:solidFill>
+              <a:effectLst/>
+              <a:uFillTx/>
+              <a:latin typeface="Arial"/>
+            </a:endParaRPr>
+          </a:p>
+          <a:p>
+            <a:pPr lvl="1" marL="685800" indent="-228600" defTabSz="914400">
+              <a:lnSpc>
+                <a:spcPct val="90000"/>
+              </a:lnSpc>
+              <a:spcBef>
+                <a:spcPts val="499"/>
+              </a:spcBef>
+              <a:buClr>
+                <a:srgbClr val="000000"/>
+              </a:buClr>
+              <a:buFont typeface="Arial"/>
+              <a:buChar char="•"/>
+            </a:pPr>
+            <a:r>
+              <a:rPr b="0" lang="es-ES" sz="2400" strike="noStrike" u="none">
+                <a:solidFill>
+                  <a:schemeClr val="dk1"/>
+                </a:solidFill>
+                <a:effectLst/>
+                <a:uFillTx/>
+                <a:latin typeface="Calibri"/>
+              </a:rPr>
+              <a:t>Segundo nivel</a:t>
+            </a:r>
+            <a:endParaRPr b="0" lang="es-ES" sz="2400" strike="noStrike" u="none">
+              <a:solidFill>
+                <a:srgbClr val="000000"/>
+              </a:solidFill>
+              <a:effectLst/>
+              <a:uFillTx/>
+              <a:latin typeface="Arial"/>
+            </a:endParaRPr>
+          </a:p>
+          <a:p>
+            <a:pPr lvl="2" marL="1143000" indent="-228600" defTabSz="914400">
+              <a:lnSpc>
+                <a:spcPct val="90000"/>
+              </a:lnSpc>
+              <a:spcBef>
+                <a:spcPts val="499"/>
+              </a:spcBef>
+              <a:buClr>
+                <a:srgbClr val="000000"/>
+              </a:buClr>
+              <a:buFont typeface="Arial"/>
+              <a:buChar char="•"/>
+            </a:pPr>
+            <a:r>
+              <a:rPr b="0" lang="es-ES" sz="2000" strike="noStrike" u="none">
+                <a:solidFill>
+                  <a:schemeClr val="dk1"/>
+                </a:solidFill>
+                <a:effectLst/>
+                <a:uFillTx/>
+                <a:latin typeface="Calibri"/>
+              </a:rPr>
+              <a:t>Tercer nivel</a:t>
+            </a:r>
+            <a:endParaRPr b="0" lang="es-ES" sz="2000" strike="noStrike" u="none">
+              <a:solidFill>
+                <a:srgbClr val="000000"/>
+              </a:solidFill>
+              <a:effectLst/>
+              <a:uFillTx/>
+              <a:latin typeface="Arial"/>
+            </a:endParaRPr>
+          </a:p>
+          <a:p>
+            <a:pPr lvl="3" marL="1600200" indent="-228600" defTabSz="914400">
+              <a:lnSpc>
+                <a:spcPct val="90000"/>
+              </a:lnSpc>
+              <a:spcBef>
+                <a:spcPts val="499"/>
+              </a:spcBef>
+              <a:buClr>
+                <a:srgbClr val="000000"/>
+              </a:buClr>
+              <a:buFont typeface="Arial"/>
+              <a:buChar char="•"/>
+            </a:pPr>
+            <a:r>
+              <a:rPr b="0" lang="es-ES" sz="1800" strike="noStrike" u="none">
+                <a:solidFill>
+                  <a:schemeClr val="dk1"/>
+                </a:solidFill>
+                <a:effectLst/>
+                <a:uFillTx/>
+                <a:latin typeface="Calibri"/>
+              </a:rPr>
+              <a:t>Cuarto nivel</a:t>
+            </a:r>
+            <a:endParaRPr b="0" lang="es-ES" sz="1800" strike="noStrike" u="none">
+              <a:solidFill>
+                <a:srgbClr val="000000"/>
+              </a:solidFill>
+              <a:effectLst/>
+              <a:uFillTx/>
+              <a:latin typeface="Arial"/>
+            </a:endParaRPr>
+          </a:p>
+          <a:p>
+            <a:pPr lvl="4" marL="2057400" indent="-228600" defTabSz="914400">
+              <a:lnSpc>
+                <a:spcPct val="90000"/>
+              </a:lnSpc>
+              <a:spcBef>
+                <a:spcPts val="499"/>
+              </a:spcBef>
+              <a:buClr>
+                <a:srgbClr val="000000"/>
+              </a:buClr>
+              <a:buFont typeface="Arial"/>
+              <a:buChar char="•"/>
+            </a:pPr>
+            <a:r>
+              <a:rPr b="0" lang="es-ES" sz="1800" strike="noStrike" u="none">
+                <a:solidFill>
+                  <a:schemeClr val="dk1"/>
+                </a:solidFill>
+                <a:effectLst/>
+                <a:uFillTx/>
+                <a:latin typeface="Calibri"/>
+              </a:rPr>
+              <a:t>Quinto nivel</a:t>
+            </a:r>
+            <a:endParaRPr b="0" lang="es-ES" sz="1800" strike="noStrike" u="none">
+              <a:solidFill>
+                <a:srgbClr val="000000"/>
+              </a:solidFill>
+              <a:effectLst/>
+              <a:uFillTx/>
+              <a:latin typeface="Arial"/>
+            </a:endParaRPr>
+          </a:p>
+        </p:txBody>
+      </p:sp>
+      <p:sp>
+        <p:nvSpPr>
+          <p:cNvPr id="54" name="PlaceHolder 4"/>
+          <p:cNvSpPr>
+            <a:spLocks noGrp="1"/>
+          </p:cNvSpPr>
+          <p:nvPr>
+            <p:ph type="body"/>
+          </p:nvPr>
+        </p:nvSpPr>
+        <p:spPr>
+          <a:xfrm>
+            <a:off x="6172200" y="1681200"/>
+            <a:ext cx="5181120" cy="821880"/>
+          </a:xfrm>
+          <a:prstGeom prst="rect">
+            <a:avLst/>
+          </a:prstGeom>
+          <a:noFill/>
+          <a:ln w="0">
+            <a:noFill/>
+          </a:ln>
+        </p:spPr>
+        <p:txBody>
+          <a:bodyPr lIns="91440" rIns="91440" tIns="45720" bIns="45720" anchor="b">
+            <a:noAutofit/>
+          </a:bodyPr>
+          <a:p>
+            <a:pPr indent="0" defTabSz="914400">
+              <a:lnSpc>
+                <a:spcPct val="90000"/>
+              </a:lnSpc>
+              <a:spcBef>
+                <a:spcPts val="1001"/>
+              </a:spcBef>
+              <a:buNone/>
+              <a:tabLst>
+                <a:tab algn="l" pos="0"/>
+              </a:tabLst>
+            </a:pPr>
+            <a:r>
+              <a:rPr b="1" lang="es-ES" sz="2400" strike="noStrike" u="none">
+                <a:solidFill>
+                  <a:schemeClr val="dk1"/>
+                </a:solidFill>
+                <a:effectLst/>
+                <a:uFillTx/>
+                <a:latin typeface="Calibri"/>
+              </a:rPr>
+              <a:t>Haga clic para modificar los estilos de texto del patrón</a:t>
+            </a:r>
+            <a:endParaRPr b="0" lang="es-ES" sz="2400" strike="noStrike" u="none">
+              <a:solidFill>
+                <a:srgbClr val="000000"/>
+              </a:solidFill>
+              <a:effectLst/>
+              <a:uFillTx/>
+              <a:latin typeface="Arial"/>
+            </a:endParaRPr>
+          </a:p>
+        </p:txBody>
+      </p:sp>
+      <p:sp>
+        <p:nvSpPr>
+          <p:cNvPr id="55" name="PlaceHolder 5"/>
+          <p:cNvSpPr>
+            <a:spLocks noGrp="1"/>
+          </p:cNvSpPr>
+          <p:nvPr>
+            <p:ph type="body"/>
+          </p:nvPr>
+        </p:nvSpPr>
+        <p:spPr>
+          <a:xfrm>
+            <a:off x="6172200" y="2505240"/>
+            <a:ext cx="5181120" cy="3682440"/>
+          </a:xfrm>
+          <a:prstGeom prst="rect">
+            <a:avLst/>
+          </a:prstGeom>
+          <a:noFill/>
+          <a:ln w="0">
+            <a:noFill/>
+          </a:ln>
+        </p:spPr>
+        <p:txBody>
+          <a:bodyPr lIns="91440" rIns="91440" tIns="45720" bIns="45720" anchor="t">
+            <a:noAutofit/>
+          </a:bodyPr>
+          <a:p>
+            <a:pPr marL="228600" indent="-228600" defTabSz="914400">
+              <a:lnSpc>
+                <a:spcPct val="90000"/>
+              </a:lnSpc>
+              <a:spcBef>
+                <a:spcPts val="1001"/>
+              </a:spcBef>
+              <a:buClr>
+                <a:srgbClr val="000000"/>
+              </a:buClr>
+              <a:buFont typeface="Arial"/>
+              <a:buChar char="•"/>
+            </a:pPr>
+            <a:r>
+              <a:rPr b="0" lang="es-ES" sz="2800" strike="noStrike" u="none">
+                <a:solidFill>
+                  <a:schemeClr val="dk1"/>
+                </a:solidFill>
+                <a:effectLst/>
+                <a:uFillTx/>
+                <a:latin typeface="Calibri"/>
+              </a:rPr>
+              <a:t>Haga clic para modificar los estilos de texto del patrón</a:t>
+            </a:r>
+            <a:endParaRPr b="0" lang="es-ES" sz="2800" strike="noStrike" u="none">
+              <a:solidFill>
+                <a:srgbClr val="000000"/>
+              </a:solidFill>
+              <a:effectLst/>
+              <a:uFillTx/>
+              <a:latin typeface="Arial"/>
+            </a:endParaRPr>
+          </a:p>
+          <a:p>
+            <a:pPr lvl="1" marL="685800" indent="-228600" defTabSz="914400">
+              <a:lnSpc>
+                <a:spcPct val="90000"/>
+              </a:lnSpc>
+              <a:spcBef>
+                <a:spcPts val="499"/>
+              </a:spcBef>
+              <a:buClr>
+                <a:srgbClr val="000000"/>
+              </a:buClr>
+              <a:buFont typeface="Arial"/>
+              <a:buChar char="•"/>
+            </a:pPr>
+            <a:r>
+              <a:rPr b="0" lang="es-ES" sz="2400" strike="noStrike" u="none">
+                <a:solidFill>
+                  <a:schemeClr val="dk1"/>
+                </a:solidFill>
+                <a:effectLst/>
+                <a:uFillTx/>
+                <a:latin typeface="Calibri"/>
+              </a:rPr>
+              <a:t>Segundo nivel</a:t>
+            </a:r>
+            <a:endParaRPr b="0" lang="es-ES" sz="2400" strike="noStrike" u="none">
+              <a:solidFill>
+                <a:srgbClr val="000000"/>
+              </a:solidFill>
+              <a:effectLst/>
+              <a:uFillTx/>
+              <a:latin typeface="Arial"/>
+            </a:endParaRPr>
+          </a:p>
+          <a:p>
+            <a:pPr lvl="2" marL="1143000" indent="-228600" defTabSz="914400">
+              <a:lnSpc>
+                <a:spcPct val="90000"/>
+              </a:lnSpc>
+              <a:spcBef>
+                <a:spcPts val="499"/>
+              </a:spcBef>
+              <a:buClr>
+                <a:srgbClr val="000000"/>
+              </a:buClr>
+              <a:buFont typeface="Arial"/>
+              <a:buChar char="•"/>
+            </a:pPr>
+            <a:r>
+              <a:rPr b="0" lang="es-ES" sz="2000" strike="noStrike" u="none">
+                <a:solidFill>
+                  <a:schemeClr val="dk1"/>
+                </a:solidFill>
+                <a:effectLst/>
+                <a:uFillTx/>
+                <a:latin typeface="Calibri"/>
+              </a:rPr>
+              <a:t>Tercer nivel</a:t>
+            </a:r>
+            <a:endParaRPr b="0" lang="es-ES" sz="2000" strike="noStrike" u="none">
+              <a:solidFill>
+                <a:srgbClr val="000000"/>
+              </a:solidFill>
+              <a:effectLst/>
+              <a:uFillTx/>
+              <a:latin typeface="Arial"/>
+            </a:endParaRPr>
+          </a:p>
+          <a:p>
+            <a:pPr lvl="3" marL="1600200" indent="-228600" defTabSz="914400">
+              <a:lnSpc>
+                <a:spcPct val="90000"/>
+              </a:lnSpc>
+              <a:spcBef>
+                <a:spcPts val="499"/>
+              </a:spcBef>
+              <a:buClr>
+                <a:srgbClr val="000000"/>
+              </a:buClr>
+              <a:buFont typeface="Arial"/>
+              <a:buChar char="•"/>
+            </a:pPr>
+            <a:r>
+              <a:rPr b="0" lang="es-ES" sz="1800" strike="noStrike" u="none">
+                <a:solidFill>
+                  <a:schemeClr val="dk1"/>
+                </a:solidFill>
+                <a:effectLst/>
+                <a:uFillTx/>
+                <a:latin typeface="Calibri"/>
+              </a:rPr>
+              <a:t>Cuarto nivel</a:t>
+            </a:r>
+            <a:endParaRPr b="0" lang="es-ES" sz="1800" strike="noStrike" u="none">
+              <a:solidFill>
+                <a:srgbClr val="000000"/>
+              </a:solidFill>
+              <a:effectLst/>
+              <a:uFillTx/>
+              <a:latin typeface="Arial"/>
+            </a:endParaRPr>
+          </a:p>
+          <a:p>
+            <a:pPr lvl="4" marL="2057400" indent="-228600" defTabSz="914400">
+              <a:lnSpc>
+                <a:spcPct val="90000"/>
+              </a:lnSpc>
+              <a:spcBef>
+                <a:spcPts val="499"/>
+              </a:spcBef>
+              <a:buClr>
+                <a:srgbClr val="000000"/>
+              </a:buClr>
+              <a:buFont typeface="Arial"/>
+              <a:buChar char="•"/>
+            </a:pPr>
+            <a:r>
+              <a:rPr b="0" lang="es-ES" sz="1800" strike="noStrike" u="none">
+                <a:solidFill>
+                  <a:schemeClr val="dk1"/>
+                </a:solidFill>
+                <a:effectLst/>
+                <a:uFillTx/>
+                <a:latin typeface="Calibri"/>
+              </a:rPr>
+              <a:t>Quinto nivel</a:t>
+            </a:r>
+            <a:endParaRPr b="0" lang="es-ES" sz="1800" strike="noStrike" u="none">
+              <a:solidFill>
+                <a:srgbClr val="000000"/>
+              </a:solidFill>
+              <a:effectLst/>
+              <a:uFillTx/>
+              <a:latin typeface="Arial"/>
+            </a:endParaRPr>
+          </a:p>
+        </p:txBody>
+      </p:sp>
+      <p:sp>
+        <p:nvSpPr>
+          <p:cNvPr id="56" name="PlaceHolder 6"/>
+          <p:cNvSpPr>
+            <a:spLocks noGrp="1"/>
+          </p:cNvSpPr>
+          <p:nvPr>
+            <p:ph type="dt" idx="31"/>
+          </p:nvPr>
+        </p:nvSpPr>
+        <p:spPr>
+          <a:xfrm>
+            <a:off x="838080" y="6356520"/>
+            <a:ext cx="2741040" cy="362880"/>
+          </a:xfrm>
+          <a:prstGeom prst="rect">
+            <a:avLst/>
+          </a:prstGeom>
+          <a:noFill/>
+          <a:ln w="0">
+            <a:noFill/>
+          </a:ln>
+        </p:spPr>
+        <p:txBody>
+          <a:bodyPr lIns="91440" rIns="91440" tIns="45720" bIns="45720" anchor="ctr">
+            <a:noAutofit/>
+          </a:bodyPr>
+          <a:lstStyle>
+            <a:lvl1pPr indent="0" defTabSz="914400">
+              <a:lnSpc>
+                <a:spcPct val="100000"/>
+              </a:lnSpc>
+              <a:buNone/>
+              <a:tabLst>
+                <a:tab algn="l" pos="0"/>
+              </a:tabLst>
+              <a:defRPr b="0" lang="en-GB" sz="1200" strike="noStrike" u="none">
+                <a:solidFill>
+                  <a:schemeClr val="dk1">
+                    <a:tint val="75000"/>
+                  </a:schemeClr>
+                </a:solidFill>
+                <a:effectLst/>
+                <a:uFillTx/>
+                <a:latin typeface="Calibri"/>
+              </a:defRPr>
+            </a:lvl1pPr>
+          </a:lstStyle>
+          <a:p>
+            <a:pPr indent="0" defTabSz="914400">
+              <a:lnSpc>
+                <a:spcPct val="100000"/>
+              </a:lnSpc>
+              <a:buNone/>
+              <a:tabLst>
+                <a:tab algn="l" pos="0"/>
+              </a:tabLst>
+            </a:pPr>
+            <a:r>
+              <a:rPr b="0" lang="en-GB" sz="1200" strike="noStrike" u="none">
+                <a:solidFill>
+                  <a:schemeClr val="dk1">
+                    <a:tint val="75000"/>
+                  </a:schemeClr>
+                </a:solidFill>
+                <a:effectLst/>
+                <a:uFillTx/>
+                <a:latin typeface="Calibri"/>
+              </a:rPr>
+              <a:t>&lt;fecha/hora&gt;</a:t>
+            </a:r>
+            <a:endParaRPr b="0" lang="es-ES" sz="1200" strike="noStrike" u="none">
+              <a:solidFill>
+                <a:srgbClr val="000000"/>
+              </a:solidFill>
+              <a:effectLst/>
+              <a:uFillTx/>
+              <a:latin typeface="Times New Roman"/>
+            </a:endParaRPr>
+          </a:p>
+        </p:txBody>
+      </p:sp>
+      <p:sp>
+        <p:nvSpPr>
+          <p:cNvPr id="57" name="PlaceHolder 7"/>
+          <p:cNvSpPr>
+            <a:spLocks noGrp="1"/>
+          </p:cNvSpPr>
+          <p:nvPr>
+            <p:ph type="ftr" idx="32"/>
+          </p:nvPr>
+        </p:nvSpPr>
+        <p:spPr>
+          <a:xfrm>
+            <a:off x="4038480" y="6356520"/>
+            <a:ext cx="4112640" cy="362880"/>
+          </a:xfrm>
+          <a:prstGeom prst="rect">
+            <a:avLst/>
+          </a:prstGeom>
+          <a:noFill/>
+          <a:ln w="0">
+            <a:noFill/>
+          </a:ln>
+        </p:spPr>
+        <p:txBody>
+          <a:bodyPr lIns="91440" rIns="91440" tIns="45720" bIns="45720" anchor="ctr">
+            <a:noAutofit/>
+          </a:bodyPr>
+          <a:lstStyle>
+            <a:lvl1pPr indent="0" algn="ctr">
+              <a:lnSpc>
+                <a:spcPct val="100000"/>
+              </a:lnSpc>
+              <a:buNone/>
+              <a:tabLst>
+                <a:tab algn="l" pos="0"/>
+              </a:tabLst>
+              <a:defRPr b="0" lang="es-ES" sz="1400" strike="noStrike" u="none">
+                <a:solidFill>
+                  <a:srgbClr val="000000"/>
+                </a:solidFill>
+                <a:effectLst/>
+                <a:uFillTx/>
+                <a:latin typeface="Times New Roman"/>
+              </a:defRPr>
+            </a:lvl1pPr>
+          </a:lstStyle>
+          <a:p>
+            <a:pPr indent="0" algn="ctr">
+              <a:lnSpc>
+                <a:spcPct val="100000"/>
+              </a:lnSpc>
+              <a:buNone/>
+              <a:tabLst>
+                <a:tab algn="l" pos="0"/>
+              </a:tabLst>
+            </a:pPr>
+            <a:r>
+              <a:rPr b="0" lang="es-ES" sz="1400" strike="noStrike" u="none">
+                <a:solidFill>
+                  <a:srgbClr val="000000"/>
+                </a:solidFill>
+                <a:effectLst/>
+                <a:uFillTx/>
+                <a:latin typeface="Times New Roman"/>
+              </a:rPr>
+              <a:t>&lt;pie de página&gt;</a:t>
+            </a:r>
+            <a:endParaRPr b="0" lang="es-ES" sz="1400" strike="noStrike" u="none">
+              <a:solidFill>
+                <a:srgbClr val="000000"/>
+              </a:solidFill>
+              <a:effectLst/>
+              <a:uFillTx/>
+              <a:latin typeface="Times New Roman"/>
+            </a:endParaRPr>
+          </a:p>
+        </p:txBody>
+      </p:sp>
+      <p:sp>
+        <p:nvSpPr>
+          <p:cNvPr id="58" name="PlaceHolder 8"/>
+          <p:cNvSpPr>
+            <a:spLocks noGrp="1"/>
+          </p:cNvSpPr>
+          <p:nvPr>
+            <p:ph type="sldNum" idx="33"/>
+          </p:nvPr>
+        </p:nvSpPr>
+        <p:spPr>
+          <a:xfrm>
+            <a:off x="8610480" y="6356520"/>
+            <a:ext cx="2741040" cy="362880"/>
+          </a:xfrm>
+          <a:prstGeom prst="rect">
+            <a:avLst/>
+          </a:prstGeom>
+          <a:noFill/>
+          <a:ln w="0">
+            <a:noFill/>
+          </a:ln>
+        </p:spPr>
+        <p:txBody>
+          <a:bodyPr lIns="91440" rIns="91440" tIns="45720" bIns="45720" anchor="ctr">
+            <a:noAutofit/>
+          </a:bodyPr>
+          <a:lstStyle>
+            <a:lvl1pPr indent="0" algn="r" defTabSz="914400">
+              <a:lnSpc>
+                <a:spcPct val="100000"/>
+              </a:lnSpc>
+              <a:buNone/>
+              <a:tabLst>
+                <a:tab algn="l" pos="0"/>
+              </a:tabLst>
+              <a:defRPr b="0" lang="en-GB" sz="1200" strike="noStrike" u="none">
+                <a:solidFill>
+                  <a:schemeClr val="dk1">
+                    <a:tint val="75000"/>
+                  </a:schemeClr>
+                </a:solidFill>
+                <a:effectLst/>
+                <a:uFillTx/>
+                <a:latin typeface="Calibri"/>
+              </a:defRPr>
+            </a:lvl1pPr>
+          </a:lstStyle>
+          <a:p>
+            <a:pPr indent="0" algn="r" defTabSz="914400">
+              <a:lnSpc>
+                <a:spcPct val="100000"/>
+              </a:lnSpc>
+              <a:buNone/>
+              <a:tabLst>
+                <a:tab algn="l" pos="0"/>
+              </a:tabLst>
+            </a:pPr>
+            <a:fld id="{D66F4F8F-A226-40E7-B6AF-220458376739}" type="slidenum">
+              <a:rPr b="0" lang="en-GB" sz="1200" strike="noStrike" u="none">
+                <a:solidFill>
+                  <a:schemeClr val="dk1">
+                    <a:tint val="75000"/>
+                  </a:schemeClr>
+                </a:solidFill>
+                <a:effectLst/>
+                <a:uFillTx/>
+                <a:latin typeface="Calibri"/>
+              </a:rPr>
+              <a:t>&lt;número&gt;</a:t>
+            </a:fld>
+            <a:endParaRPr b="0" lang="es-ES" sz="1200" strike="noStrike" u="none">
+              <a:solidFill>
+                <a:srgbClr val="000000"/>
+              </a:solidFill>
+              <a:effectLst/>
+              <a:uFillTx/>
+              <a:latin typeface="Times New Roman"/>
+            </a:endParaRPr>
+          </a:p>
+        </p:txBody>
+      </p:sp>
+    </p:spTree>
+  </p:cSld>
+</p:sldLayout>
+</file>
+
+<file path=ppt/slideLayouts/slideLayout2.xml><?xml version="1.0" encoding="utf-8"?>
 <p:sldLayout xmlns:a="http://schemas.openxmlformats.org/drawingml/2006/main" xmlns:p="http://schemas.openxmlformats.org/presentationml/2006/main" xmlns:r="http://schemas.openxmlformats.org/officeDocument/2006/relationships" xmlns:p14="http://schemas.microsoft.com/office/powerpoint/2010/main" xmlns:p15="http://schemas.microsoft.com/office/powerpoint/2012/main" xmlns:mc="http://schemas.openxmlformats.org/markup-compatibility/2006" type="blank" preserve="1">
   <p:cSld name="En blanco">
     <p:bg>
@@ -704,18 +1948,18 @@
       </p:grpSpPr>
       <p:sp>
         <p:nvSpPr>
-          <p:cNvPr id="48" name="PlaceHolder 1"/>
+          <p:cNvPr id="4" name="PlaceHolder 1"/>
           <p:cNvSpPr>
             <a:spLocks noGrp="1"/>
           </p:cNvSpPr>
           <p:nvPr>
-            <p:ph type="dt" idx="28"/>
+            <p:ph type="dt" idx="4"/>
           </p:nvPr>
         </p:nvSpPr>
         <p:spPr>
           <a:xfrm>
             <a:off x="838080" y="6356520"/>
-            <a:ext cx="2741400" cy="363240"/>
+            <a:ext cx="2741040" cy="362880"/>
           </a:xfrm>
           <a:prstGeom prst="rect">
             <a:avLst/>
@@ -786,18 +2030,18 @@
       </p:sp>
       <p:sp>
         <p:nvSpPr>
-          <p:cNvPr id="49" name="PlaceHolder 2"/>
+          <p:cNvPr id="5" name="PlaceHolder 2"/>
           <p:cNvSpPr>
             <a:spLocks noGrp="1"/>
           </p:cNvSpPr>
           <p:nvPr>
-            <p:ph type="ftr" idx="29"/>
+            <p:ph type="ftr" idx="5"/>
           </p:nvPr>
         </p:nvSpPr>
         <p:spPr>
           <a:xfrm>
             <a:off x="4038480" y="6356520"/>
-            <a:ext cx="4113000" cy="363240"/>
+            <a:ext cx="4112640" cy="362880"/>
           </a:xfrm>
           <a:prstGeom prst="rect">
             <a:avLst/>
@@ -864,18 +2108,18 @@
       </p:sp>
       <p:sp>
         <p:nvSpPr>
-          <p:cNvPr id="50" name="PlaceHolder 3"/>
+          <p:cNvPr id="6" name="PlaceHolder 3"/>
           <p:cNvSpPr>
             <a:spLocks noGrp="1"/>
           </p:cNvSpPr>
           <p:nvPr>
-            <p:ph type="sldNum" idx="30"/>
+            <p:ph type="sldNum" idx="6"/>
           </p:nvPr>
         </p:nvSpPr>
         <p:spPr>
           <a:xfrm>
             <a:off x="8610480" y="6356520"/>
-            <a:ext cx="2741400" cy="363240"/>
+            <a:ext cx="2741040" cy="362880"/>
           </a:xfrm>
           <a:prstGeom prst="rect">
             <a:avLst/>
@@ -920,7 +2164,7 @@
                 <a:tab algn="l" pos="0"/>
               </a:tabLst>
             </a:pPr>
-            <a:fld id="{D66A5C4A-EB8D-4ABA-8FA8-5AD4616323E0}" type="slidenum">
+            <a:fld id="{13E658D9-4062-4989-A735-27AACD944EBC}" type="slidenum">
               <a:rPr b="0" lang="en-GB" sz="1200" strike="noStrike" u="none">
                 <a:solidFill>
                   <a:schemeClr val="dk1">
@@ -946,7 +2190,7 @@
       </p:sp>
       <p:sp>
         <p:nvSpPr>
-          <p:cNvPr id="51" name="PlaceHolder 4"/>
+          <p:cNvPr id="7" name="PlaceHolder 4"/>
           <p:cNvSpPr>
             <a:spLocks noGrp="1"/>
           </p:cNvSpPr>
@@ -957,7 +2201,7 @@
         <p:spPr>
           <a:xfrm>
             <a:off x="609480" y="273600"/>
-            <a:ext cx="10971360" cy="1143720"/>
+            <a:ext cx="10971000" cy="1143360"/>
           </a:xfrm>
           <a:prstGeom prst="rect">
             <a:avLst/>
@@ -1005,7 +2249,7 @@
       </p:sp>
       <p:sp>
         <p:nvSpPr>
-          <p:cNvPr id="52" name="PlaceHolder 5"/>
+          <p:cNvPr id="8" name="PlaceHolder 5"/>
           <p:cNvSpPr>
             <a:spLocks noGrp="1"/>
           </p:cNvSpPr>
@@ -1016,7 +2260,7 @@
         <p:spPr>
           <a:xfrm>
             <a:off x="609480" y="1604520"/>
-            <a:ext cx="10971360" cy="3976200"/>
+            <a:ext cx="10971000" cy="3975840"/>
           </a:xfrm>
           <a:prstGeom prst="rect">
             <a:avLst/>
@@ -1282,7 +2526,7 @@
 </p:sldLayout>
 </file>
 
-<file path=ppt/slideLayouts/slideLayout11.xml><?xml version="1.0" encoding="utf-8"?>
+<file path=ppt/slideLayouts/slideLayout3.xml><?xml version="1.0" encoding="utf-8"?>
 <p:sldLayout xmlns:a="http://schemas.openxmlformats.org/drawingml/2006/main" xmlns:p="http://schemas.openxmlformats.org/presentationml/2006/main" xmlns:r="http://schemas.openxmlformats.org/officeDocument/2006/relationships" xmlns:p14="http://schemas.microsoft.com/office/powerpoint/2010/main" xmlns:p15="http://schemas.microsoft.com/office/powerpoint/2012/main" xmlns:mc="http://schemas.openxmlformats.org/markup-compatibility/2006" type="blank" preserve="1">
   <p:cSld name="Contenido con título">
     <p:bg>
@@ -1308,7 +2552,7 @@
       </p:grpSpPr>
       <p:sp>
         <p:nvSpPr>
-          <p:cNvPr id="53" name="PlaceHolder 1"/>
+          <p:cNvPr id="9" name="PlaceHolder 1"/>
           <p:cNvSpPr>
             <a:spLocks noGrp="1"/>
           </p:cNvSpPr>
@@ -1319,7 +2563,7 @@
         <p:spPr>
           <a:xfrm>
             <a:off x="839880" y="457200"/>
-            <a:ext cx="3930480" cy="1598400"/>
+            <a:ext cx="3930120" cy="1598040"/>
           </a:xfrm>
           <a:prstGeom prst="rect">
             <a:avLst/>
@@ -1367,7 +2611,7 @@
       </p:sp>
       <p:sp>
         <p:nvSpPr>
-          <p:cNvPr id="54" name="PlaceHolder 2"/>
+          <p:cNvPr id="10" name="PlaceHolder 2"/>
           <p:cNvSpPr>
             <a:spLocks noGrp="1"/>
           </p:cNvSpPr>
@@ -1378,7 +2622,7 @@
         <p:spPr>
           <a:xfrm>
             <a:off x="5183280" y="987480"/>
-            <a:ext cx="6170400" cy="4871880"/>
+            <a:ext cx="6170040" cy="4871520"/>
           </a:xfrm>
           <a:prstGeom prst="rect">
             <a:avLst/>
@@ -1566,7 +2810,7 @@
       </p:sp>
       <p:sp>
         <p:nvSpPr>
-          <p:cNvPr id="55" name="PlaceHolder 3"/>
+          <p:cNvPr id="11" name="PlaceHolder 3"/>
           <p:cNvSpPr>
             <a:spLocks noGrp="1"/>
           </p:cNvSpPr>
@@ -1577,7 +2821,7 @@
         <p:spPr>
           <a:xfrm>
             <a:off x="839880" y="2057400"/>
-            <a:ext cx="3930480" cy="3809880"/>
+            <a:ext cx="3930120" cy="3809520"/>
           </a:xfrm>
           <a:prstGeom prst="rect">
             <a:avLst/>
@@ -1628,18 +2872,18 @@
       </p:sp>
       <p:sp>
         <p:nvSpPr>
-          <p:cNvPr id="56" name="PlaceHolder 4"/>
+          <p:cNvPr id="12" name="PlaceHolder 4"/>
           <p:cNvSpPr>
             <a:spLocks noGrp="1"/>
           </p:cNvSpPr>
           <p:nvPr>
-            <p:ph type="dt" idx="31"/>
+            <p:ph type="dt" idx="7"/>
           </p:nvPr>
         </p:nvSpPr>
         <p:spPr>
           <a:xfrm>
             <a:off x="838080" y="6356520"/>
-            <a:ext cx="2741400" cy="363240"/>
+            <a:ext cx="2741040" cy="362880"/>
           </a:xfrm>
           <a:prstGeom prst="rect">
             <a:avLst/>
@@ -1710,18 +2954,18 @@
       </p:sp>
       <p:sp>
         <p:nvSpPr>
-          <p:cNvPr id="57" name="PlaceHolder 5"/>
+          <p:cNvPr id="13" name="PlaceHolder 5"/>
           <p:cNvSpPr>
             <a:spLocks noGrp="1"/>
           </p:cNvSpPr>
           <p:nvPr>
-            <p:ph type="ftr" idx="32"/>
+            <p:ph type="ftr" idx="8"/>
           </p:nvPr>
         </p:nvSpPr>
         <p:spPr>
           <a:xfrm>
             <a:off x="4038480" y="6356520"/>
-            <a:ext cx="4113000" cy="363240"/>
+            <a:ext cx="4112640" cy="362880"/>
           </a:xfrm>
           <a:prstGeom prst="rect">
             <a:avLst/>
@@ -1788,18 +3032,18 @@
       </p:sp>
       <p:sp>
         <p:nvSpPr>
-          <p:cNvPr id="58" name="PlaceHolder 6"/>
+          <p:cNvPr id="14" name="PlaceHolder 6"/>
           <p:cNvSpPr>
             <a:spLocks noGrp="1"/>
           </p:cNvSpPr>
           <p:nvPr>
-            <p:ph type="sldNum" idx="33"/>
+            <p:ph type="sldNum" idx="9"/>
           </p:nvPr>
         </p:nvSpPr>
         <p:spPr>
           <a:xfrm>
             <a:off x="8610480" y="6356520"/>
-            <a:ext cx="2741400" cy="363240"/>
+            <a:ext cx="2741040" cy="362880"/>
           </a:xfrm>
           <a:prstGeom prst="rect">
             <a:avLst/>
@@ -1844,866 +3088,7 @@
                 <a:tab algn="l" pos="0"/>
               </a:tabLst>
             </a:pPr>
-            <a:fld id="{1262A9DA-0975-4D83-8679-A0578C10376C}" type="slidenum">
-              <a:rPr b="0" lang="en-GB" sz="1200" strike="noStrike" u="none">
-                <a:solidFill>
-                  <a:schemeClr val="dk1">
-                    <a:tint val="75000"/>
-                  </a:schemeClr>
-                </a:solidFill>
-                <a:effectLst/>
-                <a:uFillTx/>
-                <a:latin typeface="Calibri"/>
-              </a:rPr>
-              <a:t>&lt;número&gt;</a:t>
-            </a:fld>
-            <a:endParaRPr b="0" lang="es-ES" sz="1200" strike="noStrike" u="none">
-              <a:solidFill>
-                <a:srgbClr val="000000"/>
-              </a:solidFill>
-              <a:effectLst/>
-              <a:uFillTx/>
-              <a:latin typeface="Times New Roman"/>
-            </a:endParaRPr>
-          </a:p>
-        </p:txBody>
-      </p:sp>
-    </p:spTree>
-  </p:cSld>
-</p:sldLayout>
-</file>
-
-<file path=ppt/slideLayouts/slideLayout2.xml><?xml version="1.0" encoding="utf-8"?>
-<p:sldLayout xmlns:a="http://schemas.openxmlformats.org/drawingml/2006/main" xmlns:p="http://schemas.openxmlformats.org/presentationml/2006/main" xmlns:r="http://schemas.openxmlformats.org/officeDocument/2006/relationships" xmlns:p14="http://schemas.microsoft.com/office/powerpoint/2010/main" xmlns:p15="http://schemas.microsoft.com/office/powerpoint/2012/main" xmlns:mc="http://schemas.openxmlformats.org/markup-compatibility/2006" type="title" preserve="1">
-  <p:cSld name="Diapositiva de título">
-    <p:bg>
-      <p:bgPr>
-        <a:solidFill>
-          <a:srgbClr val="ffffff"/>
-        </a:solidFill>
-      </p:bgPr>
-    </p:bg>
-    <p:spTree>
-      <p:nvGrpSpPr>
-        <p:cNvPr id="1" name=""/>
-        <p:cNvGrpSpPr/>
-        <p:nvPr/>
-      </p:nvGrpSpPr>
-      <p:grpSpPr>
-        <a:xfrm>
-          <a:off x="0" y="0"/>
-          <a:ext cx="0" cy="0"/>
-          <a:chOff x="0" y="0"/>
-          <a:chExt cx="0" cy="0"/>
-        </a:xfrm>
-      </p:grpSpPr>
-      <p:sp>
-        <p:nvSpPr>
-          <p:cNvPr id="6" name="PlaceHolder 1"/>
-          <p:cNvSpPr>
-            <a:spLocks noGrp="1"/>
-          </p:cNvSpPr>
-          <p:nvPr>
-            <p:ph type="title"/>
-          </p:nvPr>
-        </p:nvSpPr>
-        <p:spPr>
-          <a:xfrm>
-            <a:off x="1523880" y="1122480"/>
-            <a:ext cx="9142200" cy="2385720"/>
-          </a:xfrm>
-          <a:prstGeom prst="rect">
-            <a:avLst/>
-          </a:prstGeom>
-          <a:noFill/>
-          <a:ln w="0">
-            <a:noFill/>
-          </a:ln>
-        </p:spPr>
-        <p:txBody>
-          <a:bodyPr lIns="91440" rIns="91440" tIns="45720" bIns="45720" anchor="b">
-            <a:noAutofit/>
-          </a:bodyPr>
-          <a:p>
-            <a:pPr indent="0" algn="ctr" defTabSz="914400">
-              <a:lnSpc>
-                <a:spcPct val="90000"/>
-              </a:lnSpc>
-              <a:buNone/>
-              <a:tabLst>
-                <a:tab algn="l" pos="0"/>
-              </a:tabLst>
-            </a:pPr>
-            <a:r>
-              <a:rPr b="0" lang="es-ES" sz="6000" strike="noStrike" u="none">
-                <a:solidFill>
-                  <a:schemeClr val="dk1"/>
-                </a:solidFill>
-                <a:effectLst/>
-                <a:uFillTx/>
-                <a:latin typeface="Calibri Light"/>
-              </a:rPr>
-              <a:t>Haga clic para modificar el estilo de título del patrón</a:t>
-            </a:r>
-            <a:endParaRPr b="0" lang="es-ES" sz="6000" strike="noStrike" u="none">
-              <a:solidFill>
-                <a:srgbClr val="000000"/>
-              </a:solidFill>
-              <a:effectLst/>
-              <a:uFillTx/>
-              <a:latin typeface="Arial"/>
-            </a:endParaRPr>
-          </a:p>
-        </p:txBody>
-      </p:sp>
-      <p:sp>
-        <p:nvSpPr>
-          <p:cNvPr id="7" name="PlaceHolder 2"/>
-          <p:cNvSpPr>
-            <a:spLocks noGrp="1"/>
-          </p:cNvSpPr>
-          <p:nvPr>
-            <p:ph type="dt" idx="4"/>
-          </p:nvPr>
-        </p:nvSpPr>
-        <p:spPr>
-          <a:xfrm>
-            <a:off x="838080" y="6356520"/>
-            <a:ext cx="2741400" cy="363240"/>
-          </a:xfrm>
-          <a:prstGeom prst="rect">
-            <a:avLst/>
-          </a:prstGeom>
-          <a:noFill/>
-          <a:ln w="0">
-            <a:noFill/>
-          </a:ln>
-        </p:spPr>
-        <p:txBody>
-          <a:bodyPr lIns="91440" rIns="91440" tIns="45720" bIns="45720" anchor="ctr">
-            <a:noAutofit/>
-          </a:bodyPr>
-          <a:lstStyle>
-            <a:lvl1pPr indent="0" defTabSz="914400">
-              <a:lnSpc>
-                <a:spcPct val="100000"/>
-              </a:lnSpc>
-              <a:buNone/>
-              <a:tabLst>
-                <a:tab algn="l" pos="0"/>
-              </a:tabLst>
-              <a:defRPr b="0" lang="en-GB" sz="1200" strike="noStrike" u="none">
-                <a:solidFill>
-                  <a:schemeClr val="dk1">
-                    <a:tint val="75000"/>
-                  </a:schemeClr>
-                </a:solidFill>
-                <a:effectLst/>
-                <a:uFillTx/>
-                <a:latin typeface="Calibri"/>
-              </a:defRPr>
-            </a:lvl1pPr>
-          </a:lstStyle>
-          <a:p>
-            <a:pPr indent="0" defTabSz="914400">
-              <a:lnSpc>
-                <a:spcPct val="100000"/>
-              </a:lnSpc>
-              <a:buNone/>
-              <a:tabLst>
-                <a:tab algn="l" pos="0"/>
-              </a:tabLst>
-            </a:pPr>
-            <a:r>
-              <a:rPr b="0" lang="en-GB" sz="1200" strike="noStrike" u="none">
-                <a:solidFill>
-                  <a:schemeClr val="dk1">
-                    <a:tint val="75000"/>
-                  </a:schemeClr>
-                </a:solidFill>
-                <a:effectLst/>
-                <a:uFillTx/>
-                <a:latin typeface="Calibri"/>
-              </a:rPr>
-              <a:t>&lt;fecha/hora&gt;</a:t>
-            </a:r>
-            <a:endParaRPr b="0" lang="es-ES" sz="1200" strike="noStrike" u="none">
-              <a:solidFill>
-                <a:srgbClr val="000000"/>
-              </a:solidFill>
-              <a:effectLst/>
-              <a:uFillTx/>
-              <a:latin typeface="Times New Roman"/>
-            </a:endParaRPr>
-          </a:p>
-        </p:txBody>
-      </p:sp>
-      <p:sp>
-        <p:nvSpPr>
-          <p:cNvPr id="8" name="PlaceHolder 3"/>
-          <p:cNvSpPr>
-            <a:spLocks noGrp="1"/>
-          </p:cNvSpPr>
-          <p:nvPr>
-            <p:ph type="ftr" idx="5"/>
-          </p:nvPr>
-        </p:nvSpPr>
-        <p:spPr>
-          <a:xfrm>
-            <a:off x="4038480" y="6356520"/>
-            <a:ext cx="4113000" cy="363240"/>
-          </a:xfrm>
-          <a:prstGeom prst="rect">
-            <a:avLst/>
-          </a:prstGeom>
-          <a:noFill/>
-          <a:ln w="0">
-            <a:noFill/>
-          </a:ln>
-        </p:spPr>
-        <p:txBody>
-          <a:bodyPr lIns="91440" rIns="91440" tIns="45720" bIns="45720" anchor="ctr">
-            <a:noAutofit/>
-          </a:bodyPr>
-          <a:lstStyle>
-            <a:lvl1pPr indent="0" algn="ctr">
-              <a:lnSpc>
-                <a:spcPct val="100000"/>
-              </a:lnSpc>
-              <a:buNone/>
-              <a:tabLst>
-                <a:tab algn="l" pos="0"/>
-              </a:tabLst>
-              <a:defRPr b="0" lang="es-ES" sz="1400" strike="noStrike" u="none">
-                <a:solidFill>
-                  <a:srgbClr val="000000"/>
-                </a:solidFill>
-                <a:effectLst/>
-                <a:uFillTx/>
-                <a:latin typeface="Times New Roman"/>
-              </a:defRPr>
-            </a:lvl1pPr>
-          </a:lstStyle>
-          <a:p>
-            <a:pPr indent="0" algn="ctr">
-              <a:lnSpc>
-                <a:spcPct val="100000"/>
-              </a:lnSpc>
-              <a:buNone/>
-              <a:tabLst>
-                <a:tab algn="l" pos="0"/>
-              </a:tabLst>
-            </a:pPr>
-            <a:r>
-              <a:rPr b="0" lang="es-ES" sz="1400" strike="noStrike" u="none">
-                <a:solidFill>
-                  <a:srgbClr val="000000"/>
-                </a:solidFill>
-                <a:effectLst/>
-                <a:uFillTx/>
-                <a:latin typeface="Times New Roman"/>
-              </a:rPr>
-              <a:t>&lt;pie de página&gt;</a:t>
-            </a:r>
-            <a:endParaRPr b="0" lang="es-ES" sz="1400" strike="noStrike" u="none">
-              <a:solidFill>
-                <a:srgbClr val="000000"/>
-              </a:solidFill>
-              <a:effectLst/>
-              <a:uFillTx/>
-              <a:latin typeface="Times New Roman"/>
-            </a:endParaRPr>
-          </a:p>
-        </p:txBody>
-      </p:sp>
-      <p:sp>
-        <p:nvSpPr>
-          <p:cNvPr id="9" name="PlaceHolder 4"/>
-          <p:cNvSpPr>
-            <a:spLocks noGrp="1"/>
-          </p:cNvSpPr>
-          <p:nvPr>
-            <p:ph type="sldNum" idx="6"/>
-          </p:nvPr>
-        </p:nvSpPr>
-        <p:spPr>
-          <a:xfrm>
-            <a:off x="8610480" y="6356520"/>
-            <a:ext cx="2741400" cy="363240"/>
-          </a:xfrm>
-          <a:prstGeom prst="rect">
-            <a:avLst/>
-          </a:prstGeom>
-          <a:noFill/>
-          <a:ln w="0">
-            <a:noFill/>
-          </a:ln>
-        </p:spPr>
-        <p:txBody>
-          <a:bodyPr lIns="91440" rIns="91440" tIns="45720" bIns="45720" anchor="ctr">
-            <a:noAutofit/>
-          </a:bodyPr>
-          <a:lstStyle>
-            <a:lvl1pPr indent="0" algn="r" defTabSz="914400">
-              <a:lnSpc>
-                <a:spcPct val="100000"/>
-              </a:lnSpc>
-              <a:buNone/>
-              <a:tabLst>
-                <a:tab algn="l" pos="0"/>
-              </a:tabLst>
-              <a:defRPr b="0" lang="en-GB" sz="1200" strike="noStrike" u="none">
-                <a:solidFill>
-                  <a:schemeClr val="dk1">
-                    <a:tint val="75000"/>
-                  </a:schemeClr>
-                </a:solidFill>
-                <a:effectLst/>
-                <a:uFillTx/>
-                <a:latin typeface="Calibri"/>
-              </a:defRPr>
-            </a:lvl1pPr>
-          </a:lstStyle>
-          <a:p>
-            <a:pPr indent="0" algn="r" defTabSz="914400">
-              <a:lnSpc>
-                <a:spcPct val="100000"/>
-              </a:lnSpc>
-              <a:buNone/>
-              <a:tabLst>
-                <a:tab algn="l" pos="0"/>
-              </a:tabLst>
-            </a:pPr>
-            <a:fld id="{233D1468-CB98-4D76-A74D-478C0E70DD7C}" type="slidenum">
-              <a:rPr b="0" lang="en-GB" sz="1200" strike="noStrike" u="none">
-                <a:solidFill>
-                  <a:schemeClr val="dk1">
-                    <a:tint val="75000"/>
-                  </a:schemeClr>
-                </a:solidFill>
-                <a:effectLst/>
-                <a:uFillTx/>
-                <a:latin typeface="Calibri"/>
-              </a:rPr>
-              <a:t>&lt;número&gt;</a:t>
-            </a:fld>
-            <a:endParaRPr b="0" lang="es-ES" sz="1200" strike="noStrike" u="none">
-              <a:solidFill>
-                <a:srgbClr val="000000"/>
-              </a:solidFill>
-              <a:effectLst/>
-              <a:uFillTx/>
-              <a:latin typeface="Times New Roman"/>
-            </a:endParaRPr>
-          </a:p>
-        </p:txBody>
-      </p:sp>
-    </p:spTree>
-  </p:cSld>
-</p:sldLayout>
-</file>
-
-<file path=ppt/slideLayouts/slideLayout3.xml><?xml version="1.0" encoding="utf-8"?>
-<p:sldLayout xmlns:a="http://schemas.openxmlformats.org/drawingml/2006/main" xmlns:p="http://schemas.openxmlformats.org/presentationml/2006/main" xmlns:r="http://schemas.openxmlformats.org/officeDocument/2006/relationships" xmlns:p14="http://schemas.microsoft.com/office/powerpoint/2010/main" xmlns:p15="http://schemas.microsoft.com/office/powerpoint/2012/main" xmlns:mc="http://schemas.openxmlformats.org/markup-compatibility/2006" type="vertTx" preserve="1">
-  <p:cSld name="Título y texto vertical">
-    <p:bg>
-      <p:bgPr>
-        <a:solidFill>
-          <a:srgbClr val="ffffff"/>
-        </a:solidFill>
-      </p:bgPr>
-    </p:bg>
-    <p:spTree>
-      <p:nvGrpSpPr>
-        <p:cNvPr id="1" name=""/>
-        <p:cNvGrpSpPr/>
-        <p:nvPr/>
-      </p:nvGrpSpPr>
-      <p:grpSpPr>
-        <a:xfrm>
-          <a:off x="0" y="0"/>
-          <a:ext cx="0" cy="0"/>
-          <a:chOff x="0" y="0"/>
-          <a:chExt cx="0" cy="0"/>
-        </a:xfrm>
-      </p:grpSpPr>
-      <p:sp>
-        <p:nvSpPr>
-          <p:cNvPr id="10" name="PlaceHolder 1"/>
-          <p:cNvSpPr>
-            <a:spLocks noGrp="1"/>
-          </p:cNvSpPr>
-          <p:nvPr>
-            <p:ph type="title"/>
-          </p:nvPr>
-        </p:nvSpPr>
-        <p:spPr>
-          <a:xfrm>
-            <a:off x="838080" y="365040"/>
-            <a:ext cx="10513800" cy="1323720"/>
-          </a:xfrm>
-          <a:prstGeom prst="rect">
-            <a:avLst/>
-          </a:prstGeom>
-          <a:noFill/>
-          <a:ln w="0">
-            <a:noFill/>
-          </a:ln>
-        </p:spPr>
-        <p:txBody>
-          <a:bodyPr lIns="91440" rIns="91440" tIns="45720" bIns="45720" anchor="ctr">
-            <a:noAutofit/>
-          </a:bodyPr>
-          <a:p>
-            <a:pPr indent="0" defTabSz="914400">
-              <a:lnSpc>
-                <a:spcPct val="90000"/>
-              </a:lnSpc>
-              <a:buNone/>
-              <a:tabLst>
-                <a:tab algn="l" pos="0"/>
-              </a:tabLst>
-            </a:pPr>
-            <a:r>
-              <a:rPr b="0" lang="es-ES" sz="4400" strike="noStrike" u="none">
-                <a:solidFill>
-                  <a:schemeClr val="dk1"/>
-                </a:solidFill>
-                <a:effectLst/>
-                <a:uFillTx/>
-                <a:latin typeface="Calibri Light"/>
-              </a:rPr>
-              <a:t>Haga clic para modificar el estilo de título del patrón</a:t>
-            </a:r>
-            <a:endParaRPr b="0" lang="es-ES" sz="4400" strike="noStrike" u="none">
-              <a:solidFill>
-                <a:srgbClr val="000000"/>
-              </a:solidFill>
-              <a:effectLst/>
-              <a:uFillTx/>
-              <a:latin typeface="Arial"/>
-            </a:endParaRPr>
-          </a:p>
-        </p:txBody>
-      </p:sp>
-      <p:sp>
-        <p:nvSpPr>
-          <p:cNvPr id="11" name="PlaceHolder 2"/>
-          <p:cNvSpPr>
-            <a:spLocks noGrp="1"/>
-          </p:cNvSpPr>
-          <p:nvPr>
-            <p:ph type="body"/>
-          </p:nvPr>
-        </p:nvSpPr>
-        <p:spPr>
-          <a:xfrm>
-            <a:off x="838080" y="1825560"/>
-            <a:ext cx="10513800" cy="4349520"/>
-          </a:xfrm>
-          <a:prstGeom prst="rect">
-            <a:avLst/>
-          </a:prstGeom>
-          <a:noFill/>
-          <a:ln w="0">
-            <a:noFill/>
-          </a:ln>
-        </p:spPr>
-        <p:txBody>
-          <a:bodyPr lIns="91440" rIns="91440" tIns="45720" bIns="45720" anchor="t" vert="eaVert">
-            <a:noAutofit/>
-          </a:bodyPr>
-          <a:p>
-            <a:pPr marL="228600" indent="-228600" defTabSz="914400">
-              <a:lnSpc>
-                <a:spcPct val="90000"/>
-              </a:lnSpc>
-              <a:spcBef>
-                <a:spcPts val="1001"/>
-              </a:spcBef>
-              <a:buClr>
-                <a:srgbClr val="000000"/>
-              </a:buClr>
-              <a:buFont typeface="Arial"/>
-              <a:buChar char="•"/>
-            </a:pPr>
-            <a:r>
-              <a:rPr b="0" lang="es-ES" sz="2800" strike="noStrike" u="none">
-                <a:solidFill>
-                  <a:schemeClr val="dk1"/>
-                </a:solidFill>
-                <a:effectLst/>
-                <a:uFillTx/>
-                <a:latin typeface="Calibri"/>
-              </a:rPr>
-              <a:t>Haga clic para modificar los estilos de texto del patrón</a:t>
-            </a:r>
-            <a:endParaRPr b="0" lang="es-ES" sz="2800" strike="noStrike" u="none">
-              <a:solidFill>
-                <a:srgbClr val="000000"/>
-              </a:solidFill>
-              <a:effectLst/>
-              <a:uFillTx/>
-              <a:latin typeface="Arial"/>
-            </a:endParaRPr>
-          </a:p>
-          <a:p>
-            <a:pPr lvl="1" marL="685800" indent="-228600" defTabSz="914400">
-              <a:lnSpc>
-                <a:spcPct val="90000"/>
-              </a:lnSpc>
-              <a:spcBef>
-                <a:spcPts val="499"/>
-              </a:spcBef>
-              <a:buClr>
-                <a:srgbClr val="000000"/>
-              </a:buClr>
-              <a:buFont typeface="Arial"/>
-              <a:buChar char="•"/>
-            </a:pPr>
-            <a:r>
-              <a:rPr b="0" lang="es-ES" sz="2400" strike="noStrike" u="none">
-                <a:solidFill>
-                  <a:schemeClr val="dk1"/>
-                </a:solidFill>
-                <a:effectLst/>
-                <a:uFillTx/>
-                <a:latin typeface="Calibri"/>
-              </a:rPr>
-              <a:t>Segundo nivel</a:t>
-            </a:r>
-            <a:endParaRPr b="0" lang="es-ES" sz="2400" strike="noStrike" u="none">
-              <a:solidFill>
-                <a:srgbClr val="000000"/>
-              </a:solidFill>
-              <a:effectLst/>
-              <a:uFillTx/>
-              <a:latin typeface="Arial"/>
-            </a:endParaRPr>
-          </a:p>
-          <a:p>
-            <a:pPr lvl="2" marL="1143000" indent="-228600" defTabSz="914400">
-              <a:lnSpc>
-                <a:spcPct val="90000"/>
-              </a:lnSpc>
-              <a:spcBef>
-                <a:spcPts val="499"/>
-              </a:spcBef>
-              <a:buClr>
-                <a:srgbClr val="000000"/>
-              </a:buClr>
-              <a:buFont typeface="Arial"/>
-              <a:buChar char="•"/>
-            </a:pPr>
-            <a:r>
-              <a:rPr b="0" lang="es-ES" sz="2000" strike="noStrike" u="none">
-                <a:solidFill>
-                  <a:schemeClr val="dk1"/>
-                </a:solidFill>
-                <a:effectLst/>
-                <a:uFillTx/>
-                <a:latin typeface="Calibri"/>
-              </a:rPr>
-              <a:t>Tercer nivel</a:t>
-            </a:r>
-            <a:endParaRPr b="0" lang="es-ES" sz="2000" strike="noStrike" u="none">
-              <a:solidFill>
-                <a:srgbClr val="000000"/>
-              </a:solidFill>
-              <a:effectLst/>
-              <a:uFillTx/>
-              <a:latin typeface="Arial"/>
-            </a:endParaRPr>
-          </a:p>
-          <a:p>
-            <a:pPr lvl="3" marL="1600200" indent="-228600" defTabSz="914400">
-              <a:lnSpc>
-                <a:spcPct val="90000"/>
-              </a:lnSpc>
-              <a:spcBef>
-                <a:spcPts val="499"/>
-              </a:spcBef>
-              <a:buClr>
-                <a:srgbClr val="000000"/>
-              </a:buClr>
-              <a:buFont typeface="Arial"/>
-              <a:buChar char="•"/>
-            </a:pPr>
-            <a:r>
-              <a:rPr b="0" lang="es-ES" sz="1800" strike="noStrike" u="none">
-                <a:solidFill>
-                  <a:schemeClr val="dk1"/>
-                </a:solidFill>
-                <a:effectLst/>
-                <a:uFillTx/>
-                <a:latin typeface="Calibri"/>
-              </a:rPr>
-              <a:t>Cuarto nivel</a:t>
-            </a:r>
-            <a:endParaRPr b="0" lang="es-ES" sz="1800" strike="noStrike" u="none">
-              <a:solidFill>
-                <a:srgbClr val="000000"/>
-              </a:solidFill>
-              <a:effectLst/>
-              <a:uFillTx/>
-              <a:latin typeface="Arial"/>
-            </a:endParaRPr>
-          </a:p>
-          <a:p>
-            <a:pPr lvl="4" marL="2057400" indent="-228600" defTabSz="914400">
-              <a:lnSpc>
-                <a:spcPct val="90000"/>
-              </a:lnSpc>
-              <a:spcBef>
-                <a:spcPts val="499"/>
-              </a:spcBef>
-              <a:buClr>
-                <a:srgbClr val="000000"/>
-              </a:buClr>
-              <a:buFont typeface="Arial"/>
-              <a:buChar char="•"/>
-            </a:pPr>
-            <a:r>
-              <a:rPr b="0" lang="es-ES" sz="1800" strike="noStrike" u="none">
-                <a:solidFill>
-                  <a:schemeClr val="dk1"/>
-                </a:solidFill>
-                <a:effectLst/>
-                <a:uFillTx/>
-                <a:latin typeface="Calibri"/>
-              </a:rPr>
-              <a:t>Quinto nivel</a:t>
-            </a:r>
-            <a:endParaRPr b="0" lang="es-ES" sz="1800" strike="noStrike" u="none">
-              <a:solidFill>
-                <a:srgbClr val="000000"/>
-              </a:solidFill>
-              <a:effectLst/>
-              <a:uFillTx/>
-              <a:latin typeface="Arial"/>
-            </a:endParaRPr>
-          </a:p>
-        </p:txBody>
-      </p:sp>
-      <p:sp>
-        <p:nvSpPr>
-          <p:cNvPr id="12" name="PlaceHolder 3"/>
-          <p:cNvSpPr>
-            <a:spLocks noGrp="1"/>
-          </p:cNvSpPr>
-          <p:nvPr>
-            <p:ph type="dt" idx="7"/>
-          </p:nvPr>
-        </p:nvSpPr>
-        <p:spPr>
-          <a:xfrm>
-            <a:off x="838080" y="6356520"/>
-            <a:ext cx="2741400" cy="363240"/>
-          </a:xfrm>
-          <a:prstGeom prst="rect">
-            <a:avLst/>
-          </a:prstGeom>
-          <a:noFill/>
-          <a:ln w="0">
-            <a:noFill/>
-          </a:ln>
-        </p:spPr>
-        <p:txBody>
-          <a:bodyPr lIns="91440" rIns="91440" tIns="45720" bIns="45720" anchor="ctr">
-            <a:noAutofit/>
-          </a:bodyPr>
-          <a:lstStyle>
-            <a:lvl1pPr indent="0" defTabSz="914400">
-              <a:lnSpc>
-                <a:spcPct val="100000"/>
-              </a:lnSpc>
-              <a:buNone/>
-              <a:tabLst>
-                <a:tab algn="l" pos="0"/>
-              </a:tabLst>
-              <a:defRPr b="0" lang="en-GB" sz="1200" strike="noStrike" u="none">
-                <a:solidFill>
-                  <a:schemeClr val="dk1">
-                    <a:tint val="75000"/>
-                  </a:schemeClr>
-                </a:solidFill>
-                <a:effectLst/>
-                <a:uFillTx/>
-                <a:latin typeface="Calibri"/>
-              </a:defRPr>
-            </a:lvl1pPr>
-          </a:lstStyle>
-          <a:p>
-            <a:pPr indent="0" defTabSz="914400">
-              <a:lnSpc>
-                <a:spcPct val="100000"/>
-              </a:lnSpc>
-              <a:buNone/>
-              <a:tabLst>
-                <a:tab algn="l" pos="0"/>
-              </a:tabLst>
-            </a:pPr>
-            <a:r>
-              <a:rPr b="0" lang="en-GB" sz="1200" strike="noStrike" u="none">
-                <a:solidFill>
-                  <a:schemeClr val="dk1">
-                    <a:tint val="75000"/>
-                  </a:schemeClr>
-                </a:solidFill>
-                <a:effectLst/>
-                <a:uFillTx/>
-                <a:latin typeface="Calibri"/>
-              </a:rPr>
-              <a:t>&lt;fecha/hora&gt;</a:t>
-            </a:r>
-            <a:endParaRPr b="0" lang="es-ES" sz="1200" strike="noStrike" u="none">
-              <a:solidFill>
-                <a:srgbClr val="000000"/>
-              </a:solidFill>
-              <a:effectLst/>
-              <a:uFillTx/>
-              <a:latin typeface="Times New Roman"/>
-            </a:endParaRPr>
-          </a:p>
-        </p:txBody>
-      </p:sp>
-      <p:sp>
-        <p:nvSpPr>
-          <p:cNvPr id="13" name="PlaceHolder 4"/>
-          <p:cNvSpPr>
-            <a:spLocks noGrp="1"/>
-          </p:cNvSpPr>
-          <p:nvPr>
-            <p:ph type="ftr" idx="8"/>
-          </p:nvPr>
-        </p:nvSpPr>
-        <p:spPr>
-          <a:xfrm>
-            <a:off x="4038480" y="6356520"/>
-            <a:ext cx="4113000" cy="363240"/>
-          </a:xfrm>
-          <a:prstGeom prst="rect">
-            <a:avLst/>
-          </a:prstGeom>
-          <a:noFill/>
-          <a:ln w="0">
-            <a:noFill/>
-          </a:ln>
-        </p:spPr>
-        <p:txBody>
-          <a:bodyPr lIns="91440" rIns="91440" tIns="45720" bIns="45720" anchor="ctr">
-            <a:noAutofit/>
-          </a:bodyPr>
-          <a:lstStyle>
-            <a:lvl1pPr indent="0" algn="ctr">
-              <a:lnSpc>
-                <a:spcPct val="100000"/>
-              </a:lnSpc>
-              <a:buNone/>
-              <a:tabLst>
-                <a:tab algn="l" pos="0"/>
-              </a:tabLst>
-              <a:defRPr b="0" lang="es-ES" sz="1400" strike="noStrike" u="none">
-                <a:solidFill>
-                  <a:srgbClr val="000000"/>
-                </a:solidFill>
-                <a:effectLst/>
-                <a:uFillTx/>
-                <a:latin typeface="Times New Roman"/>
-              </a:defRPr>
-            </a:lvl1pPr>
-          </a:lstStyle>
-          <a:p>
-            <a:pPr indent="0" algn="ctr">
-              <a:lnSpc>
-                <a:spcPct val="100000"/>
-              </a:lnSpc>
-              <a:buNone/>
-              <a:tabLst>
-                <a:tab algn="l" pos="0"/>
-              </a:tabLst>
-            </a:pPr>
-            <a:r>
-              <a:rPr b="0" lang="es-ES" sz="1400" strike="noStrike" u="none">
-                <a:solidFill>
-                  <a:srgbClr val="000000"/>
-                </a:solidFill>
-                <a:effectLst/>
-                <a:uFillTx/>
-                <a:latin typeface="Times New Roman"/>
-              </a:rPr>
-              <a:t>&lt;pie de página&gt;</a:t>
-            </a:r>
-            <a:endParaRPr b="0" lang="es-ES" sz="1400" strike="noStrike" u="none">
-              <a:solidFill>
-                <a:srgbClr val="000000"/>
-              </a:solidFill>
-              <a:effectLst/>
-              <a:uFillTx/>
-              <a:latin typeface="Times New Roman"/>
-            </a:endParaRPr>
-          </a:p>
-        </p:txBody>
-      </p:sp>
-      <p:sp>
-        <p:nvSpPr>
-          <p:cNvPr id="14" name="PlaceHolder 5"/>
-          <p:cNvSpPr>
-            <a:spLocks noGrp="1"/>
-          </p:cNvSpPr>
-          <p:nvPr>
-            <p:ph type="sldNum" idx="9"/>
-          </p:nvPr>
-        </p:nvSpPr>
-        <p:spPr>
-          <a:xfrm>
-            <a:off x="8610480" y="6356520"/>
-            <a:ext cx="2741400" cy="363240"/>
-          </a:xfrm>
-          <a:prstGeom prst="rect">
-            <a:avLst/>
-          </a:prstGeom>
-          <a:noFill/>
-          <a:ln w="0">
-            <a:noFill/>
-          </a:ln>
-        </p:spPr>
-        <p:txBody>
-          <a:bodyPr lIns="91440" rIns="91440" tIns="45720" bIns="45720" anchor="ctr">
-            <a:noAutofit/>
-          </a:bodyPr>
-          <a:lstStyle>
-            <a:lvl1pPr indent="0" algn="r" defTabSz="914400">
-              <a:lnSpc>
-                <a:spcPct val="100000"/>
-              </a:lnSpc>
-              <a:buNone/>
-              <a:tabLst>
-                <a:tab algn="l" pos="0"/>
-              </a:tabLst>
-              <a:defRPr b="0" lang="en-GB" sz="1200" strike="noStrike" u="none">
-                <a:solidFill>
-                  <a:schemeClr val="dk1">
-                    <a:tint val="75000"/>
-                  </a:schemeClr>
-                </a:solidFill>
-                <a:effectLst/>
-                <a:uFillTx/>
-                <a:latin typeface="Calibri"/>
-              </a:defRPr>
-            </a:lvl1pPr>
-          </a:lstStyle>
-          <a:p>
-            <a:pPr indent="0" algn="r" defTabSz="914400">
-              <a:lnSpc>
-                <a:spcPct val="100000"/>
-              </a:lnSpc>
-              <a:buNone/>
-              <a:tabLst>
-                <a:tab algn="l" pos="0"/>
-              </a:tabLst>
-            </a:pPr>
-            <a:fld id="{515C74DF-2161-48AA-828D-1A8459AD8708}" type="slidenum">
+            <a:fld id="{C05712DC-FEC4-40CC-9B9E-B1177C49433B}" type="slidenum">
               <a:rPr b="0" lang="en-GB" sz="1200" strike="noStrike" u="none">
                 <a:solidFill>
                   <a:schemeClr val="dk1">
@@ -2733,8 +3118,8 @@
 </file>
 
 <file path=ppt/slideLayouts/slideLayout4.xml><?xml version="1.0" encoding="utf-8"?>
-<p:sldLayout xmlns:a="http://schemas.openxmlformats.org/drawingml/2006/main" xmlns:p="http://schemas.openxmlformats.org/presentationml/2006/main" xmlns:r="http://schemas.openxmlformats.org/officeDocument/2006/relationships" xmlns:p14="http://schemas.microsoft.com/office/powerpoint/2010/main" xmlns:p15="http://schemas.microsoft.com/office/powerpoint/2012/main" xmlns:mc="http://schemas.openxmlformats.org/markup-compatibility/2006" type="vertTitleAndTx" preserve="1">
-  <p:cSld name="Título vertical y texto">
+<p:sldLayout xmlns:a="http://schemas.openxmlformats.org/drawingml/2006/main" xmlns:p="http://schemas.openxmlformats.org/presentationml/2006/main" xmlns:r="http://schemas.openxmlformats.org/officeDocument/2006/relationships" xmlns:p14="http://schemas.microsoft.com/office/powerpoint/2010/main" xmlns:p15="http://schemas.microsoft.com/office/powerpoint/2012/main" xmlns:mc="http://schemas.openxmlformats.org/markup-compatibility/2006" type="blank" preserve="1">
+  <p:cSld name="Imagen con título">
     <p:bg>
       <p:bgPr>
         <a:solidFill>
@@ -2768,8 +3153,8 @@
         </p:nvSpPr>
         <p:spPr>
           <a:xfrm>
-            <a:off x="8724960" y="365040"/>
-            <a:ext cx="2627280" cy="5810040"/>
+            <a:off x="839880" y="457200"/>
+            <a:ext cx="3930120" cy="1598040"/>
           </a:xfrm>
           <a:prstGeom prst="rect">
             <a:avLst/>
@@ -2780,7 +3165,7 @@
           </a:ln>
         </p:spPr>
         <p:txBody>
-          <a:bodyPr lIns="91440" rIns="91440" tIns="45720" bIns="45720" anchor="ctr" vert="eaVert">
+          <a:bodyPr lIns="91440" rIns="91440" tIns="45720" bIns="45720" anchor="b">
             <a:noAutofit/>
           </a:bodyPr>
           <a:p>
@@ -2794,7 +3179,7 @@
               </a:tabLst>
             </a:pPr>
             <a:r>
-              <a:rPr b="0" lang="es-ES" sz="4400" strike="noStrike" u="none">
+              <a:rPr b="0" lang="es-ES" sz="3200" strike="noStrike" u="none">
                 <a:solidFill>
                   <a:schemeClr val="dk1"/>
                 </a:solidFill>
@@ -2804,7 +3189,7 @@
               </a:rPr>
               <a:t>Haga clic para modificar el estilo de título del patrón</a:t>
             </a:r>
-            <a:endParaRPr b="0" lang="es-ES" sz="4400" strike="noStrike" u="none">
+            <a:endParaRPr b="0" lang="es-ES" sz="3200" strike="noStrike" u="none">
               <a:solidFill>
                 <a:srgbClr val="000000"/>
               </a:solidFill>
@@ -2827,8 +3212,8 @@
         </p:nvSpPr>
         <p:spPr>
           <a:xfrm>
-            <a:off x="838080" y="365040"/>
-            <a:ext cx="7732440" cy="5810040"/>
+            <a:off x="5183280" y="987480"/>
+            <a:ext cx="6170040" cy="4871520"/>
           </a:xfrm>
           <a:prstGeom prst="rect">
             <a:avLst/>
@@ -2839,171 +3224,246 @@
           </a:ln>
         </p:spPr>
         <p:txBody>
-          <a:bodyPr lIns="91440" rIns="91440" tIns="45720" bIns="45720" anchor="t" vert="eaVert">
+          <a:bodyPr lIns="90000" rIns="90000" tIns="45000" bIns="45000" anchor="t">
             <a:noAutofit/>
           </a:bodyPr>
           <a:p>
-            <a:pPr marL="228600" indent="-228600" defTabSz="914400">
-              <a:lnSpc>
-                <a:spcPct val="90000"/>
-              </a:lnSpc>
-              <a:spcBef>
-                <a:spcPts val="1001"/>
+            <a:pPr marL="432000" indent="-324000">
+              <a:lnSpc>
+                <a:spcPct val="90000"/>
+              </a:lnSpc>
+              <a:spcBef>
+                <a:spcPts val="1417"/>
               </a:spcBef>
               <a:buClr>
                 <a:srgbClr val="000000"/>
               </a:buClr>
-              <a:buFont typeface="Arial"/>
-              <a:buChar char="•"/>
-            </a:pPr>
-            <a:r>
-              <a:rPr b="0" lang="es-ES" sz="2800" strike="noStrike" u="none">
-                <a:solidFill>
-                  <a:schemeClr val="dk1"/>
-                </a:solidFill>
-                <a:effectLst/>
-                <a:uFillTx/>
-                <a:latin typeface="Calibri"/>
-              </a:rPr>
-              <a:t>Haga clic para modificar los estilos de texto del patrón</a:t>
-            </a:r>
-            <a:endParaRPr b="0" lang="es-ES" sz="2800" strike="noStrike" u="none">
-              <a:solidFill>
-                <a:srgbClr val="000000"/>
-              </a:solidFill>
-              <a:effectLst/>
-              <a:uFillTx/>
-              <a:latin typeface="Arial"/>
-            </a:endParaRPr>
-          </a:p>
-          <a:p>
-            <a:pPr lvl="1" marL="685800" indent="-228600" defTabSz="914400">
-              <a:lnSpc>
-                <a:spcPct val="90000"/>
-              </a:lnSpc>
-              <a:spcBef>
-                <a:spcPts val="499"/>
+              <a:buSzPct val="45000"/>
+              <a:buFont typeface="Wingdings" charset="2"/>
+              <a:buChar char=""/>
+            </a:pPr>
+            <a:r>
+              <a:rPr b="0" lang="es-ES" sz="3200" strike="noStrike" u="none">
+                <a:solidFill>
+                  <a:schemeClr val="dk1"/>
+                </a:solidFill>
+                <a:effectLst/>
+                <a:uFillTx/>
+                <a:latin typeface="Calibri"/>
+              </a:rPr>
+              <a:t>Pulse para editar el formato de texto del esquema</a:t>
+            </a:r>
+            <a:endParaRPr b="0" lang="es-ES" sz="3200" strike="noStrike" u="none">
+              <a:solidFill>
+                <a:srgbClr val="000000"/>
+              </a:solidFill>
+              <a:effectLst/>
+              <a:uFillTx/>
+              <a:latin typeface="Arial"/>
+            </a:endParaRPr>
+          </a:p>
+          <a:p>
+            <a:pPr lvl="1" marL="864000" indent="-324000">
+              <a:lnSpc>
+                <a:spcPct val="90000"/>
+              </a:lnSpc>
+              <a:spcBef>
+                <a:spcPts val="1134"/>
               </a:spcBef>
               <a:buClr>
                 <a:srgbClr val="000000"/>
               </a:buClr>
-              <a:buFont typeface="Arial"/>
-              <a:buChar char="•"/>
-            </a:pPr>
-            <a:r>
-              <a:rPr b="0" lang="es-ES" sz="2400" strike="noStrike" u="none">
-                <a:solidFill>
-                  <a:schemeClr val="dk1"/>
-                </a:solidFill>
-                <a:effectLst/>
-                <a:uFillTx/>
-                <a:latin typeface="Calibri"/>
-              </a:rPr>
-              <a:t>Segundo nivel</a:t>
-            </a:r>
-            <a:endParaRPr b="0" lang="es-ES" sz="2400" strike="noStrike" u="none">
-              <a:solidFill>
-                <a:srgbClr val="000000"/>
-              </a:solidFill>
-              <a:effectLst/>
-              <a:uFillTx/>
-              <a:latin typeface="Arial"/>
-            </a:endParaRPr>
-          </a:p>
-          <a:p>
-            <a:pPr lvl="2" marL="1143000" indent="-228600" defTabSz="914400">
-              <a:lnSpc>
-                <a:spcPct val="90000"/>
-              </a:lnSpc>
-              <a:spcBef>
-                <a:spcPts val="499"/>
+              <a:buSzPct val="75000"/>
+              <a:buFont typeface="Symbol" charset="2"/>
+              <a:buChar char=""/>
+            </a:pPr>
+            <a:r>
+              <a:rPr b="0" lang="es-ES" sz="3200" strike="noStrike" u="none">
+                <a:solidFill>
+                  <a:schemeClr val="dk1"/>
+                </a:solidFill>
+                <a:effectLst/>
+                <a:uFillTx/>
+                <a:latin typeface="Calibri"/>
+              </a:rPr>
+              <a:t>Segundo nivel del esquema</a:t>
+            </a:r>
+            <a:endParaRPr b="0" lang="es-ES" sz="3200" strike="noStrike" u="none">
+              <a:solidFill>
+                <a:srgbClr val="000000"/>
+              </a:solidFill>
+              <a:effectLst/>
+              <a:uFillTx/>
+              <a:latin typeface="Arial"/>
+            </a:endParaRPr>
+          </a:p>
+          <a:p>
+            <a:pPr lvl="2" marL="1296000" indent="-288000">
+              <a:lnSpc>
+                <a:spcPct val="90000"/>
+              </a:lnSpc>
+              <a:spcBef>
+                <a:spcPts val="850"/>
               </a:spcBef>
               <a:buClr>
                 <a:srgbClr val="000000"/>
               </a:buClr>
-              <a:buFont typeface="Arial"/>
-              <a:buChar char="•"/>
-            </a:pPr>
-            <a:r>
-              <a:rPr b="0" lang="es-ES" sz="2000" strike="noStrike" u="none">
-                <a:solidFill>
-                  <a:schemeClr val="dk1"/>
-                </a:solidFill>
-                <a:effectLst/>
-                <a:uFillTx/>
-                <a:latin typeface="Calibri"/>
-              </a:rPr>
-              <a:t>Tercer nivel</a:t>
-            </a:r>
-            <a:endParaRPr b="0" lang="es-ES" sz="2000" strike="noStrike" u="none">
-              <a:solidFill>
-                <a:srgbClr val="000000"/>
-              </a:solidFill>
-              <a:effectLst/>
-              <a:uFillTx/>
-              <a:latin typeface="Arial"/>
-            </a:endParaRPr>
-          </a:p>
-          <a:p>
-            <a:pPr lvl="3" marL="1600200" indent="-228600" defTabSz="914400">
-              <a:lnSpc>
-                <a:spcPct val="90000"/>
-              </a:lnSpc>
-              <a:spcBef>
-                <a:spcPts val="499"/>
+              <a:buSzPct val="45000"/>
+              <a:buFont typeface="Wingdings" charset="2"/>
+              <a:buChar char=""/>
+            </a:pPr>
+            <a:r>
+              <a:rPr b="0" lang="es-ES" sz="3200" strike="noStrike" u="none">
+                <a:solidFill>
+                  <a:schemeClr val="dk1"/>
+                </a:solidFill>
+                <a:effectLst/>
+                <a:uFillTx/>
+                <a:latin typeface="Calibri"/>
+              </a:rPr>
+              <a:t>Tercer nivel del esquema</a:t>
+            </a:r>
+            <a:endParaRPr b="0" lang="es-ES" sz="3200" strike="noStrike" u="none">
+              <a:solidFill>
+                <a:srgbClr val="000000"/>
+              </a:solidFill>
+              <a:effectLst/>
+              <a:uFillTx/>
+              <a:latin typeface="Arial"/>
+            </a:endParaRPr>
+          </a:p>
+          <a:p>
+            <a:pPr lvl="3" marL="1728000" indent="-216000">
+              <a:lnSpc>
+                <a:spcPct val="90000"/>
+              </a:lnSpc>
+              <a:spcBef>
+                <a:spcPts val="567"/>
               </a:spcBef>
               <a:buClr>
                 <a:srgbClr val="000000"/>
               </a:buClr>
-              <a:buFont typeface="Arial"/>
-              <a:buChar char="•"/>
-            </a:pPr>
-            <a:r>
-              <a:rPr b="0" lang="es-ES" sz="1800" strike="noStrike" u="none">
-                <a:solidFill>
-                  <a:schemeClr val="dk1"/>
-                </a:solidFill>
-                <a:effectLst/>
-                <a:uFillTx/>
-                <a:latin typeface="Calibri"/>
-              </a:rPr>
-              <a:t>Cuarto nivel</a:t>
-            </a:r>
-            <a:endParaRPr b="0" lang="es-ES" sz="1800" strike="noStrike" u="none">
-              <a:solidFill>
-                <a:srgbClr val="000000"/>
-              </a:solidFill>
-              <a:effectLst/>
-              <a:uFillTx/>
-              <a:latin typeface="Arial"/>
-            </a:endParaRPr>
-          </a:p>
-          <a:p>
-            <a:pPr lvl="4" marL="2057400" indent="-228600" defTabSz="914400">
-              <a:lnSpc>
-                <a:spcPct val="90000"/>
-              </a:lnSpc>
-              <a:spcBef>
-                <a:spcPts val="499"/>
+              <a:buSzPct val="75000"/>
+              <a:buFont typeface="Symbol" charset="2"/>
+              <a:buChar char=""/>
+            </a:pPr>
+            <a:r>
+              <a:rPr b="0" lang="es-ES" sz="3200" strike="noStrike" u="none">
+                <a:solidFill>
+                  <a:schemeClr val="dk1"/>
+                </a:solidFill>
+                <a:effectLst/>
+                <a:uFillTx/>
+                <a:latin typeface="Calibri"/>
+              </a:rPr>
+              <a:t>Cuarto nivel del esquema</a:t>
+            </a:r>
+            <a:endParaRPr b="0" lang="es-ES" sz="3200" strike="noStrike" u="none">
+              <a:solidFill>
+                <a:srgbClr val="000000"/>
+              </a:solidFill>
+              <a:effectLst/>
+              <a:uFillTx/>
+              <a:latin typeface="Arial"/>
+            </a:endParaRPr>
+          </a:p>
+          <a:p>
+            <a:pPr lvl="4" marL="2160000" indent="-216000">
+              <a:lnSpc>
+                <a:spcPct val="90000"/>
+              </a:lnSpc>
+              <a:spcBef>
+                <a:spcPts val="283"/>
               </a:spcBef>
               <a:buClr>
                 <a:srgbClr val="000000"/>
               </a:buClr>
-              <a:buFont typeface="Arial"/>
-              <a:buChar char="•"/>
-            </a:pPr>
-            <a:r>
-              <a:rPr b="0" lang="es-ES" sz="1800" strike="noStrike" u="none">
-                <a:solidFill>
-                  <a:schemeClr val="dk1"/>
-                </a:solidFill>
-                <a:effectLst/>
-                <a:uFillTx/>
-                <a:latin typeface="Calibri"/>
-              </a:rPr>
-              <a:t>Quinto nivel</a:t>
-            </a:r>
-            <a:endParaRPr b="0" lang="es-ES" sz="1800" strike="noStrike" u="none">
+              <a:buSzPct val="45000"/>
+              <a:buFont typeface="Wingdings" charset="2"/>
+              <a:buChar char=""/>
+            </a:pPr>
+            <a:r>
+              <a:rPr b="0" lang="es-ES" sz="3200" strike="noStrike" u="none">
+                <a:solidFill>
+                  <a:schemeClr val="dk1"/>
+                </a:solidFill>
+                <a:effectLst/>
+                <a:uFillTx/>
+                <a:latin typeface="Calibri"/>
+              </a:rPr>
+              <a:t>Quinto nivel del esquema</a:t>
+            </a:r>
+            <a:endParaRPr b="0" lang="es-ES" sz="3200" strike="noStrike" u="none">
+              <a:solidFill>
+                <a:srgbClr val="000000"/>
+              </a:solidFill>
+              <a:effectLst/>
+              <a:uFillTx/>
+              <a:latin typeface="Arial"/>
+            </a:endParaRPr>
+          </a:p>
+          <a:p>
+            <a:pPr lvl="5" marL="2592000" indent="-216000">
+              <a:lnSpc>
+                <a:spcPct val="90000"/>
+              </a:lnSpc>
+              <a:spcBef>
+                <a:spcPts val="283"/>
+              </a:spcBef>
+              <a:buClr>
+                <a:srgbClr val="000000"/>
+              </a:buClr>
+              <a:buSzPct val="45000"/>
+              <a:buFont typeface="Wingdings" charset="2"/>
+              <a:buChar char=""/>
+            </a:pPr>
+            <a:r>
+              <a:rPr b="0" lang="es-ES" sz="3200" strike="noStrike" u="none">
+                <a:solidFill>
+                  <a:schemeClr val="dk1"/>
+                </a:solidFill>
+                <a:effectLst/>
+                <a:uFillTx/>
+                <a:latin typeface="Calibri"/>
+              </a:rPr>
+              <a:t>Sexto nivel del esquema</a:t>
+            </a:r>
+            <a:endParaRPr b="0" lang="es-ES" sz="3200" strike="noStrike" u="none">
+              <a:solidFill>
+                <a:srgbClr val="000000"/>
+              </a:solidFill>
+              <a:effectLst/>
+              <a:uFillTx/>
+              <a:latin typeface="Arial"/>
+            </a:endParaRPr>
+          </a:p>
+          <a:p>
+            <a:pPr lvl="6" marL="3024000" indent="-216000">
+              <a:lnSpc>
+                <a:spcPct val="90000"/>
+              </a:lnSpc>
+              <a:spcBef>
+                <a:spcPts val="283"/>
+              </a:spcBef>
+              <a:buClr>
+                <a:srgbClr val="000000"/>
+              </a:buClr>
+              <a:buSzPct val="45000"/>
+              <a:buFont typeface="Wingdings" charset="2"/>
+              <a:buChar char=""/>
+            </a:pPr>
+            <a:r>
+              <a:rPr b="0" lang="es-ES" sz="3200" strike="noStrike" u="none">
+                <a:solidFill>
+                  <a:schemeClr val="dk1"/>
+                </a:solidFill>
+                <a:effectLst/>
+                <a:uFillTx/>
+                <a:latin typeface="Calibri"/>
+              </a:rPr>
+              <a:t>Séptimo nivel del esquema</a:t>
+            </a:r>
+            <a:endParaRPr b="0" lang="es-ES" sz="3200" strike="noStrike" u="none">
               <a:solidFill>
                 <a:srgbClr val="000000"/>
               </a:solidFill>
@@ -3017,6 +3477,68 @@
       <p:sp>
         <p:nvSpPr>
           <p:cNvPr id="17" name="PlaceHolder 3"/>
+          <p:cNvSpPr>
+            <a:spLocks noGrp="1"/>
+          </p:cNvSpPr>
+          <p:nvPr>
+            <p:ph type="body"/>
+          </p:nvPr>
+        </p:nvSpPr>
+        <p:spPr>
+          <a:xfrm>
+            <a:off x="839880" y="2057400"/>
+            <a:ext cx="3930120" cy="3809520"/>
+          </a:xfrm>
+          <a:prstGeom prst="rect">
+            <a:avLst/>
+          </a:prstGeom>
+          <a:noFill/>
+          <a:ln w="0">
+            <a:noFill/>
+          </a:ln>
+        </p:spPr>
+        <p:txBody>
+          <a:bodyPr lIns="91440" rIns="91440" tIns="45720" bIns="45720" anchor="t">
+            <a:noAutofit/>
+          </a:bodyPr>
+          <a:p>
+            <a:pPr indent="0" defTabSz="914400">
+              <a:lnSpc>
+                <a:spcPct val="90000"/>
+              </a:lnSpc>
+              <a:spcBef>
+                <a:spcPts val="1001"/>
+              </a:spcBef>
+              <a:buNone/>
+              <a:tabLst>
+                <a:tab algn="l" pos="0"/>
+              </a:tabLst>
+            </a:pPr>
+            <a:r>
+              <a:rPr b="0" lang="es-ES" sz="1600" strike="noStrike" u="none">
+                <a:solidFill>
+                  <a:schemeClr val="dk1"/>
+                </a:solidFill>
+                <a:effectLst/>
+                <a:uFillTx/>
+                <a:latin typeface="Calibri"/>
+              </a:rPr>
+              <a:t>Haga clic para modificar los estilos de texto del patrón</a:t>
+            </a:r>
+            <a:endParaRPr b="0" lang="es-ES" sz="1600" strike="noStrike" u="none">
+              <a:solidFill>
+                <a:srgbClr val="000000"/>
+              </a:solidFill>
+              <a:effectLst/>
+              <a:uFillTx/>
+              <a:latin typeface="Arial"/>
+            </a:endParaRPr>
+          </a:p>
+        </p:txBody>
+      </p:sp>
+      <p:sp>
+        <p:nvSpPr>
+          <p:cNvPr id="18" name="PlaceHolder 4"/>
           <p:cNvSpPr>
             <a:spLocks noGrp="1"/>
           </p:cNvSpPr>
@@ -3027,7 +3549,7 @@
         <p:spPr>
           <a:xfrm>
             <a:off x="838080" y="6356520"/>
-            <a:ext cx="2741400" cy="363240"/>
+            <a:ext cx="2741040" cy="362880"/>
           </a:xfrm>
           <a:prstGeom prst="rect">
             <a:avLst/>
@@ -3098,7 +3620,7 @@
       </p:sp>
       <p:sp>
         <p:nvSpPr>
-          <p:cNvPr id="18" name="PlaceHolder 4"/>
+          <p:cNvPr id="19" name="PlaceHolder 5"/>
           <p:cNvSpPr>
             <a:spLocks noGrp="1"/>
           </p:cNvSpPr>
@@ -3109,7 +3631,7 @@
         <p:spPr>
           <a:xfrm>
             <a:off x="4038480" y="6356520"/>
-            <a:ext cx="4113000" cy="363240"/>
+            <a:ext cx="4112640" cy="362880"/>
           </a:xfrm>
           <a:prstGeom prst="rect">
             <a:avLst/>
@@ -3176,7 +3698,7 @@
       </p:sp>
       <p:sp>
         <p:nvSpPr>
-          <p:cNvPr id="19" name="PlaceHolder 5"/>
+          <p:cNvPr id="20" name="PlaceHolder 6"/>
           <p:cNvSpPr>
             <a:spLocks noGrp="1"/>
           </p:cNvSpPr>
@@ -3187,7 +3709,7 @@
         <p:spPr>
           <a:xfrm>
             <a:off x="8610480" y="6356520"/>
-            <a:ext cx="2741400" cy="363240"/>
+            <a:ext cx="2741040" cy="362880"/>
           </a:xfrm>
           <a:prstGeom prst="rect">
             <a:avLst/>
@@ -3232,7 +3754,7 @@
                 <a:tab algn="l" pos="0"/>
               </a:tabLst>
             </a:pPr>
-            <a:fld id="{352BCFAF-D7AC-49F7-9A88-53BC77322D4C}" type="slidenum">
+            <a:fld id="{BB484151-CDD2-491B-AEF9-9FC33057B7F4}" type="slidenum">
               <a:rPr b="0" lang="en-GB" sz="1200" strike="noStrike" u="none">
                 <a:solidFill>
                   <a:schemeClr val="dk1">
@@ -3262,8 +3784,8 @@
 </file>
 
 <file path=ppt/slideLayouts/slideLayout5.xml><?xml version="1.0" encoding="utf-8"?>
-<p:sldLayout xmlns:a="http://schemas.openxmlformats.org/drawingml/2006/main" xmlns:p="http://schemas.openxmlformats.org/presentationml/2006/main" xmlns:r="http://schemas.openxmlformats.org/officeDocument/2006/relationships" xmlns:p14="http://schemas.microsoft.com/office/powerpoint/2010/main" xmlns:p15="http://schemas.microsoft.com/office/powerpoint/2012/main" xmlns:mc="http://schemas.openxmlformats.org/markup-compatibility/2006" type="obj" preserve="1">
-  <p:cSld name="Título y objetos">
+<p:sldLayout xmlns:a="http://schemas.openxmlformats.org/drawingml/2006/main" xmlns:p="http://schemas.openxmlformats.org/presentationml/2006/main" xmlns:r="http://schemas.openxmlformats.org/officeDocument/2006/relationships" xmlns:p14="http://schemas.microsoft.com/office/powerpoint/2010/main" xmlns:p15="http://schemas.microsoft.com/office/powerpoint/2012/main" xmlns:mc="http://schemas.openxmlformats.org/markup-compatibility/2006" type="title" preserve="1">
+  <p:cSld name="Diapositiva de título">
     <p:bg>
       <p:bgPr>
         <a:solidFill>
@@ -3287,7 +3809,7 @@
       </p:grpSpPr>
       <p:sp>
         <p:nvSpPr>
-          <p:cNvPr id="20" name="PlaceHolder 1"/>
+          <p:cNvPr id="21" name="PlaceHolder 1"/>
           <p:cNvSpPr>
             <a:spLocks noGrp="1"/>
           </p:cNvSpPr>
@@ -3297,8 +3819,8 @@
         </p:nvSpPr>
         <p:spPr>
           <a:xfrm>
-            <a:off x="838080" y="365040"/>
-            <a:ext cx="10513800" cy="1323720"/>
+            <a:off x="1523880" y="1122480"/>
+            <a:ext cx="9141840" cy="2385360"/>
           </a:xfrm>
           <a:prstGeom prst="rect">
             <a:avLst/>
@@ -3309,11 +3831,11 @@
           </a:ln>
         </p:spPr>
         <p:txBody>
-          <a:bodyPr lIns="91440" rIns="91440" tIns="45720" bIns="45720" anchor="ctr">
+          <a:bodyPr lIns="91440" rIns="91440" tIns="45720" bIns="45720" anchor="b">
             <a:noAutofit/>
           </a:bodyPr>
           <a:p>
-            <a:pPr indent="0" defTabSz="914400">
+            <a:pPr indent="0" algn="ctr" defTabSz="914400">
               <a:lnSpc>
                 <a:spcPct val="90000"/>
               </a:lnSpc>
@@ -3323,7 +3845,7 @@
               </a:tabLst>
             </a:pPr>
             <a:r>
-              <a:rPr b="0" lang="es-ES" sz="4400" strike="noStrike" u="none">
+              <a:rPr b="0" lang="es-ES" sz="6000" strike="noStrike" u="none">
                 <a:solidFill>
                   <a:schemeClr val="dk1"/>
                 </a:solidFill>
@@ -3333,7 +3855,7 @@
               </a:rPr>
               <a:t>Haga clic para modificar el estilo de título del patrón</a:t>
             </a:r>
-            <a:endParaRPr b="0" lang="es-ES" sz="4400" strike="noStrike" u="none">
+            <a:endParaRPr b="0" lang="es-ES" sz="6000" strike="noStrike" u="none">
               <a:solidFill>
                 <a:srgbClr val="000000"/>
               </a:solidFill>
@@ -3346,206 +3868,7 @@
       </p:sp>
       <p:sp>
         <p:nvSpPr>
-          <p:cNvPr id="21" name="PlaceHolder 2"/>
-          <p:cNvSpPr>
-            <a:spLocks noGrp="1"/>
-          </p:cNvSpPr>
-          <p:nvPr>
-            <p:ph type="body"/>
-          </p:nvPr>
-        </p:nvSpPr>
-        <p:spPr>
-          <a:xfrm>
-            <a:off x="838080" y="1825560"/>
-            <a:ext cx="10513800" cy="4349520"/>
-          </a:xfrm>
-          <a:prstGeom prst="rect">
-            <a:avLst/>
-          </a:prstGeom>
-          <a:noFill/>
-          <a:ln w="0">
-            <a:noFill/>
-          </a:ln>
-        </p:spPr>
-        <p:txBody>
-          <a:bodyPr lIns="91440" rIns="91440" tIns="45720" bIns="45720" anchor="t">
-            <a:noAutofit/>
-          </a:bodyPr>
-          <a:p>
-            <a:pPr marL="228600" indent="-228600" defTabSz="914400">
-              <a:lnSpc>
-                <a:spcPct val="90000"/>
-              </a:lnSpc>
-              <a:spcBef>
-                <a:spcPts val="1001"/>
-              </a:spcBef>
-              <a:buClr>
-                <a:srgbClr val="000000"/>
-              </a:buClr>
-              <a:buFont typeface="Arial"/>
-              <a:buChar char="•"/>
-            </a:pPr>
-            <a:r>
-              <a:rPr b="0" lang="es-ES" sz="2800" strike="noStrike" u="none">
-                <a:solidFill>
-                  <a:schemeClr val="dk1"/>
-                </a:solidFill>
-                <a:effectLst/>
-                <a:uFillTx/>
-                <a:latin typeface="Calibri"/>
-              </a:rPr>
-              <a:t>Haga clic para modificar los estilos de texto del patrón</a:t>
-            </a:r>
-            <a:endParaRPr b="0" lang="es-ES" sz="2800" strike="noStrike" u="none">
-              <a:solidFill>
-                <a:srgbClr val="000000"/>
-              </a:solidFill>
-              <a:effectLst/>
-              <a:uFillTx/>
-              <a:latin typeface="Arial"/>
-            </a:endParaRPr>
-          </a:p>
-          <a:p>
-            <a:pPr lvl="1" marL="685800" indent="-228600" defTabSz="914400">
-              <a:lnSpc>
-                <a:spcPct val="90000"/>
-              </a:lnSpc>
-              <a:spcBef>
-                <a:spcPts val="499"/>
-              </a:spcBef>
-              <a:buClr>
-                <a:srgbClr val="000000"/>
-              </a:buClr>
-              <a:buFont typeface="Arial"/>
-              <a:buChar char="•"/>
-            </a:pPr>
-            <a:r>
-              <a:rPr b="0" lang="es-ES" sz="2400" strike="noStrike" u="none">
-                <a:solidFill>
-                  <a:schemeClr val="dk1"/>
-                </a:solidFill>
-                <a:effectLst/>
-                <a:uFillTx/>
-                <a:latin typeface="Calibri"/>
-              </a:rPr>
-              <a:t>Segundo nivel</a:t>
-            </a:r>
-            <a:endParaRPr b="0" lang="es-ES" sz="2400" strike="noStrike" u="none">
-              <a:solidFill>
-                <a:srgbClr val="000000"/>
-              </a:solidFill>
-              <a:effectLst/>
-              <a:uFillTx/>
-              <a:latin typeface="Arial"/>
-            </a:endParaRPr>
-          </a:p>
-          <a:p>
-            <a:pPr lvl="2" marL="1143000" indent="-228600" defTabSz="914400">
-              <a:lnSpc>
-                <a:spcPct val="90000"/>
-              </a:lnSpc>
-              <a:spcBef>
-                <a:spcPts val="499"/>
-              </a:spcBef>
-              <a:buClr>
-                <a:srgbClr val="000000"/>
-              </a:buClr>
-              <a:buFont typeface="Arial"/>
-              <a:buChar char="•"/>
-            </a:pPr>
-            <a:r>
-              <a:rPr b="0" lang="es-ES" sz="2000" strike="noStrike" u="none">
-                <a:solidFill>
-                  <a:schemeClr val="dk1"/>
-                </a:solidFill>
-                <a:effectLst/>
-                <a:uFillTx/>
-                <a:latin typeface="Calibri"/>
-              </a:rPr>
-              <a:t>Tercer nivel</a:t>
-            </a:r>
-            <a:endParaRPr b="0" lang="es-ES" sz="2000" strike="noStrike" u="none">
-              <a:solidFill>
-                <a:srgbClr val="000000"/>
-              </a:solidFill>
-              <a:effectLst/>
-              <a:uFillTx/>
-              <a:latin typeface="Arial"/>
-            </a:endParaRPr>
-          </a:p>
-          <a:p>
-            <a:pPr lvl="3" marL="1600200" indent="-228600" defTabSz="914400">
-              <a:lnSpc>
-                <a:spcPct val="90000"/>
-              </a:lnSpc>
-              <a:spcBef>
-                <a:spcPts val="499"/>
-              </a:spcBef>
-              <a:buClr>
-                <a:srgbClr val="000000"/>
-              </a:buClr>
-              <a:buFont typeface="Arial"/>
-              <a:buChar char="•"/>
-            </a:pPr>
-            <a:r>
-              <a:rPr b="0" lang="es-ES" sz="1800" strike="noStrike" u="none">
-                <a:solidFill>
-                  <a:schemeClr val="dk1"/>
-                </a:solidFill>
-                <a:effectLst/>
-                <a:uFillTx/>
-                <a:latin typeface="Calibri"/>
-              </a:rPr>
-              <a:t>Cuarto nivel</a:t>
-            </a:r>
-            <a:endParaRPr b="0" lang="es-ES" sz="1800" strike="noStrike" u="none">
-              <a:solidFill>
-                <a:srgbClr val="000000"/>
-              </a:solidFill>
-              <a:effectLst/>
-              <a:uFillTx/>
-              <a:latin typeface="Arial"/>
-            </a:endParaRPr>
-          </a:p>
-          <a:p>
-            <a:pPr lvl="4" marL="2057400" indent="-228600" defTabSz="914400">
-              <a:lnSpc>
-                <a:spcPct val="90000"/>
-              </a:lnSpc>
-              <a:spcBef>
-                <a:spcPts val="499"/>
-              </a:spcBef>
-              <a:buClr>
-                <a:srgbClr val="000000"/>
-              </a:buClr>
-              <a:buFont typeface="Arial"/>
-              <a:buChar char="•"/>
-            </a:pPr>
-            <a:r>
-              <a:rPr b="0" lang="es-ES" sz="1800" strike="noStrike" u="none">
-                <a:solidFill>
-                  <a:schemeClr val="dk1"/>
-                </a:solidFill>
-                <a:effectLst/>
-                <a:uFillTx/>
-                <a:latin typeface="Calibri"/>
-              </a:rPr>
-              <a:t>Quinto nivel</a:t>
-            </a:r>
-            <a:endParaRPr b="0" lang="es-ES" sz="1800" strike="noStrike" u="none">
-              <a:solidFill>
-                <a:srgbClr val="000000"/>
-              </a:solidFill>
-              <a:effectLst/>
-              <a:uFillTx/>
-              <a:latin typeface="Arial"/>
-            </a:endParaRPr>
-          </a:p>
-        </p:txBody>
-      </p:sp>
-      <p:sp>
-        <p:nvSpPr>
-          <p:cNvPr id="22" name="PlaceHolder 3"/>
+          <p:cNvPr id="22" name="PlaceHolder 2"/>
           <p:cNvSpPr>
             <a:spLocks noGrp="1"/>
           </p:cNvSpPr>
@@ -3556,7 +3879,7 @@
         <p:spPr>
           <a:xfrm>
             <a:off x="838080" y="6356520"/>
-            <a:ext cx="2741400" cy="363240"/>
+            <a:ext cx="2741040" cy="362880"/>
           </a:xfrm>
           <a:prstGeom prst="rect">
             <a:avLst/>
@@ -3627,7 +3950,7 @@
       </p:sp>
       <p:sp>
         <p:nvSpPr>
-          <p:cNvPr id="23" name="PlaceHolder 4"/>
+          <p:cNvPr id="23" name="PlaceHolder 3"/>
           <p:cNvSpPr>
             <a:spLocks noGrp="1"/>
           </p:cNvSpPr>
@@ -3638,7 +3961,7 @@
         <p:spPr>
           <a:xfrm>
             <a:off x="4038480" y="6356520"/>
-            <a:ext cx="4113000" cy="363240"/>
+            <a:ext cx="4112640" cy="362880"/>
           </a:xfrm>
           <a:prstGeom prst="rect">
             <a:avLst/>
@@ -3705,7 +4028,7 @@
       </p:sp>
       <p:sp>
         <p:nvSpPr>
-          <p:cNvPr id="24" name="PlaceHolder 5"/>
+          <p:cNvPr id="24" name="PlaceHolder 4"/>
           <p:cNvSpPr>
             <a:spLocks noGrp="1"/>
           </p:cNvSpPr>
@@ -3716,7 +4039,7 @@
         <p:spPr>
           <a:xfrm>
             <a:off x="8610480" y="6356520"/>
-            <a:ext cx="2741400" cy="363240"/>
+            <a:ext cx="2741040" cy="362880"/>
           </a:xfrm>
           <a:prstGeom prst="rect">
             <a:avLst/>
@@ -3761,7 +4084,7 @@
                 <a:tab algn="l" pos="0"/>
               </a:tabLst>
             </a:pPr>
-            <a:fld id="{8621EE56-C6E1-4F2B-8E58-5D64BAF3146A}" type="slidenum">
+            <a:fld id="{75462815-4A07-4BE1-BEB6-65CD7559EE11}" type="slidenum">
               <a:rPr b="0" lang="en-GB" sz="1200" strike="noStrike" u="none">
                 <a:solidFill>
                   <a:schemeClr val="dk1">
@@ -3791,8 +4114,8 @@
 </file>
 
 <file path=ppt/slideLayouts/slideLayout6.xml><?xml version="1.0" encoding="utf-8"?>
-<p:sldLayout xmlns:a="http://schemas.openxmlformats.org/drawingml/2006/main" xmlns:p="http://schemas.openxmlformats.org/presentationml/2006/main" xmlns:r="http://schemas.openxmlformats.org/officeDocument/2006/relationships" xmlns:p14="http://schemas.microsoft.com/office/powerpoint/2010/main" xmlns:p15="http://schemas.microsoft.com/office/powerpoint/2012/main" xmlns:mc="http://schemas.openxmlformats.org/markup-compatibility/2006" type="blank" preserve="1">
-  <p:cSld name="Encabezado de sección">
+<p:sldLayout xmlns:a="http://schemas.openxmlformats.org/drawingml/2006/main" xmlns:p="http://schemas.openxmlformats.org/presentationml/2006/main" xmlns:r="http://schemas.openxmlformats.org/officeDocument/2006/relationships" xmlns:p14="http://schemas.microsoft.com/office/powerpoint/2010/main" xmlns:p15="http://schemas.microsoft.com/office/powerpoint/2012/main" xmlns:mc="http://schemas.openxmlformats.org/markup-compatibility/2006" type="vertTx" preserve="1">
+  <p:cSld name="Título y texto vertical">
     <p:bg>
       <p:bgPr>
         <a:solidFill>
@@ -3826,8 +4149,8 @@
         </p:nvSpPr>
         <p:spPr>
           <a:xfrm>
-            <a:off x="831960" y="1709640"/>
-            <a:ext cx="10513800" cy="2850840"/>
+            <a:off x="838080" y="365040"/>
+            <a:ext cx="10513440" cy="1323360"/>
           </a:xfrm>
           <a:prstGeom prst="rect">
             <a:avLst/>
@@ -3838,7 +4161,7 @@
           </a:ln>
         </p:spPr>
         <p:txBody>
-          <a:bodyPr lIns="91440" rIns="91440" tIns="45720" bIns="45720" anchor="b">
+          <a:bodyPr lIns="91440" rIns="91440" tIns="45720" bIns="45720" anchor="ctr">
             <a:noAutofit/>
           </a:bodyPr>
           <a:p>
@@ -3852,7 +4175,7 @@
               </a:tabLst>
             </a:pPr>
             <a:r>
-              <a:rPr b="0" lang="es-ES" sz="6000" strike="noStrike" u="none">
+              <a:rPr b="0" lang="es-ES" sz="4400" strike="noStrike" u="none">
                 <a:solidFill>
                   <a:schemeClr val="dk1"/>
                 </a:solidFill>
@@ -3862,7 +4185,7 @@
               </a:rPr>
               <a:t>Haga clic para modificar el estilo de título del patrón</a:t>
             </a:r>
-            <a:endParaRPr b="0" lang="es-ES" sz="6000" strike="noStrike" u="none">
+            <a:endParaRPr b="0" lang="es-ES" sz="4400" strike="noStrike" u="none">
               <a:solidFill>
                 <a:srgbClr val="000000"/>
               </a:solidFill>
@@ -3885,8 +4208,8 @@
         </p:nvSpPr>
         <p:spPr>
           <a:xfrm>
-            <a:off x="831960" y="4589640"/>
-            <a:ext cx="10513800" cy="1498320"/>
+            <a:off x="838080" y="1825560"/>
+            <a:ext cx="10513440" cy="4349160"/>
           </a:xfrm>
           <a:prstGeom prst="rect">
             <a:avLst/>
@@ -3897,36 +4220,171 @@
           </a:ln>
         </p:spPr>
         <p:txBody>
-          <a:bodyPr lIns="91440" rIns="91440" tIns="45720" bIns="45720" anchor="t">
+          <a:bodyPr lIns="91440" rIns="91440" tIns="45720" bIns="45720" anchor="t" vert="eaVert">
             <a:noAutofit/>
           </a:bodyPr>
           <a:p>
-            <a:pPr indent="0" defTabSz="914400">
+            <a:pPr marL="228600" indent="-228600" defTabSz="914400">
               <a:lnSpc>
                 <a:spcPct val="90000"/>
               </a:lnSpc>
               <a:spcBef>
                 <a:spcPts val="1001"/>
               </a:spcBef>
-              <a:buNone/>
-              <a:tabLst>
-                <a:tab algn="l" pos="0"/>
-              </a:tabLst>
+              <a:buClr>
+                <a:srgbClr val="000000"/>
+              </a:buClr>
+              <a:buFont typeface="Arial"/>
+              <a:buChar char="•"/>
+            </a:pPr>
+            <a:r>
+              <a:rPr b="0" lang="es-ES" sz="2800" strike="noStrike" u="none">
+                <a:solidFill>
+                  <a:schemeClr val="dk1"/>
+                </a:solidFill>
+                <a:effectLst/>
+                <a:uFillTx/>
+                <a:latin typeface="Calibri"/>
+              </a:rPr>
+              <a:t>Haga clic para modificar los estilos de texto del patrón</a:t>
+            </a:r>
+            <a:endParaRPr b="0" lang="es-ES" sz="2800" strike="noStrike" u="none">
+              <a:solidFill>
+                <a:srgbClr val="000000"/>
+              </a:solidFill>
+              <a:effectLst/>
+              <a:uFillTx/>
+              <a:latin typeface="Arial"/>
+            </a:endParaRPr>
+          </a:p>
+          <a:p>
+            <a:pPr lvl="1" marL="685800" indent="-228600" defTabSz="914400">
+              <a:lnSpc>
+                <a:spcPct val="90000"/>
+              </a:lnSpc>
+              <a:spcBef>
+                <a:spcPts val="499"/>
+              </a:spcBef>
+              <a:buClr>
+                <a:srgbClr val="000000"/>
+              </a:buClr>
+              <a:buFont typeface="Arial"/>
+              <a:buChar char="•"/>
             </a:pPr>
             <a:r>
               <a:rPr b="0" lang="es-ES" sz="2400" strike="noStrike" u="none">
                 <a:solidFill>
-                  <a:schemeClr val="dk1">
-                    <a:tint val="75000"/>
-                  </a:schemeClr>
-                </a:solidFill>
-                <a:effectLst/>
-                <a:uFillTx/>
-                <a:latin typeface="Calibri"/>
-              </a:rPr>
-              <a:t>Haga clic para modificar los estilos de texto del patrón</a:t>
+                  <a:schemeClr val="dk1"/>
+                </a:solidFill>
+                <a:effectLst/>
+                <a:uFillTx/>
+                <a:latin typeface="Calibri"/>
+              </a:rPr>
+              <a:t>Segundo nivel</a:t>
             </a:r>
             <a:endParaRPr b="0" lang="es-ES" sz="2400" strike="noStrike" u="none">
+              <a:solidFill>
+                <a:srgbClr val="000000"/>
+              </a:solidFill>
+              <a:effectLst/>
+              <a:uFillTx/>
+              <a:latin typeface="Arial"/>
+            </a:endParaRPr>
+          </a:p>
+          <a:p>
+            <a:pPr lvl="2" marL="1143000" indent="-228600" defTabSz="914400">
+              <a:lnSpc>
+                <a:spcPct val="90000"/>
+              </a:lnSpc>
+              <a:spcBef>
+                <a:spcPts val="499"/>
+              </a:spcBef>
+              <a:buClr>
+                <a:srgbClr val="000000"/>
+              </a:buClr>
+              <a:buFont typeface="Arial"/>
+              <a:buChar char="•"/>
+            </a:pPr>
+            <a:r>
+              <a:rPr b="0" lang="es-ES" sz="2000" strike="noStrike" u="none">
+                <a:solidFill>
+                  <a:schemeClr val="dk1"/>
+                </a:solidFill>
+                <a:effectLst/>
+                <a:uFillTx/>
+                <a:latin typeface="Calibri"/>
+              </a:rPr>
+              <a:t>Tercer nivel</a:t>
+            </a:r>
+            <a:endParaRPr b="0" lang="es-ES" sz="2000" strike="noStrike" u="none">
+              <a:solidFill>
+                <a:srgbClr val="000000"/>
+              </a:solidFill>
+              <a:effectLst/>
+              <a:uFillTx/>
+              <a:latin typeface="Arial"/>
+            </a:endParaRPr>
+          </a:p>
+          <a:p>
+            <a:pPr lvl="3" marL="1600200" indent="-228600" defTabSz="914400">
+              <a:lnSpc>
+                <a:spcPct val="90000"/>
+              </a:lnSpc>
+              <a:spcBef>
+                <a:spcPts val="499"/>
+              </a:spcBef>
+              <a:buClr>
+                <a:srgbClr val="000000"/>
+              </a:buClr>
+              <a:buFont typeface="Arial"/>
+              <a:buChar char="•"/>
+            </a:pPr>
+            <a:r>
+              <a:rPr b="0" lang="es-ES" sz="1800" strike="noStrike" u="none">
+                <a:solidFill>
+                  <a:schemeClr val="dk1"/>
+                </a:solidFill>
+                <a:effectLst/>
+                <a:uFillTx/>
+                <a:latin typeface="Calibri"/>
+              </a:rPr>
+              <a:t>Cuarto nivel</a:t>
+            </a:r>
+            <a:endParaRPr b="0" lang="es-ES" sz="1800" strike="noStrike" u="none">
+              <a:solidFill>
+                <a:srgbClr val="000000"/>
+              </a:solidFill>
+              <a:effectLst/>
+              <a:uFillTx/>
+              <a:latin typeface="Arial"/>
+            </a:endParaRPr>
+          </a:p>
+          <a:p>
+            <a:pPr lvl="4" marL="2057400" indent="-228600" defTabSz="914400">
+              <a:lnSpc>
+                <a:spcPct val="90000"/>
+              </a:lnSpc>
+              <a:spcBef>
+                <a:spcPts val="499"/>
+              </a:spcBef>
+              <a:buClr>
+                <a:srgbClr val="000000"/>
+              </a:buClr>
+              <a:buFont typeface="Arial"/>
+              <a:buChar char="•"/>
+            </a:pPr>
+            <a:r>
+              <a:rPr b="0" lang="es-ES" sz="1800" strike="noStrike" u="none">
+                <a:solidFill>
+                  <a:schemeClr val="dk1"/>
+                </a:solidFill>
+                <a:effectLst/>
+                <a:uFillTx/>
+                <a:latin typeface="Calibri"/>
+              </a:rPr>
+              <a:t>Quinto nivel</a:t>
+            </a:r>
+            <a:endParaRPr b="0" lang="es-ES" sz="1800" strike="noStrike" u="none">
               <a:solidFill>
                 <a:srgbClr val="000000"/>
               </a:solidFill>
@@ -3950,7 +4408,7 @@
         <p:spPr>
           <a:xfrm>
             <a:off x="838080" y="6356520"/>
-            <a:ext cx="2741400" cy="363240"/>
+            <a:ext cx="2741040" cy="362880"/>
           </a:xfrm>
           <a:prstGeom prst="rect">
             <a:avLst/>
@@ -4032,7 +4490,7 @@
         <p:spPr>
           <a:xfrm>
             <a:off x="4038480" y="6356520"/>
-            <a:ext cx="4113000" cy="363240"/>
+            <a:ext cx="4112640" cy="362880"/>
           </a:xfrm>
           <a:prstGeom prst="rect">
             <a:avLst/>
@@ -4110,7 +4568,7 @@
         <p:spPr>
           <a:xfrm>
             <a:off x="8610480" y="6356520"/>
-            <a:ext cx="2741400" cy="363240"/>
+            <a:ext cx="2741040" cy="362880"/>
           </a:xfrm>
           <a:prstGeom prst="rect">
             <a:avLst/>
@@ -4155,7 +4613,7 @@
                 <a:tab algn="l" pos="0"/>
               </a:tabLst>
             </a:pPr>
-            <a:fld id="{A71366A2-C820-4AC4-B898-07D4C4CC9DFE}" type="slidenum">
+            <a:fld id="{A86A532E-7DB1-45ED-8B20-EA31DC26DB7D}" type="slidenum">
               <a:rPr b="0" lang="en-GB" sz="1200" strike="noStrike" u="none">
                 <a:solidFill>
                   <a:schemeClr val="dk1">
@@ -4185,8 +4643,8 @@
 </file>
 
 <file path=ppt/slideLayouts/slideLayout7.xml><?xml version="1.0" encoding="utf-8"?>
-<p:sldLayout xmlns:a="http://schemas.openxmlformats.org/drawingml/2006/main" xmlns:p="http://schemas.openxmlformats.org/presentationml/2006/main" xmlns:r="http://schemas.openxmlformats.org/officeDocument/2006/relationships" xmlns:p14="http://schemas.microsoft.com/office/powerpoint/2010/main" xmlns:p15="http://schemas.microsoft.com/office/powerpoint/2012/main" xmlns:mc="http://schemas.openxmlformats.org/markup-compatibility/2006" type="twoObj" preserve="1">
-  <p:cSld name="Dos objetos">
+<p:sldLayout xmlns:a="http://schemas.openxmlformats.org/drawingml/2006/main" xmlns:p="http://schemas.openxmlformats.org/presentationml/2006/main" xmlns:r="http://schemas.openxmlformats.org/officeDocument/2006/relationships" xmlns:p14="http://schemas.microsoft.com/office/powerpoint/2010/main" xmlns:p15="http://schemas.microsoft.com/office/powerpoint/2012/main" xmlns:mc="http://schemas.openxmlformats.org/markup-compatibility/2006" type="vertTitleAndTx" preserve="1">
+  <p:cSld name="Título vertical y texto">
     <p:bg>
       <p:bgPr>
         <a:solidFill>
@@ -4220,8 +4678,8 @@
         </p:nvSpPr>
         <p:spPr>
           <a:xfrm>
-            <a:off x="838080" y="365040"/>
-            <a:ext cx="10513800" cy="1323720"/>
+            <a:off x="8724960" y="365040"/>
+            <a:ext cx="2626920" cy="5809680"/>
           </a:xfrm>
           <a:prstGeom prst="rect">
             <a:avLst/>
@@ -4232,7 +4690,7 @@
           </a:ln>
         </p:spPr>
         <p:txBody>
-          <a:bodyPr lIns="91440" rIns="91440" tIns="45720" bIns="45720" anchor="ctr">
+          <a:bodyPr lIns="91440" rIns="91440" tIns="45720" bIns="45720" anchor="ctr" vert="eaVert">
             <a:noAutofit/>
           </a:bodyPr>
           <a:p>
@@ -4279,8 +4737,8 @@
         </p:nvSpPr>
         <p:spPr>
           <a:xfrm>
-            <a:off x="838080" y="1825560"/>
-            <a:ext cx="5179680" cy="4349520"/>
+            <a:off x="838080" y="365040"/>
+            <a:ext cx="7732080" cy="5809680"/>
           </a:xfrm>
           <a:prstGeom prst="rect">
             <a:avLst/>
@@ -4291,7 +4749,7 @@
           </a:ln>
         </p:spPr>
         <p:txBody>
-          <a:bodyPr lIns="91440" rIns="91440" tIns="45720" bIns="45720" anchor="t">
+          <a:bodyPr lIns="91440" rIns="91440" tIns="45720" bIns="45720" anchor="t" vert="eaVert">
             <a:noAutofit/>
           </a:bodyPr>
           <a:p>
@@ -4469,205 +4927,6 @@
       <p:sp>
         <p:nvSpPr>
           <p:cNvPr id="32" name="PlaceHolder 3"/>
-          <p:cNvSpPr>
-            <a:spLocks noGrp="1"/>
-          </p:cNvSpPr>
-          <p:nvPr>
-            <p:ph type="body"/>
-          </p:nvPr>
-        </p:nvSpPr>
-        <p:spPr>
-          <a:xfrm>
-            <a:off x="6172200" y="1825560"/>
-            <a:ext cx="5179680" cy="4349520"/>
-          </a:xfrm>
-          <a:prstGeom prst="rect">
-            <a:avLst/>
-          </a:prstGeom>
-          <a:noFill/>
-          <a:ln w="0">
-            <a:noFill/>
-          </a:ln>
-        </p:spPr>
-        <p:txBody>
-          <a:bodyPr lIns="91440" rIns="91440" tIns="45720" bIns="45720" anchor="t">
-            <a:noAutofit/>
-          </a:bodyPr>
-          <a:p>
-            <a:pPr marL="228600" indent="-228600" defTabSz="914400">
-              <a:lnSpc>
-                <a:spcPct val="90000"/>
-              </a:lnSpc>
-              <a:spcBef>
-                <a:spcPts val="1001"/>
-              </a:spcBef>
-              <a:buClr>
-                <a:srgbClr val="000000"/>
-              </a:buClr>
-              <a:buFont typeface="Arial"/>
-              <a:buChar char="•"/>
-            </a:pPr>
-            <a:r>
-              <a:rPr b="0" lang="es-ES" sz="2800" strike="noStrike" u="none">
-                <a:solidFill>
-                  <a:schemeClr val="dk1"/>
-                </a:solidFill>
-                <a:effectLst/>
-                <a:uFillTx/>
-                <a:latin typeface="Calibri"/>
-              </a:rPr>
-              <a:t>Haga clic para modificar los estilos de texto del patrón</a:t>
-            </a:r>
-            <a:endParaRPr b="0" lang="es-ES" sz="2800" strike="noStrike" u="none">
-              <a:solidFill>
-                <a:srgbClr val="000000"/>
-              </a:solidFill>
-              <a:effectLst/>
-              <a:uFillTx/>
-              <a:latin typeface="Arial"/>
-            </a:endParaRPr>
-          </a:p>
-          <a:p>
-            <a:pPr lvl="1" marL="685800" indent="-228600" defTabSz="914400">
-              <a:lnSpc>
-                <a:spcPct val="90000"/>
-              </a:lnSpc>
-              <a:spcBef>
-                <a:spcPts val="499"/>
-              </a:spcBef>
-              <a:buClr>
-                <a:srgbClr val="000000"/>
-              </a:buClr>
-              <a:buFont typeface="Arial"/>
-              <a:buChar char="•"/>
-            </a:pPr>
-            <a:r>
-              <a:rPr b="0" lang="es-ES" sz="2400" strike="noStrike" u="none">
-                <a:solidFill>
-                  <a:schemeClr val="dk1"/>
-                </a:solidFill>
-                <a:effectLst/>
-                <a:uFillTx/>
-                <a:latin typeface="Calibri"/>
-              </a:rPr>
-              <a:t>Segundo nivel</a:t>
-            </a:r>
-            <a:endParaRPr b="0" lang="es-ES" sz="2400" strike="noStrike" u="none">
-              <a:solidFill>
-                <a:srgbClr val="000000"/>
-              </a:solidFill>
-              <a:effectLst/>
-              <a:uFillTx/>
-              <a:latin typeface="Arial"/>
-            </a:endParaRPr>
-          </a:p>
-          <a:p>
-            <a:pPr lvl="2" marL="1143000" indent="-228600" defTabSz="914400">
-              <a:lnSpc>
-                <a:spcPct val="90000"/>
-              </a:lnSpc>
-              <a:spcBef>
-                <a:spcPts val="499"/>
-              </a:spcBef>
-              <a:buClr>
-                <a:srgbClr val="000000"/>
-              </a:buClr>
-              <a:buFont typeface="Arial"/>
-              <a:buChar char="•"/>
-            </a:pPr>
-            <a:r>
-              <a:rPr b="0" lang="es-ES" sz="2000" strike="noStrike" u="none">
-                <a:solidFill>
-                  <a:schemeClr val="dk1"/>
-                </a:solidFill>
-                <a:effectLst/>
-                <a:uFillTx/>
-                <a:latin typeface="Calibri"/>
-              </a:rPr>
-              <a:t>Tercer nivel</a:t>
-            </a:r>
-            <a:endParaRPr b="0" lang="es-ES" sz="2000" strike="noStrike" u="none">
-              <a:solidFill>
-                <a:srgbClr val="000000"/>
-              </a:solidFill>
-              <a:effectLst/>
-              <a:uFillTx/>
-              <a:latin typeface="Arial"/>
-            </a:endParaRPr>
-          </a:p>
-          <a:p>
-            <a:pPr lvl="3" marL="1600200" indent="-228600" defTabSz="914400">
-              <a:lnSpc>
-                <a:spcPct val="90000"/>
-              </a:lnSpc>
-              <a:spcBef>
-                <a:spcPts val="499"/>
-              </a:spcBef>
-              <a:buClr>
-                <a:srgbClr val="000000"/>
-              </a:buClr>
-              <a:buFont typeface="Arial"/>
-              <a:buChar char="•"/>
-            </a:pPr>
-            <a:r>
-              <a:rPr b="0" lang="es-ES" sz="1800" strike="noStrike" u="none">
-                <a:solidFill>
-                  <a:schemeClr val="dk1"/>
-                </a:solidFill>
-                <a:effectLst/>
-                <a:uFillTx/>
-                <a:latin typeface="Calibri"/>
-              </a:rPr>
-              <a:t>Cuarto nivel</a:t>
-            </a:r>
-            <a:endParaRPr b="0" lang="es-ES" sz="1800" strike="noStrike" u="none">
-              <a:solidFill>
-                <a:srgbClr val="000000"/>
-              </a:solidFill>
-              <a:effectLst/>
-              <a:uFillTx/>
-              <a:latin typeface="Arial"/>
-            </a:endParaRPr>
-          </a:p>
-          <a:p>
-            <a:pPr lvl="4" marL="2057400" indent="-228600" defTabSz="914400">
-              <a:lnSpc>
-                <a:spcPct val="90000"/>
-              </a:lnSpc>
-              <a:spcBef>
-                <a:spcPts val="499"/>
-              </a:spcBef>
-              <a:buClr>
-                <a:srgbClr val="000000"/>
-              </a:buClr>
-              <a:buFont typeface="Arial"/>
-              <a:buChar char="•"/>
-            </a:pPr>
-            <a:r>
-              <a:rPr b="0" lang="es-ES" sz="1800" strike="noStrike" u="none">
-                <a:solidFill>
-                  <a:schemeClr val="dk1"/>
-                </a:solidFill>
-                <a:effectLst/>
-                <a:uFillTx/>
-                <a:latin typeface="Calibri"/>
-              </a:rPr>
-              <a:t>Quinto nivel</a:t>
-            </a:r>
-            <a:endParaRPr b="0" lang="es-ES" sz="1800" strike="noStrike" u="none">
-              <a:solidFill>
-                <a:srgbClr val="000000"/>
-              </a:solidFill>
-              <a:effectLst/>
-              <a:uFillTx/>
-              <a:latin typeface="Arial"/>
-            </a:endParaRPr>
-          </a:p>
-        </p:txBody>
-      </p:sp>
-      <p:sp>
-        <p:nvSpPr>
-          <p:cNvPr id="33" name="PlaceHolder 4"/>
           <p:cNvSpPr>
             <a:spLocks noGrp="1"/>
           </p:cNvSpPr>
@@ -4678,7 +4937,7 @@
         <p:spPr>
           <a:xfrm>
             <a:off x="838080" y="6356520"/>
-            <a:ext cx="2741400" cy="363240"/>
+            <a:ext cx="2741040" cy="362880"/>
           </a:xfrm>
           <a:prstGeom prst="rect">
             <a:avLst/>
@@ -4749,7 +5008,7 @@
       </p:sp>
       <p:sp>
         <p:nvSpPr>
-          <p:cNvPr id="34" name="PlaceHolder 5"/>
+          <p:cNvPr id="33" name="PlaceHolder 4"/>
           <p:cNvSpPr>
             <a:spLocks noGrp="1"/>
           </p:cNvSpPr>
@@ -4760,7 +5019,7 @@
         <p:spPr>
           <a:xfrm>
             <a:off x="4038480" y="6356520"/>
-            <a:ext cx="4113000" cy="363240"/>
+            <a:ext cx="4112640" cy="362880"/>
           </a:xfrm>
           <a:prstGeom prst="rect">
             <a:avLst/>
@@ -4827,7 +5086,7 @@
       </p:sp>
       <p:sp>
         <p:nvSpPr>
-          <p:cNvPr id="35" name="PlaceHolder 6"/>
+          <p:cNvPr id="34" name="PlaceHolder 5"/>
           <p:cNvSpPr>
             <a:spLocks noGrp="1"/>
           </p:cNvSpPr>
@@ -4838,7 +5097,7 @@
         <p:spPr>
           <a:xfrm>
             <a:off x="8610480" y="6356520"/>
-            <a:ext cx="2741400" cy="363240"/>
+            <a:ext cx="2741040" cy="362880"/>
           </a:xfrm>
           <a:prstGeom prst="rect">
             <a:avLst/>
@@ -4883,7 +5142,7 @@
                 <a:tab algn="l" pos="0"/>
               </a:tabLst>
             </a:pPr>
-            <a:fld id="{EFDE5FB7-69A3-4F15-9DD9-22C69772BD85}" type="slidenum">
+            <a:fld id="{4CE47C0E-DDC5-4F10-B2DF-59998616C5B9}" type="slidenum">
               <a:rPr b="0" lang="en-GB" sz="1200" strike="noStrike" u="none">
                 <a:solidFill>
                   <a:schemeClr val="dk1">
@@ -4913,8 +5172,8 @@
 </file>
 
 <file path=ppt/slideLayouts/slideLayout8.xml><?xml version="1.0" encoding="utf-8"?>
-<p:sldLayout xmlns:a="http://schemas.openxmlformats.org/drawingml/2006/main" xmlns:p="http://schemas.openxmlformats.org/presentationml/2006/main" xmlns:r="http://schemas.openxmlformats.org/officeDocument/2006/relationships" xmlns:p14="http://schemas.microsoft.com/office/powerpoint/2010/main" xmlns:p15="http://schemas.microsoft.com/office/powerpoint/2012/main" xmlns:mc="http://schemas.openxmlformats.org/markup-compatibility/2006" type="blank" preserve="1">
-  <p:cSld name="Comparación">
+<p:sldLayout xmlns:a="http://schemas.openxmlformats.org/drawingml/2006/main" xmlns:p="http://schemas.openxmlformats.org/presentationml/2006/main" xmlns:r="http://schemas.openxmlformats.org/officeDocument/2006/relationships" xmlns:p14="http://schemas.microsoft.com/office/powerpoint/2010/main" xmlns:p15="http://schemas.microsoft.com/office/powerpoint/2012/main" xmlns:mc="http://schemas.openxmlformats.org/markup-compatibility/2006" type="obj" preserve="1">
+  <p:cSld name="Título y objetos">
     <p:bg>
       <p:bgPr>
         <a:solidFill>
@@ -4938,7 +5197,7 @@
       </p:grpSpPr>
       <p:sp>
         <p:nvSpPr>
-          <p:cNvPr id="36" name="PlaceHolder 1"/>
+          <p:cNvPr id="35" name="PlaceHolder 1"/>
           <p:cNvSpPr>
             <a:spLocks noGrp="1"/>
           </p:cNvSpPr>
@@ -4948,8 +5207,8 @@
         </p:nvSpPr>
         <p:spPr>
           <a:xfrm>
-            <a:off x="839880" y="365040"/>
-            <a:ext cx="10513800" cy="1323720"/>
+            <a:off x="838080" y="365040"/>
+            <a:ext cx="10513440" cy="1323360"/>
           </a:xfrm>
           <a:prstGeom prst="rect">
             <a:avLst/>
@@ -4997,7 +5256,7 @@
       </p:sp>
       <p:sp>
         <p:nvSpPr>
-          <p:cNvPr id="37" name="PlaceHolder 2"/>
+          <p:cNvPr id="36" name="PlaceHolder 2"/>
           <p:cNvSpPr>
             <a:spLocks noGrp="1"/>
           </p:cNvSpPr>
@@ -5007,70 +5266,8 @@
         </p:nvSpPr>
         <p:spPr>
           <a:xfrm>
-            <a:off x="839880" y="1681200"/>
-            <a:ext cx="5155920" cy="822240"/>
-          </a:xfrm>
-          <a:prstGeom prst="rect">
-            <a:avLst/>
-          </a:prstGeom>
-          <a:noFill/>
-          <a:ln w="0">
-            <a:noFill/>
-          </a:ln>
-        </p:spPr>
-        <p:txBody>
-          <a:bodyPr lIns="91440" rIns="91440" tIns="45720" bIns="45720" anchor="b">
-            <a:noAutofit/>
-          </a:bodyPr>
-          <a:p>
-            <a:pPr indent="0" defTabSz="914400">
-              <a:lnSpc>
-                <a:spcPct val="90000"/>
-              </a:lnSpc>
-              <a:spcBef>
-                <a:spcPts val="1001"/>
-              </a:spcBef>
-              <a:buNone/>
-              <a:tabLst>
-                <a:tab algn="l" pos="0"/>
-              </a:tabLst>
-            </a:pPr>
-            <a:r>
-              <a:rPr b="1" lang="es-ES" sz="2400" strike="noStrike" u="none">
-                <a:solidFill>
-                  <a:schemeClr val="dk1"/>
-                </a:solidFill>
-                <a:effectLst/>
-                <a:uFillTx/>
-                <a:latin typeface="Calibri"/>
-              </a:rPr>
-              <a:t>Haga clic para modificar los estilos de texto del patrón</a:t>
-            </a:r>
-            <a:endParaRPr b="0" lang="es-ES" sz="2400" strike="noStrike" u="none">
-              <a:solidFill>
-                <a:srgbClr val="000000"/>
-              </a:solidFill>
-              <a:effectLst/>
-              <a:uFillTx/>
-              <a:latin typeface="Arial"/>
-            </a:endParaRPr>
-          </a:p>
-        </p:txBody>
-      </p:sp>
-      <p:sp>
-        <p:nvSpPr>
-          <p:cNvPr id="38" name="PlaceHolder 3"/>
-          <p:cNvSpPr>
-            <a:spLocks noGrp="1"/>
-          </p:cNvSpPr>
-          <p:nvPr>
-            <p:ph type="body"/>
-          </p:nvPr>
-        </p:nvSpPr>
-        <p:spPr>
-          <a:xfrm>
-            <a:off x="839880" y="2505240"/>
-            <a:ext cx="5155920" cy="3682800"/>
+            <a:off x="838080" y="1825560"/>
+            <a:ext cx="10513440" cy="4349160"/>
           </a:xfrm>
           <a:prstGeom prst="rect">
             <a:avLst/>
@@ -5258,268 +5455,7 @@
       </p:sp>
       <p:sp>
         <p:nvSpPr>
-          <p:cNvPr id="39" name="PlaceHolder 4"/>
-          <p:cNvSpPr>
-            <a:spLocks noGrp="1"/>
-          </p:cNvSpPr>
-          <p:nvPr>
-            <p:ph type="body"/>
-          </p:nvPr>
-        </p:nvSpPr>
-        <p:spPr>
-          <a:xfrm>
-            <a:off x="6172200" y="1681200"/>
-            <a:ext cx="5181480" cy="822240"/>
-          </a:xfrm>
-          <a:prstGeom prst="rect">
-            <a:avLst/>
-          </a:prstGeom>
-          <a:noFill/>
-          <a:ln w="0">
-            <a:noFill/>
-          </a:ln>
-        </p:spPr>
-        <p:txBody>
-          <a:bodyPr lIns="91440" rIns="91440" tIns="45720" bIns="45720" anchor="b">
-            <a:noAutofit/>
-          </a:bodyPr>
-          <a:p>
-            <a:pPr indent="0" defTabSz="914400">
-              <a:lnSpc>
-                <a:spcPct val="90000"/>
-              </a:lnSpc>
-              <a:spcBef>
-                <a:spcPts val="1001"/>
-              </a:spcBef>
-              <a:buNone/>
-              <a:tabLst>
-                <a:tab algn="l" pos="0"/>
-              </a:tabLst>
-            </a:pPr>
-            <a:r>
-              <a:rPr b="1" lang="es-ES" sz="2400" strike="noStrike" u="none">
-                <a:solidFill>
-                  <a:schemeClr val="dk1"/>
-                </a:solidFill>
-                <a:effectLst/>
-                <a:uFillTx/>
-                <a:latin typeface="Calibri"/>
-              </a:rPr>
-              <a:t>Haga clic para modificar los estilos de texto del patrón</a:t>
-            </a:r>
-            <a:endParaRPr b="0" lang="es-ES" sz="2400" strike="noStrike" u="none">
-              <a:solidFill>
-                <a:srgbClr val="000000"/>
-              </a:solidFill>
-              <a:effectLst/>
-              <a:uFillTx/>
-              <a:latin typeface="Arial"/>
-            </a:endParaRPr>
-          </a:p>
-        </p:txBody>
-      </p:sp>
-      <p:sp>
-        <p:nvSpPr>
-          <p:cNvPr id="40" name="PlaceHolder 5"/>
-          <p:cNvSpPr>
-            <a:spLocks noGrp="1"/>
-          </p:cNvSpPr>
-          <p:nvPr>
-            <p:ph type="body"/>
-          </p:nvPr>
-        </p:nvSpPr>
-        <p:spPr>
-          <a:xfrm>
-            <a:off x="6172200" y="2505240"/>
-            <a:ext cx="5181480" cy="3682800"/>
-          </a:xfrm>
-          <a:prstGeom prst="rect">
-            <a:avLst/>
-          </a:prstGeom>
-          <a:noFill/>
-          <a:ln w="0">
-            <a:noFill/>
-          </a:ln>
-        </p:spPr>
-        <p:txBody>
-          <a:bodyPr lIns="91440" rIns="91440" tIns="45720" bIns="45720" anchor="t">
-            <a:noAutofit/>
-          </a:bodyPr>
-          <a:p>
-            <a:pPr marL="228600" indent="-228600" defTabSz="914400">
-              <a:lnSpc>
-                <a:spcPct val="90000"/>
-              </a:lnSpc>
-              <a:spcBef>
-                <a:spcPts val="1001"/>
-              </a:spcBef>
-              <a:buClr>
-                <a:srgbClr val="000000"/>
-              </a:buClr>
-              <a:buFont typeface="Arial"/>
-              <a:buChar char="•"/>
-            </a:pPr>
-            <a:r>
-              <a:rPr b="0" lang="es-ES" sz="2800" strike="noStrike" u="none">
-                <a:solidFill>
-                  <a:schemeClr val="dk1"/>
-                </a:solidFill>
-                <a:effectLst/>
-                <a:uFillTx/>
-                <a:latin typeface="Calibri"/>
-              </a:rPr>
-              <a:t>Haga clic para modificar los estilos de texto del patrón</a:t>
-            </a:r>
-            <a:endParaRPr b="0" lang="es-ES" sz="2800" strike="noStrike" u="none">
-              <a:solidFill>
-                <a:srgbClr val="000000"/>
-              </a:solidFill>
-              <a:effectLst/>
-              <a:uFillTx/>
-              <a:latin typeface="Arial"/>
-            </a:endParaRPr>
-          </a:p>
-          <a:p>
-            <a:pPr lvl="1" marL="685800" indent="-228600" defTabSz="914400">
-              <a:lnSpc>
-                <a:spcPct val="90000"/>
-              </a:lnSpc>
-              <a:spcBef>
-                <a:spcPts val="499"/>
-              </a:spcBef>
-              <a:buClr>
-                <a:srgbClr val="000000"/>
-              </a:buClr>
-              <a:buFont typeface="Arial"/>
-              <a:buChar char="•"/>
-            </a:pPr>
-            <a:r>
-              <a:rPr b="0" lang="es-ES" sz="2400" strike="noStrike" u="none">
-                <a:solidFill>
-                  <a:schemeClr val="dk1"/>
-                </a:solidFill>
-                <a:effectLst/>
-                <a:uFillTx/>
-                <a:latin typeface="Calibri"/>
-              </a:rPr>
-              <a:t>Segundo nivel</a:t>
-            </a:r>
-            <a:endParaRPr b="0" lang="es-ES" sz="2400" strike="noStrike" u="none">
-              <a:solidFill>
-                <a:srgbClr val="000000"/>
-              </a:solidFill>
-              <a:effectLst/>
-              <a:uFillTx/>
-              <a:latin typeface="Arial"/>
-            </a:endParaRPr>
-          </a:p>
-          <a:p>
-            <a:pPr lvl="2" marL="1143000" indent="-228600" defTabSz="914400">
-              <a:lnSpc>
-                <a:spcPct val="90000"/>
-              </a:lnSpc>
-              <a:spcBef>
-                <a:spcPts val="499"/>
-              </a:spcBef>
-              <a:buClr>
-                <a:srgbClr val="000000"/>
-              </a:buClr>
-              <a:buFont typeface="Arial"/>
-              <a:buChar char="•"/>
-            </a:pPr>
-            <a:r>
-              <a:rPr b="0" lang="es-ES" sz="2000" strike="noStrike" u="none">
-                <a:solidFill>
-                  <a:schemeClr val="dk1"/>
-                </a:solidFill>
-                <a:effectLst/>
-                <a:uFillTx/>
-                <a:latin typeface="Calibri"/>
-              </a:rPr>
-              <a:t>Tercer nivel</a:t>
-            </a:r>
-            <a:endParaRPr b="0" lang="es-ES" sz="2000" strike="noStrike" u="none">
-              <a:solidFill>
-                <a:srgbClr val="000000"/>
-              </a:solidFill>
-              <a:effectLst/>
-              <a:uFillTx/>
-              <a:latin typeface="Arial"/>
-            </a:endParaRPr>
-          </a:p>
-          <a:p>
-            <a:pPr lvl="3" marL="1600200" indent="-228600" defTabSz="914400">
-              <a:lnSpc>
-                <a:spcPct val="90000"/>
-              </a:lnSpc>
-              <a:spcBef>
-                <a:spcPts val="499"/>
-              </a:spcBef>
-              <a:buClr>
-                <a:srgbClr val="000000"/>
-              </a:buClr>
-              <a:buFont typeface="Arial"/>
-              <a:buChar char="•"/>
-            </a:pPr>
-            <a:r>
-              <a:rPr b="0" lang="es-ES" sz="1800" strike="noStrike" u="none">
-                <a:solidFill>
-                  <a:schemeClr val="dk1"/>
-                </a:solidFill>
-                <a:effectLst/>
-                <a:uFillTx/>
-                <a:latin typeface="Calibri"/>
-              </a:rPr>
-              <a:t>Cuarto nivel</a:t>
-            </a:r>
-            <a:endParaRPr b="0" lang="es-ES" sz="1800" strike="noStrike" u="none">
-              <a:solidFill>
-                <a:srgbClr val="000000"/>
-              </a:solidFill>
-              <a:effectLst/>
-              <a:uFillTx/>
-              <a:latin typeface="Arial"/>
-            </a:endParaRPr>
-          </a:p>
-          <a:p>
-            <a:pPr lvl="4" marL="2057400" indent="-228600" defTabSz="914400">
-              <a:lnSpc>
-                <a:spcPct val="90000"/>
-              </a:lnSpc>
-              <a:spcBef>
-                <a:spcPts val="499"/>
-              </a:spcBef>
-              <a:buClr>
-                <a:srgbClr val="000000"/>
-              </a:buClr>
-              <a:buFont typeface="Arial"/>
-              <a:buChar char="•"/>
-            </a:pPr>
-            <a:r>
-              <a:rPr b="0" lang="es-ES" sz="1800" strike="noStrike" u="none">
-                <a:solidFill>
-                  <a:schemeClr val="dk1"/>
-                </a:solidFill>
-                <a:effectLst/>
-                <a:uFillTx/>
-                <a:latin typeface="Calibri"/>
-              </a:rPr>
-              <a:t>Quinto nivel</a:t>
-            </a:r>
-            <a:endParaRPr b="0" lang="es-ES" sz="1800" strike="noStrike" u="none">
-              <a:solidFill>
-                <a:srgbClr val="000000"/>
-              </a:solidFill>
-              <a:effectLst/>
-              <a:uFillTx/>
-              <a:latin typeface="Arial"/>
-            </a:endParaRPr>
-          </a:p>
-        </p:txBody>
-      </p:sp>
-      <p:sp>
-        <p:nvSpPr>
-          <p:cNvPr id="41" name="PlaceHolder 6"/>
+          <p:cNvPr id="37" name="PlaceHolder 3"/>
           <p:cNvSpPr>
             <a:spLocks noGrp="1"/>
           </p:cNvSpPr>
@@ -5530,7 +5466,7 @@
         <p:spPr>
           <a:xfrm>
             <a:off x="838080" y="6356520"/>
-            <a:ext cx="2741400" cy="363240"/>
+            <a:ext cx="2741040" cy="362880"/>
           </a:xfrm>
           <a:prstGeom prst="rect">
             <a:avLst/>
@@ -5601,7 +5537,7 @@
       </p:sp>
       <p:sp>
         <p:nvSpPr>
-          <p:cNvPr id="42" name="PlaceHolder 7"/>
+          <p:cNvPr id="38" name="PlaceHolder 4"/>
           <p:cNvSpPr>
             <a:spLocks noGrp="1"/>
           </p:cNvSpPr>
@@ -5612,7 +5548,7 @@
         <p:spPr>
           <a:xfrm>
             <a:off x="4038480" y="6356520"/>
-            <a:ext cx="4113000" cy="363240"/>
+            <a:ext cx="4112640" cy="362880"/>
           </a:xfrm>
           <a:prstGeom prst="rect">
             <a:avLst/>
@@ -5679,7 +5615,7 @@
       </p:sp>
       <p:sp>
         <p:nvSpPr>
-          <p:cNvPr id="43" name="PlaceHolder 8"/>
+          <p:cNvPr id="39" name="PlaceHolder 5"/>
           <p:cNvSpPr>
             <a:spLocks noGrp="1"/>
           </p:cNvSpPr>
@@ -5690,7 +5626,7 @@
         <p:spPr>
           <a:xfrm>
             <a:off x="8610480" y="6356520"/>
-            <a:ext cx="2741400" cy="363240"/>
+            <a:ext cx="2741040" cy="362880"/>
           </a:xfrm>
           <a:prstGeom prst="rect">
             <a:avLst/>
@@ -5735,7 +5671,7 @@
                 <a:tab algn="l" pos="0"/>
               </a:tabLst>
             </a:pPr>
-            <a:fld id="{2FA5C43C-60CE-41E8-8264-A9C2610DBFCA}" type="slidenum">
+            <a:fld id="{1D329964-9BF5-4F98-BA2C-54A5027F20BC}" type="slidenum">
               <a:rPr b="0" lang="en-GB" sz="1200" strike="noStrike" u="none">
                 <a:solidFill>
                   <a:schemeClr val="dk1">
@@ -5765,8 +5701,8 @@
 </file>
 
 <file path=ppt/slideLayouts/slideLayout9.xml><?xml version="1.0" encoding="utf-8"?>
-<p:sldLayout xmlns:a="http://schemas.openxmlformats.org/drawingml/2006/main" xmlns:p="http://schemas.openxmlformats.org/presentationml/2006/main" xmlns:r="http://schemas.openxmlformats.org/officeDocument/2006/relationships" xmlns:p14="http://schemas.microsoft.com/office/powerpoint/2010/main" xmlns:p15="http://schemas.microsoft.com/office/powerpoint/2012/main" xmlns:mc="http://schemas.openxmlformats.org/markup-compatibility/2006" type="titleOnly" preserve="1">
-  <p:cSld name="Solo el título">
+<p:sldLayout xmlns:a="http://schemas.openxmlformats.org/drawingml/2006/main" xmlns:p="http://schemas.openxmlformats.org/presentationml/2006/main" xmlns:r="http://schemas.openxmlformats.org/officeDocument/2006/relationships" xmlns:p14="http://schemas.microsoft.com/office/powerpoint/2010/main" xmlns:p15="http://schemas.microsoft.com/office/powerpoint/2012/main" xmlns:mc="http://schemas.openxmlformats.org/markup-compatibility/2006" type="blank" preserve="1">
+  <p:cSld name="Encabezado de sección">
     <p:bg>
       <p:bgPr>
         <a:solidFill>
@@ -5790,7 +5726,7 @@
       </p:grpSpPr>
       <p:sp>
         <p:nvSpPr>
-          <p:cNvPr id="44" name="PlaceHolder 1"/>
+          <p:cNvPr id="40" name="PlaceHolder 1"/>
           <p:cNvSpPr>
             <a:spLocks noGrp="1"/>
           </p:cNvSpPr>
@@ -5800,8 +5736,8 @@
         </p:nvSpPr>
         <p:spPr>
           <a:xfrm>
-            <a:off x="838080" y="365040"/>
-            <a:ext cx="10513800" cy="1323720"/>
+            <a:off x="831960" y="1709640"/>
+            <a:ext cx="10513440" cy="2850480"/>
           </a:xfrm>
           <a:prstGeom prst="rect">
             <a:avLst/>
@@ -5812,7 +5748,7 @@
           </a:ln>
         </p:spPr>
         <p:txBody>
-          <a:bodyPr lIns="91440" rIns="91440" tIns="45720" bIns="45720" anchor="ctr">
+          <a:bodyPr lIns="91440" rIns="91440" tIns="45720" bIns="45720" anchor="b">
             <a:noAutofit/>
           </a:bodyPr>
           <a:p>
@@ -5826,7 +5762,7 @@
               </a:tabLst>
             </a:pPr>
             <a:r>
-              <a:rPr b="0" lang="es-ES" sz="4400" strike="noStrike" u="none">
+              <a:rPr b="0" lang="es-ES" sz="6000" strike="noStrike" u="none">
                 <a:solidFill>
                   <a:schemeClr val="dk1"/>
                 </a:solidFill>
@@ -5836,7 +5772,7 @@
               </a:rPr>
               <a:t>Haga clic para modificar el estilo de título del patrón</a:t>
             </a:r>
-            <a:endParaRPr b="0" lang="es-ES" sz="4400" strike="noStrike" u="none">
+            <a:endParaRPr b="0" lang="es-ES" sz="6000" strike="noStrike" u="none">
               <a:solidFill>
                 <a:srgbClr val="000000"/>
               </a:solidFill>
@@ -5849,7 +5785,71 @@
       </p:sp>
       <p:sp>
         <p:nvSpPr>
-          <p:cNvPr id="45" name="PlaceHolder 2"/>
+          <p:cNvPr id="41" name="PlaceHolder 2"/>
+          <p:cNvSpPr>
+            <a:spLocks noGrp="1"/>
+          </p:cNvSpPr>
+          <p:nvPr>
+            <p:ph type="body"/>
+          </p:nvPr>
+        </p:nvSpPr>
+        <p:spPr>
+          <a:xfrm>
+            <a:off x="831960" y="4589640"/>
+            <a:ext cx="10513440" cy="1497960"/>
+          </a:xfrm>
+          <a:prstGeom prst="rect">
+            <a:avLst/>
+          </a:prstGeom>
+          <a:noFill/>
+          <a:ln w="0">
+            <a:noFill/>
+          </a:ln>
+        </p:spPr>
+        <p:txBody>
+          <a:bodyPr lIns="91440" rIns="91440" tIns="45720" bIns="45720" anchor="t">
+            <a:noAutofit/>
+          </a:bodyPr>
+          <a:p>
+            <a:pPr indent="0" defTabSz="914400">
+              <a:lnSpc>
+                <a:spcPct val="90000"/>
+              </a:lnSpc>
+              <a:spcBef>
+                <a:spcPts val="1001"/>
+              </a:spcBef>
+              <a:buNone/>
+              <a:tabLst>
+                <a:tab algn="l" pos="0"/>
+              </a:tabLst>
+            </a:pPr>
+            <a:r>
+              <a:rPr b="0" lang="es-ES" sz="2400" strike="noStrike" u="none">
+                <a:solidFill>
+                  <a:schemeClr val="dk1">
+                    <a:tint val="75000"/>
+                  </a:schemeClr>
+                </a:solidFill>
+                <a:effectLst/>
+                <a:uFillTx/>
+                <a:latin typeface="Calibri"/>
+              </a:rPr>
+              <a:t>Haga clic para modificar los estilos de texto del patrón</a:t>
+            </a:r>
+            <a:endParaRPr b="0" lang="es-ES" sz="2400" strike="noStrike" u="none">
+              <a:solidFill>
+                <a:srgbClr val="000000"/>
+              </a:solidFill>
+              <a:effectLst/>
+              <a:uFillTx/>
+              <a:latin typeface="Arial"/>
+            </a:endParaRPr>
+          </a:p>
+        </p:txBody>
+      </p:sp>
+      <p:sp>
+        <p:nvSpPr>
+          <p:cNvPr id="42" name="PlaceHolder 3"/>
           <p:cNvSpPr>
             <a:spLocks noGrp="1"/>
           </p:cNvSpPr>
@@ -5860,7 +5860,7 @@
         <p:spPr>
           <a:xfrm>
             <a:off x="838080" y="6356520"/>
-            <a:ext cx="2741400" cy="363240"/>
+            <a:ext cx="2741040" cy="362880"/>
           </a:xfrm>
           <a:prstGeom prst="rect">
             <a:avLst/>
@@ -5931,7 +5931,7 @@
       </p:sp>
       <p:sp>
         <p:nvSpPr>
-          <p:cNvPr id="46" name="PlaceHolder 3"/>
+          <p:cNvPr id="43" name="PlaceHolder 4"/>
           <p:cNvSpPr>
             <a:spLocks noGrp="1"/>
           </p:cNvSpPr>
@@ -5942,7 +5942,7 @@
         <p:spPr>
           <a:xfrm>
             <a:off x="4038480" y="6356520"/>
-            <a:ext cx="4113000" cy="363240"/>
+            <a:ext cx="4112640" cy="362880"/>
           </a:xfrm>
           <a:prstGeom prst="rect">
             <a:avLst/>
@@ -6009,7 +6009,7 @@
       </p:sp>
       <p:sp>
         <p:nvSpPr>
-          <p:cNvPr id="47" name="PlaceHolder 4"/>
+          <p:cNvPr id="44" name="PlaceHolder 5"/>
           <p:cNvSpPr>
             <a:spLocks noGrp="1"/>
           </p:cNvSpPr>
@@ -6020,7 +6020,7 @@
         <p:spPr>
           <a:xfrm>
             <a:off x="8610480" y="6356520"/>
-            <a:ext cx="2741400" cy="363240"/>
+            <a:ext cx="2741040" cy="362880"/>
           </a:xfrm>
           <a:prstGeom prst="rect">
             <a:avLst/>
@@ -6065,7 +6065,7 @@
                 <a:tab algn="l" pos="0"/>
               </a:tabLst>
             </a:pPr>
-            <a:fld id="{D49D662C-69EE-43E3-B2A3-2BEB3F1D7A4A}" type="slidenum">
+            <a:fld id="{0046BD8A-BB07-4A81-96D3-5A3530BE776B}" type="slidenum">
               <a:rPr b="0" lang="en-GB" sz="1200" strike="noStrike" u="none">
                 <a:solidFill>
                   <a:schemeClr val="dk1">
@@ -6156,7 +6156,7 @@
         <p:spPr>
           <a:xfrm>
             <a:off x="3651840" y="1213920"/>
-            <a:ext cx="2518560" cy="4987800"/>
+            <a:ext cx="2518200" cy="4987440"/>
           </a:xfrm>
           <a:prstGeom prst="rect">
             <a:avLst/>
@@ -6616,7 +6616,7 @@
         <p:spPr>
           <a:xfrm>
             <a:off x="644760" y="363240"/>
-            <a:ext cx="2237400" cy="638280"/>
+            <a:ext cx="2237040" cy="638280"/>
           </a:xfrm>
           <a:prstGeom prst="rect">
             <a:avLst/>
@@ -6673,7 +6673,7 @@
         <p:spPr>
           <a:xfrm>
             <a:off x="3651840" y="567720"/>
-            <a:ext cx="2422440" cy="638280"/>
+            <a:ext cx="2422080" cy="638280"/>
           </a:xfrm>
           <a:prstGeom prst="rect">
             <a:avLst/>
@@ -6723,802 +6723,14 @@
       </p:sp>
       <p:sp>
         <p:nvSpPr>
-          <p:cNvPr id="62" name="2 Marcador de contenido 3"/>
-          <p:cNvSpPr/>
-          <p:nvPr/>
-        </p:nvSpPr>
-        <p:spPr>
-          <a:xfrm>
-            <a:off x="541440" y="1080360"/>
-            <a:ext cx="2518560" cy="5399640"/>
-          </a:xfrm>
-          <a:prstGeom prst="rect">
-            <a:avLst/>
-          </a:prstGeom>
-          <a:solidFill>
-            <a:srgbClr val="ffffff"/>
-          </a:solidFill>
-          <a:ln>
-            <a:solidFill>
-              <a:srgbClr val="000000"/>
-            </a:solidFill>
-          </a:ln>
-        </p:spPr>
-        <p:style>
-          <a:lnRef idx="2">
-            <a:schemeClr val="dk1"/>
-          </a:lnRef>
-          <a:fillRef idx="1">
-            <a:schemeClr val="lt1"/>
-          </a:fillRef>
-          <a:effectRef idx="0">
-            <a:schemeClr val="dk1"/>
-          </a:effectRef>
-          <a:fontRef idx="minor"/>
-        </p:style>
-        <p:txBody>
-          <a:bodyPr lIns="90000" rIns="90000" tIns="45000" bIns="45000" anchor="t">
-            <a:noAutofit/>
-          </a:bodyPr>
-          <a:p>
-            <a:pPr defTabSz="914400">
-              <a:lnSpc>
-                <a:spcPct val="90000"/>
-              </a:lnSpc>
-              <a:spcBef>
-                <a:spcPts val="1001"/>
-              </a:spcBef>
-              <a:tabLst>
-                <a:tab algn="l" pos="0"/>
-              </a:tabLst>
-            </a:pPr>
-            <a:r>
-              <a:rPr b="0" i="1" lang="en-GB" sz="1200" strike="noStrike" u="none">
-                <a:solidFill>
-                  <a:schemeClr val="dk1"/>
-                </a:solidFill>
-                <a:effectLst/>
-                <a:uFillTx/>
-                <a:latin typeface="Calibri"/>
-              </a:rPr>
-              <a:t>Nombre</a:t>
-            </a:r>
-            <a:r>
-              <a:rPr b="0" lang="en-GB" sz="1200" strike="noStrike" u="none">
-                <a:solidFill>
-                  <a:schemeClr val="dk1"/>
-                </a:solidFill>
-                <a:effectLst/>
-                <a:uFillTx/>
-                <a:latin typeface="Calibri"/>
-              </a:rPr>
-              <a:t>: </a:t>
-            </a:r>
-            <a:r>
-              <a:rPr b="0" lang="en-GB" sz="1050" strike="noStrike" u="none">
-                <a:solidFill>
-                  <a:schemeClr val="dk1"/>
-                </a:solidFill>
-                <a:effectLst/>
-                <a:uFillTx/>
-                <a:latin typeface="Lucida Handwriting"/>
-              </a:rPr>
-              <a:t>Principal</a:t>
-            </a:r>
-            <a:endParaRPr b="0" lang="es-ES" sz="1050" strike="noStrike" u="none">
-              <a:solidFill>
-                <a:srgbClr val="000000"/>
-              </a:solidFill>
-              <a:effectLst/>
-              <a:uFillTx/>
-              <a:latin typeface="Arial"/>
-            </a:endParaRPr>
-          </a:p>
-          <a:p>
-            <a:pPr defTabSz="914400">
-              <a:lnSpc>
-                <a:spcPct val="90000"/>
-              </a:lnSpc>
-              <a:spcBef>
-                <a:spcPts val="1191"/>
-              </a:spcBef>
-              <a:spcAft>
-                <a:spcPts val="992"/>
-              </a:spcAft>
-              <a:tabLst>
-                <a:tab algn="l" pos="0"/>
-              </a:tabLst>
-            </a:pPr>
-            <a:r>
-              <a:rPr b="0" i="1" lang="en-GB" sz="1200" strike="noStrike" u="none">
-                <a:solidFill>
-                  <a:schemeClr val="dk1"/>
-                </a:solidFill>
-                <a:effectLst/>
-                <a:uFillTx/>
-                <a:latin typeface="Calibri"/>
-              </a:rPr>
-              <a:t>Objetivo</a:t>
-            </a:r>
-            <a:r>
-              <a:rPr b="0" lang="en-GB" sz="1200" strike="noStrike" u="none">
-                <a:solidFill>
-                  <a:schemeClr val="dk1"/>
-                </a:solidFill>
-                <a:effectLst/>
-                <a:uFillTx/>
-                <a:latin typeface="Calibri"/>
-              </a:rPr>
-              <a:t>: Acceder rápidamente a las funciones más importantes</a:t>
-            </a:r>
-            <a:endParaRPr b="0" lang="es-ES" sz="1200" strike="noStrike" u="none">
-              <a:solidFill>
-                <a:srgbClr val="000000"/>
-              </a:solidFill>
-              <a:effectLst/>
-              <a:uFillTx/>
-              <a:latin typeface="Arial"/>
-            </a:endParaRPr>
-          </a:p>
-          <a:p>
-            <a:pPr defTabSz="914400">
-              <a:lnSpc>
-                <a:spcPct val="90000"/>
-              </a:lnSpc>
-              <a:spcBef>
-                <a:spcPts val="1001"/>
-              </a:spcBef>
-              <a:tabLst>
-                <a:tab algn="l" pos="0"/>
-              </a:tabLst>
-            </a:pPr>
-            <a:r>
-              <a:rPr b="0" i="1" lang="en-GB" sz="1200" strike="noStrike" u="none">
-                <a:solidFill>
-                  <a:schemeClr val="dk1"/>
-                </a:solidFill>
-                <a:effectLst/>
-                <a:uFillTx/>
-                <a:latin typeface="Calibri"/>
-              </a:rPr>
-              <a:t>Funciones</a:t>
-            </a:r>
-            <a:r>
-              <a:rPr b="0" lang="en-GB" sz="1200" strike="noStrike" u="none">
-                <a:solidFill>
-                  <a:schemeClr val="dk1"/>
-                </a:solidFill>
-                <a:effectLst/>
-                <a:uFillTx/>
-                <a:latin typeface="Calibri"/>
-              </a:rPr>
-              <a:t>: </a:t>
-            </a:r>
-            <a:endParaRPr b="0" lang="es-ES" sz="1200" strike="noStrike" u="none">
-              <a:solidFill>
-                <a:srgbClr val="000000"/>
-              </a:solidFill>
-              <a:effectLst/>
-              <a:uFillTx/>
-              <a:latin typeface="Arial"/>
-            </a:endParaRPr>
-          </a:p>
-          <a:p>
-            <a:pPr lvl="1" marL="450720" indent="-228600" defTabSz="914400">
-              <a:lnSpc>
-                <a:spcPct val="100000"/>
-              </a:lnSpc>
-              <a:spcBef>
-                <a:spcPts val="340"/>
-              </a:spcBef>
-              <a:spcAft>
-                <a:spcPts val="142"/>
-              </a:spcAft>
-              <a:buClr>
-                <a:srgbClr val="000000"/>
-              </a:buClr>
-              <a:buSzPct val="200000"/>
-              <a:buFont typeface="Arial"/>
-              <a:buChar char="•"/>
-              <a:tabLst>
-                <a:tab algn="l" pos="355680"/>
-              </a:tabLst>
-            </a:pPr>
-            <a:r>
-              <a:rPr b="0" lang="en-GB" sz="1000" strike="noStrike" u="none">
-                <a:solidFill>
-                  <a:schemeClr val="dk1"/>
-                </a:solidFill>
-                <a:effectLst/>
-                <a:uFillTx/>
-                <a:latin typeface="Lucida Handwriting"/>
-              </a:rPr>
-              <a:t>Ir a Actividades</a:t>
-            </a:r>
-            <a:endParaRPr b="0" lang="es-ES" sz="1000" strike="noStrike" u="none">
-              <a:solidFill>
-                <a:srgbClr val="000000"/>
-              </a:solidFill>
-              <a:effectLst/>
-              <a:uFillTx/>
-              <a:latin typeface="Arial"/>
-            </a:endParaRPr>
-          </a:p>
-          <a:p>
-            <a:pPr lvl="1" marL="450720" indent="-228600" defTabSz="914400">
-              <a:lnSpc>
-                <a:spcPct val="100000"/>
-              </a:lnSpc>
-              <a:spcBef>
-                <a:spcPts val="340"/>
-              </a:spcBef>
-              <a:spcAft>
-                <a:spcPts val="142"/>
-              </a:spcAft>
-              <a:buClr>
-                <a:srgbClr val="000000"/>
-              </a:buClr>
-              <a:buSzPct val="200000"/>
-              <a:buFont typeface="Arial"/>
-              <a:buChar char="•"/>
-              <a:tabLst>
-                <a:tab algn="l" pos="355680"/>
-              </a:tabLst>
-            </a:pPr>
-            <a:r>
-              <a:rPr b="0" lang="en-GB" sz="1000" strike="noStrike" u="none">
-                <a:solidFill>
-                  <a:schemeClr val="dk1"/>
-                </a:solidFill>
-                <a:effectLst/>
-                <a:uFillTx/>
-                <a:latin typeface="Lucida Handwriting"/>
-              </a:rPr>
-              <a:t>Ir a Historial</a:t>
-            </a:r>
-            <a:endParaRPr b="0" lang="es-ES" sz="1000" strike="noStrike" u="none">
-              <a:solidFill>
-                <a:srgbClr val="000000"/>
-              </a:solidFill>
-              <a:effectLst/>
-              <a:uFillTx/>
-              <a:latin typeface="Arial"/>
-            </a:endParaRPr>
-          </a:p>
-          <a:p>
-            <a:pPr lvl="1" marL="450720" indent="-228600" defTabSz="914400">
-              <a:lnSpc>
-                <a:spcPct val="100000"/>
-              </a:lnSpc>
-              <a:spcBef>
-                <a:spcPts val="340"/>
-              </a:spcBef>
-              <a:spcAft>
-                <a:spcPts val="142"/>
-              </a:spcAft>
-              <a:buClr>
-                <a:srgbClr val="000000"/>
-              </a:buClr>
-              <a:buSzPct val="200000"/>
-              <a:buFont typeface="Arial"/>
-              <a:buChar char="•"/>
-              <a:tabLst>
-                <a:tab algn="l" pos="355680"/>
-              </a:tabLst>
-            </a:pPr>
-            <a:r>
-              <a:rPr b="0" lang="en-GB" sz="1000" strike="noStrike" u="none">
-                <a:solidFill>
-                  <a:schemeClr val="dk1"/>
-                </a:solidFill>
-                <a:effectLst/>
-                <a:uFillTx/>
-                <a:latin typeface="Lucida Handwriting"/>
-              </a:rPr>
-              <a:t>Ir a Mapas</a:t>
-            </a:r>
-            <a:endParaRPr b="0" lang="es-ES" sz="1000" strike="noStrike" u="none">
-              <a:solidFill>
-                <a:srgbClr val="000000"/>
-              </a:solidFill>
-              <a:effectLst/>
-              <a:uFillTx/>
-              <a:latin typeface="Arial"/>
-            </a:endParaRPr>
-          </a:p>
-          <a:p>
-            <a:pPr lvl="1" marL="450720" indent="-228600" defTabSz="914400">
-              <a:lnSpc>
-                <a:spcPct val="100000"/>
-              </a:lnSpc>
-              <a:spcBef>
-                <a:spcPts val="340"/>
-              </a:spcBef>
-              <a:spcAft>
-                <a:spcPts val="142"/>
-              </a:spcAft>
-              <a:buClr>
-                <a:srgbClr val="000000"/>
-              </a:buClr>
-              <a:buSzPct val="200000"/>
-              <a:buFont typeface="Arial"/>
-              <a:buChar char="•"/>
-              <a:tabLst>
-                <a:tab algn="l" pos="355680"/>
-              </a:tabLst>
-            </a:pPr>
-            <a:r>
-              <a:rPr b="0" lang="en-GB" sz="1000" strike="noStrike" u="none">
-                <a:solidFill>
-                  <a:schemeClr val="dk1"/>
-                </a:solidFill>
-                <a:effectLst/>
-                <a:uFillTx/>
-                <a:latin typeface="Lucida Handwriting"/>
-              </a:rPr>
-              <a:t>Ir a Perfil</a:t>
-            </a:r>
-            <a:endParaRPr b="0" lang="es-ES" sz="1000" strike="noStrike" u="none">
-              <a:solidFill>
-                <a:srgbClr val="000000"/>
-              </a:solidFill>
-              <a:effectLst/>
-              <a:uFillTx/>
-              <a:latin typeface="Arial"/>
-            </a:endParaRPr>
-          </a:p>
-          <a:p>
-            <a:pPr lvl="1" marL="450720" indent="-228600" defTabSz="914400">
-              <a:lnSpc>
-                <a:spcPct val="100000"/>
-              </a:lnSpc>
-              <a:spcBef>
-                <a:spcPts val="340"/>
-              </a:spcBef>
-              <a:spcAft>
-                <a:spcPts val="142"/>
-              </a:spcAft>
-              <a:buClr>
-                <a:srgbClr val="000000"/>
-              </a:buClr>
-              <a:buSzPct val="200000"/>
-              <a:buFont typeface="Arial"/>
-              <a:buChar char="•"/>
-              <a:tabLst>
-                <a:tab algn="l" pos="355680"/>
-              </a:tabLst>
-            </a:pPr>
-            <a:r>
-              <a:rPr b="0" lang="en-GB" sz="1000" strike="noStrike" u="none">
-                <a:solidFill>
-                  <a:schemeClr val="dk1"/>
-                </a:solidFill>
-                <a:effectLst/>
-                <a:uFillTx/>
-                <a:latin typeface="Lucida Handwriting"/>
-              </a:rPr>
-              <a:t>Cerrar sesión</a:t>
-            </a:r>
-            <a:endParaRPr b="0" lang="es-ES" sz="1000" strike="noStrike" u="none">
-              <a:solidFill>
-                <a:srgbClr val="000000"/>
-              </a:solidFill>
-              <a:effectLst/>
-              <a:uFillTx/>
-              <a:latin typeface="Arial"/>
-            </a:endParaRPr>
-          </a:p>
-          <a:p>
-            <a:pPr defTabSz="914400">
-              <a:lnSpc>
-                <a:spcPct val="90000"/>
-              </a:lnSpc>
-              <a:tabLst>
-                <a:tab algn="l" pos="355680"/>
-              </a:tabLst>
-            </a:pPr>
-            <a:endParaRPr b="0" lang="es-ES" sz="1000" strike="noStrike" u="none">
-              <a:solidFill>
-                <a:srgbClr val="000000"/>
-              </a:solidFill>
-              <a:effectLst/>
-              <a:uFillTx/>
-              <a:latin typeface="Arial"/>
-            </a:endParaRPr>
-          </a:p>
-          <a:p>
-            <a:pPr defTabSz="914400">
-              <a:lnSpc>
-                <a:spcPct val="90000"/>
-              </a:lnSpc>
-              <a:spcBef>
-                <a:spcPts val="1001"/>
-              </a:spcBef>
-              <a:tabLst>
-                <a:tab algn="l" pos="0"/>
-              </a:tabLst>
-            </a:pPr>
-            <a:r>
-              <a:rPr b="0" i="1" lang="en-GB" sz="1200" strike="noStrike" u="none">
-                <a:solidFill>
-                  <a:schemeClr val="dk1"/>
-                </a:solidFill>
-                <a:effectLst/>
-                <a:uFillTx/>
-                <a:latin typeface="Calibri"/>
-                <a:ea typeface="Microsoft YaHei"/>
-              </a:rPr>
-              <a:t>Enlaces</a:t>
-            </a:r>
-            <a:r>
-              <a:rPr b="0" lang="en-GB" sz="1200" strike="noStrike" u="none">
-                <a:solidFill>
-                  <a:schemeClr val="dk1"/>
-                </a:solidFill>
-                <a:effectLst/>
-                <a:uFillTx/>
-                <a:latin typeface="Calibri"/>
-                <a:ea typeface="Microsoft YaHei"/>
-              </a:rPr>
-              <a:t>: </a:t>
-            </a:r>
-            <a:endParaRPr b="0" lang="es-ES" sz="1200" strike="noStrike" u="none">
-              <a:solidFill>
-                <a:srgbClr val="000000"/>
-              </a:solidFill>
-              <a:effectLst/>
-              <a:uFillTx/>
-              <a:latin typeface="Arial"/>
-            </a:endParaRPr>
-          </a:p>
-          <a:p>
-            <a:pPr marL="268200" defTabSz="914400">
-              <a:lnSpc>
-                <a:spcPct val="90000"/>
-              </a:lnSpc>
-              <a:spcBef>
-                <a:spcPts val="340"/>
-              </a:spcBef>
-              <a:spcAft>
-                <a:spcPts val="142"/>
-              </a:spcAft>
-              <a:tabLst>
-                <a:tab algn="l" pos="0"/>
-              </a:tabLst>
-            </a:pPr>
-            <a:r>
-              <a:rPr b="0" lang="en-GB" sz="1000" strike="noStrike" u="none">
-                <a:solidFill>
-                  <a:schemeClr val="dk1"/>
-                </a:solidFill>
-                <a:effectLst/>
-                <a:uFillTx/>
-                <a:latin typeface="Lucida Handwriting"/>
-                <a:ea typeface="Microsoft YaHei"/>
-              </a:rPr>
-              <a:t>► Actividades</a:t>
-            </a:r>
-            <a:endParaRPr b="0" lang="es-ES" sz="1000" strike="noStrike" u="none">
-              <a:solidFill>
-                <a:srgbClr val="000000"/>
-              </a:solidFill>
-              <a:effectLst/>
-              <a:uFillTx/>
-              <a:latin typeface="Arial"/>
-            </a:endParaRPr>
-          </a:p>
-          <a:p>
-            <a:pPr marL="268200" defTabSz="914400">
-              <a:lnSpc>
-                <a:spcPct val="90000"/>
-              </a:lnSpc>
-              <a:spcBef>
-                <a:spcPts val="340"/>
-              </a:spcBef>
-              <a:spcAft>
-                <a:spcPts val="142"/>
-              </a:spcAft>
-              <a:tabLst>
-                <a:tab algn="l" pos="0"/>
-              </a:tabLst>
-            </a:pPr>
-            <a:r>
-              <a:rPr b="0" lang="en-GB" sz="1000" strike="noStrike" u="none">
-                <a:solidFill>
-                  <a:schemeClr val="dk1"/>
-                </a:solidFill>
-                <a:effectLst/>
-                <a:uFillTx/>
-                <a:latin typeface="Lucida Handwriting"/>
-                <a:ea typeface="Microsoft YaHei"/>
-              </a:rPr>
-              <a:t>► Historial</a:t>
-            </a:r>
-            <a:endParaRPr b="0" lang="es-ES" sz="1000" strike="noStrike" u="none">
-              <a:solidFill>
-                <a:srgbClr val="000000"/>
-              </a:solidFill>
-              <a:effectLst/>
-              <a:uFillTx/>
-              <a:latin typeface="Arial"/>
-            </a:endParaRPr>
-          </a:p>
-          <a:p>
-            <a:pPr marL="268200" defTabSz="914400">
-              <a:lnSpc>
-                <a:spcPct val="90000"/>
-              </a:lnSpc>
-              <a:spcBef>
-                <a:spcPts val="340"/>
-              </a:spcBef>
-              <a:spcAft>
-                <a:spcPts val="142"/>
-              </a:spcAft>
-              <a:tabLst>
-                <a:tab algn="l" pos="0"/>
-              </a:tabLst>
-            </a:pPr>
-            <a:r>
-              <a:rPr b="0" lang="en-GB" sz="1000" strike="noStrike" u="none">
-                <a:solidFill>
-                  <a:schemeClr val="dk1"/>
-                </a:solidFill>
-                <a:effectLst/>
-                <a:uFillTx/>
-                <a:latin typeface="Lucida Handwriting"/>
-                <a:ea typeface="Microsoft YaHei"/>
-              </a:rPr>
-              <a:t>► Perfil</a:t>
-            </a:r>
-            <a:endParaRPr b="0" lang="es-ES" sz="1000" strike="noStrike" u="none">
-              <a:solidFill>
-                <a:srgbClr val="000000"/>
-              </a:solidFill>
-              <a:effectLst/>
-              <a:uFillTx/>
-              <a:latin typeface="Arial"/>
-            </a:endParaRPr>
-          </a:p>
-          <a:p>
-            <a:pPr marL="268200" defTabSz="914400">
-              <a:lnSpc>
-                <a:spcPct val="90000"/>
-              </a:lnSpc>
-              <a:spcBef>
-                <a:spcPts val="340"/>
-              </a:spcBef>
-              <a:spcAft>
-                <a:spcPts val="142"/>
-              </a:spcAft>
-              <a:tabLst>
-                <a:tab algn="l" pos="0"/>
-              </a:tabLst>
-            </a:pPr>
-            <a:r>
-              <a:rPr b="0" lang="en-GB" sz="1000" strike="noStrike" u="none">
-                <a:solidFill>
-                  <a:schemeClr val="dk1"/>
-                </a:solidFill>
-                <a:effectLst/>
-                <a:uFillTx/>
-                <a:latin typeface="Lucida Handwriting"/>
-                <a:ea typeface="Microsoft YaHei"/>
-              </a:rPr>
-              <a:t>► Mapas</a:t>
-            </a:r>
-            <a:endParaRPr b="0" lang="es-ES" sz="1000" strike="noStrike" u="none">
-              <a:solidFill>
-                <a:srgbClr val="000000"/>
-              </a:solidFill>
-              <a:effectLst/>
-              <a:uFillTx/>
-              <a:latin typeface="Arial"/>
-            </a:endParaRPr>
-          </a:p>
-          <a:p>
-            <a:pPr marL="268200" defTabSz="914400">
-              <a:lnSpc>
-                <a:spcPct val="90000"/>
-              </a:lnSpc>
-              <a:spcBef>
-                <a:spcPts val="434"/>
-              </a:spcBef>
-              <a:tabLst>
-                <a:tab algn="l" pos="0"/>
-              </a:tabLst>
-            </a:pPr>
-            <a:endParaRPr b="0" lang="es-ES" sz="1200" strike="noStrike" u="none">
-              <a:solidFill>
-                <a:srgbClr val="000000"/>
-              </a:solidFill>
-              <a:effectLst/>
-              <a:uFillTx/>
-              <a:latin typeface="Arial"/>
-            </a:endParaRPr>
-          </a:p>
-          <a:p>
-            <a:pPr marL="268200" defTabSz="914400">
-              <a:lnSpc>
-                <a:spcPct val="90000"/>
-              </a:lnSpc>
-              <a:spcBef>
-                <a:spcPts val="434"/>
-              </a:spcBef>
-              <a:tabLst>
-                <a:tab algn="l" pos="0"/>
-              </a:tabLst>
-            </a:pPr>
-            <a:r>
-              <a:rPr b="0" i="1" lang="en-GB" sz="1200" strike="noStrike" u="none">
-                <a:solidFill>
-                  <a:schemeClr val="dk1"/>
-                </a:solidFill>
-                <a:effectLst/>
-                <a:uFillTx/>
-                <a:latin typeface="Calibri"/>
-                <a:ea typeface="Microsoft YaHei"/>
-              </a:rPr>
-              <a:t>Objectos</a:t>
-            </a:r>
-            <a:r>
-              <a:rPr b="0" lang="en-GB" sz="1200" strike="noStrike" u="none">
-                <a:solidFill>
-                  <a:schemeClr val="dk1"/>
-                </a:solidFill>
-                <a:effectLst/>
-                <a:uFillTx/>
-                <a:latin typeface="Calibri"/>
-                <a:ea typeface="Microsoft YaHei"/>
-              </a:rPr>
-              <a:t>:</a:t>
-            </a:r>
-            <a:endParaRPr b="0" lang="es-ES" sz="1200" strike="noStrike" u="none">
-              <a:solidFill>
-                <a:srgbClr val="000000"/>
-              </a:solidFill>
-              <a:effectLst/>
-              <a:uFillTx/>
-              <a:latin typeface="Arial"/>
-            </a:endParaRPr>
-          </a:p>
-          <a:p>
-            <a:pPr marL="268200" defTabSz="914400">
-              <a:lnSpc>
-                <a:spcPct val="90000"/>
-              </a:lnSpc>
-              <a:spcBef>
-                <a:spcPts val="340"/>
-              </a:spcBef>
-              <a:spcAft>
-                <a:spcPts val="142"/>
-              </a:spcAft>
-              <a:tabLst>
-                <a:tab algn="l" pos="0"/>
-              </a:tabLst>
-            </a:pPr>
-            <a:r>
-              <a:rPr b="0" i="1" lang="en-GB" sz="1200" strike="noStrike" u="none">
-                <a:solidFill>
-                  <a:schemeClr val="dk1"/>
-                </a:solidFill>
-                <a:effectLst/>
-                <a:uFillTx/>
-                <a:latin typeface="Calibri"/>
-                <a:ea typeface="Microsoft YaHei"/>
-              </a:rPr>
-              <a:t>Restricciones</a:t>
-            </a:r>
-            <a:r>
-              <a:rPr b="0" lang="en-GB" sz="1200" strike="noStrike" u="none">
-                <a:solidFill>
-                  <a:schemeClr val="dk1"/>
-                </a:solidFill>
-                <a:effectLst/>
-                <a:uFillTx/>
-                <a:latin typeface="Calibri"/>
-                <a:ea typeface="Microsoft YaHei"/>
-              </a:rPr>
-              <a:t>: </a:t>
-            </a:r>
-            <a:endParaRPr b="0" lang="es-ES" sz="1200" strike="noStrike" u="none">
-              <a:solidFill>
-                <a:srgbClr val="000000"/>
-              </a:solidFill>
-              <a:effectLst/>
-              <a:uFillTx/>
-              <a:latin typeface="Arial"/>
-            </a:endParaRPr>
-          </a:p>
-          <a:p>
-            <a:pPr marL="268200" defTabSz="914400">
-              <a:lnSpc>
-                <a:spcPct val="90000"/>
-              </a:lnSpc>
-              <a:spcBef>
-                <a:spcPts val="340"/>
-              </a:spcBef>
-              <a:spcAft>
-                <a:spcPts val="142"/>
-              </a:spcAft>
-              <a:tabLst>
-                <a:tab algn="l" pos="0"/>
-              </a:tabLst>
-            </a:pPr>
-            <a:r>
-              <a:rPr b="0" lang="en-GB" sz="1200" strike="noStrike" u="none">
-                <a:solidFill>
-                  <a:schemeClr val="dk1"/>
-                </a:solidFill>
-                <a:effectLst/>
-                <a:uFillTx/>
-                <a:latin typeface="Calibri"/>
-                <a:ea typeface="Microsoft YaHei"/>
-              </a:rPr>
-              <a:t>- Solo accesible con sesión iniciada</a:t>
-            </a:r>
-            <a:endParaRPr b="0" lang="es-ES" sz="1200" strike="noStrike" u="none">
-              <a:solidFill>
-                <a:srgbClr val="000000"/>
-              </a:solidFill>
-              <a:effectLst/>
-              <a:uFillTx/>
-              <a:latin typeface="Arial"/>
-            </a:endParaRPr>
-          </a:p>
-          <a:p>
-            <a:pPr marL="268200" defTabSz="914400">
-              <a:lnSpc>
-                <a:spcPct val="90000"/>
-              </a:lnSpc>
-              <a:spcBef>
-                <a:spcPts val="1001"/>
-              </a:spcBef>
-              <a:tabLst>
-                <a:tab algn="l" pos="0"/>
-              </a:tabLst>
-            </a:pPr>
-            <a:endParaRPr b="0" lang="es-ES" sz="1200" strike="noStrike" u="none">
-              <a:solidFill>
-                <a:srgbClr val="000000"/>
-              </a:solidFill>
-              <a:effectLst/>
-              <a:uFillTx/>
-              <a:latin typeface="Arial"/>
-            </a:endParaRPr>
-          </a:p>
-          <a:p>
-            <a:pPr marL="268200" defTabSz="914400">
-              <a:lnSpc>
-                <a:spcPct val="90000"/>
-              </a:lnSpc>
-              <a:spcBef>
-                <a:spcPts val="1001"/>
-              </a:spcBef>
-              <a:tabLst>
-                <a:tab algn="l" pos="0"/>
-              </a:tabLst>
-            </a:pPr>
-            <a:endParaRPr b="0" lang="es-ES" sz="1800" strike="noStrike" u="none">
-              <a:solidFill>
-                <a:srgbClr val="000000"/>
-              </a:solidFill>
-              <a:effectLst/>
-              <a:uFillTx/>
-              <a:latin typeface="Arial"/>
-            </a:endParaRPr>
-          </a:p>
-        </p:txBody>
-      </p:sp>
-      <p:sp>
-        <p:nvSpPr>
-          <p:cNvPr id="63" name="5 Redondear rectángulo de esquina diagonal"/>
+          <p:cNvPr id="62" name="5 Redondear rectángulo de esquina diagonal"/>
           <p:cNvSpPr/>
           <p:nvPr/>
         </p:nvSpPr>
         <p:spPr>
           <a:xfrm>
             <a:off x="6660000" y="2160000"/>
-            <a:ext cx="1562400" cy="647640"/>
+            <a:ext cx="1562040" cy="647280"/>
           </a:xfrm>
           <a:prstGeom prst="round2DiagRect">
             <a:avLst>
@@ -7581,14 +6793,14 @@
       </p:sp>
       <p:sp>
         <p:nvSpPr>
-          <p:cNvPr id="64" name="5 Redondear rectángulo de esquina diagonal 1"/>
+          <p:cNvPr id="63" name="5 Redondear rectángulo de esquina diagonal 1"/>
           <p:cNvSpPr/>
           <p:nvPr/>
         </p:nvSpPr>
         <p:spPr>
           <a:xfrm>
             <a:off x="8640000" y="2160000"/>
-            <a:ext cx="1562400" cy="647640"/>
+            <a:ext cx="1562040" cy="647280"/>
           </a:xfrm>
           <a:prstGeom prst="round2DiagRect">
             <a:avLst>
@@ -7651,14 +6863,14 @@
       </p:sp>
       <p:sp>
         <p:nvSpPr>
-          <p:cNvPr id="65" name="5 Redondear rectángulo de esquina diagonal 2"/>
+          <p:cNvPr id="64" name="5 Redondear rectángulo de esquina diagonal 2"/>
           <p:cNvSpPr/>
           <p:nvPr/>
         </p:nvSpPr>
         <p:spPr>
           <a:xfrm>
             <a:off x="8640000" y="3232800"/>
-            <a:ext cx="1562400" cy="647640"/>
+            <a:ext cx="1562040" cy="647280"/>
           </a:xfrm>
           <a:prstGeom prst="round2DiagRect">
             <a:avLst>
@@ -7721,22 +6933,22 @@
       </p:sp>
       <p:cxnSp>
         <p:nvCxnSpPr>
-          <p:cNvPr id="66" name="Conector recto de flecha 10"/>
+          <p:cNvPr id="65" name="Conector recto de flecha 10"/>
           <p:cNvCxnSpPr>
-            <a:stCxn id="63" idx="3"/>
-            <a:endCxn id="64" idx="1"/>
+            <a:stCxn id="62" idx="3"/>
+            <a:endCxn id="63" idx="1"/>
           </p:cNvCxnSpPr>
           <p:nvPr/>
         </p:nvCxnSpPr>
         <p:spPr>
           <a:xfrm>
-            <a:off x="8222400" y="2483640"/>
-            <a:ext cx="417960" cy="360"/>
+            <a:off x="8222040" y="2483640"/>
+            <a:ext cx="418320" cy="360"/>
           </a:xfrm>
           <a:prstGeom prst="straightConnector1">
             <a:avLst/>
           </a:prstGeom>
-          <a:ln>
+          <a:ln w="0">
             <a:solidFill>
               <a:srgbClr val="4472c4"/>
             </a:solidFill>
@@ -7746,22 +6958,22 @@
       </p:cxnSp>
       <p:cxnSp>
         <p:nvCxnSpPr>
-          <p:cNvPr id="67" name="Conector recto de flecha 13"/>
+          <p:cNvPr id="66" name="Conector recto de flecha 13"/>
           <p:cNvCxnSpPr>
-            <a:stCxn id="63" idx="3"/>
-            <a:endCxn id="65" idx="1"/>
+            <a:stCxn id="62" idx="3"/>
+            <a:endCxn id="64" idx="1"/>
           </p:cNvCxnSpPr>
           <p:nvPr/>
         </p:nvCxnSpPr>
         <p:spPr>
           <a:xfrm>
-            <a:off x="8222400" y="2483640"/>
-            <a:ext cx="417960" cy="1073160"/>
+            <a:off x="8222040" y="2483640"/>
+            <a:ext cx="418320" cy="1073160"/>
           </a:xfrm>
           <a:prstGeom prst="straightConnector1">
             <a:avLst/>
           </a:prstGeom>
-          <a:ln>
+          <a:ln w="0">
             <a:solidFill>
               <a:srgbClr val="4472c4"/>
             </a:solidFill>
@@ -7771,14 +6983,14 @@
       </p:cxnSp>
       <p:sp>
         <p:nvSpPr>
-          <p:cNvPr id="68" name="CuadroTexto 37"/>
+          <p:cNvPr id="67" name="CuadroTexto 37"/>
           <p:cNvSpPr/>
           <p:nvPr/>
         </p:nvSpPr>
         <p:spPr>
           <a:xfrm>
             <a:off x="6661440" y="1440000"/>
-            <a:ext cx="3238560" cy="364680"/>
+            <a:ext cx="3238200" cy="363960"/>
           </a:xfrm>
           <a:prstGeom prst="rect">
             <a:avLst/>
@@ -7828,14 +7040,14 @@
       </p:sp>
       <p:sp>
         <p:nvSpPr>
-          <p:cNvPr id="69" name="5 Redondear rectángulo de esquina diagonal 3"/>
+          <p:cNvPr id="68" name="5 Redondear rectángulo de esquina diagonal 3"/>
           <p:cNvSpPr/>
           <p:nvPr/>
         </p:nvSpPr>
         <p:spPr>
           <a:xfrm>
             <a:off x="10497600" y="2160000"/>
-            <a:ext cx="1562400" cy="647640"/>
+            <a:ext cx="1562040" cy="647280"/>
           </a:xfrm>
           <a:prstGeom prst="round2DiagRect">
             <a:avLst>
@@ -7898,22 +7110,22 @@
       </p:sp>
       <p:cxnSp>
         <p:nvCxnSpPr>
-          <p:cNvPr id="70" name="Conector recto de flecha 1"/>
+          <p:cNvPr id="69" name="Conector recto de flecha 1"/>
           <p:cNvCxnSpPr>
-            <a:stCxn id="64" idx="3"/>
-            <a:endCxn id="69" idx="1"/>
+            <a:stCxn id="63" idx="3"/>
+            <a:endCxn id="68" idx="1"/>
           </p:cNvCxnSpPr>
           <p:nvPr/>
         </p:nvCxnSpPr>
         <p:spPr>
           <a:xfrm>
-            <a:off x="10202400" y="2483640"/>
-            <a:ext cx="295560" cy="360"/>
+            <a:off x="10202040" y="2483640"/>
+            <a:ext cx="295920" cy="360"/>
           </a:xfrm>
           <a:prstGeom prst="straightConnector1">
             <a:avLst/>
           </a:prstGeom>
-          <a:ln>
+          <a:ln w="0">
             <a:solidFill>
               <a:srgbClr val="4472c4"/>
             </a:solidFill>
@@ -7921,6 +7133,835 @@
           </a:ln>
         </p:spPr>
       </p:cxnSp>
+      <p:sp>
+        <p:nvSpPr>
+          <p:cNvPr id="70" name="2 Marcador de contenido 1"/>
+          <p:cNvSpPr/>
+          <p:nvPr/>
+        </p:nvSpPr>
+        <p:spPr>
+          <a:xfrm>
+            <a:off x="540000" y="1081080"/>
+            <a:ext cx="2517840" cy="5398920"/>
+          </a:xfrm>
+          <a:prstGeom prst="rect">
+            <a:avLst/>
+          </a:prstGeom>
+          <a:solidFill>
+            <a:srgbClr val="ffffff"/>
+          </a:solidFill>
+          <a:ln>
+            <a:solidFill>
+              <a:srgbClr val="000000"/>
+            </a:solidFill>
+          </a:ln>
+        </p:spPr>
+        <p:style>
+          <a:lnRef idx="2">
+            <a:schemeClr val="dk1"/>
+          </a:lnRef>
+          <a:fillRef idx="1">
+            <a:schemeClr val="lt1"/>
+          </a:fillRef>
+          <a:effectRef idx="0">
+            <a:schemeClr val="dk1"/>
+          </a:effectRef>
+          <a:fontRef idx="minor"/>
+        </p:style>
+        <p:txBody>
+          <a:bodyPr lIns="90000" rIns="90000" tIns="45000" bIns="45000" anchor="t">
+            <a:noAutofit/>
+          </a:bodyPr>
+          <a:p>
+            <a:pPr defTabSz="914400">
+              <a:lnSpc>
+                <a:spcPct val="90000"/>
+              </a:lnSpc>
+              <a:spcBef>
+                <a:spcPts val="1001"/>
+              </a:spcBef>
+              <a:tabLst>
+                <a:tab algn="l" pos="0"/>
+              </a:tabLst>
+            </a:pPr>
+            <a:r>
+              <a:rPr b="0" i="1" lang="en-GB" sz="1200" strike="noStrike" u="none">
+                <a:solidFill>
+                  <a:schemeClr val="dk1"/>
+                </a:solidFill>
+                <a:effectLst/>
+                <a:uFillTx/>
+                <a:latin typeface="Calibri"/>
+              </a:rPr>
+              <a:t>Nombre</a:t>
+            </a:r>
+            <a:r>
+              <a:rPr b="0" lang="en-GB" sz="1200" strike="noStrike" u="none">
+                <a:solidFill>
+                  <a:schemeClr val="dk1"/>
+                </a:solidFill>
+                <a:effectLst/>
+                <a:uFillTx/>
+                <a:latin typeface="Calibri"/>
+              </a:rPr>
+              <a:t>: </a:t>
+            </a:r>
+            <a:r>
+              <a:rPr b="0" lang="en-GB" sz="1050" strike="noStrike" u="none">
+                <a:solidFill>
+                  <a:schemeClr val="dk1"/>
+                </a:solidFill>
+                <a:effectLst/>
+                <a:uFillTx/>
+                <a:latin typeface="Lucida Handwriting"/>
+              </a:rPr>
+              <a:t>Principal</a:t>
+            </a:r>
+            <a:endParaRPr b="0" lang="es-ES" sz="1050" strike="noStrike" u="none">
+              <a:solidFill>
+                <a:srgbClr val="000000"/>
+              </a:solidFill>
+              <a:effectLst/>
+              <a:uFillTx/>
+              <a:latin typeface="Arial"/>
+            </a:endParaRPr>
+          </a:p>
+          <a:p>
+            <a:pPr defTabSz="914400">
+              <a:lnSpc>
+                <a:spcPct val="90000"/>
+              </a:lnSpc>
+              <a:spcBef>
+                <a:spcPts val="1191"/>
+              </a:spcBef>
+              <a:spcAft>
+                <a:spcPts val="992"/>
+              </a:spcAft>
+              <a:tabLst>
+                <a:tab algn="l" pos="0"/>
+              </a:tabLst>
+            </a:pPr>
+            <a:r>
+              <a:rPr b="0" i="1" lang="en-GB" sz="1200" strike="noStrike" u="none">
+                <a:solidFill>
+                  <a:schemeClr val="dk1"/>
+                </a:solidFill>
+                <a:effectLst/>
+                <a:uFillTx/>
+                <a:latin typeface="Calibri"/>
+              </a:rPr>
+              <a:t>Objetivo</a:t>
+            </a:r>
+            <a:r>
+              <a:rPr b="0" lang="en-GB" sz="1200" strike="noStrike" u="none">
+                <a:solidFill>
+                  <a:schemeClr val="dk1"/>
+                </a:solidFill>
+                <a:effectLst/>
+                <a:uFillTx/>
+                <a:latin typeface="Calibri"/>
+              </a:rPr>
+              <a:t>: Acceder rápidamente a las funciones más importantes</a:t>
+            </a:r>
+            <a:endParaRPr b="0" lang="es-ES" sz="1200" strike="noStrike" u="none">
+              <a:solidFill>
+                <a:srgbClr val="000000"/>
+              </a:solidFill>
+              <a:effectLst/>
+              <a:uFillTx/>
+              <a:latin typeface="Arial"/>
+            </a:endParaRPr>
+          </a:p>
+          <a:p>
+            <a:pPr defTabSz="914400">
+              <a:lnSpc>
+                <a:spcPct val="90000"/>
+              </a:lnSpc>
+              <a:spcBef>
+                <a:spcPts val="1001"/>
+              </a:spcBef>
+              <a:tabLst>
+                <a:tab algn="l" pos="0"/>
+              </a:tabLst>
+            </a:pPr>
+            <a:r>
+              <a:rPr b="0" i="1" lang="en-GB" sz="1200" strike="noStrike" u="none">
+                <a:solidFill>
+                  <a:schemeClr val="dk1"/>
+                </a:solidFill>
+                <a:effectLst/>
+                <a:uFillTx/>
+                <a:latin typeface="Calibri"/>
+              </a:rPr>
+              <a:t>Funciones</a:t>
+            </a:r>
+            <a:r>
+              <a:rPr b="0" lang="en-GB" sz="1200" strike="noStrike" u="none">
+                <a:solidFill>
+                  <a:schemeClr val="dk1"/>
+                </a:solidFill>
+                <a:effectLst/>
+                <a:uFillTx/>
+                <a:latin typeface="Calibri"/>
+              </a:rPr>
+              <a:t>: </a:t>
+            </a:r>
+            <a:endParaRPr b="0" lang="es-ES" sz="1200" strike="noStrike" u="none">
+              <a:solidFill>
+                <a:srgbClr val="000000"/>
+              </a:solidFill>
+              <a:effectLst/>
+              <a:uFillTx/>
+              <a:latin typeface="Arial"/>
+            </a:endParaRPr>
+          </a:p>
+          <a:p>
+            <a:pPr lvl="1" marL="450720" indent="-228600" defTabSz="914400">
+              <a:lnSpc>
+                <a:spcPct val="100000"/>
+              </a:lnSpc>
+              <a:spcBef>
+                <a:spcPts val="340"/>
+              </a:spcBef>
+              <a:spcAft>
+                <a:spcPts val="142"/>
+              </a:spcAft>
+              <a:buClr>
+                <a:srgbClr val="000000"/>
+              </a:buClr>
+              <a:buSzPct val="200000"/>
+              <a:buFont typeface="Arial"/>
+              <a:buChar char="•"/>
+              <a:tabLst>
+                <a:tab algn="l" pos="355680"/>
+              </a:tabLst>
+            </a:pPr>
+            <a:r>
+              <a:rPr b="0" lang="en-GB" sz="1000" strike="noStrike" u="none">
+                <a:solidFill>
+                  <a:schemeClr val="dk1"/>
+                </a:solidFill>
+                <a:effectLst/>
+                <a:uFillTx/>
+                <a:latin typeface="Lucida Handwriting"/>
+              </a:rPr>
+              <a:t>Ir a Actividades</a:t>
+            </a:r>
+            <a:endParaRPr b="0" lang="es-ES" sz="1000" strike="noStrike" u="none">
+              <a:solidFill>
+                <a:srgbClr val="000000"/>
+              </a:solidFill>
+              <a:effectLst/>
+              <a:uFillTx/>
+              <a:latin typeface="Arial"/>
+            </a:endParaRPr>
+          </a:p>
+          <a:p>
+            <a:pPr lvl="1" marL="450720" indent="-228600" defTabSz="914400">
+              <a:lnSpc>
+                <a:spcPct val="100000"/>
+              </a:lnSpc>
+              <a:spcBef>
+                <a:spcPts val="340"/>
+              </a:spcBef>
+              <a:spcAft>
+                <a:spcPts val="142"/>
+              </a:spcAft>
+              <a:buClr>
+                <a:srgbClr val="000000"/>
+              </a:buClr>
+              <a:buSzPct val="200000"/>
+              <a:buFont typeface="Arial"/>
+              <a:buChar char="•"/>
+              <a:tabLst>
+                <a:tab algn="l" pos="355680"/>
+              </a:tabLst>
+            </a:pPr>
+            <a:r>
+              <a:rPr b="0" lang="en-GB" sz="1000" strike="noStrike" u="none">
+                <a:solidFill>
+                  <a:schemeClr val="dk1"/>
+                </a:solidFill>
+                <a:effectLst/>
+                <a:uFillTx/>
+                <a:latin typeface="Lucida Handwriting"/>
+              </a:rPr>
+              <a:t>Importar GPX</a:t>
+            </a:r>
+            <a:endParaRPr b="0" lang="es-ES" sz="1000" strike="noStrike" u="none">
+              <a:solidFill>
+                <a:srgbClr val="000000"/>
+              </a:solidFill>
+              <a:effectLst/>
+              <a:uFillTx/>
+              <a:latin typeface="Arial"/>
+            </a:endParaRPr>
+          </a:p>
+          <a:p>
+            <a:pPr lvl="1" marL="450720" indent="-228600" defTabSz="914400">
+              <a:lnSpc>
+                <a:spcPct val="100000"/>
+              </a:lnSpc>
+              <a:spcBef>
+                <a:spcPts val="340"/>
+              </a:spcBef>
+              <a:spcAft>
+                <a:spcPts val="142"/>
+              </a:spcAft>
+              <a:buClr>
+                <a:srgbClr val="000000"/>
+              </a:buClr>
+              <a:buSzPct val="200000"/>
+              <a:buFont typeface="Arial"/>
+              <a:buChar char="•"/>
+              <a:tabLst>
+                <a:tab algn="l" pos="355680"/>
+              </a:tabLst>
+            </a:pPr>
+            <a:r>
+              <a:rPr b="0" lang="en-GB" sz="1000" strike="noStrike" u="none">
+                <a:solidFill>
+                  <a:schemeClr val="dk1"/>
+                </a:solidFill>
+                <a:effectLst/>
+                <a:uFillTx/>
+                <a:latin typeface="Lucida Handwriting"/>
+              </a:rPr>
+              <a:t>Ir a Historial</a:t>
+            </a:r>
+            <a:endParaRPr b="0" lang="es-ES" sz="1000" strike="noStrike" u="none">
+              <a:solidFill>
+                <a:srgbClr val="000000"/>
+              </a:solidFill>
+              <a:effectLst/>
+              <a:uFillTx/>
+              <a:latin typeface="Arial"/>
+            </a:endParaRPr>
+          </a:p>
+          <a:p>
+            <a:pPr lvl="1" marL="450720" indent="-228600" defTabSz="914400">
+              <a:lnSpc>
+                <a:spcPct val="100000"/>
+              </a:lnSpc>
+              <a:spcBef>
+                <a:spcPts val="340"/>
+              </a:spcBef>
+              <a:spcAft>
+                <a:spcPts val="142"/>
+              </a:spcAft>
+              <a:buClr>
+                <a:srgbClr val="000000"/>
+              </a:buClr>
+              <a:buSzPct val="200000"/>
+              <a:buFont typeface="Arial"/>
+              <a:buChar char="•"/>
+              <a:tabLst>
+                <a:tab algn="l" pos="355680"/>
+              </a:tabLst>
+            </a:pPr>
+            <a:r>
+              <a:rPr b="0" lang="en-GB" sz="1000" strike="noStrike" u="none">
+                <a:solidFill>
+                  <a:schemeClr val="dk1"/>
+                </a:solidFill>
+                <a:effectLst/>
+                <a:uFillTx/>
+                <a:latin typeface="Lucida Handwriting"/>
+              </a:rPr>
+              <a:t>Ir a Mapas</a:t>
+            </a:r>
+            <a:endParaRPr b="0" lang="es-ES" sz="1000" strike="noStrike" u="none">
+              <a:solidFill>
+                <a:srgbClr val="000000"/>
+              </a:solidFill>
+              <a:effectLst/>
+              <a:uFillTx/>
+              <a:latin typeface="Arial"/>
+            </a:endParaRPr>
+          </a:p>
+          <a:p>
+            <a:pPr lvl="1" marL="450720" indent="-228600" defTabSz="914400">
+              <a:lnSpc>
+                <a:spcPct val="100000"/>
+              </a:lnSpc>
+              <a:spcBef>
+                <a:spcPts val="340"/>
+              </a:spcBef>
+              <a:spcAft>
+                <a:spcPts val="142"/>
+              </a:spcAft>
+              <a:buClr>
+                <a:srgbClr val="000000"/>
+              </a:buClr>
+              <a:buSzPct val="200000"/>
+              <a:buFont typeface="Arial"/>
+              <a:buChar char="•"/>
+              <a:tabLst>
+                <a:tab algn="l" pos="355680"/>
+              </a:tabLst>
+            </a:pPr>
+            <a:r>
+              <a:rPr b="0" lang="en-GB" sz="1000" strike="noStrike" u="none">
+                <a:solidFill>
+                  <a:schemeClr val="dk1"/>
+                </a:solidFill>
+                <a:effectLst/>
+                <a:uFillTx/>
+                <a:latin typeface="Lucida Handwriting"/>
+              </a:rPr>
+              <a:t>Ir a Perfil</a:t>
+            </a:r>
+            <a:endParaRPr b="0" lang="es-ES" sz="1000" strike="noStrike" u="none">
+              <a:solidFill>
+                <a:srgbClr val="000000"/>
+              </a:solidFill>
+              <a:effectLst/>
+              <a:uFillTx/>
+              <a:latin typeface="Arial"/>
+            </a:endParaRPr>
+          </a:p>
+          <a:p>
+            <a:pPr lvl="1" marL="450720" indent="-228600" defTabSz="914400">
+              <a:lnSpc>
+                <a:spcPct val="100000"/>
+              </a:lnSpc>
+              <a:spcBef>
+                <a:spcPts val="340"/>
+              </a:spcBef>
+              <a:spcAft>
+                <a:spcPts val="142"/>
+              </a:spcAft>
+              <a:buClr>
+                <a:srgbClr val="000000"/>
+              </a:buClr>
+              <a:buSzPct val="200000"/>
+              <a:buFont typeface="Arial"/>
+              <a:buChar char="•"/>
+              <a:tabLst>
+                <a:tab algn="l" pos="355680"/>
+              </a:tabLst>
+            </a:pPr>
+            <a:r>
+              <a:rPr b="0" lang="en-GB" sz="1000" strike="noStrike" u="none">
+                <a:solidFill>
+                  <a:schemeClr val="dk1"/>
+                </a:solidFill>
+                <a:effectLst/>
+                <a:uFillTx/>
+                <a:latin typeface="Lucida Handwriting"/>
+              </a:rPr>
+              <a:t>Cerrar sesión</a:t>
+            </a:r>
+            <a:endParaRPr b="0" lang="es-ES" sz="1000" strike="noStrike" u="none">
+              <a:solidFill>
+                <a:srgbClr val="000000"/>
+              </a:solidFill>
+              <a:effectLst/>
+              <a:uFillTx/>
+              <a:latin typeface="Arial"/>
+            </a:endParaRPr>
+          </a:p>
+          <a:p>
+            <a:pPr defTabSz="914400">
+              <a:lnSpc>
+                <a:spcPct val="90000"/>
+              </a:lnSpc>
+              <a:tabLst>
+                <a:tab algn="l" pos="355680"/>
+              </a:tabLst>
+            </a:pPr>
+            <a:endParaRPr b="0" lang="es-ES" sz="1000" strike="noStrike" u="none">
+              <a:solidFill>
+                <a:srgbClr val="000000"/>
+              </a:solidFill>
+              <a:effectLst/>
+              <a:uFillTx/>
+              <a:latin typeface="Arial"/>
+            </a:endParaRPr>
+          </a:p>
+          <a:p>
+            <a:pPr defTabSz="914400">
+              <a:lnSpc>
+                <a:spcPct val="90000"/>
+              </a:lnSpc>
+              <a:spcBef>
+                <a:spcPts val="1001"/>
+              </a:spcBef>
+              <a:tabLst>
+                <a:tab algn="l" pos="0"/>
+              </a:tabLst>
+            </a:pPr>
+            <a:r>
+              <a:rPr b="0" i="1" lang="en-GB" sz="1200" strike="noStrike" u="none">
+                <a:solidFill>
+                  <a:schemeClr val="dk1"/>
+                </a:solidFill>
+                <a:effectLst/>
+                <a:uFillTx/>
+                <a:latin typeface="Calibri"/>
+                <a:ea typeface="Microsoft YaHei"/>
+              </a:rPr>
+              <a:t>Enlaces</a:t>
+            </a:r>
+            <a:r>
+              <a:rPr b="0" lang="en-GB" sz="1200" strike="noStrike" u="none">
+                <a:solidFill>
+                  <a:schemeClr val="dk1"/>
+                </a:solidFill>
+                <a:effectLst/>
+                <a:uFillTx/>
+                <a:latin typeface="Calibri"/>
+                <a:ea typeface="Microsoft YaHei"/>
+              </a:rPr>
+              <a:t>: </a:t>
+            </a:r>
+            <a:endParaRPr b="0" lang="es-ES" sz="1200" strike="noStrike" u="none">
+              <a:solidFill>
+                <a:srgbClr val="000000"/>
+              </a:solidFill>
+              <a:effectLst/>
+              <a:uFillTx/>
+              <a:latin typeface="Arial"/>
+            </a:endParaRPr>
+          </a:p>
+          <a:p>
+            <a:pPr marL="268200" defTabSz="914400">
+              <a:lnSpc>
+                <a:spcPct val="90000"/>
+              </a:lnSpc>
+              <a:spcBef>
+                <a:spcPts val="340"/>
+              </a:spcBef>
+              <a:spcAft>
+                <a:spcPts val="142"/>
+              </a:spcAft>
+              <a:tabLst>
+                <a:tab algn="l" pos="0"/>
+              </a:tabLst>
+            </a:pPr>
+            <a:r>
+              <a:rPr b="0" lang="en-GB" sz="1000" strike="noStrike" u="none">
+                <a:solidFill>
+                  <a:schemeClr val="dk1"/>
+                </a:solidFill>
+                <a:effectLst/>
+                <a:uFillTx/>
+                <a:latin typeface="Lucida Handwriting"/>
+                <a:ea typeface="Microsoft YaHei"/>
+              </a:rPr>
+              <a:t>► Actividades</a:t>
+            </a:r>
+            <a:endParaRPr b="0" lang="es-ES" sz="1000" strike="noStrike" u="none">
+              <a:solidFill>
+                <a:srgbClr val="000000"/>
+              </a:solidFill>
+              <a:effectLst/>
+              <a:uFillTx/>
+              <a:latin typeface="Arial"/>
+            </a:endParaRPr>
+          </a:p>
+          <a:p>
+            <a:pPr marL="268200" defTabSz="914400">
+              <a:lnSpc>
+                <a:spcPct val="90000"/>
+              </a:lnSpc>
+              <a:spcBef>
+                <a:spcPts val="340"/>
+              </a:spcBef>
+              <a:spcAft>
+                <a:spcPts val="142"/>
+              </a:spcAft>
+              <a:tabLst>
+                <a:tab algn="l" pos="0"/>
+              </a:tabLst>
+            </a:pPr>
+            <a:r>
+              <a:rPr b="0" lang="en-GB" sz="1000" strike="noStrike" u="none">
+                <a:solidFill>
+                  <a:schemeClr val="dk1"/>
+                </a:solidFill>
+                <a:effectLst/>
+                <a:uFillTx/>
+                <a:latin typeface="Lucida Handwriting"/>
+                <a:ea typeface="Microsoft YaHei"/>
+              </a:rPr>
+              <a:t>► Historial</a:t>
+            </a:r>
+            <a:endParaRPr b="0" lang="es-ES" sz="1000" strike="noStrike" u="none">
+              <a:solidFill>
+                <a:srgbClr val="000000"/>
+              </a:solidFill>
+              <a:effectLst/>
+              <a:uFillTx/>
+              <a:latin typeface="Arial"/>
+            </a:endParaRPr>
+          </a:p>
+          <a:p>
+            <a:pPr marL="268200" defTabSz="914400">
+              <a:lnSpc>
+                <a:spcPct val="90000"/>
+              </a:lnSpc>
+              <a:spcBef>
+                <a:spcPts val="340"/>
+              </a:spcBef>
+              <a:spcAft>
+                <a:spcPts val="142"/>
+              </a:spcAft>
+              <a:tabLst>
+                <a:tab algn="l" pos="0"/>
+              </a:tabLst>
+            </a:pPr>
+            <a:r>
+              <a:rPr b="0" lang="en-GB" sz="1000" strike="noStrike" u="none">
+                <a:solidFill>
+                  <a:schemeClr val="dk1"/>
+                </a:solidFill>
+                <a:effectLst/>
+                <a:uFillTx/>
+                <a:latin typeface="Lucida Handwriting"/>
+                <a:ea typeface="Microsoft YaHei"/>
+              </a:rPr>
+              <a:t>► Perfil</a:t>
+            </a:r>
+            <a:endParaRPr b="0" lang="es-ES" sz="1000" strike="noStrike" u="none">
+              <a:solidFill>
+                <a:srgbClr val="000000"/>
+              </a:solidFill>
+              <a:effectLst/>
+              <a:uFillTx/>
+              <a:latin typeface="Arial"/>
+            </a:endParaRPr>
+          </a:p>
+          <a:p>
+            <a:pPr marL="268200" defTabSz="914400">
+              <a:lnSpc>
+                <a:spcPct val="90000"/>
+              </a:lnSpc>
+              <a:spcBef>
+                <a:spcPts val="340"/>
+              </a:spcBef>
+              <a:spcAft>
+                <a:spcPts val="142"/>
+              </a:spcAft>
+              <a:tabLst>
+                <a:tab algn="l" pos="0"/>
+              </a:tabLst>
+            </a:pPr>
+            <a:r>
+              <a:rPr b="0" lang="en-GB" sz="1000" strike="noStrike" u="none">
+                <a:solidFill>
+                  <a:schemeClr val="dk1"/>
+                </a:solidFill>
+                <a:effectLst/>
+                <a:uFillTx/>
+                <a:latin typeface="Lucida Handwriting"/>
+                <a:ea typeface="Microsoft YaHei"/>
+              </a:rPr>
+              <a:t>► Mapas</a:t>
+            </a:r>
+            <a:endParaRPr b="0" lang="es-ES" sz="1000" strike="noStrike" u="none">
+              <a:solidFill>
+                <a:srgbClr val="000000"/>
+              </a:solidFill>
+              <a:effectLst/>
+              <a:uFillTx/>
+              <a:latin typeface="Arial"/>
+            </a:endParaRPr>
+          </a:p>
+          <a:p>
+            <a:pPr marL="268200" defTabSz="914400">
+              <a:lnSpc>
+                <a:spcPct val="90000"/>
+              </a:lnSpc>
+              <a:spcBef>
+                <a:spcPts val="434"/>
+              </a:spcBef>
+              <a:tabLst>
+                <a:tab algn="l" pos="0"/>
+              </a:tabLst>
+            </a:pPr>
+            <a:endParaRPr b="0" lang="es-ES" sz="1200" strike="noStrike" u="none">
+              <a:solidFill>
+                <a:srgbClr val="000000"/>
+              </a:solidFill>
+              <a:effectLst/>
+              <a:uFillTx/>
+              <a:latin typeface="Arial"/>
+            </a:endParaRPr>
+          </a:p>
+          <a:p>
+            <a:pPr marL="268200" defTabSz="914400">
+              <a:lnSpc>
+                <a:spcPct val="90000"/>
+              </a:lnSpc>
+              <a:spcBef>
+                <a:spcPts val="434"/>
+              </a:spcBef>
+              <a:tabLst>
+                <a:tab algn="l" pos="0"/>
+              </a:tabLst>
+            </a:pPr>
+            <a:r>
+              <a:rPr b="0" i="1" lang="en-GB" sz="1200" strike="noStrike" u="none">
+                <a:solidFill>
+                  <a:schemeClr val="dk1"/>
+                </a:solidFill>
+                <a:effectLst/>
+                <a:uFillTx/>
+                <a:latin typeface="Calibri"/>
+                <a:ea typeface="Microsoft YaHei"/>
+              </a:rPr>
+              <a:t>Objectos</a:t>
+            </a:r>
+            <a:r>
+              <a:rPr b="0" lang="en-GB" sz="1200" strike="noStrike" u="none">
+                <a:solidFill>
+                  <a:schemeClr val="dk1"/>
+                </a:solidFill>
+                <a:effectLst/>
+                <a:uFillTx/>
+                <a:latin typeface="Calibri"/>
+                <a:ea typeface="Microsoft YaHei"/>
+              </a:rPr>
+              <a:t>:</a:t>
+            </a:r>
+            <a:endParaRPr b="0" lang="es-ES" sz="1200" strike="noStrike" u="none">
+              <a:solidFill>
+                <a:srgbClr val="000000"/>
+              </a:solidFill>
+              <a:effectLst/>
+              <a:uFillTx/>
+              <a:latin typeface="Arial"/>
+            </a:endParaRPr>
+          </a:p>
+          <a:p>
+            <a:pPr marL="268200" defTabSz="914400">
+              <a:lnSpc>
+                <a:spcPct val="90000"/>
+              </a:lnSpc>
+              <a:spcBef>
+                <a:spcPts val="340"/>
+              </a:spcBef>
+              <a:spcAft>
+                <a:spcPts val="142"/>
+              </a:spcAft>
+              <a:tabLst>
+                <a:tab algn="l" pos="0"/>
+              </a:tabLst>
+            </a:pPr>
+            <a:r>
+              <a:rPr b="0" i="1" lang="en-GB" sz="1200" strike="noStrike" u="none">
+                <a:solidFill>
+                  <a:schemeClr val="dk1"/>
+                </a:solidFill>
+                <a:effectLst/>
+                <a:uFillTx/>
+                <a:latin typeface="Calibri"/>
+                <a:ea typeface="Microsoft YaHei"/>
+              </a:rPr>
+              <a:t>Restricciones</a:t>
+            </a:r>
+            <a:r>
+              <a:rPr b="0" lang="en-GB" sz="1200" strike="noStrike" u="none">
+                <a:solidFill>
+                  <a:schemeClr val="dk1"/>
+                </a:solidFill>
+                <a:effectLst/>
+                <a:uFillTx/>
+                <a:latin typeface="Calibri"/>
+                <a:ea typeface="Microsoft YaHei"/>
+              </a:rPr>
+              <a:t>: </a:t>
+            </a:r>
+            <a:endParaRPr b="0" lang="es-ES" sz="1200" strike="noStrike" u="none">
+              <a:solidFill>
+                <a:srgbClr val="000000"/>
+              </a:solidFill>
+              <a:effectLst/>
+              <a:uFillTx/>
+              <a:latin typeface="Arial"/>
+            </a:endParaRPr>
+          </a:p>
+          <a:p>
+            <a:pPr marL="268200" defTabSz="914400">
+              <a:lnSpc>
+                <a:spcPct val="90000"/>
+              </a:lnSpc>
+              <a:spcBef>
+                <a:spcPts val="340"/>
+              </a:spcBef>
+              <a:spcAft>
+                <a:spcPts val="142"/>
+              </a:spcAft>
+              <a:tabLst>
+                <a:tab algn="l" pos="0"/>
+              </a:tabLst>
+            </a:pPr>
+            <a:r>
+              <a:rPr b="0" lang="en-GB" sz="1200" strike="noStrike" u="none">
+                <a:solidFill>
+                  <a:schemeClr val="dk1"/>
+                </a:solidFill>
+                <a:effectLst/>
+                <a:uFillTx/>
+                <a:latin typeface="Calibri"/>
+                <a:ea typeface="Microsoft YaHei"/>
+              </a:rPr>
+              <a:t>- Solo accesible con sesión iniciada</a:t>
+            </a:r>
+            <a:endParaRPr b="0" lang="es-ES" sz="1200" strike="noStrike" u="none">
+              <a:solidFill>
+                <a:srgbClr val="000000"/>
+              </a:solidFill>
+              <a:effectLst/>
+              <a:uFillTx/>
+              <a:latin typeface="Arial"/>
+            </a:endParaRPr>
+          </a:p>
+          <a:p>
+            <a:pPr marL="268200" defTabSz="914400">
+              <a:lnSpc>
+                <a:spcPct val="90000"/>
+              </a:lnSpc>
+              <a:spcBef>
+                <a:spcPts val="1001"/>
+              </a:spcBef>
+              <a:tabLst>
+                <a:tab algn="l" pos="0"/>
+              </a:tabLst>
+            </a:pPr>
+            <a:endParaRPr b="0" lang="es-ES" sz="1200" strike="noStrike" u="none">
+              <a:solidFill>
+                <a:srgbClr val="000000"/>
+              </a:solidFill>
+              <a:effectLst/>
+              <a:uFillTx/>
+              <a:latin typeface="Arial"/>
+            </a:endParaRPr>
+          </a:p>
+          <a:p>
+            <a:pPr marL="268200" defTabSz="914400">
+              <a:lnSpc>
+                <a:spcPct val="90000"/>
+              </a:lnSpc>
+              <a:spcBef>
+                <a:spcPts val="1001"/>
+              </a:spcBef>
+              <a:tabLst>
+                <a:tab algn="l" pos="0"/>
+              </a:tabLst>
+            </a:pPr>
+            <a:endParaRPr b="0" lang="es-ES" sz="1800" strike="noStrike" u="none">
+              <a:solidFill>
+                <a:srgbClr val="000000"/>
+              </a:solidFill>
+              <a:effectLst/>
+              <a:uFillTx/>
+              <a:latin typeface="Arial"/>
+            </a:endParaRPr>
+          </a:p>
+        </p:txBody>
+      </p:sp>
     </p:spTree>
   </p:cSld>
   <mc:AlternateContent>
